--- a/assets/libreoffice_impr_njc/3be4747b-a8aa-4b79-8f0c-0c7326a3d169/Game Theory.pptx
+++ b/assets/libreoffice_impr_njc/3be4747b-a8aa-4b79-8f0c-0c7326a3d169/Game Theory.pptx
@@ -85,18 +85,12 @@
             </a:pPr>
             <a:r>
               <a:rPr b="0" lang="en-HK" sz="4400" spc="-1" strike="noStrike">
-                <a:solidFill>
-                  <a:srgbClr val="000000"/>
-                </a:solidFill>
-                <a:latin typeface="Calibri Light"/>
+                <a:latin typeface="Arial"/>
               </a:rPr>
               <a:t>Click to move the slide</a:t>
             </a:r>
             <a:endParaRPr b="0" lang="en-HK" sz="4400" spc="-1" strike="noStrike">
-              <a:solidFill>
-                <a:srgbClr val="000000"/>
-              </a:solidFill>
-              <a:latin typeface="Calibri Light"/>
+              <a:latin typeface="Arial"/>
             </a:endParaRPr>
           </a:p>
         </p:txBody>
@@ -318,7 +312,7 @@
             <a:pPr algn="r">
               <a:buNone/>
             </a:pPr>
-            <a:fld id="{EFE10CB4-C406-4DB1-B000-0D0BE6C83AFD}" type="slidenum">
+            <a:fld id="{EE353743-CC35-4A8F-8E6C-2AFC1E49CE30}" type="slidenum">
               <a:rPr b="0" lang="en-HK" sz="1400" spc="-1" strike="noStrike">
                 <a:latin typeface="Times New Roman"/>
               </a:rPr>
@@ -366,7 +360,7 @@
         <p:spPr>
           <a:xfrm>
             <a:off x="685800" y="1143000"/>
-            <a:ext cx="5486040" cy="3085920"/>
+            <a:ext cx="5485680" cy="3085560"/>
           </a:xfrm>
           <a:prstGeom prst="rect">
             <a:avLst/>
@@ -389,18 +383,18 @@
         <p:spPr>
           <a:xfrm>
             <a:off x="685800" y="4400640"/>
-            <a:ext cx="5486040" cy="3600000"/>
-          </a:xfrm>
-          <a:prstGeom prst="rect">
-            <a:avLst/>
-          </a:prstGeom>
-          <a:noFill/>
-          <a:ln w="0">
-            <a:noFill/>
-          </a:ln>
-        </p:spPr>
-        <p:txBody>
-          <a:bodyPr anchor="t">
+            <a:ext cx="5485680" cy="3599640"/>
+          </a:xfrm>
+          <a:prstGeom prst="rect">
+            <a:avLst/>
+          </a:prstGeom>
+          <a:noFill/>
+          <a:ln w="0">
+            <a:noFill/>
+          </a:ln>
+        </p:spPr>
+        <p:txBody>
+          <a:bodyPr lIns="0" rIns="0" tIns="0" bIns="0" anchor="t">
             <a:noAutofit/>
           </a:bodyPr>
           <a:p>
@@ -423,18 +417,18 @@
         <p:spPr>
           <a:xfrm>
             <a:off x="3884760" y="8685360"/>
-            <a:ext cx="2971440" cy="458280"/>
-          </a:xfrm>
-          <a:prstGeom prst="rect">
-            <a:avLst/>
-          </a:prstGeom>
-          <a:noFill/>
-          <a:ln w="0">
-            <a:noFill/>
-          </a:ln>
-        </p:spPr>
-        <p:txBody>
-          <a:bodyPr anchor="b">
+            <a:ext cx="2971080" cy="457920"/>
+          </a:xfrm>
+          <a:prstGeom prst="rect">
+            <a:avLst/>
+          </a:prstGeom>
+          <a:noFill/>
+          <a:ln w="0">
+            <a:noFill/>
+          </a:ln>
+        </p:spPr>
+        <p:txBody>
+          <a:bodyPr lIns="0" rIns="0" tIns="0" bIns="0" anchor="b">
             <a:noAutofit/>
           </a:bodyPr>
           <a:lstStyle>
@@ -455,7 +449,7 @@
               </a:lnSpc>
               <a:buNone/>
             </a:pPr>
-            <a:fld id="{7BDE18F0-A0A3-4B5E-B7F4-7B759128B10C}" type="slidenum">
+            <a:fld id="{4A430E89-643C-4D17-AA29-200EBF802120}" type="slidenum">
               <a:rPr b="0" lang="en-US" sz="1200" spc="-1" strike="noStrike">
                 <a:latin typeface="Times New Roman"/>
               </a:rPr>
@@ -502,7 +496,7 @@
         <p:spPr>
           <a:xfrm>
             <a:off x="685800" y="1143000"/>
-            <a:ext cx="5486040" cy="3085920"/>
+            <a:ext cx="5485680" cy="3085560"/>
           </a:xfrm>
           <a:prstGeom prst="rect">
             <a:avLst/>
@@ -525,18 +519,18 @@
         <p:spPr>
           <a:xfrm>
             <a:off x="685800" y="4400640"/>
-            <a:ext cx="5486040" cy="3600000"/>
-          </a:xfrm>
-          <a:prstGeom prst="rect">
-            <a:avLst/>
-          </a:prstGeom>
-          <a:noFill/>
-          <a:ln w="0">
-            <a:noFill/>
-          </a:ln>
-        </p:spPr>
-        <p:txBody>
-          <a:bodyPr anchor="t">
+            <a:ext cx="5485680" cy="3599640"/>
+          </a:xfrm>
+          <a:prstGeom prst="rect">
+            <a:avLst/>
+          </a:prstGeom>
+          <a:noFill/>
+          <a:ln w="0">
+            <a:noFill/>
+          </a:ln>
+        </p:spPr>
+        <p:txBody>
+          <a:bodyPr lIns="0" rIns="0" tIns="0" bIns="0" anchor="t">
             <a:noAutofit/>
           </a:bodyPr>
           <a:p>
@@ -559,18 +553,18 @@
         <p:spPr>
           <a:xfrm>
             <a:off x="3884760" y="8685360"/>
-            <a:ext cx="2971440" cy="458280"/>
-          </a:xfrm>
-          <a:prstGeom prst="rect">
-            <a:avLst/>
-          </a:prstGeom>
-          <a:noFill/>
-          <a:ln w="0">
-            <a:noFill/>
-          </a:ln>
-        </p:spPr>
-        <p:txBody>
-          <a:bodyPr anchor="b">
+            <a:ext cx="2971080" cy="457920"/>
+          </a:xfrm>
+          <a:prstGeom prst="rect">
+            <a:avLst/>
+          </a:prstGeom>
+          <a:noFill/>
+          <a:ln w="0">
+            <a:noFill/>
+          </a:ln>
+        </p:spPr>
+        <p:txBody>
+          <a:bodyPr lIns="0" rIns="0" tIns="0" bIns="0" anchor="b">
             <a:noAutofit/>
           </a:bodyPr>
           <a:lstStyle>
@@ -591,7 +585,7 @@
               </a:lnSpc>
               <a:buNone/>
             </a:pPr>
-            <a:fld id="{5E7DE09C-6311-4C30-AB55-AE77E5E7FDC1}" type="slidenum">
+            <a:fld id="{D285E54F-260F-4038-86AD-22D360527799}" type="slidenum">
               <a:rPr b="0" lang="en-US" sz="1200" spc="-1" strike="noStrike">
                 <a:latin typeface="Times New Roman"/>
               </a:rPr>
@@ -638,7 +632,7 @@
         <p:spPr>
           <a:xfrm>
             <a:off x="685800" y="1143000"/>
-            <a:ext cx="5486040" cy="3085920"/>
+            <a:ext cx="5485680" cy="3085560"/>
           </a:xfrm>
           <a:prstGeom prst="rect">
             <a:avLst/>
@@ -661,18 +655,18 @@
         <p:spPr>
           <a:xfrm>
             <a:off x="685800" y="4400640"/>
-            <a:ext cx="5486040" cy="3600000"/>
-          </a:xfrm>
-          <a:prstGeom prst="rect">
-            <a:avLst/>
-          </a:prstGeom>
-          <a:noFill/>
-          <a:ln w="0">
-            <a:noFill/>
-          </a:ln>
-        </p:spPr>
-        <p:txBody>
-          <a:bodyPr anchor="t">
+            <a:ext cx="5485680" cy="3599640"/>
+          </a:xfrm>
+          <a:prstGeom prst="rect">
+            <a:avLst/>
+          </a:prstGeom>
+          <a:noFill/>
+          <a:ln w="0">
+            <a:noFill/>
+          </a:ln>
+        </p:spPr>
+        <p:txBody>
+          <a:bodyPr lIns="0" rIns="0" tIns="0" bIns="0" anchor="t">
             <a:noAutofit/>
           </a:bodyPr>
           <a:p>
@@ -695,18 +689,18 @@
         <p:spPr>
           <a:xfrm>
             <a:off x="3884760" y="8685360"/>
-            <a:ext cx="2971440" cy="458280"/>
-          </a:xfrm>
-          <a:prstGeom prst="rect">
-            <a:avLst/>
-          </a:prstGeom>
-          <a:noFill/>
-          <a:ln w="0">
-            <a:noFill/>
-          </a:ln>
-        </p:spPr>
-        <p:txBody>
-          <a:bodyPr anchor="b">
+            <a:ext cx="2971080" cy="457920"/>
+          </a:xfrm>
+          <a:prstGeom prst="rect">
+            <a:avLst/>
+          </a:prstGeom>
+          <a:noFill/>
+          <a:ln w="0">
+            <a:noFill/>
+          </a:ln>
+        </p:spPr>
+        <p:txBody>
+          <a:bodyPr lIns="0" rIns="0" tIns="0" bIns="0" anchor="b">
             <a:noAutofit/>
           </a:bodyPr>
           <a:lstStyle>
@@ -727,7 +721,7 @@
               </a:lnSpc>
               <a:buNone/>
             </a:pPr>
-            <a:fld id="{AA020111-304B-4400-AE08-B199DB34CCD4}" type="slidenum">
+            <a:fld id="{63BFEB29-AFCE-4512-8835-015A322B281B}" type="slidenum">
               <a:rPr b="0" lang="en-US" sz="1200" spc="-1" strike="noStrike">
                 <a:latin typeface="Times New Roman"/>
               </a:rPr>
@@ -774,7 +768,7 @@
         <p:spPr>
           <a:xfrm>
             <a:off x="685800" y="1143000"/>
-            <a:ext cx="5486040" cy="3085920"/>
+            <a:ext cx="5485680" cy="3085560"/>
           </a:xfrm>
           <a:prstGeom prst="rect">
             <a:avLst/>
@@ -797,18 +791,18 @@
         <p:spPr>
           <a:xfrm>
             <a:off x="685800" y="4400640"/>
-            <a:ext cx="5486040" cy="3600000"/>
-          </a:xfrm>
-          <a:prstGeom prst="rect">
-            <a:avLst/>
-          </a:prstGeom>
-          <a:noFill/>
-          <a:ln w="0">
-            <a:noFill/>
-          </a:ln>
-        </p:spPr>
-        <p:txBody>
-          <a:bodyPr anchor="t">
+            <a:ext cx="5485680" cy="3599640"/>
+          </a:xfrm>
+          <a:prstGeom prst="rect">
+            <a:avLst/>
+          </a:prstGeom>
+          <a:noFill/>
+          <a:ln w="0">
+            <a:noFill/>
+          </a:ln>
+        </p:spPr>
+        <p:txBody>
+          <a:bodyPr lIns="0" rIns="0" tIns="0" bIns="0" anchor="t">
             <a:noAutofit/>
           </a:bodyPr>
           <a:p>
@@ -831,18 +825,18 @@
         <p:spPr>
           <a:xfrm>
             <a:off x="3884760" y="8685360"/>
-            <a:ext cx="2971440" cy="458280"/>
-          </a:xfrm>
-          <a:prstGeom prst="rect">
-            <a:avLst/>
-          </a:prstGeom>
-          <a:noFill/>
-          <a:ln w="0">
-            <a:noFill/>
-          </a:ln>
-        </p:spPr>
-        <p:txBody>
-          <a:bodyPr anchor="b">
+            <a:ext cx="2971080" cy="457920"/>
+          </a:xfrm>
+          <a:prstGeom prst="rect">
+            <a:avLst/>
+          </a:prstGeom>
+          <a:noFill/>
+          <a:ln w="0">
+            <a:noFill/>
+          </a:ln>
+        </p:spPr>
+        <p:txBody>
+          <a:bodyPr lIns="0" rIns="0" tIns="0" bIns="0" anchor="b">
             <a:noAutofit/>
           </a:bodyPr>
           <a:lstStyle>
@@ -863,7 +857,7 @@
               </a:lnSpc>
               <a:buNone/>
             </a:pPr>
-            <a:fld id="{4BC1FE2A-4E0B-471A-B478-8E1BD4D80BDB}" type="slidenum">
+            <a:fld id="{66EBB481-FB15-4DA4-A8E1-002B3CC70F7B}" type="slidenum">
               <a:rPr b="0" lang="en-US" sz="1200" spc="-1" strike="noStrike">
                 <a:latin typeface="Times New Roman"/>
               </a:rPr>
@@ -910,7 +904,7 @@
         <p:spPr>
           <a:xfrm>
             <a:off x="685800" y="1143000"/>
-            <a:ext cx="5486040" cy="3085920"/>
+            <a:ext cx="5485680" cy="3085560"/>
           </a:xfrm>
           <a:prstGeom prst="rect">
             <a:avLst/>
@@ -933,18 +927,18 @@
         <p:spPr>
           <a:xfrm>
             <a:off x="685800" y="4400640"/>
-            <a:ext cx="5486040" cy="3600000"/>
-          </a:xfrm>
-          <a:prstGeom prst="rect">
-            <a:avLst/>
-          </a:prstGeom>
-          <a:noFill/>
-          <a:ln w="0">
-            <a:noFill/>
-          </a:ln>
-        </p:spPr>
-        <p:txBody>
-          <a:bodyPr anchor="t">
+            <a:ext cx="5485680" cy="3599640"/>
+          </a:xfrm>
+          <a:prstGeom prst="rect">
+            <a:avLst/>
+          </a:prstGeom>
+          <a:noFill/>
+          <a:ln w="0">
+            <a:noFill/>
+          </a:ln>
+        </p:spPr>
+        <p:txBody>
+          <a:bodyPr lIns="0" rIns="0" tIns="0" bIns="0" anchor="t">
             <a:noAutofit/>
           </a:bodyPr>
           <a:p>
@@ -967,18 +961,18 @@
         <p:spPr>
           <a:xfrm>
             <a:off x="3884760" y="8685360"/>
-            <a:ext cx="2971440" cy="458280"/>
-          </a:xfrm>
-          <a:prstGeom prst="rect">
-            <a:avLst/>
-          </a:prstGeom>
-          <a:noFill/>
-          <a:ln w="0">
-            <a:noFill/>
-          </a:ln>
-        </p:spPr>
-        <p:txBody>
-          <a:bodyPr anchor="b">
+            <a:ext cx="2971080" cy="457920"/>
+          </a:xfrm>
+          <a:prstGeom prst="rect">
+            <a:avLst/>
+          </a:prstGeom>
+          <a:noFill/>
+          <a:ln w="0">
+            <a:noFill/>
+          </a:ln>
+        </p:spPr>
+        <p:txBody>
+          <a:bodyPr lIns="0" rIns="0" tIns="0" bIns="0" anchor="b">
             <a:noAutofit/>
           </a:bodyPr>
           <a:lstStyle>
@@ -999,7 +993,7 @@
               </a:lnSpc>
               <a:buNone/>
             </a:pPr>
-            <a:fld id="{AFC24308-E294-4CFB-82A8-A758B40272A0}" type="slidenum">
+            <a:fld id="{FD3AFC48-B7D0-4A65-B059-079324CAB2DB}" type="slidenum">
               <a:rPr b="0" lang="en-US" sz="1200" spc="-1" strike="noStrike">
                 <a:latin typeface="Times New Roman"/>
               </a:rPr>
@@ -1046,7 +1040,7 @@
         <p:spPr>
           <a:xfrm>
             <a:off x="685800" y="1143000"/>
-            <a:ext cx="5486040" cy="3085920"/>
+            <a:ext cx="5485680" cy="3085560"/>
           </a:xfrm>
           <a:prstGeom prst="rect">
             <a:avLst/>
@@ -1069,18 +1063,18 @@
         <p:spPr>
           <a:xfrm>
             <a:off x="685800" y="4400640"/>
-            <a:ext cx="5486040" cy="3600000"/>
-          </a:xfrm>
-          <a:prstGeom prst="rect">
-            <a:avLst/>
-          </a:prstGeom>
-          <a:noFill/>
-          <a:ln w="0">
-            <a:noFill/>
-          </a:ln>
-        </p:spPr>
-        <p:txBody>
-          <a:bodyPr anchor="t">
+            <a:ext cx="5485680" cy="3599640"/>
+          </a:xfrm>
+          <a:prstGeom prst="rect">
+            <a:avLst/>
+          </a:prstGeom>
+          <a:noFill/>
+          <a:ln w="0">
+            <a:noFill/>
+          </a:ln>
+        </p:spPr>
+        <p:txBody>
+          <a:bodyPr lIns="0" rIns="0" tIns="0" bIns="0" anchor="t">
             <a:noAutofit/>
           </a:bodyPr>
           <a:p>
@@ -1103,18 +1097,18 @@
         <p:spPr>
           <a:xfrm>
             <a:off x="3884760" y="8685360"/>
-            <a:ext cx="2971440" cy="458280"/>
-          </a:xfrm>
-          <a:prstGeom prst="rect">
-            <a:avLst/>
-          </a:prstGeom>
-          <a:noFill/>
-          <a:ln w="0">
-            <a:noFill/>
-          </a:ln>
-        </p:spPr>
-        <p:txBody>
-          <a:bodyPr anchor="b">
+            <a:ext cx="2971080" cy="457920"/>
+          </a:xfrm>
+          <a:prstGeom prst="rect">
+            <a:avLst/>
+          </a:prstGeom>
+          <a:noFill/>
+          <a:ln w="0">
+            <a:noFill/>
+          </a:ln>
+        </p:spPr>
+        <p:txBody>
+          <a:bodyPr lIns="0" rIns="0" tIns="0" bIns="0" anchor="b">
             <a:noAutofit/>
           </a:bodyPr>
           <a:lstStyle>
@@ -1135,7 +1129,7 @@
               </a:lnSpc>
               <a:buNone/>
             </a:pPr>
-            <a:fld id="{EC85454E-8313-4AEE-A94A-9EFE79D2791E}" type="slidenum">
+            <a:fld id="{A4FBBBB9-AF1E-469B-A959-E52C685F85E2}" type="slidenum">
               <a:rPr b="0" lang="en-US" sz="1200" spc="-1" strike="noStrike">
                 <a:latin typeface="Times New Roman"/>
               </a:rPr>
@@ -1182,7 +1176,7 @@
         <p:spPr>
           <a:xfrm>
             <a:off x="685800" y="1143000"/>
-            <a:ext cx="5486040" cy="3085920"/>
+            <a:ext cx="5485680" cy="3085560"/>
           </a:xfrm>
           <a:prstGeom prst="rect">
             <a:avLst/>
@@ -1205,18 +1199,18 @@
         <p:spPr>
           <a:xfrm>
             <a:off x="685800" y="4400640"/>
-            <a:ext cx="5486040" cy="3600000"/>
-          </a:xfrm>
-          <a:prstGeom prst="rect">
-            <a:avLst/>
-          </a:prstGeom>
-          <a:noFill/>
-          <a:ln w="0">
-            <a:noFill/>
-          </a:ln>
-        </p:spPr>
-        <p:txBody>
-          <a:bodyPr anchor="t">
+            <a:ext cx="5485680" cy="3599640"/>
+          </a:xfrm>
+          <a:prstGeom prst="rect">
+            <a:avLst/>
+          </a:prstGeom>
+          <a:noFill/>
+          <a:ln w="0">
+            <a:noFill/>
+          </a:ln>
+        </p:spPr>
+        <p:txBody>
+          <a:bodyPr lIns="0" rIns="0" tIns="0" bIns="0" anchor="t">
             <a:noAutofit/>
           </a:bodyPr>
           <a:p>
@@ -1239,18 +1233,18 @@
         <p:spPr>
           <a:xfrm>
             <a:off x="3884760" y="8685360"/>
-            <a:ext cx="2971440" cy="458280"/>
-          </a:xfrm>
-          <a:prstGeom prst="rect">
-            <a:avLst/>
-          </a:prstGeom>
-          <a:noFill/>
-          <a:ln w="0">
-            <a:noFill/>
-          </a:ln>
-        </p:spPr>
-        <p:txBody>
-          <a:bodyPr anchor="b">
+            <a:ext cx="2971080" cy="457920"/>
+          </a:xfrm>
+          <a:prstGeom prst="rect">
+            <a:avLst/>
+          </a:prstGeom>
+          <a:noFill/>
+          <a:ln w="0">
+            <a:noFill/>
+          </a:ln>
+        </p:spPr>
+        <p:txBody>
+          <a:bodyPr lIns="0" rIns="0" tIns="0" bIns="0" anchor="b">
             <a:noAutofit/>
           </a:bodyPr>
           <a:lstStyle>
@@ -1271,7 +1265,7 @@
               </a:lnSpc>
               <a:buNone/>
             </a:pPr>
-            <a:fld id="{6F675DF2-515A-412B-944E-7EAD0B09EAA6}" type="slidenum">
+            <a:fld id="{1F144D53-9954-4DFC-A9A5-9ECD89DE661D}" type="slidenum">
               <a:rPr b="0" lang="en-US" sz="1200" spc="-1" strike="noStrike">
                 <a:latin typeface="Times New Roman"/>
               </a:rPr>
@@ -1318,7 +1312,7 @@
         <p:spPr>
           <a:xfrm>
             <a:off x="685800" y="1143000"/>
-            <a:ext cx="5486040" cy="3085920"/>
+            <a:ext cx="5485680" cy="3085560"/>
           </a:xfrm>
           <a:prstGeom prst="rect">
             <a:avLst/>
@@ -1341,18 +1335,18 @@
         <p:spPr>
           <a:xfrm>
             <a:off x="685800" y="4400640"/>
-            <a:ext cx="5486040" cy="3600000"/>
-          </a:xfrm>
-          <a:prstGeom prst="rect">
-            <a:avLst/>
-          </a:prstGeom>
-          <a:noFill/>
-          <a:ln w="0">
-            <a:noFill/>
-          </a:ln>
-        </p:spPr>
-        <p:txBody>
-          <a:bodyPr anchor="t">
+            <a:ext cx="5485680" cy="3599640"/>
+          </a:xfrm>
+          <a:prstGeom prst="rect">
+            <a:avLst/>
+          </a:prstGeom>
+          <a:noFill/>
+          <a:ln w="0">
+            <a:noFill/>
+          </a:ln>
+        </p:spPr>
+        <p:txBody>
+          <a:bodyPr lIns="0" rIns="0" tIns="0" bIns="0" anchor="t">
             <a:noAutofit/>
           </a:bodyPr>
           <a:p>
@@ -1375,18 +1369,18 @@
         <p:spPr>
           <a:xfrm>
             <a:off x="3884760" y="8685360"/>
-            <a:ext cx="2971440" cy="458280"/>
-          </a:xfrm>
-          <a:prstGeom prst="rect">
-            <a:avLst/>
-          </a:prstGeom>
-          <a:noFill/>
-          <a:ln w="0">
-            <a:noFill/>
-          </a:ln>
-        </p:spPr>
-        <p:txBody>
-          <a:bodyPr anchor="b">
+            <a:ext cx="2971080" cy="457920"/>
+          </a:xfrm>
+          <a:prstGeom prst="rect">
+            <a:avLst/>
+          </a:prstGeom>
+          <a:noFill/>
+          <a:ln w="0">
+            <a:noFill/>
+          </a:ln>
+        </p:spPr>
+        <p:txBody>
+          <a:bodyPr lIns="0" rIns="0" tIns="0" bIns="0" anchor="b">
             <a:noAutofit/>
           </a:bodyPr>
           <a:lstStyle>
@@ -1407,7 +1401,7 @@
               </a:lnSpc>
               <a:buNone/>
             </a:pPr>
-            <a:fld id="{EBF0DBB9-29B3-4294-A3B2-C4BC3FDF8B3F}" type="slidenum">
+            <a:fld id="{05DF149A-4554-479C-8B6C-8DC09A8D75A0}" type="slidenum">
               <a:rPr b="0" lang="en-US" sz="1200" spc="-1" strike="noStrike">
                 <a:latin typeface="Times New Roman"/>
               </a:rPr>
@@ -1454,7 +1448,7 @@
         <p:spPr>
           <a:xfrm>
             <a:off x="685800" y="1143000"/>
-            <a:ext cx="5486040" cy="3085920"/>
+            <a:ext cx="5485680" cy="3085560"/>
           </a:xfrm>
           <a:prstGeom prst="rect">
             <a:avLst/>
@@ -1477,18 +1471,18 @@
         <p:spPr>
           <a:xfrm>
             <a:off x="685800" y="4400640"/>
-            <a:ext cx="5486040" cy="3600000"/>
-          </a:xfrm>
-          <a:prstGeom prst="rect">
-            <a:avLst/>
-          </a:prstGeom>
-          <a:noFill/>
-          <a:ln w="0">
-            <a:noFill/>
-          </a:ln>
-        </p:spPr>
-        <p:txBody>
-          <a:bodyPr anchor="t">
+            <a:ext cx="5485680" cy="3599640"/>
+          </a:xfrm>
+          <a:prstGeom prst="rect">
+            <a:avLst/>
+          </a:prstGeom>
+          <a:noFill/>
+          <a:ln w="0">
+            <a:noFill/>
+          </a:ln>
+        </p:spPr>
+        <p:txBody>
+          <a:bodyPr lIns="0" rIns="0" tIns="0" bIns="0" anchor="t">
             <a:noAutofit/>
           </a:bodyPr>
           <a:p>
@@ -1511,18 +1505,18 @@
         <p:spPr>
           <a:xfrm>
             <a:off x="3884760" y="8685360"/>
-            <a:ext cx="2971440" cy="458280"/>
-          </a:xfrm>
-          <a:prstGeom prst="rect">
-            <a:avLst/>
-          </a:prstGeom>
-          <a:noFill/>
-          <a:ln w="0">
-            <a:noFill/>
-          </a:ln>
-        </p:spPr>
-        <p:txBody>
-          <a:bodyPr anchor="b">
+            <a:ext cx="2971080" cy="457920"/>
+          </a:xfrm>
+          <a:prstGeom prst="rect">
+            <a:avLst/>
+          </a:prstGeom>
+          <a:noFill/>
+          <a:ln w="0">
+            <a:noFill/>
+          </a:ln>
+        </p:spPr>
+        <p:txBody>
+          <a:bodyPr lIns="0" rIns="0" tIns="0" bIns="0" anchor="b">
             <a:noAutofit/>
           </a:bodyPr>
           <a:lstStyle>
@@ -1543,7 +1537,7 @@
               </a:lnSpc>
               <a:buNone/>
             </a:pPr>
-            <a:fld id="{D8FB62E8-C6C0-4B3D-BFEE-035B7191AC30}" type="slidenum">
+            <a:fld id="{E7AC03C1-5267-4DA8-8F1A-90EF257BC471}" type="slidenum">
               <a:rPr b="0" lang="en-US" sz="1200" spc="-1" strike="noStrike">
                 <a:latin typeface="Times New Roman"/>
               </a:rPr>
@@ -1590,7 +1584,7 @@
         <p:spPr>
           <a:xfrm>
             <a:off x="685800" y="1143000"/>
-            <a:ext cx="5486040" cy="3085920"/>
+            <a:ext cx="5485680" cy="3085560"/>
           </a:xfrm>
           <a:prstGeom prst="rect">
             <a:avLst/>
@@ -1613,18 +1607,18 @@
         <p:spPr>
           <a:xfrm>
             <a:off x="685800" y="4400640"/>
-            <a:ext cx="5486040" cy="3600000"/>
-          </a:xfrm>
-          <a:prstGeom prst="rect">
-            <a:avLst/>
-          </a:prstGeom>
-          <a:noFill/>
-          <a:ln w="0">
-            <a:noFill/>
-          </a:ln>
-        </p:spPr>
-        <p:txBody>
-          <a:bodyPr anchor="t">
+            <a:ext cx="5485680" cy="3599640"/>
+          </a:xfrm>
+          <a:prstGeom prst="rect">
+            <a:avLst/>
+          </a:prstGeom>
+          <a:noFill/>
+          <a:ln w="0">
+            <a:noFill/>
+          </a:ln>
+        </p:spPr>
+        <p:txBody>
+          <a:bodyPr lIns="0" rIns="0" tIns="0" bIns="0" anchor="t">
             <a:noAutofit/>
           </a:bodyPr>
           <a:p>
@@ -1647,18 +1641,18 @@
         <p:spPr>
           <a:xfrm>
             <a:off x="3884760" y="8685360"/>
-            <a:ext cx="2971440" cy="458280"/>
-          </a:xfrm>
-          <a:prstGeom prst="rect">
-            <a:avLst/>
-          </a:prstGeom>
-          <a:noFill/>
-          <a:ln w="0">
-            <a:noFill/>
-          </a:ln>
-        </p:spPr>
-        <p:txBody>
-          <a:bodyPr anchor="b">
+            <a:ext cx="2971080" cy="457920"/>
+          </a:xfrm>
+          <a:prstGeom prst="rect">
+            <a:avLst/>
+          </a:prstGeom>
+          <a:noFill/>
+          <a:ln w="0">
+            <a:noFill/>
+          </a:ln>
+        </p:spPr>
+        <p:txBody>
+          <a:bodyPr lIns="0" rIns="0" tIns="0" bIns="0" anchor="b">
             <a:noAutofit/>
           </a:bodyPr>
           <a:lstStyle>
@@ -1679,7 +1673,7 @@
               </a:lnSpc>
               <a:buNone/>
             </a:pPr>
-            <a:fld id="{16F89620-D20B-4DE7-801E-4C53FED209EC}" type="slidenum">
+            <a:fld id="{88A64624-D49B-4D72-BEE0-FC1E9285CB1C}" type="slidenum">
               <a:rPr b="0" lang="en-US" sz="1200" spc="-1" strike="noStrike">
                 <a:latin typeface="Times New Roman"/>
               </a:rPr>
@@ -1726,7 +1720,7 @@
         <p:spPr>
           <a:xfrm>
             <a:off x="685800" y="1143000"/>
-            <a:ext cx="5486040" cy="3085920"/>
+            <a:ext cx="5485680" cy="3085560"/>
           </a:xfrm>
           <a:prstGeom prst="rect">
             <a:avLst/>
@@ -1749,18 +1743,18 @@
         <p:spPr>
           <a:xfrm>
             <a:off x="685800" y="4400640"/>
-            <a:ext cx="5486040" cy="3600000"/>
-          </a:xfrm>
-          <a:prstGeom prst="rect">
-            <a:avLst/>
-          </a:prstGeom>
-          <a:noFill/>
-          <a:ln w="0">
-            <a:noFill/>
-          </a:ln>
-        </p:spPr>
-        <p:txBody>
-          <a:bodyPr anchor="t">
+            <a:ext cx="5485680" cy="3599640"/>
+          </a:xfrm>
+          <a:prstGeom prst="rect">
+            <a:avLst/>
+          </a:prstGeom>
+          <a:noFill/>
+          <a:ln w="0">
+            <a:noFill/>
+          </a:ln>
+        </p:spPr>
+        <p:txBody>
+          <a:bodyPr lIns="0" rIns="0" tIns="0" bIns="0" anchor="t">
             <a:noAutofit/>
           </a:bodyPr>
           <a:p>
@@ -1783,18 +1777,18 @@
         <p:spPr>
           <a:xfrm>
             <a:off x="3884760" y="8685360"/>
-            <a:ext cx="2971440" cy="458280"/>
-          </a:xfrm>
-          <a:prstGeom prst="rect">
-            <a:avLst/>
-          </a:prstGeom>
-          <a:noFill/>
-          <a:ln w="0">
-            <a:noFill/>
-          </a:ln>
-        </p:spPr>
-        <p:txBody>
-          <a:bodyPr anchor="b">
+            <a:ext cx="2971080" cy="457920"/>
+          </a:xfrm>
+          <a:prstGeom prst="rect">
+            <a:avLst/>
+          </a:prstGeom>
+          <a:noFill/>
+          <a:ln w="0">
+            <a:noFill/>
+          </a:ln>
+        </p:spPr>
+        <p:txBody>
+          <a:bodyPr lIns="0" rIns="0" tIns="0" bIns="0" anchor="b">
             <a:noAutofit/>
           </a:bodyPr>
           <a:lstStyle>
@@ -1815,7 +1809,7 @@
               </a:lnSpc>
               <a:buNone/>
             </a:pPr>
-            <a:fld id="{4189978A-FB00-4944-B71E-8E063A5C351A}" type="slidenum">
+            <a:fld id="{504AD6D5-3B54-41AB-8DBB-1F0ECE50D82B}" type="slidenum">
               <a:rPr b="0" lang="en-US" sz="1200" spc="-1" strike="noStrike">
                 <a:latin typeface="Times New Roman"/>
               </a:rPr>
@@ -1862,7 +1856,7 @@
         <p:spPr>
           <a:xfrm>
             <a:off x="685800" y="1143000"/>
-            <a:ext cx="5486040" cy="3085920"/>
+            <a:ext cx="5485680" cy="3085560"/>
           </a:xfrm>
           <a:prstGeom prst="rect">
             <a:avLst/>
@@ -1885,18 +1879,18 @@
         <p:spPr>
           <a:xfrm>
             <a:off x="685800" y="4400640"/>
-            <a:ext cx="5486040" cy="3600000"/>
-          </a:xfrm>
-          <a:prstGeom prst="rect">
-            <a:avLst/>
-          </a:prstGeom>
-          <a:noFill/>
-          <a:ln w="0">
-            <a:noFill/>
-          </a:ln>
-        </p:spPr>
-        <p:txBody>
-          <a:bodyPr anchor="t">
+            <a:ext cx="5485680" cy="3599640"/>
+          </a:xfrm>
+          <a:prstGeom prst="rect">
+            <a:avLst/>
+          </a:prstGeom>
+          <a:noFill/>
+          <a:ln w="0">
+            <a:noFill/>
+          </a:ln>
+        </p:spPr>
+        <p:txBody>
+          <a:bodyPr lIns="0" rIns="0" tIns="0" bIns="0" anchor="t">
             <a:noAutofit/>
           </a:bodyPr>
           <a:p>
@@ -1919,18 +1913,18 @@
         <p:spPr>
           <a:xfrm>
             <a:off x="3884760" y="8685360"/>
-            <a:ext cx="2971440" cy="458280"/>
-          </a:xfrm>
-          <a:prstGeom prst="rect">
-            <a:avLst/>
-          </a:prstGeom>
-          <a:noFill/>
-          <a:ln w="0">
-            <a:noFill/>
-          </a:ln>
-        </p:spPr>
-        <p:txBody>
-          <a:bodyPr anchor="b">
+            <a:ext cx="2971080" cy="457920"/>
+          </a:xfrm>
+          <a:prstGeom prst="rect">
+            <a:avLst/>
+          </a:prstGeom>
+          <a:noFill/>
+          <a:ln w="0">
+            <a:noFill/>
+          </a:ln>
+        </p:spPr>
+        <p:txBody>
+          <a:bodyPr lIns="0" rIns="0" tIns="0" bIns="0" anchor="b">
             <a:noAutofit/>
           </a:bodyPr>
           <a:lstStyle>
@@ -1951,7 +1945,7 @@
               </a:lnSpc>
               <a:buNone/>
             </a:pPr>
-            <a:fld id="{966C9843-0662-4A1B-B41D-7A22BB0E2C01}" type="slidenum">
+            <a:fld id="{02EA3664-82B7-4C7F-8A7A-5684340A4244}" type="slidenum">
               <a:rPr b="0" lang="en-US" sz="1200" spc="-1" strike="noStrike">
                 <a:latin typeface="Times New Roman"/>
               </a:rPr>
@@ -1998,7 +1992,7 @@
         <p:spPr>
           <a:xfrm>
             <a:off x="685800" y="1143000"/>
-            <a:ext cx="5486040" cy="3085920"/>
+            <a:ext cx="5485680" cy="3085560"/>
           </a:xfrm>
           <a:prstGeom prst="rect">
             <a:avLst/>
@@ -2021,18 +2015,18 @@
         <p:spPr>
           <a:xfrm>
             <a:off x="685800" y="4400640"/>
-            <a:ext cx="5486040" cy="3600000"/>
-          </a:xfrm>
-          <a:prstGeom prst="rect">
-            <a:avLst/>
-          </a:prstGeom>
-          <a:noFill/>
-          <a:ln w="0">
-            <a:noFill/>
-          </a:ln>
-        </p:spPr>
-        <p:txBody>
-          <a:bodyPr anchor="t">
+            <a:ext cx="5485680" cy="3599640"/>
+          </a:xfrm>
+          <a:prstGeom prst="rect">
+            <a:avLst/>
+          </a:prstGeom>
+          <a:noFill/>
+          <a:ln w="0">
+            <a:noFill/>
+          </a:ln>
+        </p:spPr>
+        <p:txBody>
+          <a:bodyPr lIns="0" rIns="0" tIns="0" bIns="0" anchor="t">
             <a:noAutofit/>
           </a:bodyPr>
           <a:p>
@@ -2055,18 +2049,18 @@
         <p:spPr>
           <a:xfrm>
             <a:off x="3884760" y="8685360"/>
-            <a:ext cx="2971440" cy="458280"/>
-          </a:xfrm>
-          <a:prstGeom prst="rect">
-            <a:avLst/>
-          </a:prstGeom>
-          <a:noFill/>
-          <a:ln w="0">
-            <a:noFill/>
-          </a:ln>
-        </p:spPr>
-        <p:txBody>
-          <a:bodyPr anchor="b">
+            <a:ext cx="2971080" cy="457920"/>
+          </a:xfrm>
+          <a:prstGeom prst="rect">
+            <a:avLst/>
+          </a:prstGeom>
+          <a:noFill/>
+          <a:ln w="0">
+            <a:noFill/>
+          </a:ln>
+        </p:spPr>
+        <p:txBody>
+          <a:bodyPr lIns="0" rIns="0" tIns="0" bIns="0" anchor="b">
             <a:noAutofit/>
           </a:bodyPr>
           <a:lstStyle>
@@ -2087,7 +2081,7 @@
               </a:lnSpc>
               <a:buNone/>
             </a:pPr>
-            <a:fld id="{8F918614-CA1C-4466-ACC1-FD4F439C5FCD}" type="slidenum">
+            <a:fld id="{F916DDF1-8597-4F47-997E-7F68C078C1D6}" type="slidenum">
               <a:rPr b="0" lang="en-US" sz="1200" spc="-1" strike="noStrike">
                 <a:latin typeface="Times New Roman"/>
               </a:rPr>
@@ -2134,7 +2128,7 @@
         <p:spPr>
           <a:xfrm>
             <a:off x="685800" y="1143000"/>
-            <a:ext cx="5486040" cy="3085920"/>
+            <a:ext cx="5485680" cy="3085560"/>
           </a:xfrm>
           <a:prstGeom prst="rect">
             <a:avLst/>
@@ -2157,18 +2151,18 @@
         <p:spPr>
           <a:xfrm>
             <a:off x="685800" y="4400640"/>
-            <a:ext cx="5486040" cy="3600000"/>
-          </a:xfrm>
-          <a:prstGeom prst="rect">
-            <a:avLst/>
-          </a:prstGeom>
-          <a:noFill/>
-          <a:ln w="0">
-            <a:noFill/>
-          </a:ln>
-        </p:spPr>
-        <p:txBody>
-          <a:bodyPr anchor="t">
+            <a:ext cx="5485680" cy="3599640"/>
+          </a:xfrm>
+          <a:prstGeom prst="rect">
+            <a:avLst/>
+          </a:prstGeom>
+          <a:noFill/>
+          <a:ln w="0">
+            <a:noFill/>
+          </a:ln>
+        </p:spPr>
+        <p:txBody>
+          <a:bodyPr lIns="0" rIns="0" tIns="0" bIns="0" anchor="t">
             <a:noAutofit/>
           </a:bodyPr>
           <a:p>
@@ -2191,18 +2185,18 @@
         <p:spPr>
           <a:xfrm>
             <a:off x="3884760" y="8685360"/>
-            <a:ext cx="2971440" cy="458280"/>
-          </a:xfrm>
-          <a:prstGeom prst="rect">
-            <a:avLst/>
-          </a:prstGeom>
-          <a:noFill/>
-          <a:ln w="0">
-            <a:noFill/>
-          </a:ln>
-        </p:spPr>
-        <p:txBody>
-          <a:bodyPr anchor="b">
+            <a:ext cx="2971080" cy="457920"/>
+          </a:xfrm>
+          <a:prstGeom prst="rect">
+            <a:avLst/>
+          </a:prstGeom>
+          <a:noFill/>
+          <a:ln w="0">
+            <a:noFill/>
+          </a:ln>
+        </p:spPr>
+        <p:txBody>
+          <a:bodyPr lIns="0" rIns="0" tIns="0" bIns="0" anchor="b">
             <a:noAutofit/>
           </a:bodyPr>
           <a:lstStyle>
@@ -2223,7 +2217,7 @@
               </a:lnSpc>
               <a:buNone/>
             </a:pPr>
-            <a:fld id="{FEF2E026-F9E2-47FB-BE0B-41D443385D40}" type="slidenum">
+            <a:fld id="{04B21C55-20DC-41C9-8550-C22537D8933A}" type="slidenum">
               <a:rPr b="0" lang="en-US" sz="1200" spc="-1" strike="noStrike">
                 <a:latin typeface="Times New Roman"/>
               </a:rPr>
@@ -2270,7 +2264,7 @@
         <p:spPr>
           <a:xfrm>
             <a:off x="685800" y="1143000"/>
-            <a:ext cx="5486040" cy="3085920"/>
+            <a:ext cx="5485680" cy="3085560"/>
           </a:xfrm>
           <a:prstGeom prst="rect">
             <a:avLst/>
@@ -2293,18 +2287,18 @@
         <p:spPr>
           <a:xfrm>
             <a:off x="685800" y="4400640"/>
-            <a:ext cx="5486040" cy="3600000"/>
-          </a:xfrm>
-          <a:prstGeom prst="rect">
-            <a:avLst/>
-          </a:prstGeom>
-          <a:noFill/>
-          <a:ln w="0">
-            <a:noFill/>
-          </a:ln>
-        </p:spPr>
-        <p:txBody>
-          <a:bodyPr anchor="t">
+            <a:ext cx="5485680" cy="3599640"/>
+          </a:xfrm>
+          <a:prstGeom prst="rect">
+            <a:avLst/>
+          </a:prstGeom>
+          <a:noFill/>
+          <a:ln w="0">
+            <a:noFill/>
+          </a:ln>
+        </p:spPr>
+        <p:txBody>
+          <a:bodyPr lIns="0" rIns="0" tIns="0" bIns="0" anchor="t">
             <a:noAutofit/>
           </a:bodyPr>
           <a:p>
@@ -2327,18 +2321,18 @@
         <p:spPr>
           <a:xfrm>
             <a:off x="3884760" y="8685360"/>
-            <a:ext cx="2971440" cy="458280"/>
-          </a:xfrm>
-          <a:prstGeom prst="rect">
-            <a:avLst/>
-          </a:prstGeom>
-          <a:noFill/>
-          <a:ln w="0">
-            <a:noFill/>
-          </a:ln>
-        </p:spPr>
-        <p:txBody>
-          <a:bodyPr anchor="b">
+            <a:ext cx="2971080" cy="457920"/>
+          </a:xfrm>
+          <a:prstGeom prst="rect">
+            <a:avLst/>
+          </a:prstGeom>
+          <a:noFill/>
+          <a:ln w="0">
+            <a:noFill/>
+          </a:ln>
+        </p:spPr>
+        <p:txBody>
+          <a:bodyPr lIns="0" rIns="0" tIns="0" bIns="0" anchor="b">
             <a:noAutofit/>
           </a:bodyPr>
           <a:lstStyle>
@@ -2359,7 +2353,7 @@
               </a:lnSpc>
               <a:buNone/>
             </a:pPr>
-            <a:fld id="{29B3373D-5A4C-4DC7-BC9E-28494D184FC4}" type="slidenum">
+            <a:fld id="{FFF0DFF0-4919-47F2-9765-40820A45A29C}" type="slidenum">
               <a:rPr b="0" lang="en-US" sz="1200" spc="-1" strike="noStrike">
                 <a:latin typeface="Times New Roman"/>
               </a:rPr>
@@ -2406,7 +2400,7 @@
         <p:spPr>
           <a:xfrm>
             <a:off x="685800" y="1143000"/>
-            <a:ext cx="5486040" cy="3085920"/>
+            <a:ext cx="5485680" cy="3085560"/>
           </a:xfrm>
           <a:prstGeom prst="rect">
             <a:avLst/>
@@ -2429,18 +2423,18 @@
         <p:spPr>
           <a:xfrm>
             <a:off x="685800" y="4400640"/>
-            <a:ext cx="5486040" cy="3600000"/>
-          </a:xfrm>
-          <a:prstGeom prst="rect">
-            <a:avLst/>
-          </a:prstGeom>
-          <a:noFill/>
-          <a:ln w="0">
-            <a:noFill/>
-          </a:ln>
-        </p:spPr>
-        <p:txBody>
-          <a:bodyPr anchor="t">
+            <a:ext cx="5485680" cy="3599640"/>
+          </a:xfrm>
+          <a:prstGeom prst="rect">
+            <a:avLst/>
+          </a:prstGeom>
+          <a:noFill/>
+          <a:ln w="0">
+            <a:noFill/>
+          </a:ln>
+        </p:spPr>
+        <p:txBody>
+          <a:bodyPr lIns="0" rIns="0" tIns="0" bIns="0" anchor="t">
             <a:noAutofit/>
           </a:bodyPr>
           <a:p>
@@ -2463,18 +2457,18 @@
         <p:spPr>
           <a:xfrm>
             <a:off x="3884760" y="8685360"/>
-            <a:ext cx="2971440" cy="458280"/>
-          </a:xfrm>
-          <a:prstGeom prst="rect">
-            <a:avLst/>
-          </a:prstGeom>
-          <a:noFill/>
-          <a:ln w="0">
-            <a:noFill/>
-          </a:ln>
-        </p:spPr>
-        <p:txBody>
-          <a:bodyPr anchor="b">
+            <a:ext cx="2971080" cy="457920"/>
+          </a:xfrm>
+          <a:prstGeom prst="rect">
+            <a:avLst/>
+          </a:prstGeom>
+          <a:noFill/>
+          <a:ln w="0">
+            <a:noFill/>
+          </a:ln>
+        </p:spPr>
+        <p:txBody>
+          <a:bodyPr lIns="0" rIns="0" tIns="0" bIns="0" anchor="b">
             <a:noAutofit/>
           </a:bodyPr>
           <a:lstStyle>
@@ -2495,7 +2489,7 @@
               </a:lnSpc>
               <a:buNone/>
             </a:pPr>
-            <a:fld id="{5E2B5E01-E901-45A1-8A1B-626FA54890B5}" type="slidenum">
+            <a:fld id="{97FDDC73-3650-4C0D-8666-0D37E5F617C8}" type="slidenum">
               <a:rPr b="0" lang="en-US" sz="1200" spc="-1" strike="noStrike">
                 <a:latin typeface="Times New Roman"/>
               </a:rPr>
@@ -2542,7 +2536,7 @@
         <p:spPr>
           <a:xfrm>
             <a:off x="685800" y="1143000"/>
-            <a:ext cx="5486040" cy="3085920"/>
+            <a:ext cx="5485680" cy="3085560"/>
           </a:xfrm>
           <a:prstGeom prst="rect">
             <a:avLst/>
@@ -2565,18 +2559,18 @@
         <p:spPr>
           <a:xfrm>
             <a:off x="685800" y="4400640"/>
-            <a:ext cx="5486040" cy="3600000"/>
-          </a:xfrm>
-          <a:prstGeom prst="rect">
-            <a:avLst/>
-          </a:prstGeom>
-          <a:noFill/>
-          <a:ln w="0">
-            <a:noFill/>
-          </a:ln>
-        </p:spPr>
-        <p:txBody>
-          <a:bodyPr anchor="t">
+            <a:ext cx="5485680" cy="3599640"/>
+          </a:xfrm>
+          <a:prstGeom prst="rect">
+            <a:avLst/>
+          </a:prstGeom>
+          <a:noFill/>
+          <a:ln w="0">
+            <a:noFill/>
+          </a:ln>
+        </p:spPr>
+        <p:txBody>
+          <a:bodyPr lIns="0" rIns="0" tIns="0" bIns="0" anchor="t">
             <a:noAutofit/>
           </a:bodyPr>
           <a:p>
@@ -2599,18 +2593,18 @@
         <p:spPr>
           <a:xfrm>
             <a:off x="3884760" y="8685360"/>
-            <a:ext cx="2971440" cy="458280"/>
-          </a:xfrm>
-          <a:prstGeom prst="rect">
-            <a:avLst/>
-          </a:prstGeom>
-          <a:noFill/>
-          <a:ln w="0">
-            <a:noFill/>
-          </a:ln>
-        </p:spPr>
-        <p:txBody>
-          <a:bodyPr anchor="b">
+            <a:ext cx="2971080" cy="457920"/>
+          </a:xfrm>
+          <a:prstGeom prst="rect">
+            <a:avLst/>
+          </a:prstGeom>
+          <a:noFill/>
+          <a:ln w="0">
+            <a:noFill/>
+          </a:ln>
+        </p:spPr>
+        <p:txBody>
+          <a:bodyPr lIns="0" rIns="0" tIns="0" bIns="0" anchor="b">
             <a:noAutofit/>
           </a:bodyPr>
           <a:lstStyle>
@@ -2631,7 +2625,7 @@
               </a:lnSpc>
               <a:buNone/>
             </a:pPr>
-            <a:fld id="{95677CB9-DB03-43C6-9521-54242F8BA779}" type="slidenum">
+            <a:fld id="{584C36DC-86F2-44AD-A4B3-C5843C861B4E}" type="slidenum">
               <a:rPr b="0" lang="en-US" sz="1200" spc="-1" strike="noStrike">
                 <a:latin typeface="Times New Roman"/>
               </a:rPr>
@@ -2678,7 +2672,7 @@
         <p:spPr>
           <a:xfrm>
             <a:off x="685800" y="1143000"/>
-            <a:ext cx="5486040" cy="3085920"/>
+            <a:ext cx="5485680" cy="3085560"/>
           </a:xfrm>
           <a:prstGeom prst="rect">
             <a:avLst/>
@@ -2701,18 +2695,18 @@
         <p:spPr>
           <a:xfrm>
             <a:off x="685800" y="4400640"/>
-            <a:ext cx="5486040" cy="3600000"/>
-          </a:xfrm>
-          <a:prstGeom prst="rect">
-            <a:avLst/>
-          </a:prstGeom>
-          <a:noFill/>
-          <a:ln w="0">
-            <a:noFill/>
-          </a:ln>
-        </p:spPr>
-        <p:txBody>
-          <a:bodyPr anchor="t">
+            <a:ext cx="5485680" cy="3599640"/>
+          </a:xfrm>
+          <a:prstGeom prst="rect">
+            <a:avLst/>
+          </a:prstGeom>
+          <a:noFill/>
+          <a:ln w="0">
+            <a:noFill/>
+          </a:ln>
+        </p:spPr>
+        <p:txBody>
+          <a:bodyPr lIns="0" rIns="0" tIns="0" bIns="0" anchor="t">
             <a:noAutofit/>
           </a:bodyPr>
           <a:p>
@@ -2735,18 +2729,18 @@
         <p:spPr>
           <a:xfrm>
             <a:off x="3884760" y="8685360"/>
-            <a:ext cx="2971440" cy="458280"/>
-          </a:xfrm>
-          <a:prstGeom prst="rect">
-            <a:avLst/>
-          </a:prstGeom>
-          <a:noFill/>
-          <a:ln w="0">
-            <a:noFill/>
-          </a:ln>
-        </p:spPr>
-        <p:txBody>
-          <a:bodyPr anchor="b">
+            <a:ext cx="2971080" cy="457920"/>
+          </a:xfrm>
+          <a:prstGeom prst="rect">
+            <a:avLst/>
+          </a:prstGeom>
+          <a:noFill/>
+          <a:ln w="0">
+            <a:noFill/>
+          </a:ln>
+        </p:spPr>
+        <p:txBody>
+          <a:bodyPr lIns="0" rIns="0" tIns="0" bIns="0" anchor="b">
             <a:noAutofit/>
           </a:bodyPr>
           <a:lstStyle>
@@ -2767,7 +2761,7 @@
               </a:lnSpc>
               <a:buNone/>
             </a:pPr>
-            <a:fld id="{7676A28E-716D-4564-9E6E-E971DFDBE73D}" type="slidenum">
+            <a:fld id="{6C22E38A-11C8-4D6E-8FAB-4CE7A7871A1C}" type="slidenum">
               <a:rPr b="0" lang="en-US" sz="1200" spc="-1" strike="noStrike">
                 <a:latin typeface="Times New Roman"/>
               </a:rPr>
@@ -2814,7 +2808,7 @@
         <p:spPr>
           <a:xfrm>
             <a:off x="685800" y="1143000"/>
-            <a:ext cx="5486040" cy="3085920"/>
+            <a:ext cx="5485680" cy="3085560"/>
           </a:xfrm>
           <a:prstGeom prst="rect">
             <a:avLst/>
@@ -2837,18 +2831,18 @@
         <p:spPr>
           <a:xfrm>
             <a:off x="685800" y="4400640"/>
-            <a:ext cx="5486040" cy="3600000"/>
-          </a:xfrm>
-          <a:prstGeom prst="rect">
-            <a:avLst/>
-          </a:prstGeom>
-          <a:noFill/>
-          <a:ln w="0">
-            <a:noFill/>
-          </a:ln>
-        </p:spPr>
-        <p:txBody>
-          <a:bodyPr anchor="t">
+            <a:ext cx="5485680" cy="3599640"/>
+          </a:xfrm>
+          <a:prstGeom prst="rect">
+            <a:avLst/>
+          </a:prstGeom>
+          <a:noFill/>
+          <a:ln w="0">
+            <a:noFill/>
+          </a:ln>
+        </p:spPr>
+        <p:txBody>
+          <a:bodyPr lIns="0" rIns="0" tIns="0" bIns="0" anchor="t">
             <a:noAutofit/>
           </a:bodyPr>
           <a:p>
@@ -2871,18 +2865,18 @@
         <p:spPr>
           <a:xfrm>
             <a:off x="3884760" y="8685360"/>
-            <a:ext cx="2971440" cy="458280"/>
-          </a:xfrm>
-          <a:prstGeom prst="rect">
-            <a:avLst/>
-          </a:prstGeom>
-          <a:noFill/>
-          <a:ln w="0">
-            <a:noFill/>
-          </a:ln>
-        </p:spPr>
-        <p:txBody>
-          <a:bodyPr anchor="b">
+            <a:ext cx="2971080" cy="457920"/>
+          </a:xfrm>
+          <a:prstGeom prst="rect">
+            <a:avLst/>
+          </a:prstGeom>
+          <a:noFill/>
+          <a:ln w="0">
+            <a:noFill/>
+          </a:ln>
+        </p:spPr>
+        <p:txBody>
+          <a:bodyPr lIns="0" rIns="0" tIns="0" bIns="0" anchor="b">
             <a:noAutofit/>
           </a:bodyPr>
           <a:lstStyle>
@@ -2903,7 +2897,7 @@
               </a:lnSpc>
               <a:buNone/>
             </a:pPr>
-            <a:fld id="{A03CED03-C677-4F94-BDE8-00CF6B4BBECD}" type="slidenum">
+            <a:fld id="{44FED2E1-4599-46C8-9A25-5209E41910CD}" type="slidenum">
               <a:rPr b="0" lang="en-US" sz="1200" spc="-1" strike="noStrike">
                 <a:latin typeface="Times New Roman"/>
               </a:rPr>
@@ -2950,7 +2944,7 @@
         <p:spPr>
           <a:xfrm>
             <a:off x="685800" y="1143000"/>
-            <a:ext cx="5486040" cy="3085920"/>
+            <a:ext cx="5485680" cy="3085560"/>
           </a:xfrm>
           <a:prstGeom prst="rect">
             <a:avLst/>
@@ -2973,18 +2967,18 @@
         <p:spPr>
           <a:xfrm>
             <a:off x="685800" y="4400640"/>
-            <a:ext cx="5486040" cy="3600000"/>
-          </a:xfrm>
-          <a:prstGeom prst="rect">
-            <a:avLst/>
-          </a:prstGeom>
-          <a:noFill/>
-          <a:ln w="0">
-            <a:noFill/>
-          </a:ln>
-        </p:spPr>
-        <p:txBody>
-          <a:bodyPr anchor="t">
+            <a:ext cx="5485680" cy="3599640"/>
+          </a:xfrm>
+          <a:prstGeom prst="rect">
+            <a:avLst/>
+          </a:prstGeom>
+          <a:noFill/>
+          <a:ln w="0">
+            <a:noFill/>
+          </a:ln>
+        </p:spPr>
+        <p:txBody>
+          <a:bodyPr lIns="0" rIns="0" tIns="0" bIns="0" anchor="t">
             <a:noAutofit/>
           </a:bodyPr>
           <a:p>
@@ -3007,18 +3001,18 @@
         <p:spPr>
           <a:xfrm>
             <a:off x="3884760" y="8685360"/>
-            <a:ext cx="2971440" cy="458280"/>
-          </a:xfrm>
-          <a:prstGeom prst="rect">
-            <a:avLst/>
-          </a:prstGeom>
-          <a:noFill/>
-          <a:ln w="0">
-            <a:noFill/>
-          </a:ln>
-        </p:spPr>
-        <p:txBody>
-          <a:bodyPr anchor="b">
+            <a:ext cx="2971080" cy="457920"/>
+          </a:xfrm>
+          <a:prstGeom prst="rect">
+            <a:avLst/>
+          </a:prstGeom>
+          <a:noFill/>
+          <a:ln w="0">
+            <a:noFill/>
+          </a:ln>
+        </p:spPr>
+        <p:txBody>
+          <a:bodyPr lIns="0" rIns="0" tIns="0" bIns="0" anchor="b">
             <a:noAutofit/>
           </a:bodyPr>
           <a:lstStyle>
@@ -3039,7 +3033,7 @@
               </a:lnSpc>
               <a:buNone/>
             </a:pPr>
-            <a:fld id="{459E7629-9ABD-4193-BFF8-37A874765437}" type="slidenum">
+            <a:fld id="{040A806A-1855-451E-9364-603AD7932EF9}" type="slidenum">
               <a:rPr b="0" lang="en-US" sz="1200" spc="-1" strike="noStrike">
                 <a:latin typeface="Times New Roman"/>
               </a:rPr>
@@ -3086,7 +3080,7 @@
         <p:spPr>
           <a:xfrm>
             <a:off x="685800" y="1143000"/>
-            <a:ext cx="5486040" cy="3085920"/>
+            <a:ext cx="5485680" cy="3085560"/>
           </a:xfrm>
           <a:prstGeom prst="rect">
             <a:avLst/>
@@ -3109,18 +3103,18 @@
         <p:spPr>
           <a:xfrm>
             <a:off x="685800" y="4400640"/>
-            <a:ext cx="5486040" cy="3600000"/>
-          </a:xfrm>
-          <a:prstGeom prst="rect">
-            <a:avLst/>
-          </a:prstGeom>
-          <a:noFill/>
-          <a:ln w="0">
-            <a:noFill/>
-          </a:ln>
-        </p:spPr>
-        <p:txBody>
-          <a:bodyPr anchor="t">
+            <a:ext cx="5485680" cy="3599640"/>
+          </a:xfrm>
+          <a:prstGeom prst="rect">
+            <a:avLst/>
+          </a:prstGeom>
+          <a:noFill/>
+          <a:ln w="0">
+            <a:noFill/>
+          </a:ln>
+        </p:spPr>
+        <p:txBody>
+          <a:bodyPr lIns="0" rIns="0" tIns="0" bIns="0" anchor="t">
             <a:noAutofit/>
           </a:bodyPr>
           <a:p>
@@ -3143,18 +3137,18 @@
         <p:spPr>
           <a:xfrm>
             <a:off x="3884760" y="8685360"/>
-            <a:ext cx="2971440" cy="458280"/>
-          </a:xfrm>
-          <a:prstGeom prst="rect">
-            <a:avLst/>
-          </a:prstGeom>
-          <a:noFill/>
-          <a:ln w="0">
-            <a:noFill/>
-          </a:ln>
-        </p:spPr>
-        <p:txBody>
-          <a:bodyPr anchor="b">
+            <a:ext cx="2971080" cy="457920"/>
+          </a:xfrm>
+          <a:prstGeom prst="rect">
+            <a:avLst/>
+          </a:prstGeom>
+          <a:noFill/>
+          <a:ln w="0">
+            <a:noFill/>
+          </a:ln>
+        </p:spPr>
+        <p:txBody>
+          <a:bodyPr lIns="0" rIns="0" tIns="0" bIns="0" anchor="b">
             <a:noAutofit/>
           </a:bodyPr>
           <a:lstStyle>
@@ -3175,7 +3169,7 @@
               </a:lnSpc>
               <a:buNone/>
             </a:pPr>
-            <a:fld id="{4B2524E5-C7EC-4950-89DD-9C32F6435CDF}" type="slidenum">
+            <a:fld id="{B6AB4465-3FC7-45D4-A04A-61D723BF3930}" type="slidenum">
               <a:rPr b="0" lang="en-US" sz="1200" spc="-1" strike="noStrike">
                 <a:latin typeface="Times New Roman"/>
               </a:rPr>
@@ -3263,10 +3257,7 @@
               <a:buNone/>
             </a:pPr>
             <a:endParaRPr b="0" lang="en-HK" sz="4400" spc="-1" strike="noStrike">
-              <a:solidFill>
-                <a:srgbClr val="000000"/>
-              </a:solidFill>
-              <a:latin typeface="Calibri Light"/>
+              <a:latin typeface="Arial"/>
             </a:endParaRPr>
           </a:p>
         </p:txBody>
@@ -3300,10 +3291,7 @@
           </a:bodyPr>
           <a:p>
             <a:endParaRPr b="0" lang="en-HK" sz="3200" spc="-1" strike="noStrike">
-              <a:solidFill>
-                <a:srgbClr val="000000"/>
-              </a:solidFill>
-              <a:latin typeface="Calibri"/>
+              <a:latin typeface="Arial"/>
             </a:endParaRPr>
           </a:p>
         </p:txBody>
@@ -3337,10 +3325,7 @@
           </a:bodyPr>
           <a:p>
             <a:endParaRPr b="0" lang="en-HK" sz="3200" spc="-1" strike="noStrike">
-              <a:solidFill>
-                <a:srgbClr val="000000"/>
-              </a:solidFill>
-              <a:latin typeface="Calibri"/>
+              <a:latin typeface="Arial"/>
             </a:endParaRPr>
           </a:p>
         </p:txBody>
@@ -3399,10 +3384,7 @@
               <a:buNone/>
             </a:pPr>
             <a:endParaRPr b="0" lang="en-HK" sz="4400" spc="-1" strike="noStrike">
-              <a:solidFill>
-                <a:srgbClr val="000000"/>
-              </a:solidFill>
-              <a:latin typeface="Calibri Light"/>
+              <a:latin typeface="Arial"/>
             </a:endParaRPr>
           </a:p>
         </p:txBody>
@@ -3436,10 +3418,7 @@
           </a:bodyPr>
           <a:p>
             <a:endParaRPr b="0" lang="en-HK" sz="3200" spc="-1" strike="noStrike">
-              <a:solidFill>
-                <a:srgbClr val="000000"/>
-              </a:solidFill>
-              <a:latin typeface="Calibri"/>
+              <a:latin typeface="Arial"/>
             </a:endParaRPr>
           </a:p>
         </p:txBody>
@@ -3473,10 +3452,7 @@
           </a:bodyPr>
           <a:p>
             <a:endParaRPr b="0" lang="en-HK" sz="3200" spc="-1" strike="noStrike">
-              <a:solidFill>
-                <a:srgbClr val="000000"/>
-              </a:solidFill>
-              <a:latin typeface="Calibri"/>
+              <a:latin typeface="Arial"/>
             </a:endParaRPr>
           </a:p>
         </p:txBody>
@@ -3510,10 +3486,7 @@
           </a:bodyPr>
           <a:p>
             <a:endParaRPr b="0" lang="en-HK" sz="3200" spc="-1" strike="noStrike">
-              <a:solidFill>
-                <a:srgbClr val="000000"/>
-              </a:solidFill>
-              <a:latin typeface="Calibri"/>
+              <a:latin typeface="Arial"/>
             </a:endParaRPr>
           </a:p>
         </p:txBody>
@@ -3547,10 +3520,7 @@
           </a:bodyPr>
           <a:p>
             <a:endParaRPr b="0" lang="en-HK" sz="3200" spc="-1" strike="noStrike">
-              <a:solidFill>
-                <a:srgbClr val="000000"/>
-              </a:solidFill>
-              <a:latin typeface="Calibri"/>
+              <a:latin typeface="Arial"/>
             </a:endParaRPr>
           </a:p>
         </p:txBody>
@@ -3609,10 +3579,7 @@
               <a:buNone/>
             </a:pPr>
             <a:endParaRPr b="0" lang="en-HK" sz="4400" spc="-1" strike="noStrike">
-              <a:solidFill>
-                <a:srgbClr val="000000"/>
-              </a:solidFill>
-              <a:latin typeface="Calibri Light"/>
+              <a:latin typeface="Arial"/>
             </a:endParaRPr>
           </a:p>
         </p:txBody>
@@ -3646,10 +3613,7 @@
           </a:bodyPr>
           <a:p>
             <a:endParaRPr b="0" lang="en-HK" sz="3200" spc="-1" strike="noStrike">
-              <a:solidFill>
-                <a:srgbClr val="000000"/>
-              </a:solidFill>
-              <a:latin typeface="Calibri"/>
+              <a:latin typeface="Arial"/>
             </a:endParaRPr>
           </a:p>
         </p:txBody>
@@ -3683,10 +3647,7 @@
           </a:bodyPr>
           <a:p>
             <a:endParaRPr b="0" lang="en-HK" sz="3200" spc="-1" strike="noStrike">
-              <a:solidFill>
-                <a:srgbClr val="000000"/>
-              </a:solidFill>
-              <a:latin typeface="Calibri"/>
+              <a:latin typeface="Arial"/>
             </a:endParaRPr>
           </a:p>
         </p:txBody>
@@ -3720,10 +3681,7 @@
           </a:bodyPr>
           <a:p>
             <a:endParaRPr b="0" lang="en-HK" sz="3200" spc="-1" strike="noStrike">
-              <a:solidFill>
-                <a:srgbClr val="000000"/>
-              </a:solidFill>
-              <a:latin typeface="Calibri"/>
+              <a:latin typeface="Arial"/>
             </a:endParaRPr>
           </a:p>
         </p:txBody>
@@ -3757,10 +3715,7 @@
           </a:bodyPr>
           <a:p>
             <a:endParaRPr b="0" lang="en-HK" sz="3200" spc="-1" strike="noStrike">
-              <a:solidFill>
-                <a:srgbClr val="000000"/>
-              </a:solidFill>
-              <a:latin typeface="Calibri"/>
+              <a:latin typeface="Arial"/>
             </a:endParaRPr>
           </a:p>
         </p:txBody>
@@ -3794,10 +3749,7 @@
           </a:bodyPr>
           <a:p>
             <a:endParaRPr b="0" lang="en-HK" sz="3200" spc="-1" strike="noStrike">
-              <a:solidFill>
-                <a:srgbClr val="000000"/>
-              </a:solidFill>
-              <a:latin typeface="Calibri"/>
+              <a:latin typeface="Arial"/>
             </a:endParaRPr>
           </a:p>
         </p:txBody>
@@ -3831,10 +3783,7 @@
           </a:bodyPr>
           <a:p>
             <a:endParaRPr b="0" lang="en-HK" sz="3200" spc="-1" strike="noStrike">
-              <a:solidFill>
-                <a:srgbClr val="000000"/>
-              </a:solidFill>
-              <a:latin typeface="Calibri"/>
+              <a:latin typeface="Arial"/>
             </a:endParaRPr>
           </a:p>
         </p:txBody>
@@ -3893,10 +3842,7 @@
               <a:buNone/>
             </a:pPr>
             <a:endParaRPr b="0" lang="en-HK" sz="4400" spc="-1" strike="noStrike">
-              <a:solidFill>
-                <a:srgbClr val="000000"/>
-              </a:solidFill>
-              <a:latin typeface="Calibri Light"/>
+              <a:latin typeface="Arial"/>
             </a:endParaRPr>
           </a:p>
         </p:txBody>
@@ -3992,10 +3938,7 @@
               <a:buNone/>
             </a:pPr>
             <a:endParaRPr b="0" lang="en-HK" sz="4400" spc="-1" strike="noStrike">
-              <a:solidFill>
-                <a:srgbClr val="000000"/>
-              </a:solidFill>
-              <a:latin typeface="Calibri Light"/>
+              <a:latin typeface="Arial"/>
             </a:endParaRPr>
           </a:p>
         </p:txBody>
@@ -4029,10 +3972,7 @@
           </a:bodyPr>
           <a:p>
             <a:endParaRPr b="0" lang="en-HK" sz="3200" spc="-1" strike="noStrike">
-              <a:solidFill>
-                <a:srgbClr val="000000"/>
-              </a:solidFill>
-              <a:latin typeface="Calibri"/>
+              <a:latin typeface="Arial"/>
             </a:endParaRPr>
           </a:p>
         </p:txBody>
@@ -4091,10 +4031,7 @@
               <a:buNone/>
             </a:pPr>
             <a:endParaRPr b="0" lang="en-HK" sz="4400" spc="-1" strike="noStrike">
-              <a:solidFill>
-                <a:srgbClr val="000000"/>
-              </a:solidFill>
-              <a:latin typeface="Calibri Light"/>
+              <a:latin typeface="Arial"/>
             </a:endParaRPr>
           </a:p>
         </p:txBody>
@@ -4128,10 +4065,7 @@
           </a:bodyPr>
           <a:p>
             <a:endParaRPr b="0" lang="en-HK" sz="3200" spc="-1" strike="noStrike">
-              <a:solidFill>
-                <a:srgbClr val="000000"/>
-              </a:solidFill>
-              <a:latin typeface="Calibri"/>
+              <a:latin typeface="Arial"/>
             </a:endParaRPr>
           </a:p>
         </p:txBody>
@@ -4165,10 +4099,7 @@
           </a:bodyPr>
           <a:p>
             <a:endParaRPr b="0" lang="en-HK" sz="3200" spc="-1" strike="noStrike">
-              <a:solidFill>
-                <a:srgbClr val="000000"/>
-              </a:solidFill>
-              <a:latin typeface="Calibri"/>
+              <a:latin typeface="Arial"/>
             </a:endParaRPr>
           </a:p>
         </p:txBody>
@@ -4227,10 +4158,7 @@
               <a:buNone/>
             </a:pPr>
             <a:endParaRPr b="0" lang="en-HK" sz="4400" spc="-1" strike="noStrike">
-              <a:solidFill>
-                <a:srgbClr val="000000"/>
-              </a:solidFill>
-              <a:latin typeface="Calibri Light"/>
+              <a:latin typeface="Arial"/>
             </a:endParaRPr>
           </a:p>
         </p:txBody>
@@ -4348,10 +4276,7 @@
               <a:buNone/>
             </a:pPr>
             <a:endParaRPr b="0" lang="en-HK" sz="4400" spc="-1" strike="noStrike">
-              <a:solidFill>
-                <a:srgbClr val="000000"/>
-              </a:solidFill>
-              <a:latin typeface="Calibri Light"/>
+              <a:latin typeface="Arial"/>
             </a:endParaRPr>
           </a:p>
         </p:txBody>
@@ -4385,10 +4310,7 @@
           </a:bodyPr>
           <a:p>
             <a:endParaRPr b="0" lang="en-HK" sz="3200" spc="-1" strike="noStrike">
-              <a:solidFill>
-                <a:srgbClr val="000000"/>
-              </a:solidFill>
-              <a:latin typeface="Calibri"/>
+              <a:latin typeface="Arial"/>
             </a:endParaRPr>
           </a:p>
         </p:txBody>
@@ -4422,10 +4344,7 @@
           </a:bodyPr>
           <a:p>
             <a:endParaRPr b="0" lang="en-HK" sz="3200" spc="-1" strike="noStrike">
-              <a:solidFill>
-                <a:srgbClr val="000000"/>
-              </a:solidFill>
-              <a:latin typeface="Calibri"/>
+              <a:latin typeface="Arial"/>
             </a:endParaRPr>
           </a:p>
         </p:txBody>
@@ -4459,10 +4378,7 @@
           </a:bodyPr>
           <a:p>
             <a:endParaRPr b="0" lang="en-HK" sz="3200" spc="-1" strike="noStrike">
-              <a:solidFill>
-                <a:srgbClr val="000000"/>
-              </a:solidFill>
-              <a:latin typeface="Calibri"/>
+              <a:latin typeface="Arial"/>
             </a:endParaRPr>
           </a:p>
         </p:txBody>
@@ -4521,10 +4437,7 @@
               <a:buNone/>
             </a:pPr>
             <a:endParaRPr b="0" lang="en-HK" sz="4400" spc="-1" strike="noStrike">
-              <a:solidFill>
-                <a:srgbClr val="000000"/>
-              </a:solidFill>
-              <a:latin typeface="Calibri Light"/>
+              <a:latin typeface="Arial"/>
             </a:endParaRPr>
           </a:p>
         </p:txBody>
@@ -4558,10 +4471,7 @@
           </a:bodyPr>
           <a:p>
             <a:endParaRPr b="0" lang="en-HK" sz="3200" spc="-1" strike="noStrike">
-              <a:solidFill>
-                <a:srgbClr val="000000"/>
-              </a:solidFill>
-              <a:latin typeface="Calibri"/>
+              <a:latin typeface="Arial"/>
             </a:endParaRPr>
           </a:p>
         </p:txBody>
@@ -4595,10 +4505,7 @@
           </a:bodyPr>
           <a:p>
             <a:endParaRPr b="0" lang="en-HK" sz="3200" spc="-1" strike="noStrike">
-              <a:solidFill>
-                <a:srgbClr val="000000"/>
-              </a:solidFill>
-              <a:latin typeface="Calibri"/>
+              <a:latin typeface="Arial"/>
             </a:endParaRPr>
           </a:p>
         </p:txBody>
@@ -4632,10 +4539,7 @@
           </a:bodyPr>
           <a:p>
             <a:endParaRPr b="0" lang="en-HK" sz="3200" spc="-1" strike="noStrike">
-              <a:solidFill>
-                <a:srgbClr val="000000"/>
-              </a:solidFill>
-              <a:latin typeface="Calibri"/>
+              <a:latin typeface="Arial"/>
             </a:endParaRPr>
           </a:p>
         </p:txBody>
@@ -4694,10 +4598,7 @@
               <a:buNone/>
             </a:pPr>
             <a:endParaRPr b="0" lang="en-HK" sz="4400" spc="-1" strike="noStrike">
-              <a:solidFill>
-                <a:srgbClr val="000000"/>
-              </a:solidFill>
-              <a:latin typeface="Calibri Light"/>
+              <a:latin typeface="Arial"/>
             </a:endParaRPr>
           </a:p>
         </p:txBody>
@@ -4731,10 +4632,7 @@
           </a:bodyPr>
           <a:p>
             <a:endParaRPr b="0" lang="en-HK" sz="3200" spc="-1" strike="noStrike">
-              <a:solidFill>
-                <a:srgbClr val="000000"/>
-              </a:solidFill>
-              <a:latin typeface="Calibri"/>
+              <a:latin typeface="Arial"/>
             </a:endParaRPr>
           </a:p>
         </p:txBody>
@@ -4768,10 +4666,7 @@
           </a:bodyPr>
           <a:p>
             <a:endParaRPr b="0" lang="en-HK" sz="3200" spc="-1" strike="noStrike">
-              <a:solidFill>
-                <a:srgbClr val="000000"/>
-              </a:solidFill>
-              <a:latin typeface="Calibri"/>
+              <a:latin typeface="Arial"/>
             </a:endParaRPr>
           </a:p>
         </p:txBody>
@@ -4805,10 +4700,7 @@
           </a:bodyPr>
           <a:p>
             <a:endParaRPr b="0" lang="en-HK" sz="3200" spc="-1" strike="noStrike">
-              <a:solidFill>
-                <a:srgbClr val="000000"/>
-              </a:solidFill>
-              <a:latin typeface="Calibri"/>
+              <a:latin typeface="Arial"/>
             </a:endParaRPr>
           </a:p>
         </p:txBody>
@@ -4875,18 +4767,12 @@
             </a:pPr>
             <a:r>
               <a:rPr b="0" lang="en-HK" sz="4400" spc="-1" strike="noStrike">
-                <a:solidFill>
-                  <a:srgbClr val="000000"/>
-                </a:solidFill>
-                <a:latin typeface="Calibri Light"/>
+                <a:latin typeface="Arial"/>
               </a:rPr>
               <a:t>Click to edit the title text format</a:t>
             </a:r>
             <a:endParaRPr b="0" lang="en-HK" sz="4400" spc="-1" strike="noStrike">
-              <a:solidFill>
-                <a:srgbClr val="000000"/>
-              </a:solidFill>
-              <a:latin typeface="Calibri Light"/>
+              <a:latin typeface="Arial"/>
             </a:endParaRPr>
           </a:p>
         </p:txBody>
@@ -4932,18 +4818,12 @@
             </a:pPr>
             <a:r>
               <a:rPr b="0" lang="en-HK" sz="3200" spc="-1" strike="noStrike">
-                <a:solidFill>
-                  <a:srgbClr val="000000"/>
-                </a:solidFill>
-                <a:latin typeface="Calibri"/>
+                <a:latin typeface="Arial"/>
               </a:rPr>
               <a:t>Click to edit the outline text format</a:t>
             </a:r>
             <a:endParaRPr b="0" lang="en-HK" sz="3200" spc="-1" strike="noStrike">
-              <a:solidFill>
-                <a:srgbClr val="000000"/>
-              </a:solidFill>
-              <a:latin typeface="Calibri"/>
+              <a:latin typeface="Arial"/>
             </a:endParaRPr>
           </a:p>
           <a:p>
@@ -4959,19 +4839,13 @@
               <a:buChar char=""/>
             </a:pPr>
             <a:r>
-              <a:rPr b="0" lang="en-HK" sz="2400" spc="-1" strike="noStrike">
-                <a:solidFill>
-                  <a:srgbClr val="000000"/>
-                </a:solidFill>
-                <a:latin typeface="Calibri"/>
+              <a:rPr b="0" lang="en-HK" sz="2800" spc="-1" strike="noStrike">
+                <a:latin typeface="Arial"/>
               </a:rPr>
               <a:t>Second Outline Level</a:t>
             </a:r>
-            <a:endParaRPr b="0" lang="en-HK" sz="2400" spc="-1" strike="noStrike">
-              <a:solidFill>
-                <a:srgbClr val="000000"/>
-              </a:solidFill>
-              <a:latin typeface="Calibri"/>
+            <a:endParaRPr b="0" lang="en-HK" sz="2800" spc="-1" strike="noStrike">
+              <a:latin typeface="Arial"/>
             </a:endParaRPr>
           </a:p>
           <a:p>
@@ -4987,19 +4861,13 @@
               <a:buChar char=""/>
             </a:pPr>
             <a:r>
-              <a:rPr b="0" lang="en-HK" sz="2000" spc="-1" strike="noStrike">
-                <a:solidFill>
-                  <a:srgbClr val="000000"/>
-                </a:solidFill>
-                <a:latin typeface="Calibri"/>
+              <a:rPr b="0" lang="en-HK" sz="2400" spc="-1" strike="noStrike">
+                <a:latin typeface="Arial"/>
               </a:rPr>
               <a:t>Third Outline Level</a:t>
             </a:r>
-            <a:endParaRPr b="0" lang="en-HK" sz="2000" spc="-1" strike="noStrike">
-              <a:solidFill>
-                <a:srgbClr val="000000"/>
-              </a:solidFill>
-              <a:latin typeface="Calibri"/>
+            <a:endParaRPr b="0" lang="en-HK" sz="2400" spc="-1" strike="noStrike">
+              <a:latin typeface="Arial"/>
             </a:endParaRPr>
           </a:p>
           <a:p>
@@ -5016,18 +4884,12 @@
             </a:pPr>
             <a:r>
               <a:rPr b="0" lang="en-HK" sz="2000" spc="-1" strike="noStrike">
-                <a:solidFill>
-                  <a:srgbClr val="000000"/>
-                </a:solidFill>
-                <a:latin typeface="Calibri"/>
+                <a:latin typeface="Arial"/>
               </a:rPr>
               <a:t>Fourth Outline Level</a:t>
             </a:r>
             <a:endParaRPr b="0" lang="en-HK" sz="2000" spc="-1" strike="noStrike">
-              <a:solidFill>
-                <a:srgbClr val="000000"/>
-              </a:solidFill>
-              <a:latin typeface="Calibri"/>
+              <a:latin typeface="Arial"/>
             </a:endParaRPr>
           </a:p>
           <a:p>
@@ -5044,18 +4906,12 @@
             </a:pPr>
             <a:r>
               <a:rPr b="0" lang="en-HK" sz="2000" spc="-1" strike="noStrike">
-                <a:solidFill>
-                  <a:srgbClr val="000000"/>
-                </a:solidFill>
-                <a:latin typeface="Calibri"/>
+                <a:latin typeface="Arial"/>
               </a:rPr>
               <a:t>Fifth Outline Level</a:t>
             </a:r>
             <a:endParaRPr b="0" lang="en-HK" sz="2000" spc="-1" strike="noStrike">
-              <a:solidFill>
-                <a:srgbClr val="000000"/>
-              </a:solidFill>
-              <a:latin typeface="Calibri"/>
+              <a:latin typeface="Arial"/>
             </a:endParaRPr>
           </a:p>
           <a:p>
@@ -5072,18 +4928,12 @@
             </a:pPr>
             <a:r>
               <a:rPr b="0" lang="en-HK" sz="2000" spc="-1" strike="noStrike">
-                <a:solidFill>
-                  <a:srgbClr val="000000"/>
-                </a:solidFill>
-                <a:latin typeface="Calibri"/>
+                <a:latin typeface="Arial"/>
               </a:rPr>
               <a:t>Sixth Outline Level</a:t>
             </a:r>
             <a:endParaRPr b="0" lang="en-HK" sz="2000" spc="-1" strike="noStrike">
-              <a:solidFill>
-                <a:srgbClr val="000000"/>
-              </a:solidFill>
-              <a:latin typeface="Calibri"/>
+              <a:latin typeface="Arial"/>
             </a:endParaRPr>
           </a:p>
           <a:p>
@@ -5100,18 +4950,12 @@
             </a:pPr>
             <a:r>
               <a:rPr b="0" lang="en-HK" sz="2000" spc="-1" strike="noStrike">
-                <a:solidFill>
-                  <a:srgbClr val="000000"/>
-                </a:solidFill>
-                <a:latin typeface="Calibri"/>
+                <a:latin typeface="Arial"/>
               </a:rPr>
               <a:t>Seventh Outline Level</a:t>
             </a:r>
             <a:endParaRPr b="0" lang="en-HK" sz="2000" spc="-1" strike="noStrike">
-              <a:solidFill>
-                <a:srgbClr val="000000"/>
-              </a:solidFill>
-              <a:latin typeface="Calibri"/>
+              <a:latin typeface="Arial"/>
             </a:endParaRPr>
           </a:p>
         </p:txBody>
@@ -5169,7 +5013,7 @@
         <p:spPr>
           <a:xfrm>
             <a:off x="5638680" y="2266920"/>
-            <a:ext cx="914040" cy="18720"/>
+            <a:ext cx="913680" cy="18360"/>
           </a:xfrm>
           <a:custGeom>
             <a:avLst/>
@@ -5220,7 +5064,7 @@
         <p:spPr>
           <a:xfrm>
             <a:off x="3633840" y="2514600"/>
-            <a:ext cx="4924080" cy="914040"/>
+            <a:ext cx="4923720" cy="913680"/>
           </a:xfrm>
           <a:prstGeom prst="rect">
             <a:avLst/>
@@ -5272,7 +5116,7 @@
         <p:spPr>
           <a:xfrm>
             <a:off x="5638680" y="3657600"/>
-            <a:ext cx="914040" cy="18720"/>
+            <a:ext cx="913680" cy="18360"/>
           </a:xfrm>
           <a:custGeom>
             <a:avLst/>
@@ -5323,7 +5167,7 @@
         <p:spPr>
           <a:xfrm>
             <a:off x="3545640" y="4286160"/>
-            <a:ext cx="5095440" cy="304560"/>
+            <a:ext cx="5095080" cy="304200"/>
           </a:xfrm>
           <a:prstGeom prst="rect">
             <a:avLst/>
@@ -5351,7 +5195,7 @@
               <a:buNone/>
             </a:pPr>
             <a:r>
-              <a:rPr b="0" lang="en-US" sz="1800" spc="43" strike="noStrike">
+              <a:rPr b="0" lang="en-US" sz="1800" spc="41" strike="noStrike">
                 <a:solidFill>
                   <a:srgbClr val="636e72"/>
                 </a:solidFill>
@@ -5412,7 +5256,7 @@
         <p:spPr>
           <a:xfrm>
             <a:off x="380880" y="380880"/>
-            <a:ext cx="11505960" cy="228240"/>
+            <a:ext cx="11505600" cy="227880"/>
           </a:xfrm>
           <a:prstGeom prst="rect">
             <a:avLst/>
@@ -5440,7 +5284,7 @@
               <a:buNone/>
             </a:pPr>
             <a:r>
-              <a:rPr b="1" lang="en-US" sz="1200" spc="58" strike="noStrike">
+              <a:rPr b="1" lang="en-US" sz="1200" spc="55" strike="noStrike">
                 <a:solidFill>
                   <a:srgbClr val="0984e3"/>
                 </a:solidFill>
@@ -5464,7 +5308,7 @@
         <p:spPr>
           <a:xfrm>
             <a:off x="380880" y="685800"/>
-            <a:ext cx="11658240" cy="456840"/>
+            <a:ext cx="11657880" cy="456480"/>
           </a:xfrm>
           <a:prstGeom prst="rect">
             <a:avLst/>
@@ -5516,7 +5360,7 @@
         <p:spPr>
           <a:xfrm>
             <a:off x="380880" y="1419120"/>
-            <a:ext cx="5496840" cy="828360"/>
+            <a:ext cx="5496480" cy="828000"/>
           </a:xfrm>
           <a:prstGeom prst="rect">
             <a:avLst/>
@@ -5568,7 +5412,7 @@
         <p:spPr>
           <a:xfrm>
             <a:off x="380880" y="2452680"/>
-            <a:ext cx="5648040" cy="837720"/>
+            <a:ext cx="5647680" cy="837360"/>
           </a:xfrm>
           <a:prstGeom prst="rect">
             <a:avLst/>
@@ -5620,7 +5464,7 @@
         <p:spPr>
           <a:xfrm>
             <a:off x="380880" y="3867120"/>
-            <a:ext cx="5562360" cy="2018880"/>
+            <a:ext cx="5562000" cy="2018520"/>
           </a:xfrm>
           <a:custGeom>
             <a:avLst/>
@@ -5671,7 +5515,7 @@
         <p:spPr>
           <a:xfrm>
             <a:off x="609480" y="4095720"/>
-            <a:ext cx="5200200" cy="266400"/>
+            <a:ext cx="5199840" cy="266040"/>
           </a:xfrm>
           <a:prstGeom prst="rect">
             <a:avLst/>
@@ -5723,7 +5567,7 @@
         <p:spPr>
           <a:xfrm>
             <a:off x="609480" y="4476600"/>
-            <a:ext cx="5181120" cy="247320"/>
+            <a:ext cx="5180760" cy="246960"/>
           </a:xfrm>
           <a:prstGeom prst="rect">
             <a:avLst/>
@@ -5815,7 +5659,7 @@
         <p:spPr>
           <a:xfrm>
             <a:off x="609480" y="4838760"/>
-            <a:ext cx="5105160" cy="456840"/>
+            <a:ext cx="5104800" cy="456480"/>
           </a:xfrm>
           <a:custGeom>
             <a:avLst/>
@@ -5866,24 +5710,24 @@
         <p:spPr>
           <a:xfrm>
             <a:off x="609480" y="4838760"/>
-            <a:ext cx="5181120" cy="456840"/>
-          </a:xfrm>
-          <a:prstGeom prst="rect">
-            <a:avLst/>
-          </a:prstGeom>
-          <a:noFill/>
-          <a:ln w="0">
-            <a:noFill/>
-          </a:ln>
-        </p:spPr>
-        <p:style>
-          <a:lnRef idx="0"/>
-          <a:fillRef idx="0"/>
-          <a:effectRef idx="0"/>
-          <a:fontRef idx="minor"/>
-        </p:style>
-        <p:txBody>
-          <a:bodyPr lIns="114480" rIns="114480" tIns="228960" bIns="228960" anchor="ctr">
+            <a:ext cx="5180760" cy="456480"/>
+          </a:xfrm>
+          <a:prstGeom prst="rect">
+            <a:avLst/>
+          </a:prstGeom>
+          <a:noFill/>
+          <a:ln w="0">
+            <a:noFill/>
+          </a:ln>
+        </p:spPr>
+        <p:style>
+          <a:lnRef idx="0"/>
+          <a:fillRef idx="0"/>
+          <a:effectRef idx="0"/>
+          <a:fontRef idx="minor"/>
+        </p:style>
+        <p:txBody>
+          <a:bodyPr lIns="114480" rIns="114480" tIns="457200" bIns="457200" anchor="ctr">
             <a:noAutofit/>
           </a:bodyPr>
           <a:p>
@@ -5918,7 +5762,7 @@
         <p:spPr>
           <a:xfrm>
             <a:off x="609480" y="5410080"/>
-            <a:ext cx="5181120" cy="247320"/>
+            <a:ext cx="5180760" cy="246960"/>
           </a:xfrm>
           <a:prstGeom prst="rect">
             <a:avLst/>
@@ -5990,7 +5834,7 @@
         <p:spPr>
           <a:xfrm>
             <a:off x="6253200" y="1376280"/>
-            <a:ext cx="5552640" cy="3209400"/>
+            <a:ext cx="5552280" cy="3209040"/>
           </a:xfrm>
           <a:custGeom>
             <a:avLst/>
@@ -6044,7 +5888,7 @@
         <p:spPr>
           <a:xfrm>
             <a:off x="6486480" y="1609560"/>
-            <a:ext cx="5181120" cy="266400"/>
+            <a:ext cx="5180760" cy="266040"/>
           </a:xfrm>
           <a:prstGeom prst="rect">
             <a:avLst/>
@@ -6096,7 +5940,7 @@
         <p:spPr>
           <a:xfrm>
             <a:off x="6486480" y="2028960"/>
-            <a:ext cx="304560" cy="304560"/>
+            <a:ext cx="304200" cy="304200"/>
           </a:xfrm>
           <a:custGeom>
             <a:avLst/>
@@ -6147,7 +5991,7 @@
         <p:spPr>
           <a:xfrm>
             <a:off x="6453360" y="2028960"/>
-            <a:ext cx="371160" cy="304560"/>
+            <a:ext cx="370800" cy="304200"/>
           </a:xfrm>
           <a:prstGeom prst="rect">
             <a:avLst/>
@@ -6199,7 +6043,7 @@
         <p:spPr>
           <a:xfrm>
             <a:off x="6905520" y="2028960"/>
-            <a:ext cx="3066840" cy="228240"/>
+            <a:ext cx="3066480" cy="227880"/>
           </a:xfrm>
           <a:prstGeom prst="rect">
             <a:avLst/>
@@ -6251,7 +6095,7 @@
         <p:spPr>
           <a:xfrm>
             <a:off x="6905520" y="2295360"/>
-            <a:ext cx="3066840" cy="228240"/>
+            <a:ext cx="3066480" cy="227880"/>
           </a:xfrm>
           <a:prstGeom prst="rect">
             <a:avLst/>
@@ -6303,7 +6147,7 @@
         <p:spPr>
           <a:xfrm>
             <a:off x="6486480" y="2638440"/>
-            <a:ext cx="304560" cy="304560"/>
+            <a:ext cx="304200" cy="304200"/>
           </a:xfrm>
           <a:custGeom>
             <a:avLst/>
@@ -6354,7 +6198,7 @@
         <p:spPr>
           <a:xfrm>
             <a:off x="6453360" y="2638440"/>
-            <a:ext cx="371160" cy="304560"/>
+            <a:ext cx="370800" cy="304200"/>
           </a:xfrm>
           <a:prstGeom prst="rect">
             <a:avLst/>
@@ -6406,7 +6250,7 @@
         <p:spPr>
           <a:xfrm>
             <a:off x="6905520" y="2638440"/>
-            <a:ext cx="3666600" cy="228240"/>
+            <a:ext cx="3666240" cy="227880"/>
           </a:xfrm>
           <a:prstGeom prst="rect">
             <a:avLst/>
@@ -6458,7 +6302,7 @@
         <p:spPr>
           <a:xfrm>
             <a:off x="6905520" y="2905200"/>
-            <a:ext cx="3666600" cy="228240"/>
+            <a:ext cx="3666240" cy="227880"/>
           </a:xfrm>
           <a:prstGeom prst="rect">
             <a:avLst/>
@@ -6510,7 +6354,7 @@
         <p:spPr>
           <a:xfrm>
             <a:off x="6486480" y="3247920"/>
-            <a:ext cx="304560" cy="304560"/>
+            <a:ext cx="304200" cy="304200"/>
           </a:xfrm>
           <a:custGeom>
             <a:avLst/>
@@ -6561,7 +6405,7 @@
         <p:spPr>
           <a:xfrm>
             <a:off x="6453360" y="3247920"/>
-            <a:ext cx="371160" cy="304560"/>
+            <a:ext cx="370800" cy="304200"/>
           </a:xfrm>
           <a:prstGeom prst="rect">
             <a:avLst/>
@@ -6613,7 +6457,7 @@
         <p:spPr>
           <a:xfrm>
             <a:off x="6905520" y="3247920"/>
-            <a:ext cx="3285720" cy="228240"/>
+            <a:ext cx="3285360" cy="227880"/>
           </a:xfrm>
           <a:prstGeom prst="rect">
             <a:avLst/>
@@ -6665,7 +6509,7 @@
         <p:spPr>
           <a:xfrm>
             <a:off x="6905520" y="3514680"/>
-            <a:ext cx="3285720" cy="228240"/>
+            <a:ext cx="3285360" cy="227880"/>
           </a:xfrm>
           <a:prstGeom prst="rect">
             <a:avLst/>
@@ -6717,7 +6561,7 @@
         <p:spPr>
           <a:xfrm>
             <a:off x="6486480" y="3857760"/>
-            <a:ext cx="304560" cy="304560"/>
+            <a:ext cx="304200" cy="304200"/>
           </a:xfrm>
           <a:custGeom>
             <a:avLst/>
@@ -6768,7 +6612,7 @@
         <p:spPr>
           <a:xfrm>
             <a:off x="6453360" y="3857760"/>
-            <a:ext cx="371160" cy="304560"/>
+            <a:ext cx="370800" cy="304200"/>
           </a:xfrm>
           <a:prstGeom prst="rect">
             <a:avLst/>
@@ -6820,7 +6664,7 @@
         <p:spPr>
           <a:xfrm>
             <a:off x="6905520" y="3857760"/>
-            <a:ext cx="4133520" cy="228240"/>
+            <a:ext cx="4133160" cy="227880"/>
           </a:xfrm>
           <a:prstGeom prst="rect">
             <a:avLst/>
@@ -6872,7 +6716,7 @@
         <p:spPr>
           <a:xfrm>
             <a:off x="6905520" y="4124160"/>
-            <a:ext cx="4133520" cy="228240"/>
+            <a:ext cx="4133160" cy="227880"/>
           </a:xfrm>
           <a:prstGeom prst="rect">
             <a:avLst/>
@@ -6924,7 +6768,7 @@
         <p:spPr>
           <a:xfrm>
             <a:off x="6267600" y="4743360"/>
-            <a:ext cx="5543280" cy="1142640"/>
+            <a:ext cx="5542920" cy="1142280"/>
           </a:xfrm>
           <a:custGeom>
             <a:avLst/>
@@ -6975,7 +6819,7 @@
         <p:spPr>
           <a:xfrm>
             <a:off x="6267600" y="4743360"/>
-            <a:ext cx="37800" cy="1142640"/>
+            <a:ext cx="37440" cy="1142280"/>
           </a:xfrm>
           <a:custGeom>
             <a:avLst/>
@@ -7026,7 +6870,7 @@
         <p:spPr>
           <a:xfrm>
             <a:off x="6477120" y="4933800"/>
-            <a:ext cx="5219280" cy="495000"/>
+            <a:ext cx="5218920" cy="494640"/>
           </a:xfrm>
           <a:prstGeom prst="rect">
             <a:avLst/>
@@ -7078,7 +6922,7 @@
         <p:spPr>
           <a:xfrm>
             <a:off x="6477120" y="5505480"/>
-            <a:ext cx="5209920" cy="190080"/>
+            <a:ext cx="5209560" cy="189720"/>
           </a:xfrm>
           <a:prstGeom prst="rect">
             <a:avLst/>
@@ -7177,7 +7021,7 @@
         <p:spPr>
           <a:xfrm>
             <a:off x="379440" y="379440"/>
-            <a:ext cx="11508480" cy="227520"/>
+            <a:ext cx="11508120" cy="227160"/>
           </a:xfrm>
           <a:prstGeom prst="rect">
             <a:avLst/>
@@ -7205,7 +7049,7 @@
               <a:buNone/>
             </a:pPr>
             <a:r>
-              <a:rPr b="1" lang="en-US" sz="1200" spc="58" strike="noStrike">
+              <a:rPr b="1" lang="en-US" sz="1200" spc="55" strike="noStrike">
                 <a:solidFill>
                   <a:srgbClr val="0984e3"/>
                 </a:solidFill>
@@ -7229,7 +7073,7 @@
         <p:spPr>
           <a:xfrm>
             <a:off x="379440" y="683280"/>
-            <a:ext cx="11660400" cy="455040"/>
+            <a:ext cx="11660040" cy="454680"/>
           </a:xfrm>
           <a:prstGeom prst="rect">
             <a:avLst/>
@@ -7281,7 +7125,7 @@
         <p:spPr>
           <a:xfrm>
             <a:off x="379440" y="1366200"/>
-            <a:ext cx="5682960" cy="303120"/>
+            <a:ext cx="5682600" cy="302760"/>
           </a:xfrm>
           <a:prstGeom prst="rect">
             <a:avLst/>
@@ -7333,7 +7177,7 @@
         <p:spPr>
           <a:xfrm>
             <a:off x="379440" y="1826280"/>
-            <a:ext cx="5096880" cy="466920"/>
+            <a:ext cx="5096520" cy="466560"/>
           </a:xfrm>
           <a:prstGeom prst="rect">
             <a:avLst/>
@@ -7385,7 +7229,7 @@
         <p:spPr>
           <a:xfrm>
             <a:off x="379440" y="2452680"/>
-            <a:ext cx="5644800" cy="739800"/>
+            <a:ext cx="5644440" cy="739440"/>
           </a:xfrm>
           <a:prstGeom prst="rect">
             <a:avLst/>
@@ -7437,7 +7281,7 @@
         <p:spPr>
           <a:xfrm>
             <a:off x="398520" y="3306600"/>
-            <a:ext cx="5550120" cy="758520"/>
+            <a:ext cx="5549760" cy="758160"/>
           </a:xfrm>
           <a:custGeom>
             <a:avLst/>
@@ -7488,7 +7332,7 @@
         <p:spPr>
           <a:xfrm>
             <a:off x="398520" y="3306600"/>
-            <a:ext cx="37440" cy="758520"/>
+            <a:ext cx="37080" cy="758160"/>
           </a:xfrm>
           <a:custGeom>
             <a:avLst/>
@@ -7539,7 +7383,7 @@
         <p:spPr>
           <a:xfrm>
             <a:off x="569160" y="3458520"/>
-            <a:ext cx="5303520" cy="455040"/>
+            <a:ext cx="5303160" cy="454680"/>
           </a:xfrm>
           <a:prstGeom prst="rect">
             <a:avLst/>
@@ -7632,7 +7476,7 @@
         <p:spPr>
           <a:xfrm>
             <a:off x="379440" y="4217400"/>
-            <a:ext cx="5682960" cy="303120"/>
+            <a:ext cx="5682600" cy="302760"/>
           </a:xfrm>
           <a:prstGeom prst="rect">
             <a:avLst/>
@@ -7684,7 +7528,7 @@
         <p:spPr>
           <a:xfrm>
             <a:off x="379440" y="4635000"/>
-            <a:ext cx="5644800" cy="739800"/>
+            <a:ext cx="5644440" cy="739440"/>
           </a:xfrm>
           <a:prstGeom prst="rect">
             <a:avLst/>
@@ -7736,7 +7580,7 @@
         <p:spPr>
           <a:xfrm>
             <a:off x="6249240" y="1366200"/>
-            <a:ext cx="5682960" cy="303120"/>
+            <a:ext cx="5682600" cy="302760"/>
           </a:xfrm>
           <a:prstGeom prst="rect">
             <a:avLst/>
@@ -7788,7 +7632,7 @@
         <p:spPr>
           <a:xfrm>
             <a:off x="6249240" y="1826280"/>
-            <a:ext cx="5250240" cy="466920"/>
+            <a:ext cx="5249880" cy="466560"/>
           </a:xfrm>
           <a:prstGeom prst="rect">
             <a:avLst/>
@@ -7840,7 +7684,7 @@
         <p:spPr>
           <a:xfrm>
             <a:off x="6249240" y="2452680"/>
-            <a:ext cx="5644800" cy="739800"/>
+            <a:ext cx="5644440" cy="739440"/>
           </a:xfrm>
           <a:prstGeom prst="rect">
             <a:avLst/>
@@ -7892,7 +7736,7 @@
         <p:spPr>
           <a:xfrm>
             <a:off x="6249240" y="3344400"/>
-            <a:ext cx="5569200" cy="2181960"/>
+            <a:ext cx="5568840" cy="2181600"/>
           </a:xfrm>
           <a:custGeom>
             <a:avLst/>
@@ -7943,7 +7787,7 @@
         <p:spPr>
           <a:xfrm>
             <a:off x="6438960" y="3534120"/>
-            <a:ext cx="5284440" cy="265320"/>
+            <a:ext cx="5284080" cy="264960"/>
           </a:xfrm>
           <a:prstGeom prst="rect">
             <a:avLst/>
@@ -7995,7 +7839,7 @@
         <p:spPr>
           <a:xfrm>
             <a:off x="6438960" y="3913920"/>
-            <a:ext cx="5265360" cy="246240"/>
+            <a:ext cx="5265000" cy="245880"/>
           </a:xfrm>
           <a:prstGeom prst="rect">
             <a:avLst/>
@@ -8047,7 +7891,7 @@
         <p:spPr>
           <a:xfrm>
             <a:off x="6438960" y="4274280"/>
-            <a:ext cx="5189400" cy="455040"/>
+            <a:ext cx="5189040" cy="454680"/>
           </a:xfrm>
           <a:custGeom>
             <a:avLst/>
@@ -8098,7 +7942,7 @@
         <p:spPr>
           <a:xfrm>
             <a:off x="6438960" y="4274280"/>
-            <a:ext cx="5265360" cy="455040"/>
+            <a:ext cx="5265000" cy="454680"/>
           </a:xfrm>
           <a:prstGeom prst="rect">
             <a:avLst/>
@@ -8150,7 +7994,7 @@
         <p:spPr>
           <a:xfrm>
             <a:off x="6438960" y="4843440"/>
-            <a:ext cx="5265360" cy="492840"/>
+            <a:ext cx="5265000" cy="492480"/>
           </a:xfrm>
           <a:prstGeom prst="rect">
             <a:avLst/>
@@ -8202,7 +8046,7 @@
         <p:spPr>
           <a:xfrm>
             <a:off x="6268320" y="5678640"/>
-            <a:ext cx="5550120" cy="796680"/>
+            <a:ext cx="5549760" cy="796320"/>
           </a:xfrm>
           <a:custGeom>
             <a:avLst/>
@@ -8253,7 +8097,7 @@
         <p:spPr>
           <a:xfrm>
             <a:off x="6268320" y="5678640"/>
-            <a:ext cx="37440" cy="796680"/>
+            <a:ext cx="37080" cy="796320"/>
           </a:xfrm>
           <a:custGeom>
             <a:avLst/>
@@ -8304,7 +8148,7 @@
         <p:spPr>
           <a:xfrm>
             <a:off x="6438960" y="5830200"/>
-            <a:ext cx="5303520" cy="492840"/>
+            <a:ext cx="5303160" cy="492480"/>
           </a:xfrm>
           <a:prstGeom prst="rect">
             <a:avLst/>
@@ -8403,7 +8247,7 @@
         <p:spPr>
           <a:xfrm>
             <a:off x="609480" y="2066760"/>
-            <a:ext cx="12191760" cy="1218960"/>
+            <a:ext cx="12191400" cy="1218600"/>
           </a:xfrm>
           <a:prstGeom prst="rect">
             <a:avLst/>
@@ -8457,7 +8301,7 @@
         <p:spPr>
           <a:xfrm>
             <a:off x="609480" y="3438360"/>
-            <a:ext cx="11867760" cy="571320"/>
+            <a:ext cx="11867400" cy="570960"/>
           </a:xfrm>
           <a:prstGeom prst="rect">
             <a:avLst/>
@@ -8509,7 +8353,7 @@
         <p:spPr>
           <a:xfrm>
             <a:off x="609480" y="4238640"/>
-            <a:ext cx="1218960" cy="18720"/>
+            <a:ext cx="1218600" cy="18360"/>
           </a:xfrm>
           <a:custGeom>
             <a:avLst/>
@@ -8560,7 +8404,7 @@
         <p:spPr>
           <a:xfrm>
             <a:off x="609480" y="4486320"/>
-            <a:ext cx="11696400" cy="304560"/>
+            <a:ext cx="11696040" cy="304200"/>
           </a:xfrm>
           <a:prstGeom prst="rect">
             <a:avLst/>
@@ -8649,7 +8493,7 @@
         <p:spPr>
           <a:xfrm>
             <a:off x="356400" y="356400"/>
-            <a:ext cx="11550600" cy="213480"/>
+            <a:ext cx="11550240" cy="213120"/>
           </a:xfrm>
           <a:prstGeom prst="rect">
             <a:avLst/>
@@ -8677,7 +8521,7 @@
               <a:buNone/>
             </a:pPr>
             <a:r>
-              <a:rPr b="1" lang="en-US" sz="1120" spc="55" strike="noStrike">
+              <a:rPr b="1" lang="en-US" sz="1120" spc="52" strike="noStrike">
                 <a:solidFill>
                   <a:srgbClr val="0984e3"/>
                 </a:solidFill>
@@ -8701,7 +8545,7 @@
         <p:spPr>
           <a:xfrm>
             <a:off x="356400" y="641160"/>
-            <a:ext cx="11692800" cy="426960"/>
+            <a:ext cx="11692440" cy="426600"/>
           </a:xfrm>
           <a:prstGeom prst="rect">
             <a:avLst/>
@@ -8753,7 +8597,7 @@
         <p:spPr>
           <a:xfrm>
             <a:off x="360720" y="1287000"/>
-            <a:ext cx="3695400" cy="2626920"/>
+            <a:ext cx="3695040" cy="2626560"/>
           </a:xfrm>
           <a:custGeom>
             <a:avLst/>
@@ -8807,7 +8651,7 @@
         <p:spPr>
           <a:xfrm>
             <a:off x="543240" y="1469520"/>
-            <a:ext cx="426960" cy="426960"/>
+            <a:ext cx="426600" cy="426600"/>
           </a:xfrm>
           <a:custGeom>
             <a:avLst/>
@@ -8858,7 +8702,7 @@
         <p:spPr>
           <a:xfrm>
             <a:off x="656640" y="1594080"/>
-            <a:ext cx="200160" cy="177840"/>
+            <a:ext cx="199800" cy="177480"/>
           </a:xfrm>
           <a:custGeom>
             <a:avLst/>
@@ -9055,7 +8899,7 @@
         <p:spPr>
           <a:xfrm>
             <a:off x="1077480" y="1558440"/>
-            <a:ext cx="2341800" cy="249120"/>
+            <a:ext cx="2341440" cy="248760"/>
           </a:xfrm>
           <a:prstGeom prst="rect">
             <a:avLst/>
@@ -9107,7 +8951,7 @@
         <p:spPr>
           <a:xfrm>
             <a:off x="543240" y="2003760"/>
-            <a:ext cx="3401640" cy="694440"/>
+            <a:ext cx="3401280" cy="694080"/>
           </a:xfrm>
           <a:prstGeom prst="rect">
             <a:avLst/>
@@ -9169,7 +9013,7 @@
         <p:spPr>
           <a:xfrm>
             <a:off x="543240" y="2805480"/>
-            <a:ext cx="3401640" cy="925920"/>
+            <a:ext cx="3401280" cy="925560"/>
           </a:xfrm>
           <a:prstGeom prst="rect">
             <a:avLst/>
@@ -9231,7 +9075,7 @@
         <p:spPr>
           <a:xfrm>
             <a:off x="4246200" y="1287000"/>
-            <a:ext cx="3695400" cy="2626920"/>
+            <a:ext cx="3695040" cy="2626560"/>
           </a:xfrm>
           <a:custGeom>
             <a:avLst/>
@@ -9285,7 +9129,7 @@
         <p:spPr>
           <a:xfrm>
             <a:off x="4428720" y="1469520"/>
-            <a:ext cx="426960" cy="426960"/>
+            <a:ext cx="426600" cy="426600"/>
           </a:xfrm>
           <a:custGeom>
             <a:avLst/>
@@ -9336,7 +9180,7 @@
         <p:spPr>
           <a:xfrm>
             <a:off x="4542120" y="1594080"/>
-            <a:ext cx="200160" cy="177840"/>
+            <a:ext cx="199800" cy="177480"/>
           </a:xfrm>
           <a:custGeom>
             <a:avLst/>
@@ -9488,7 +9332,7 @@
         <p:spPr>
           <a:xfrm>
             <a:off x="4962960" y="1558440"/>
-            <a:ext cx="2431080" cy="249120"/>
+            <a:ext cx="2430720" cy="248760"/>
           </a:xfrm>
           <a:prstGeom prst="rect">
             <a:avLst/>
@@ -9540,7 +9384,7 @@
         <p:spPr>
           <a:xfrm>
             <a:off x="4428720" y="2003760"/>
-            <a:ext cx="3401640" cy="694440"/>
+            <a:ext cx="3401280" cy="694080"/>
           </a:xfrm>
           <a:prstGeom prst="rect">
             <a:avLst/>
@@ -9602,7 +9446,7 @@
         <p:spPr>
           <a:xfrm>
             <a:off x="4428720" y="2805480"/>
-            <a:ext cx="3401640" cy="694440"/>
+            <a:ext cx="3401280" cy="694080"/>
           </a:xfrm>
           <a:prstGeom prst="rect">
             <a:avLst/>
@@ -9664,7 +9508,7 @@
         <p:spPr>
           <a:xfrm>
             <a:off x="8131680" y="1287000"/>
-            <a:ext cx="3695400" cy="2626920"/>
+            <a:ext cx="3695040" cy="2626560"/>
           </a:xfrm>
           <a:custGeom>
             <a:avLst/>
@@ -9718,7 +9562,7 @@
         <p:spPr>
           <a:xfrm>
             <a:off x="8314200" y="1469520"/>
-            <a:ext cx="426960" cy="426960"/>
+            <a:ext cx="426600" cy="426600"/>
           </a:xfrm>
           <a:custGeom>
             <a:avLst/>
@@ -9769,7 +9613,7 @@
         <p:spPr>
           <a:xfrm>
             <a:off x="8439120" y="1594080"/>
-            <a:ext cx="177840" cy="177840"/>
+            <a:ext cx="177480" cy="177480"/>
           </a:xfrm>
           <a:custGeom>
             <a:avLst/>
@@ -9869,7 +9713,7 @@
         <p:spPr>
           <a:xfrm>
             <a:off x="8848800" y="1558440"/>
-            <a:ext cx="2039040" cy="249120"/>
+            <a:ext cx="2038680" cy="248760"/>
           </a:xfrm>
           <a:prstGeom prst="rect">
             <a:avLst/>
@@ -9921,7 +9765,7 @@
         <p:spPr>
           <a:xfrm>
             <a:off x="8314200" y="2003760"/>
-            <a:ext cx="3401640" cy="694440"/>
+            <a:ext cx="3401280" cy="694080"/>
           </a:xfrm>
           <a:prstGeom prst="rect">
             <a:avLst/>
@@ -9983,7 +9827,7 @@
         <p:spPr>
           <a:xfrm>
             <a:off x="8314200" y="2805480"/>
-            <a:ext cx="3401640" cy="694440"/>
+            <a:ext cx="3401280" cy="694080"/>
           </a:xfrm>
           <a:prstGeom prst="rect">
             <a:avLst/>
@@ -10045,7 +9889,7 @@
         <p:spPr>
           <a:xfrm>
             <a:off x="360720" y="4101120"/>
-            <a:ext cx="3695400" cy="2395440"/>
+            <a:ext cx="3695040" cy="2395080"/>
           </a:xfrm>
           <a:custGeom>
             <a:avLst/>
@@ -10099,7 +9943,7 @@
         <p:spPr>
           <a:xfrm>
             <a:off x="543240" y="4283640"/>
-            <a:ext cx="426960" cy="426960"/>
+            <a:ext cx="426600" cy="426600"/>
           </a:xfrm>
           <a:custGeom>
             <a:avLst/>
@@ -10150,7 +9994,7 @@
         <p:spPr>
           <a:xfrm>
             <a:off x="645840" y="4408200"/>
-            <a:ext cx="222120" cy="177840"/>
+            <a:ext cx="221760" cy="177480"/>
           </a:xfrm>
           <a:custGeom>
             <a:avLst/>
@@ -10382,7 +10226,7 @@
         <p:spPr>
           <a:xfrm>
             <a:off x="1077480" y="4372560"/>
-            <a:ext cx="1932120" cy="249120"/>
+            <a:ext cx="1931760" cy="248760"/>
           </a:xfrm>
           <a:prstGeom prst="rect">
             <a:avLst/>
@@ -10434,7 +10278,7 @@
         <p:spPr>
           <a:xfrm>
             <a:off x="543240" y="4817880"/>
-            <a:ext cx="3401640" cy="694440"/>
+            <a:ext cx="3401280" cy="694080"/>
           </a:xfrm>
           <a:prstGeom prst="rect">
             <a:avLst/>
@@ -10496,7 +10340,7 @@
         <p:spPr>
           <a:xfrm>
             <a:off x="543240" y="5619600"/>
-            <a:ext cx="3401640" cy="694440"/>
+            <a:ext cx="3401280" cy="694080"/>
           </a:xfrm>
           <a:prstGeom prst="rect">
             <a:avLst/>
@@ -10558,7 +10402,7 @@
         <p:spPr>
           <a:xfrm>
             <a:off x="4246200" y="4101120"/>
-            <a:ext cx="7587360" cy="2395440"/>
+            <a:ext cx="7587000" cy="2395080"/>
           </a:xfrm>
           <a:custGeom>
             <a:avLst/>
@@ -10612,7 +10456,7 @@
         <p:spPr>
           <a:xfrm>
             <a:off x="4428720" y="4283640"/>
-            <a:ext cx="426960" cy="426960"/>
+            <a:ext cx="426600" cy="426600"/>
           </a:xfrm>
           <a:custGeom>
             <a:avLst/>
@@ -10663,7 +10507,7 @@
         <p:spPr>
           <a:xfrm>
             <a:off x="4553280" y="4408200"/>
-            <a:ext cx="177840" cy="177840"/>
+            <a:ext cx="177480" cy="177480"/>
           </a:xfrm>
           <a:custGeom>
             <a:avLst/>
@@ -10796,7 +10640,7 @@
         <p:spPr>
           <a:xfrm>
             <a:off x="4962960" y="4372560"/>
-            <a:ext cx="2048040" cy="249120"/>
+            <a:ext cx="2047680" cy="248760"/>
           </a:xfrm>
           <a:prstGeom prst="rect">
             <a:avLst/>
@@ -10848,7 +10692,7 @@
         <p:spPr>
           <a:xfrm>
             <a:off x="4428720" y="4817880"/>
-            <a:ext cx="3606480" cy="694440"/>
+            <a:ext cx="3606120" cy="694080"/>
           </a:xfrm>
           <a:prstGeom prst="rect">
             <a:avLst/>
@@ -10910,7 +10754,7 @@
         <p:spPr>
           <a:xfrm>
             <a:off x="4428720" y="5583960"/>
-            <a:ext cx="3606480" cy="462600"/>
+            <a:ext cx="3606120" cy="462240"/>
           </a:xfrm>
           <a:prstGeom prst="rect">
             <a:avLst/>
@@ -10962,7 +10806,7 @@
         <p:spPr>
           <a:xfrm>
             <a:off x="8109360" y="4817880"/>
-            <a:ext cx="3606480" cy="694440"/>
+            <a:ext cx="3606120" cy="694080"/>
           </a:xfrm>
           <a:prstGeom prst="rect">
             <a:avLst/>
@@ -11024,7 +10868,7 @@
         <p:spPr>
           <a:xfrm>
             <a:off x="8109360" y="5583960"/>
-            <a:ext cx="3606480" cy="462600"/>
+            <a:ext cx="3606120" cy="462240"/>
           </a:xfrm>
           <a:prstGeom prst="rect">
             <a:avLst/>
@@ -11113,7 +10957,7 @@
         <p:spPr>
           <a:xfrm>
             <a:off x="609480" y="2066760"/>
-            <a:ext cx="12191760" cy="1218960"/>
+            <a:ext cx="12191400" cy="1218600"/>
           </a:xfrm>
           <a:prstGeom prst="rect">
             <a:avLst/>
@@ -11167,7 +11011,7 @@
         <p:spPr>
           <a:xfrm>
             <a:off x="609480" y="3438360"/>
-            <a:ext cx="11867760" cy="571320"/>
+            <a:ext cx="11867400" cy="570960"/>
           </a:xfrm>
           <a:prstGeom prst="rect">
             <a:avLst/>
@@ -11219,7 +11063,7 @@
         <p:spPr>
           <a:xfrm>
             <a:off x="609480" y="4238640"/>
-            <a:ext cx="1218960" cy="18720"/>
+            <a:ext cx="1218600" cy="18360"/>
           </a:xfrm>
           <a:custGeom>
             <a:avLst/>
@@ -11270,7 +11114,7 @@
         <p:spPr>
           <a:xfrm>
             <a:off x="609480" y="4486320"/>
-            <a:ext cx="11696400" cy="304560"/>
+            <a:ext cx="11696040" cy="304200"/>
           </a:xfrm>
           <a:prstGeom prst="rect">
             <a:avLst/>
@@ -11359,7 +11203,7 @@
         <p:spPr>
           <a:xfrm>
             <a:off x="380880" y="380880"/>
-            <a:ext cx="11505960" cy="228240"/>
+            <a:ext cx="11505600" cy="227880"/>
           </a:xfrm>
           <a:prstGeom prst="rect">
             <a:avLst/>
@@ -11387,7 +11231,7 @@
               <a:buNone/>
             </a:pPr>
             <a:r>
-              <a:rPr b="1" lang="en-US" sz="1200" spc="58" strike="noStrike">
+              <a:rPr b="1" lang="en-US" sz="1200" spc="55" strike="noStrike">
                 <a:solidFill>
                   <a:srgbClr val="0984e3"/>
                 </a:solidFill>
@@ -11411,7 +11255,7 @@
         <p:spPr>
           <a:xfrm>
             <a:off x="380880" y="685800"/>
-            <a:ext cx="11658240" cy="456840"/>
+            <a:ext cx="11657880" cy="456480"/>
           </a:xfrm>
           <a:prstGeom prst="rect">
             <a:avLst/>
@@ -11463,7 +11307,7 @@
         <p:spPr>
           <a:xfrm>
             <a:off x="380880" y="1295280"/>
-            <a:ext cx="5657400" cy="1238040"/>
+            <a:ext cx="5657040" cy="1237680"/>
           </a:xfrm>
           <a:prstGeom prst="rect">
             <a:avLst/>
@@ -11525,7 +11369,7 @@
         <p:spPr>
           <a:xfrm>
             <a:off x="380880" y="2647800"/>
-            <a:ext cx="5638320" cy="742680"/>
+            <a:ext cx="5637960" cy="742320"/>
           </a:xfrm>
           <a:prstGeom prst="rect">
             <a:avLst/>
@@ -11577,7 +11421,7 @@
         <p:spPr>
           <a:xfrm>
             <a:off x="385920" y="3548160"/>
-            <a:ext cx="5552640" cy="2028600"/>
+            <a:ext cx="5552280" cy="2028240"/>
           </a:xfrm>
           <a:custGeom>
             <a:avLst/>
@@ -11631,7 +11475,7 @@
         <p:spPr>
           <a:xfrm>
             <a:off x="495360" y="3705120"/>
-            <a:ext cx="5333760" cy="266400"/>
+            <a:ext cx="5333400" cy="266040"/>
           </a:xfrm>
           <a:prstGeom prst="rect">
             <a:avLst/>
@@ -11682,7 +11526,7 @@
         </p:nvGraphicFramePr>
         <p:xfrm>
           <a:off x="542880" y="4086360"/>
-          <a:ext cx="5238360" cy="1066320"/>
+          <a:ext cx="5238000" cy="1065960"/>
         </p:xfrm>
         <a:graphic>
           <a:graphicData uri="http://schemas.openxmlformats.org/drawingml/2006/table">
@@ -11723,7 +11567,7 @@
                 </a:tc>
                 <a:tc>
                   <a:txBody>
-                    <a:bodyPr lIns="75960" rIns="75960" tIns="75960" bIns="75960" anchor="ctr">
+                    <a:bodyPr lIns="75960" rIns="75960" anchor="ctr">
                       <a:noAutofit/>
                     </a:bodyPr>
                     <a:p>
@@ -11776,7 +11620,7 @@
                 </a:tc>
                 <a:tc>
                   <a:txBody>
-                    <a:bodyPr lIns="75960" rIns="75960" tIns="75960" bIns="75960" anchor="ctr">
+                    <a:bodyPr lIns="75960" rIns="75960" anchor="ctr">
                       <a:noAutofit/>
                     </a:bodyPr>
                     <a:p>
@@ -11831,7 +11675,7 @@
               <a:tr h="355320">
                 <a:tc>
                   <a:txBody>
-                    <a:bodyPr lIns="75960" rIns="75960" tIns="75960" bIns="75960" anchor="ctr">
+                    <a:bodyPr lIns="75960" rIns="75960" anchor="ctr">
                       <a:noAutofit/>
                     </a:bodyPr>
                     <a:p>
@@ -11884,7 +11728,7 @@
                 </a:tc>
                 <a:tc>
                   <a:txBody>
-                    <a:bodyPr lIns="75960" rIns="75960" tIns="75960" bIns="75960" anchor="ctr">
+                    <a:bodyPr lIns="75960" rIns="75960" anchor="ctr">
                       <a:noAutofit/>
                     </a:bodyPr>
                     <a:p>
@@ -11935,7 +11779,7 @@
                 </a:tc>
                 <a:tc>
                   <a:txBody>
-                    <a:bodyPr lIns="75960" rIns="75960" tIns="75960" bIns="75960" anchor="ctr">
+                    <a:bodyPr lIns="75960" rIns="75960" anchor="ctr">
                       <a:noAutofit/>
                     </a:bodyPr>
                     <a:p>
@@ -11988,7 +11832,7 @@
               <a:tr h="355680">
                 <a:tc>
                   <a:txBody>
-                    <a:bodyPr lIns="75960" rIns="75960" tIns="75960" bIns="75960" anchor="ctr">
+                    <a:bodyPr lIns="75960" rIns="75960" anchor="ctr">
                       <a:noAutofit/>
                     </a:bodyPr>
                     <a:p>
@@ -12041,7 +11885,7 @@
                 </a:tc>
                 <a:tc>
                   <a:txBody>
-                    <a:bodyPr lIns="75960" rIns="75960" tIns="75960" bIns="75960" anchor="ctr">
+                    <a:bodyPr lIns="75960" rIns="75960" anchor="ctr">
                       <a:noAutofit/>
                     </a:bodyPr>
                     <a:p>
@@ -12092,7 +11936,7 @@
                 </a:tc>
                 <a:tc>
                   <a:txBody>
-                    <a:bodyPr lIns="75960" rIns="75960" tIns="75960" bIns="75960" anchor="ctr">
+                    <a:bodyPr lIns="75960" rIns="75960" anchor="ctr">
                       <a:noAutofit/>
                     </a:bodyPr>
                     <a:p>
@@ -12157,7 +12001,7 @@
         <p:spPr>
           <a:xfrm>
             <a:off x="509760" y="5229360"/>
-            <a:ext cx="5304960" cy="190080"/>
+            <a:ext cx="5304600" cy="189720"/>
           </a:xfrm>
           <a:prstGeom prst="rect">
             <a:avLst/>
@@ -12209,7 +12053,7 @@
         <p:spPr>
           <a:xfrm>
             <a:off x="6253200" y="1300320"/>
-            <a:ext cx="5552640" cy="1609200"/>
+            <a:ext cx="5552280" cy="1608840"/>
           </a:xfrm>
           <a:custGeom>
             <a:avLst/>
@@ -12263,7 +12107,7 @@
         <p:spPr>
           <a:xfrm>
             <a:off x="6448320" y="1495440"/>
-            <a:ext cx="5257440" cy="266400"/>
+            <a:ext cx="5257080" cy="266040"/>
           </a:xfrm>
           <a:prstGeom prst="rect">
             <a:avLst/>
@@ -12315,7 +12159,7 @@
         <p:spPr>
           <a:xfrm>
             <a:off x="6448320" y="1876320"/>
-            <a:ext cx="5238360" cy="228240"/>
+            <a:ext cx="5238000" cy="227880"/>
           </a:xfrm>
           <a:prstGeom prst="rect">
             <a:avLst/>
@@ -12377,7 +12221,7 @@
         <p:spPr>
           <a:xfrm>
             <a:off x="6448320" y="2181240"/>
-            <a:ext cx="5238360" cy="228240"/>
+            <a:ext cx="5238000" cy="227880"/>
           </a:xfrm>
           <a:prstGeom prst="rect">
             <a:avLst/>
@@ -12439,7 +12283,7 @@
         <p:spPr>
           <a:xfrm>
             <a:off x="6448320" y="2486160"/>
-            <a:ext cx="5238360" cy="228240"/>
+            <a:ext cx="5238000" cy="227880"/>
           </a:xfrm>
           <a:prstGeom prst="rect">
             <a:avLst/>
@@ -12491,7 +12335,7 @@
         <p:spPr>
           <a:xfrm>
             <a:off x="6267600" y="3067200"/>
-            <a:ext cx="5543280" cy="2133360"/>
+            <a:ext cx="5542920" cy="2133000"/>
           </a:xfrm>
           <a:custGeom>
             <a:avLst/>
@@ -12542,7 +12386,7 @@
         <p:spPr>
           <a:xfrm>
             <a:off x="6267600" y="3067200"/>
-            <a:ext cx="37800" cy="2133360"/>
+            <a:ext cx="37440" cy="2133000"/>
           </a:xfrm>
           <a:custGeom>
             <a:avLst/>
@@ -12593,7 +12437,7 @@
         <p:spPr>
           <a:xfrm>
             <a:off x="6477120" y="3257640"/>
-            <a:ext cx="5238360" cy="266400"/>
+            <a:ext cx="5238000" cy="266040"/>
           </a:xfrm>
           <a:prstGeom prst="rect">
             <a:avLst/>
@@ -12645,7 +12489,7 @@
         <p:spPr>
           <a:xfrm>
             <a:off x="6496200" y="3672000"/>
-            <a:ext cx="151920" cy="151920"/>
+            <a:ext cx="151560" cy="151560"/>
           </a:xfrm>
           <a:custGeom>
             <a:avLst/>
@@ -12769,7 +12613,7 @@
         <p:spPr>
           <a:xfrm>
             <a:off x="6724800" y="3638520"/>
-            <a:ext cx="4971600" cy="456840"/>
+            <a:ext cx="4971240" cy="456480"/>
           </a:xfrm>
           <a:prstGeom prst="rect">
             <a:avLst/>
@@ -12831,7 +12675,7 @@
         <p:spPr>
           <a:xfrm>
             <a:off x="6496200" y="4205160"/>
-            <a:ext cx="151920" cy="151920"/>
+            <a:ext cx="151560" cy="151560"/>
           </a:xfrm>
           <a:custGeom>
             <a:avLst/>
@@ -12954,7 +12798,7 @@
         <p:spPr>
           <a:xfrm>
             <a:off x="6724800" y="4172040"/>
-            <a:ext cx="4971600" cy="228240"/>
+            <a:ext cx="4971240" cy="227880"/>
           </a:xfrm>
           <a:prstGeom prst="rect">
             <a:avLst/>
@@ -13016,7 +12860,7 @@
         <p:spPr>
           <a:xfrm>
             <a:off x="6515280" y="4510080"/>
-            <a:ext cx="114120" cy="151920"/>
+            <a:ext cx="113760" cy="151560"/>
           </a:xfrm>
           <a:custGeom>
             <a:avLst/>
@@ -13257,7 +13101,7 @@
         <p:spPr>
           <a:xfrm>
             <a:off x="6724800" y="4476600"/>
-            <a:ext cx="4971600" cy="228240"/>
+            <a:ext cx="4971240" cy="227880"/>
           </a:xfrm>
           <a:prstGeom prst="rect">
             <a:avLst/>
@@ -13319,7 +13163,7 @@
         <p:spPr>
           <a:xfrm>
             <a:off x="6486480" y="4815000"/>
-            <a:ext cx="171000" cy="151920"/>
+            <a:ext cx="170640" cy="151560"/>
           </a:xfrm>
           <a:custGeom>
             <a:avLst/>
@@ -13555,7 +13399,7 @@
         <p:spPr>
           <a:xfrm>
             <a:off x="6724800" y="4781520"/>
-            <a:ext cx="4971600" cy="228240"/>
+            <a:ext cx="4971240" cy="227880"/>
           </a:xfrm>
           <a:prstGeom prst="rect">
             <a:avLst/>
@@ -13654,7 +13498,7 @@
         <p:spPr>
           <a:xfrm>
             <a:off x="358560" y="358560"/>
-            <a:ext cx="11546280" cy="214920"/>
+            <a:ext cx="11545920" cy="214560"/>
           </a:xfrm>
           <a:prstGeom prst="rect">
             <a:avLst/>
@@ -13682,7 +13526,7 @@
               <a:buNone/>
             </a:pPr>
             <a:r>
-              <a:rPr b="1" lang="en-US" sz="1130" spc="55" strike="noStrike">
+              <a:rPr b="1" lang="en-US" sz="1130" spc="52" strike="noStrike">
                 <a:solidFill>
                   <a:srgbClr val="0984e3"/>
                 </a:solidFill>
@@ -13706,7 +13550,7 @@
         <p:spPr>
           <a:xfrm>
             <a:off x="358560" y="645480"/>
-            <a:ext cx="11689560" cy="429840"/>
+            <a:ext cx="11689200" cy="429480"/>
           </a:xfrm>
           <a:prstGeom prst="rect">
             <a:avLst/>
@@ -13758,7 +13602,7 @@
         <p:spPr>
           <a:xfrm>
             <a:off x="358560" y="1290960"/>
-            <a:ext cx="5701320" cy="286560"/>
+            <a:ext cx="5700960" cy="286200"/>
           </a:xfrm>
           <a:prstGeom prst="rect">
             <a:avLst/>
@@ -13810,7 +13654,7 @@
         <p:spPr>
           <a:xfrm>
             <a:off x="358560" y="1725840"/>
-            <a:ext cx="5474160" cy="441000"/>
+            <a:ext cx="5473800" cy="440640"/>
           </a:xfrm>
           <a:prstGeom prst="rect">
             <a:avLst/>
@@ -13862,7 +13706,7 @@
         <p:spPr>
           <a:xfrm>
             <a:off x="358560" y="2317320"/>
-            <a:ext cx="5665320" cy="465840"/>
+            <a:ext cx="5664960" cy="465480"/>
           </a:xfrm>
           <a:prstGeom prst="rect">
             <a:avLst/>
@@ -13914,7 +13758,7 @@
         <p:spPr>
           <a:xfrm>
             <a:off x="363240" y="2931480"/>
-            <a:ext cx="5584680" cy="1873440"/>
+            <a:ext cx="5584320" cy="1873080"/>
           </a:xfrm>
           <a:custGeom>
             <a:avLst/>
@@ -13968,7 +13812,7 @@
         <p:spPr>
           <a:xfrm>
             <a:off x="470520" y="3079440"/>
-            <a:ext cx="5369400" cy="250560"/>
+            <a:ext cx="5369040" cy="250200"/>
           </a:xfrm>
           <a:prstGeom prst="rect">
             <a:avLst/>
@@ -14019,7 +13863,7 @@
         </p:nvGraphicFramePr>
         <p:xfrm>
           <a:off x="510840" y="3402000"/>
-          <a:ext cx="5288760" cy="1003680"/>
+          <a:ext cx="5288400" cy="1003320"/>
         </p:xfrm>
         <a:graphic>
           <a:graphicData uri="http://schemas.openxmlformats.org/drawingml/2006/table">
@@ -14060,7 +13904,7 @@
                 </a:tc>
                 <a:tc>
                   <a:txBody>
-                    <a:bodyPr lIns="71640" rIns="71640" tIns="71640" bIns="71640" anchor="ctr">
+                    <a:bodyPr lIns="71640" rIns="71640" anchor="ctr">
                       <a:noAutofit/>
                     </a:bodyPr>
                     <a:p>
@@ -14113,7 +13957,7 @@
                 </a:tc>
                 <a:tc>
                   <a:txBody>
-                    <a:bodyPr lIns="71640" rIns="71640" tIns="71640" bIns="71640" anchor="ctr">
+                    <a:bodyPr lIns="71640" rIns="71640" anchor="ctr">
                       <a:noAutofit/>
                     </a:bodyPr>
                     <a:p>
@@ -14168,7 +14012,7 @@
               <a:tr h="334440">
                 <a:tc>
                   <a:txBody>
-                    <a:bodyPr lIns="71640" rIns="71640" tIns="71640" bIns="71640" anchor="ctr">
+                    <a:bodyPr lIns="71640" rIns="71640" anchor="ctr">
                       <a:noAutofit/>
                     </a:bodyPr>
                     <a:p>
@@ -14221,7 +14065,7 @@
                 </a:tc>
                 <a:tc>
                   <a:txBody>
-                    <a:bodyPr lIns="71640" rIns="71640" tIns="71640" bIns="71640" anchor="ctr">
+                    <a:bodyPr lIns="71640" rIns="71640" anchor="ctr">
                       <a:noAutofit/>
                     </a:bodyPr>
                     <a:p>
@@ -14274,7 +14118,7 @@
                 </a:tc>
                 <a:tc>
                   <a:txBody>
-                    <a:bodyPr lIns="71640" rIns="71640" tIns="71640" bIns="71640" anchor="ctr">
+                    <a:bodyPr lIns="71640" rIns="71640" anchor="ctr">
                       <a:noAutofit/>
                     </a:bodyPr>
                     <a:p>
@@ -14327,7 +14171,7 @@
               <a:tr h="334800">
                 <a:tc>
                   <a:txBody>
-                    <a:bodyPr lIns="71640" rIns="71640" tIns="71640" bIns="71640" anchor="ctr">
+                    <a:bodyPr lIns="71640" rIns="71640" anchor="ctr">
                       <a:noAutofit/>
                     </a:bodyPr>
                     <a:p>
@@ -14380,7 +14224,7 @@
                 </a:tc>
                 <a:tc>
                   <a:txBody>
-                    <a:bodyPr lIns="71640" rIns="71640" tIns="71640" bIns="71640" anchor="ctr">
+                    <a:bodyPr lIns="71640" rIns="71640" anchor="ctr">
                       <a:noAutofit/>
                     </a:bodyPr>
                     <a:p>
@@ -14431,7 +14275,7 @@
                 </a:tc>
                 <a:tc>
                   <a:txBody>
-                    <a:bodyPr lIns="71640" rIns="71640" tIns="71640" bIns="71640" anchor="ctr">
+                    <a:bodyPr lIns="71640" rIns="71640" anchor="ctr">
                       <a:noAutofit/>
                     </a:bodyPr>
                     <a:p>
@@ -14496,7 +14340,7 @@
         <p:spPr>
           <a:xfrm>
             <a:off x="479520" y="4478040"/>
-            <a:ext cx="5351400" cy="178920"/>
+            <a:ext cx="5351040" cy="178560"/>
           </a:xfrm>
           <a:prstGeom prst="rect">
             <a:avLst/>
@@ -14548,7 +14392,7 @@
         <p:spPr>
           <a:xfrm>
             <a:off x="376560" y="4952880"/>
-            <a:ext cx="5575680" cy="752760"/>
+            <a:ext cx="5575320" cy="752400"/>
           </a:xfrm>
           <a:custGeom>
             <a:avLst/>
@@ -14599,7 +14443,7 @@
         <p:spPr>
           <a:xfrm>
             <a:off x="376560" y="4952880"/>
-            <a:ext cx="35640" cy="752760"/>
+            <a:ext cx="35280" cy="752400"/>
           </a:xfrm>
           <a:custGeom>
             <a:avLst/>
@@ -14650,7 +14494,7 @@
         <p:spPr>
           <a:xfrm>
             <a:off x="537840" y="5096520"/>
-            <a:ext cx="5342760" cy="465840"/>
+            <a:ext cx="5342400" cy="465480"/>
           </a:xfrm>
           <a:prstGeom prst="rect">
             <a:avLst/>
@@ -14712,7 +14556,7 @@
         <p:spPr>
           <a:xfrm>
             <a:off x="6239520" y="1290960"/>
-            <a:ext cx="5701320" cy="286560"/>
+            <a:ext cx="5700960" cy="286200"/>
           </a:xfrm>
           <a:prstGeom prst="rect">
             <a:avLst/>
@@ -14764,7 +14608,7 @@
         <p:spPr>
           <a:xfrm>
             <a:off x="6239520" y="1685520"/>
-            <a:ext cx="5674320" cy="528480"/>
+            <a:ext cx="5673960" cy="528120"/>
           </a:xfrm>
           <a:prstGeom prst="rect">
             <a:avLst/>
@@ -14826,7 +14670,7 @@
         <p:spPr>
           <a:xfrm>
             <a:off x="6239520" y="2317320"/>
-            <a:ext cx="5665320" cy="698760"/>
+            <a:ext cx="5664960" cy="698400"/>
           </a:xfrm>
           <a:prstGeom prst="rect">
             <a:avLst/>
@@ -14878,7 +14722,7 @@
         <p:spPr>
           <a:xfrm>
             <a:off x="6243840" y="3164400"/>
-            <a:ext cx="5584680" cy="1873440"/>
+            <a:ext cx="5584320" cy="1873080"/>
           </a:xfrm>
           <a:custGeom>
             <a:avLst/>
@@ -14932,7 +14776,7 @@
         <p:spPr>
           <a:xfrm>
             <a:off x="6351480" y="3312360"/>
-            <a:ext cx="5369400" cy="250560"/>
+            <a:ext cx="5369040" cy="250200"/>
           </a:xfrm>
           <a:prstGeom prst="rect">
             <a:avLst/>
@@ -14983,7 +14827,7 @@
         </p:nvGraphicFramePr>
         <p:xfrm>
           <a:off x="6391800" y="3635280"/>
-          <a:ext cx="5288760" cy="1003680"/>
+          <a:ext cx="5288400" cy="1003320"/>
         </p:xfrm>
         <a:graphic>
           <a:graphicData uri="http://schemas.openxmlformats.org/drawingml/2006/table">
@@ -15024,7 +14868,7 @@
                 </a:tc>
                 <a:tc>
                   <a:txBody>
-                    <a:bodyPr lIns="71640" rIns="71640" tIns="71640" bIns="71640" anchor="ctr">
+                    <a:bodyPr lIns="71640" rIns="71640" anchor="ctr">
                       <a:noAutofit/>
                     </a:bodyPr>
                     <a:p>
@@ -15077,7 +14921,7 @@
                 </a:tc>
                 <a:tc>
                   <a:txBody>
-                    <a:bodyPr lIns="71640" rIns="71640" tIns="71640" bIns="71640" anchor="ctr">
+                    <a:bodyPr lIns="71640" rIns="71640" anchor="ctr">
                       <a:noAutofit/>
                     </a:bodyPr>
                     <a:p>
@@ -15132,7 +14976,7 @@
               <a:tr h="334440">
                 <a:tc>
                   <a:txBody>
-                    <a:bodyPr lIns="71640" rIns="71640" tIns="71640" bIns="71640" anchor="ctr">
+                    <a:bodyPr lIns="71640" rIns="71640" anchor="ctr">
                       <a:noAutofit/>
                     </a:bodyPr>
                     <a:p>
@@ -15185,7 +15029,7 @@
                 </a:tc>
                 <a:tc>
                   <a:txBody>
-                    <a:bodyPr lIns="71640" rIns="71640" tIns="71640" bIns="71640" anchor="ctr">
+                    <a:bodyPr lIns="71640" rIns="71640" anchor="ctr">
                       <a:noAutofit/>
                     </a:bodyPr>
                     <a:p>
@@ -15236,7 +15080,7 @@
                 </a:tc>
                 <a:tc>
                   <a:txBody>
-                    <a:bodyPr lIns="71640" rIns="71640" tIns="71640" bIns="71640" anchor="ctr">
+                    <a:bodyPr lIns="71640" rIns="71640" anchor="ctr">
                       <a:noAutofit/>
                     </a:bodyPr>
                     <a:p>
@@ -15289,7 +15133,7 @@
               <a:tr h="334800">
                 <a:tc>
                   <a:txBody>
-                    <a:bodyPr lIns="71640" rIns="71640" tIns="71640" bIns="71640" anchor="ctr">
+                    <a:bodyPr lIns="71640" rIns="71640" anchor="ctr">
                       <a:noAutofit/>
                     </a:bodyPr>
                     <a:p>
@@ -15342,7 +15186,7 @@
                 </a:tc>
                 <a:tc>
                   <a:txBody>
-                    <a:bodyPr lIns="71640" rIns="71640" tIns="71640" bIns="71640" anchor="ctr">
+                    <a:bodyPr lIns="71640" rIns="71640" anchor="ctr">
                       <a:noAutofit/>
                     </a:bodyPr>
                     <a:p>
@@ -15393,7 +15237,7 @@
                 </a:tc>
                 <a:tc>
                   <a:txBody>
-                    <a:bodyPr lIns="71640" rIns="71640" tIns="71640" bIns="71640" anchor="ctr">
+                    <a:bodyPr lIns="71640" rIns="71640" anchor="ctr">
                       <a:noAutofit/>
                     </a:bodyPr>
                     <a:p>
@@ -15458,7 +15302,7 @@
         <p:spPr>
           <a:xfrm>
             <a:off x="6360480" y="4710960"/>
-            <a:ext cx="5351400" cy="178920"/>
+            <a:ext cx="5351040" cy="178560"/>
           </a:xfrm>
           <a:prstGeom prst="rect">
             <a:avLst/>
@@ -15510,7 +15354,7 @@
         <p:spPr>
           <a:xfrm>
             <a:off x="6239520" y="5186160"/>
-            <a:ext cx="5593680" cy="1308600"/>
+            <a:ext cx="5593320" cy="1308240"/>
           </a:xfrm>
           <a:custGeom>
             <a:avLst/>
@@ -15561,7 +15405,7 @@
         <p:spPr>
           <a:xfrm>
             <a:off x="6382800" y="5329440"/>
-            <a:ext cx="5387400" cy="250560"/>
+            <a:ext cx="5387040" cy="250200"/>
           </a:xfrm>
           <a:prstGeom prst="rect">
             <a:avLst/>
@@ -15613,7 +15457,7 @@
         <p:spPr>
           <a:xfrm>
             <a:off x="6382800" y="5652360"/>
-            <a:ext cx="5378400" cy="698760"/>
+            <a:ext cx="5378040" cy="698400"/>
           </a:xfrm>
           <a:prstGeom prst="rect">
             <a:avLst/>
@@ -15702,7 +15546,7 @@
         <p:spPr>
           <a:xfrm>
             <a:off x="609480" y="1781280"/>
-            <a:ext cx="12191760" cy="1218960"/>
+            <a:ext cx="12191400" cy="1218600"/>
           </a:xfrm>
           <a:prstGeom prst="rect">
             <a:avLst/>
@@ -15756,7 +15600,7 @@
         <p:spPr>
           <a:xfrm>
             <a:off x="609480" y="3152880"/>
-            <a:ext cx="11867760" cy="1142640"/>
+            <a:ext cx="11867400" cy="1142280"/>
           </a:xfrm>
           <a:prstGeom prst="rect">
             <a:avLst/>
@@ -15829,7 +15673,7 @@
         <p:spPr>
           <a:xfrm>
             <a:off x="609480" y="4524480"/>
-            <a:ext cx="1218960" cy="18720"/>
+            <a:ext cx="1218600" cy="18360"/>
           </a:xfrm>
           <a:custGeom>
             <a:avLst/>
@@ -15880,7 +15724,7 @@
         <p:spPr>
           <a:xfrm>
             <a:off x="609480" y="4772160"/>
-            <a:ext cx="11696400" cy="304560"/>
+            <a:ext cx="11696040" cy="304200"/>
           </a:xfrm>
           <a:prstGeom prst="rect">
             <a:avLst/>
@@ -15969,7 +15813,7 @@
         <p:spPr>
           <a:xfrm>
             <a:off x="380880" y="380880"/>
-            <a:ext cx="11505960" cy="228240"/>
+            <a:ext cx="11505600" cy="227880"/>
           </a:xfrm>
           <a:prstGeom prst="rect">
             <a:avLst/>
@@ -15997,7 +15841,7 @@
               <a:buNone/>
             </a:pPr>
             <a:r>
-              <a:rPr b="1" lang="en-US" sz="1200" spc="58" strike="noStrike">
+              <a:rPr b="1" lang="en-US" sz="1200" spc="55" strike="noStrike">
                 <a:solidFill>
                   <a:srgbClr val="0984e3"/>
                 </a:solidFill>
@@ -16021,7 +15865,7 @@
         <p:spPr>
           <a:xfrm>
             <a:off x="380880" y="685800"/>
-            <a:ext cx="11658240" cy="456840"/>
+            <a:ext cx="11657880" cy="456480"/>
           </a:xfrm>
           <a:prstGeom prst="rect">
             <a:avLst/>
@@ -16073,7 +15917,7 @@
         <p:spPr>
           <a:xfrm>
             <a:off x="380880" y="1295280"/>
-            <a:ext cx="7648200" cy="933120"/>
+            <a:ext cx="7647840" cy="932760"/>
           </a:xfrm>
           <a:prstGeom prst="rect">
             <a:avLst/>
@@ -16135,7 +15979,7 @@
         <p:spPr>
           <a:xfrm>
             <a:off x="385920" y="2381400"/>
-            <a:ext cx="3695400" cy="1723680"/>
+            <a:ext cx="3695040" cy="1723320"/>
           </a:xfrm>
           <a:custGeom>
             <a:avLst/>
@@ -16189,7 +16033,7 @@
         <p:spPr>
           <a:xfrm>
             <a:off x="542880" y="2538360"/>
-            <a:ext cx="3476160" cy="266400"/>
+            <a:ext cx="3475800" cy="266040"/>
           </a:xfrm>
           <a:prstGeom prst="rect">
             <a:avLst/>
@@ -16241,7 +16085,7 @@
         <p:spPr>
           <a:xfrm>
             <a:off x="542880" y="2881440"/>
-            <a:ext cx="3457080" cy="495000"/>
+            <a:ext cx="3456720" cy="494640"/>
           </a:xfrm>
           <a:prstGeom prst="rect">
             <a:avLst/>
@@ -16303,7 +16147,7 @@
         <p:spPr>
           <a:xfrm>
             <a:off x="542880" y="3452760"/>
-            <a:ext cx="3457080" cy="495000"/>
+            <a:ext cx="3456720" cy="494640"/>
           </a:xfrm>
           <a:prstGeom prst="rect">
             <a:avLst/>
@@ -16365,7 +16209,7 @@
         <p:spPr>
           <a:xfrm>
             <a:off x="4240080" y="2381400"/>
-            <a:ext cx="3695400" cy="1723680"/>
+            <a:ext cx="3695040" cy="1723320"/>
           </a:xfrm>
           <a:custGeom>
             <a:avLst/>
@@ -16419,7 +16263,7 @@
         <p:spPr>
           <a:xfrm>
             <a:off x="4397400" y="2538360"/>
-            <a:ext cx="3476160" cy="266400"/>
+            <a:ext cx="3475800" cy="266040"/>
           </a:xfrm>
           <a:prstGeom prst="rect">
             <a:avLst/>
@@ -16471,7 +16315,7 @@
         <p:spPr>
           <a:xfrm>
             <a:off x="4397400" y="2881440"/>
-            <a:ext cx="3457080" cy="495000"/>
+            <a:ext cx="3456720" cy="494640"/>
           </a:xfrm>
           <a:prstGeom prst="rect">
             <a:avLst/>
@@ -16533,7 +16377,7 @@
         <p:spPr>
           <a:xfrm>
             <a:off x="4397400" y="3452760"/>
-            <a:ext cx="3457080" cy="495000"/>
+            <a:ext cx="3456720" cy="494640"/>
           </a:xfrm>
           <a:prstGeom prst="rect">
             <a:avLst/>
@@ -16595,7 +16439,7 @@
         <p:spPr>
           <a:xfrm>
             <a:off x="399960" y="4262400"/>
-            <a:ext cx="7534080" cy="1638000"/>
+            <a:ext cx="7533720" cy="1637640"/>
           </a:xfrm>
           <a:custGeom>
             <a:avLst/>
@@ -16646,7 +16490,7 @@
         <p:spPr>
           <a:xfrm>
             <a:off x="399960" y="4262400"/>
-            <a:ext cx="37800" cy="1638000"/>
+            <a:ext cx="37440" cy="1637640"/>
           </a:xfrm>
           <a:custGeom>
             <a:avLst/>
@@ -16697,7 +16541,7 @@
         <p:spPr>
           <a:xfrm>
             <a:off x="571680" y="4414680"/>
-            <a:ext cx="7305480" cy="266400"/>
+            <a:ext cx="7305120" cy="266040"/>
           </a:xfrm>
           <a:prstGeom prst="rect">
             <a:avLst/>
@@ -16749,7 +16593,7 @@
         <p:spPr>
           <a:xfrm>
             <a:off x="619200" y="4791240"/>
-            <a:ext cx="95040" cy="151920"/>
+            <a:ext cx="94680" cy="151560"/>
           </a:xfrm>
           <a:custGeom>
             <a:avLst/>
@@ -16904,7 +16748,7 @@
         <p:spPr>
           <a:xfrm>
             <a:off x="819000" y="4757760"/>
-            <a:ext cx="3362040" cy="456840"/>
+            <a:ext cx="3361680" cy="456480"/>
           </a:xfrm>
           <a:prstGeom prst="rect">
             <a:avLst/>
@@ -16966,7 +16810,7 @@
         <p:spPr>
           <a:xfrm>
             <a:off x="4282920" y="4791240"/>
-            <a:ext cx="132840" cy="151920"/>
+            <a:ext cx="132480" cy="151560"/>
           </a:xfrm>
           <a:custGeom>
             <a:avLst/>
@@ -17098,7 +16942,7 @@
         <p:spPr>
           <a:xfrm>
             <a:off x="4502160" y="4757760"/>
-            <a:ext cx="3362040" cy="456840"/>
+            <a:ext cx="3361680" cy="456480"/>
           </a:xfrm>
           <a:prstGeom prst="rect">
             <a:avLst/>
@@ -17160,7 +17004,7 @@
         <p:spPr>
           <a:xfrm>
             <a:off x="590400" y="5324400"/>
-            <a:ext cx="151920" cy="151920"/>
+            <a:ext cx="151560" cy="151560"/>
           </a:xfrm>
           <a:custGeom>
             <a:avLst/>
@@ -17383,7 +17227,7 @@
         <p:spPr>
           <a:xfrm>
             <a:off x="819000" y="5291280"/>
-            <a:ext cx="3362040" cy="456840"/>
+            <a:ext cx="3361680" cy="456480"/>
           </a:xfrm>
           <a:prstGeom prst="rect">
             <a:avLst/>
@@ -17445,7 +17289,7 @@
         <p:spPr>
           <a:xfrm>
             <a:off x="4263840" y="5324400"/>
-            <a:ext cx="171000" cy="151920"/>
+            <a:ext cx="170640" cy="151560"/>
           </a:xfrm>
           <a:custGeom>
             <a:avLst/>
@@ -17642,7 +17486,7 @@
         <p:spPr>
           <a:xfrm>
             <a:off x="4502160" y="5291280"/>
-            <a:ext cx="3362040" cy="456840"/>
+            <a:ext cx="3361680" cy="456480"/>
           </a:xfrm>
           <a:prstGeom prst="rect">
             <a:avLst/>
@@ -17704,7 +17548,7 @@
         <p:spPr>
           <a:xfrm>
             <a:off x="8132760" y="1300320"/>
-            <a:ext cx="3676320" cy="2638080"/>
+            <a:ext cx="3675960" cy="2637720"/>
           </a:xfrm>
           <a:custGeom>
             <a:avLst/>
@@ -17758,7 +17602,7 @@
         <p:spPr>
           <a:xfrm>
             <a:off x="8242200" y="1457280"/>
-            <a:ext cx="3457080" cy="266400"/>
+            <a:ext cx="3456720" cy="266040"/>
           </a:xfrm>
           <a:prstGeom prst="rect">
             <a:avLst/>
@@ -17810,7 +17654,7 @@
         <p:spPr>
           <a:xfrm>
             <a:off x="8289720" y="1838160"/>
-            <a:ext cx="3362040" cy="1333080"/>
+            <a:ext cx="3361680" cy="1332720"/>
           </a:xfrm>
           <a:prstGeom prst="roundRect">
             <a:avLst>
@@ -17842,7 +17686,7 @@
         <p:spPr>
           <a:xfrm>
             <a:off x="8251920" y="3286080"/>
-            <a:ext cx="3438000" cy="495000"/>
+            <a:ext cx="3437640" cy="494640"/>
           </a:xfrm>
           <a:prstGeom prst="rect">
             <a:avLst/>
@@ -17894,7 +17738,7 @@
         <p:spPr>
           <a:xfrm>
             <a:off x="8128080" y="4095720"/>
-            <a:ext cx="3685680" cy="1638000"/>
+            <a:ext cx="3685320" cy="1637640"/>
           </a:xfrm>
           <a:custGeom>
             <a:avLst/>
@@ -17945,7 +17789,7 @@
         <p:spPr>
           <a:xfrm>
             <a:off x="8280360" y="4248000"/>
-            <a:ext cx="3466800" cy="266400"/>
+            <a:ext cx="3466440" cy="266040"/>
           </a:xfrm>
           <a:prstGeom prst="rect">
             <a:avLst/>
@@ -17997,7 +17841,7 @@
         <p:spPr>
           <a:xfrm>
             <a:off x="8280360" y="4591080"/>
-            <a:ext cx="3457080" cy="990360"/>
+            <a:ext cx="3456720" cy="990000"/>
           </a:xfrm>
           <a:prstGeom prst="rect">
             <a:avLst/>
@@ -18086,7 +17930,7 @@
         <p:spPr>
           <a:xfrm>
             <a:off x="370440" y="370440"/>
-            <a:ext cx="11524680" cy="222120"/>
+            <a:ext cx="11524320" cy="221760"/>
           </a:xfrm>
           <a:prstGeom prst="rect">
             <a:avLst/>
@@ -18114,7 +17958,7 @@
               <a:buNone/>
             </a:pPr>
             <a:r>
-              <a:rPr b="1" lang="en-US" sz="1170" spc="55" strike="noStrike">
+              <a:rPr b="1" lang="en-US" sz="1170" spc="52" strike="noStrike">
                 <a:solidFill>
                   <a:srgbClr val="0984e3"/>
                 </a:solidFill>
@@ -18138,7 +17982,7 @@
         <p:spPr>
           <a:xfrm>
             <a:off x="370440" y="667080"/>
-            <a:ext cx="11673000" cy="444240"/>
+            <a:ext cx="11672640" cy="443880"/>
           </a:xfrm>
           <a:prstGeom prst="rect">
             <a:avLst/>
@@ -18190,7 +18034,7 @@
         <p:spPr>
           <a:xfrm>
             <a:off x="370440" y="1334160"/>
-            <a:ext cx="5669640" cy="1203840"/>
+            <a:ext cx="5669280" cy="1203480"/>
           </a:xfrm>
           <a:prstGeom prst="rect">
             <a:avLst/>
@@ -18252,7 +18096,7 @@
         <p:spPr>
           <a:xfrm>
             <a:off x="375120" y="2691360"/>
-            <a:ext cx="5567400" cy="2158200"/>
+            <a:ext cx="5567040" cy="2157840"/>
           </a:xfrm>
           <a:custGeom>
             <a:avLst/>
@@ -18306,7 +18150,7 @@
         <p:spPr>
           <a:xfrm>
             <a:off x="565200" y="2881080"/>
-            <a:ext cx="5280480" cy="259200"/>
+            <a:ext cx="5280120" cy="258840"/>
           </a:xfrm>
           <a:prstGeom prst="rect">
             <a:avLst/>
@@ -18358,7 +18202,7 @@
         <p:spPr>
           <a:xfrm>
             <a:off x="565200" y="3251880"/>
-            <a:ext cx="5261760" cy="481320"/>
+            <a:ext cx="5261400" cy="480960"/>
           </a:xfrm>
           <a:prstGeom prst="rect">
             <a:avLst/>
@@ -18410,7 +18254,7 @@
         <p:spPr>
           <a:xfrm>
             <a:off x="592920" y="3877200"/>
-            <a:ext cx="129240" cy="147960"/>
+            <a:ext cx="128880" cy="147600"/>
           </a:xfrm>
           <a:custGeom>
             <a:avLst/>
@@ -18491,7 +18335,7 @@
         <p:spPr>
           <a:xfrm>
             <a:off x="804600" y="3844800"/>
-            <a:ext cx="5022360" cy="222120"/>
+            <a:ext cx="5022000" cy="221760"/>
           </a:xfrm>
           <a:prstGeom prst="rect">
             <a:avLst/>
@@ -18543,7 +18387,7 @@
         <p:spPr>
           <a:xfrm>
             <a:off x="592920" y="4173480"/>
-            <a:ext cx="129240" cy="147960"/>
+            <a:ext cx="128880" cy="147600"/>
           </a:xfrm>
           <a:custGeom>
             <a:avLst/>
@@ -18624,7 +18468,7 @@
         <p:spPr>
           <a:xfrm>
             <a:off x="804600" y="4141080"/>
-            <a:ext cx="5022360" cy="222120"/>
+            <a:ext cx="5022000" cy="221760"/>
           </a:xfrm>
           <a:prstGeom prst="rect">
             <a:avLst/>
@@ -18676,7 +18520,7 @@
         <p:spPr>
           <a:xfrm>
             <a:off x="592920" y="4470120"/>
-            <a:ext cx="129240" cy="147960"/>
+            <a:ext cx="128880" cy="147600"/>
           </a:xfrm>
           <a:custGeom>
             <a:avLst/>
@@ -18757,7 +18601,7 @@
         <p:spPr>
           <a:xfrm>
             <a:off x="804600" y="4437720"/>
-            <a:ext cx="5022360" cy="222120"/>
+            <a:ext cx="5022000" cy="221760"/>
           </a:xfrm>
           <a:prstGeom prst="rect">
             <a:avLst/>
@@ -18809,7 +18653,7 @@
         <p:spPr>
           <a:xfrm>
             <a:off x="375120" y="5007600"/>
-            <a:ext cx="5567400" cy="1472760"/>
+            <a:ext cx="5567040" cy="1472400"/>
           </a:xfrm>
           <a:custGeom>
             <a:avLst/>
@@ -18863,7 +18707,7 @@
         <p:spPr>
           <a:xfrm>
             <a:off x="565200" y="5197320"/>
-            <a:ext cx="5280480" cy="259200"/>
+            <a:ext cx="5280120" cy="258840"/>
           </a:xfrm>
           <a:prstGeom prst="rect">
             <a:avLst/>
@@ -18915,7 +18759,7 @@
         <p:spPr>
           <a:xfrm>
             <a:off x="565200" y="5567760"/>
-            <a:ext cx="5261760" cy="722160"/>
+            <a:ext cx="5261400" cy="721800"/>
           </a:xfrm>
           <a:prstGeom prst="rect">
             <a:avLst/>
@@ -18967,7 +18811,7 @@
         <p:spPr>
           <a:xfrm>
             <a:off x="6242040" y="1334160"/>
-            <a:ext cx="5576760" cy="2844000"/>
+            <a:ext cx="5576400" cy="2843640"/>
           </a:xfrm>
           <a:custGeom>
             <a:avLst/>
@@ -19018,7 +18862,7 @@
         <p:spPr>
           <a:xfrm>
             <a:off x="6427440" y="1519200"/>
-            <a:ext cx="5317560" cy="296280"/>
+            <a:ext cx="5317200" cy="295920"/>
           </a:xfrm>
           <a:prstGeom prst="rect">
             <a:avLst/>
@@ -19070,7 +18914,7 @@
         <p:spPr>
           <a:xfrm>
             <a:off x="6427440" y="1968840"/>
-            <a:ext cx="5146200" cy="455760"/>
+            <a:ext cx="5145840" cy="455400"/>
           </a:xfrm>
           <a:prstGeom prst="rect">
             <a:avLst/>
@@ -19122,7 +18966,7 @@
         <p:spPr>
           <a:xfrm>
             <a:off x="6427440" y="2580120"/>
-            <a:ext cx="5280480" cy="481320"/>
+            <a:ext cx="5280120" cy="480960"/>
           </a:xfrm>
           <a:prstGeom prst="rect">
             <a:avLst/>
@@ -19174,7 +19018,7 @@
         <p:spPr>
           <a:xfrm>
             <a:off x="6436800" y="3205440"/>
-            <a:ext cx="166320" cy="147960"/>
+            <a:ext cx="165960" cy="147600"/>
           </a:xfrm>
           <a:custGeom>
             <a:avLst/>
@@ -19359,7 +19203,7 @@
         <p:spPr>
           <a:xfrm>
             <a:off x="6666840" y="3173040"/>
-            <a:ext cx="5041080" cy="222120"/>
+            <a:ext cx="5040720" cy="221760"/>
           </a:xfrm>
           <a:prstGeom prst="rect">
             <a:avLst/>
@@ -19421,7 +19265,7 @@
         <p:spPr>
           <a:xfrm>
             <a:off x="6445800" y="3502080"/>
-            <a:ext cx="147960" cy="147960"/>
+            <a:ext cx="147600" cy="147600"/>
           </a:xfrm>
           <a:custGeom>
             <a:avLst/>
@@ -19588,7 +19432,7 @@
         <p:spPr>
           <a:xfrm>
             <a:off x="6666840" y="3469680"/>
-            <a:ext cx="5041080" cy="222120"/>
+            <a:ext cx="5040720" cy="221760"/>
           </a:xfrm>
           <a:prstGeom prst="rect">
             <a:avLst/>
@@ -19650,7 +19494,7 @@
         <p:spPr>
           <a:xfrm>
             <a:off x="6427440" y="3798360"/>
-            <a:ext cx="185040" cy="147960"/>
+            <a:ext cx="184680" cy="147600"/>
           </a:xfrm>
           <a:custGeom>
             <a:avLst/>
@@ -19882,7 +19726,7 @@
         <p:spPr>
           <a:xfrm>
             <a:off x="6666840" y="3765960"/>
-            <a:ext cx="5041080" cy="222120"/>
+            <a:ext cx="5040720" cy="221760"/>
           </a:xfrm>
           <a:prstGeom prst="rect">
             <a:avLst/>
@@ -19944,7 +19788,7 @@
         <p:spPr>
           <a:xfrm>
             <a:off x="6260760" y="4321800"/>
-            <a:ext cx="5558400" cy="870480"/>
+            <a:ext cx="5558040" cy="870120"/>
           </a:xfrm>
           <a:custGeom>
             <a:avLst/>
@@ -19995,7 +19839,7 @@
         <p:spPr>
           <a:xfrm>
             <a:off x="6260760" y="4321800"/>
-            <a:ext cx="36720" cy="870480"/>
+            <a:ext cx="36360" cy="870120"/>
           </a:xfrm>
           <a:custGeom>
             <a:avLst/>
@@ -20046,7 +19890,7 @@
         <p:spPr>
           <a:xfrm>
             <a:off x="6464520" y="4507200"/>
-            <a:ext cx="5243400" cy="240480"/>
+            <a:ext cx="5243040" cy="240120"/>
           </a:xfrm>
           <a:prstGeom prst="rect">
             <a:avLst/>
@@ -20098,7 +19942,7 @@
         <p:spPr>
           <a:xfrm>
             <a:off x="6464520" y="4822200"/>
-            <a:ext cx="5234040" cy="185040"/>
+            <a:ext cx="5233680" cy="184680"/>
           </a:xfrm>
           <a:prstGeom prst="rect">
             <a:avLst/>
@@ -20197,7 +20041,7 @@
         <p:spPr>
           <a:xfrm>
             <a:off x="380880" y="380880"/>
-            <a:ext cx="11658240" cy="456840"/>
+            <a:ext cx="11657880" cy="456480"/>
           </a:xfrm>
           <a:prstGeom prst="rect">
             <a:avLst/>
@@ -20249,7 +20093,7 @@
         <p:spPr>
           <a:xfrm>
             <a:off x="380880" y="952560"/>
-            <a:ext cx="761760" cy="18720"/>
+            <a:ext cx="761400" cy="18360"/>
           </a:xfrm>
           <a:custGeom>
             <a:avLst/>
@@ -20300,7 +20144,7 @@
         <p:spPr>
           <a:xfrm>
             <a:off x="380880" y="1428840"/>
-            <a:ext cx="752040" cy="571320"/>
+            <a:ext cx="751680" cy="570960"/>
           </a:xfrm>
           <a:prstGeom prst="rect">
             <a:avLst/>
@@ -20354,7 +20198,7 @@
         <p:spPr>
           <a:xfrm>
             <a:off x="1034280" y="1504800"/>
-            <a:ext cx="4190760" cy="304560"/>
+            <a:ext cx="4190400" cy="304200"/>
           </a:xfrm>
           <a:prstGeom prst="rect">
             <a:avLst/>
@@ -20406,7 +20250,7 @@
         <p:spPr>
           <a:xfrm>
             <a:off x="1034280" y="1886040"/>
-            <a:ext cx="4161960" cy="275760"/>
+            <a:ext cx="4161600" cy="275400"/>
           </a:xfrm>
           <a:prstGeom prst="rect">
             <a:avLst/>
@@ -20458,7 +20302,7 @@
         <p:spPr>
           <a:xfrm>
             <a:off x="6400800" y="1428840"/>
-            <a:ext cx="856800" cy="571320"/>
+            <a:ext cx="856440" cy="570960"/>
           </a:xfrm>
           <a:prstGeom prst="rect">
             <a:avLst/>
@@ -20512,7 +20356,7 @@
         <p:spPr>
           <a:xfrm>
             <a:off x="7160040" y="1504800"/>
-            <a:ext cx="4762080" cy="304560"/>
+            <a:ext cx="4761720" cy="304200"/>
           </a:xfrm>
           <a:prstGeom prst="rect">
             <a:avLst/>
@@ -20564,7 +20408,7 @@
         <p:spPr>
           <a:xfrm>
             <a:off x="7160040" y="1886040"/>
-            <a:ext cx="4733640" cy="561600"/>
+            <a:ext cx="4733280" cy="561240"/>
           </a:xfrm>
           <a:prstGeom prst="rect">
             <a:avLst/>
@@ -20616,7 +20460,7 @@
         <p:spPr>
           <a:xfrm>
             <a:off x="380880" y="2824200"/>
-            <a:ext cx="856800" cy="571320"/>
+            <a:ext cx="856440" cy="570960"/>
           </a:xfrm>
           <a:prstGeom prst="rect">
             <a:avLst/>
@@ -20670,7 +20514,7 @@
         <p:spPr>
           <a:xfrm>
             <a:off x="1143000" y="2900520"/>
-            <a:ext cx="3971520" cy="304560"/>
+            <a:ext cx="3971160" cy="304200"/>
           </a:xfrm>
           <a:prstGeom prst="rect">
             <a:avLst/>
@@ -20722,7 +20566,7 @@
         <p:spPr>
           <a:xfrm>
             <a:off x="1143000" y="3281400"/>
-            <a:ext cx="3943080" cy="275760"/>
+            <a:ext cx="3942720" cy="275400"/>
           </a:xfrm>
           <a:prstGeom prst="rect">
             <a:avLst/>
@@ -20774,7 +20618,7 @@
         <p:spPr>
           <a:xfrm>
             <a:off x="6400800" y="2824200"/>
-            <a:ext cx="885600" cy="571320"/>
+            <a:ext cx="885240" cy="570960"/>
           </a:xfrm>
           <a:prstGeom prst="rect">
             <a:avLst/>
@@ -20828,7 +20672,7 @@
         <p:spPr>
           <a:xfrm>
             <a:off x="7188480" y="2900520"/>
-            <a:ext cx="2476080" cy="304560"/>
+            <a:ext cx="2475720" cy="304200"/>
           </a:xfrm>
           <a:prstGeom prst="rect">
             <a:avLst/>
@@ -20880,7 +20724,7 @@
         <p:spPr>
           <a:xfrm>
             <a:off x="7188480" y="3281400"/>
-            <a:ext cx="2447640" cy="275760"/>
+            <a:ext cx="2447280" cy="275400"/>
           </a:xfrm>
           <a:prstGeom prst="rect">
             <a:avLst/>
@@ -20932,7 +20776,7 @@
         <p:spPr>
           <a:xfrm>
             <a:off x="380880" y="3940920"/>
-            <a:ext cx="847440" cy="571320"/>
+            <a:ext cx="847080" cy="570960"/>
           </a:xfrm>
           <a:prstGeom prst="rect">
             <a:avLst/>
@@ -20986,7 +20830,7 @@
         <p:spPr>
           <a:xfrm>
             <a:off x="1137240" y="4017240"/>
-            <a:ext cx="2866680" cy="304560"/>
+            <a:ext cx="2866320" cy="304200"/>
           </a:xfrm>
           <a:prstGeom prst="rect">
             <a:avLst/>
@@ -21038,7 +20882,7 @@
         <p:spPr>
           <a:xfrm>
             <a:off x="1137240" y="4398120"/>
-            <a:ext cx="2838240" cy="275760"/>
+            <a:ext cx="2837880" cy="275400"/>
           </a:xfrm>
           <a:prstGeom prst="rect">
             <a:avLst/>
@@ -21090,7 +20934,7 @@
         <p:spPr>
           <a:xfrm>
             <a:off x="6400800" y="3940920"/>
-            <a:ext cx="866520" cy="571320"/>
+            <a:ext cx="866160" cy="570960"/>
           </a:xfrm>
           <a:prstGeom prst="rect">
             <a:avLst/>
@@ -21144,7 +20988,7 @@
         <p:spPr>
           <a:xfrm>
             <a:off x="7171560" y="4017240"/>
-            <a:ext cx="3076200" cy="304560"/>
+            <a:ext cx="3075840" cy="304200"/>
           </a:xfrm>
           <a:prstGeom prst="rect">
             <a:avLst/>
@@ -21196,7 +21040,7 @@
         <p:spPr>
           <a:xfrm>
             <a:off x="7171560" y="4398120"/>
-            <a:ext cx="3047760" cy="275760"/>
+            <a:ext cx="3047400" cy="275400"/>
           </a:xfrm>
           <a:prstGeom prst="rect">
             <a:avLst/>
@@ -21285,7 +21129,7 @@
         <p:spPr>
           <a:xfrm>
             <a:off x="335880" y="335880"/>
-            <a:ext cx="11586960" cy="201240"/>
+            <a:ext cx="11586600" cy="200880"/>
           </a:xfrm>
           <a:prstGeom prst="rect">
             <a:avLst/>
@@ -21313,7 +21157,7 @@
               <a:buNone/>
             </a:pPr>
             <a:r>
-              <a:rPr b="1" lang="en-US" sz="1060" spc="52" strike="noStrike">
+              <a:rPr b="1" lang="en-US" sz="1060" spc="49" strike="noStrike">
                 <a:solidFill>
                   <a:srgbClr val="0984e3"/>
                 </a:solidFill>
@@ -21337,7 +21181,7 @@
         <p:spPr>
           <a:xfrm>
             <a:off x="335880" y="604440"/>
-            <a:ext cx="11721600" cy="402840"/>
+            <a:ext cx="11721240" cy="402480"/>
           </a:xfrm>
           <a:prstGeom prst="rect">
             <a:avLst/>
@@ -21389,7 +21233,7 @@
         <p:spPr>
           <a:xfrm>
             <a:off x="335880" y="1251000"/>
-            <a:ext cx="5995800" cy="457200"/>
+            <a:ext cx="5995440" cy="456840"/>
           </a:xfrm>
           <a:prstGeom prst="rect">
             <a:avLst/>
@@ -21441,7 +21285,7 @@
         <p:spPr>
           <a:xfrm>
             <a:off x="335880" y="1889280"/>
-            <a:ext cx="6876360" cy="654480"/>
+            <a:ext cx="6876000" cy="654120"/>
           </a:xfrm>
           <a:prstGeom prst="rect">
             <a:avLst/>
@@ -21493,7 +21337,7 @@
         <p:spPr>
           <a:xfrm>
             <a:off x="340200" y="2682720"/>
-            <a:ext cx="6801120" cy="1956240"/>
+            <a:ext cx="6800760" cy="1955880"/>
           </a:xfrm>
           <a:custGeom>
             <a:avLst/>
@@ -21547,7 +21391,7 @@
         <p:spPr>
           <a:xfrm>
             <a:off x="512280" y="2854800"/>
-            <a:ext cx="6540840" cy="234720"/>
+            <a:ext cx="6540480" cy="234360"/>
           </a:xfrm>
           <a:prstGeom prst="rect">
             <a:avLst/>
@@ -21599,7 +21443,7 @@
         <p:spPr>
           <a:xfrm>
             <a:off x="512280" y="3190680"/>
-            <a:ext cx="6523920" cy="217800"/>
+            <a:ext cx="6523560" cy="217440"/>
           </a:xfrm>
           <a:prstGeom prst="rect">
             <a:avLst/>
@@ -21651,7 +21495,7 @@
         <p:spPr>
           <a:xfrm>
             <a:off x="512280" y="3509640"/>
-            <a:ext cx="6456600" cy="637920"/>
+            <a:ext cx="6456240" cy="637560"/>
           </a:xfrm>
           <a:custGeom>
             <a:avLst/>
@@ -21702,7 +21546,7 @@
         <p:spPr>
           <a:xfrm>
             <a:off x="613080" y="3610440"/>
-            <a:ext cx="6322320" cy="201240"/>
+            <a:ext cx="6321960" cy="200880"/>
           </a:xfrm>
           <a:prstGeom prst="rect">
             <a:avLst/>
@@ -21754,7 +21598,7 @@
         <p:spPr>
           <a:xfrm>
             <a:off x="613080" y="3845520"/>
-            <a:ext cx="6322320" cy="201240"/>
+            <a:ext cx="6321960" cy="200880"/>
           </a:xfrm>
           <a:prstGeom prst="rect">
             <a:avLst/>
@@ -21806,7 +21650,7 @@
         <p:spPr>
           <a:xfrm>
             <a:off x="512280" y="4248720"/>
-            <a:ext cx="6523920" cy="217800"/>
+            <a:ext cx="6523560" cy="217440"/>
           </a:xfrm>
           <a:prstGeom prst="rect">
             <a:avLst/>
@@ -21858,7 +21702,7 @@
         <p:spPr>
           <a:xfrm>
             <a:off x="352800" y="4777560"/>
-            <a:ext cx="6792480" cy="1527840"/>
+            <a:ext cx="6792120" cy="1527480"/>
           </a:xfrm>
           <a:custGeom>
             <a:avLst/>
@@ -21909,7 +21753,7 @@
         <p:spPr>
           <a:xfrm>
             <a:off x="352800" y="4777560"/>
-            <a:ext cx="33120" cy="1527840"/>
+            <a:ext cx="32760" cy="1527480"/>
           </a:xfrm>
           <a:custGeom>
             <a:avLst/>
@@ -21960,7 +21804,7 @@
         <p:spPr>
           <a:xfrm>
             <a:off x="537480" y="4945680"/>
-            <a:ext cx="6523920" cy="234720"/>
+            <a:ext cx="6523560" cy="234360"/>
           </a:xfrm>
           <a:prstGeom prst="rect">
             <a:avLst/>
@@ -22012,7 +21856,7 @@
         <p:spPr>
           <a:xfrm>
             <a:off x="537480" y="5281560"/>
-            <a:ext cx="6507000" cy="217800"/>
+            <a:ext cx="6506640" cy="217440"/>
           </a:xfrm>
           <a:prstGeom prst="rect">
             <a:avLst/>
@@ -22064,7 +21908,7 @@
         <p:spPr>
           <a:xfrm>
             <a:off x="537480" y="5600520"/>
-            <a:ext cx="3215520" cy="201240"/>
+            <a:ext cx="3215160" cy="200880"/>
           </a:xfrm>
           <a:prstGeom prst="rect">
             <a:avLst/>
@@ -22126,7 +21970,7 @@
         <p:spPr>
           <a:xfrm>
             <a:off x="3823200" y="5600520"/>
-            <a:ext cx="3215520" cy="201240"/>
+            <a:ext cx="3215160" cy="200880"/>
           </a:xfrm>
           <a:prstGeom prst="rect">
             <a:avLst/>
@@ -22188,7 +22032,7 @@
         <p:spPr>
           <a:xfrm>
             <a:off x="537480" y="5936400"/>
-            <a:ext cx="3215520" cy="201240"/>
+            <a:ext cx="3215160" cy="200880"/>
           </a:xfrm>
           <a:prstGeom prst="rect">
             <a:avLst/>
@@ -22250,7 +22094,7 @@
         <p:spPr>
           <a:xfrm>
             <a:off x="3823200" y="5936400"/>
-            <a:ext cx="3215520" cy="201240"/>
+            <a:ext cx="3215160" cy="200880"/>
           </a:xfrm>
           <a:prstGeom prst="rect">
             <a:avLst/>
@@ -22312,7 +22156,7 @@
         <p:spPr>
           <a:xfrm>
             <a:off x="7415640" y="1213200"/>
-            <a:ext cx="4441320" cy="3501000"/>
+            <a:ext cx="4440960" cy="3500640"/>
           </a:xfrm>
           <a:custGeom>
             <a:avLst/>
@@ -22366,7 +22210,7 @@
         <p:spPr>
           <a:xfrm>
             <a:off x="7587720" y="1385280"/>
-            <a:ext cx="4097160" cy="1679040"/>
+            <a:ext cx="4096800" cy="1678680"/>
           </a:xfrm>
           <a:prstGeom prst="roundRect">
             <a:avLst>
@@ -22398,7 +22242,7 @@
         <p:spPr>
           <a:xfrm>
             <a:off x="7545600" y="3199320"/>
-            <a:ext cx="4181040" cy="234720"/>
+            <a:ext cx="4180680" cy="234360"/>
           </a:xfrm>
           <a:prstGeom prst="rect">
             <a:avLst/>
@@ -22450,7 +22294,7 @@
         <p:spPr>
           <a:xfrm>
             <a:off x="7621200" y="3564360"/>
-            <a:ext cx="100440" cy="133920"/>
+            <a:ext cx="100080" cy="133560"/>
           </a:xfrm>
           <a:custGeom>
             <a:avLst/>
@@ -22649,7 +22493,7 @@
         <p:spPr>
           <a:xfrm>
             <a:off x="7800120" y="3534840"/>
-            <a:ext cx="3952080" cy="201240"/>
+            <a:ext cx="3951720" cy="200880"/>
           </a:xfrm>
           <a:prstGeom prst="rect">
             <a:avLst/>
@@ -22711,7 +22555,7 @@
         <p:spPr>
           <a:xfrm>
             <a:off x="7604640" y="3832920"/>
-            <a:ext cx="133920" cy="133920"/>
+            <a:ext cx="133560" cy="133560"/>
           </a:xfrm>
           <a:custGeom>
             <a:avLst/>
@@ -22918,7 +22762,7 @@
         <p:spPr>
           <a:xfrm>
             <a:off x="7800120" y="3803760"/>
-            <a:ext cx="3952080" cy="201240"/>
+            <a:ext cx="3951720" cy="200880"/>
           </a:xfrm>
           <a:prstGeom prst="rect">
             <a:avLst/>
@@ -22980,7 +22824,7 @@
         <p:spPr>
           <a:xfrm>
             <a:off x="7604640" y="4101840"/>
-            <a:ext cx="133920" cy="133920"/>
+            <a:ext cx="133560" cy="133560"/>
           </a:xfrm>
           <a:custGeom>
             <a:avLst/>
@@ -23171,7 +23015,7 @@
         <p:spPr>
           <a:xfrm>
             <a:off x="7800120" y="4072320"/>
-            <a:ext cx="3952080" cy="201240"/>
+            <a:ext cx="3951720" cy="200880"/>
           </a:xfrm>
           <a:prstGeom prst="rect">
             <a:avLst/>
@@ -23233,7 +23077,7 @@
         <p:spPr>
           <a:xfrm>
             <a:off x="7587720" y="4370400"/>
-            <a:ext cx="167400" cy="133920"/>
+            <a:ext cx="167040" cy="133560"/>
           </a:xfrm>
           <a:custGeom>
             <a:avLst/>
@@ -23449,7 +23293,7 @@
         <p:spPr>
           <a:xfrm>
             <a:off x="7800120" y="4341240"/>
-            <a:ext cx="3952080" cy="201240"/>
+            <a:ext cx="3951720" cy="200880"/>
           </a:xfrm>
           <a:prstGeom prst="rect">
             <a:avLst/>
@@ -23511,7 +23355,7 @@
         <p:spPr>
           <a:xfrm>
             <a:off x="7411320" y="4853160"/>
-            <a:ext cx="4449960" cy="1292760"/>
+            <a:ext cx="4449600" cy="1292400"/>
           </a:xfrm>
           <a:custGeom>
             <a:avLst/>
@@ -23562,7 +23406,7 @@
         <p:spPr>
           <a:xfrm>
             <a:off x="7579440" y="5021280"/>
-            <a:ext cx="4189680" cy="234720"/>
+            <a:ext cx="4189320" cy="234360"/>
           </a:xfrm>
           <a:prstGeom prst="rect">
             <a:avLst/>
@@ -23614,7 +23458,7 @@
         <p:spPr>
           <a:xfrm>
             <a:off x="7579440" y="5323680"/>
-            <a:ext cx="4181040" cy="654480"/>
+            <a:ext cx="4180680" cy="654120"/>
           </a:xfrm>
           <a:prstGeom prst="rect">
             <a:avLst/>
@@ -23703,7 +23547,7 @@
         <p:spPr>
           <a:xfrm>
             <a:off x="5486400" y="585720"/>
-            <a:ext cx="1218960" cy="18720"/>
+            <a:ext cx="1218600" cy="18360"/>
           </a:xfrm>
           <a:custGeom>
             <a:avLst/>
@@ -23754,7 +23598,7 @@
         <p:spPr>
           <a:xfrm>
             <a:off x="3664080" y="909720"/>
-            <a:ext cx="4866840" cy="1428480"/>
+            <a:ext cx="4866480" cy="1428120"/>
           </a:xfrm>
           <a:prstGeom prst="rect">
             <a:avLst/>
@@ -23827,7 +23671,7 @@
         <p:spPr>
           <a:xfrm>
             <a:off x="5486400" y="2643120"/>
-            <a:ext cx="1218960" cy="18720"/>
+            <a:ext cx="1218600" cy="18360"/>
           </a:xfrm>
           <a:custGeom>
             <a:avLst/>
@@ -23878,7 +23722,7 @@
         <p:spPr>
           <a:xfrm>
             <a:off x="1771560" y="2967120"/>
-            <a:ext cx="8648280" cy="1114200"/>
+            <a:ext cx="8647920" cy="1113840"/>
           </a:xfrm>
           <a:prstGeom prst="rect">
             <a:avLst/>
@@ -23930,7 +23774,7 @@
         <p:spPr>
           <a:xfrm>
             <a:off x="1781280" y="4309920"/>
-            <a:ext cx="8629200" cy="1238040"/>
+            <a:ext cx="8628840" cy="1237680"/>
           </a:xfrm>
           <a:prstGeom prst="rect">
             <a:avLst/>
@@ -23982,7 +23826,7 @@
         <p:spPr>
           <a:xfrm>
             <a:off x="2615400" y="6005520"/>
-            <a:ext cx="6962400" cy="266400"/>
+            <a:ext cx="6962040" cy="266040"/>
           </a:xfrm>
           <a:prstGeom prst="rect">
             <a:avLst/>
@@ -24071,7 +23915,7 @@
         <p:spPr>
           <a:xfrm>
             <a:off x="609480" y="1781280"/>
-            <a:ext cx="12191760" cy="1218960"/>
+            <a:ext cx="12191400" cy="1218600"/>
           </a:xfrm>
           <a:prstGeom prst="rect">
             <a:avLst/>
@@ -24125,7 +23969,7 @@
         <p:spPr>
           <a:xfrm>
             <a:off x="609480" y="3152880"/>
-            <a:ext cx="11867760" cy="1142640"/>
+            <a:ext cx="11867400" cy="1142280"/>
           </a:xfrm>
           <a:prstGeom prst="rect">
             <a:avLst/>
@@ -24198,7 +24042,7 @@
         <p:spPr>
           <a:xfrm>
             <a:off x="609480" y="4524480"/>
-            <a:ext cx="1218960" cy="18720"/>
+            <a:ext cx="1218600" cy="18360"/>
           </a:xfrm>
           <a:custGeom>
             <a:avLst/>
@@ -24249,7 +24093,7 @@
         <p:spPr>
           <a:xfrm>
             <a:off x="609480" y="4772160"/>
-            <a:ext cx="11696400" cy="304560"/>
+            <a:ext cx="11696040" cy="304200"/>
           </a:xfrm>
           <a:prstGeom prst="rect">
             <a:avLst/>
@@ -24338,7 +24182,7 @@
         <p:spPr>
           <a:xfrm>
             <a:off x="380880" y="380880"/>
-            <a:ext cx="11505960" cy="228240"/>
+            <a:ext cx="11505600" cy="227880"/>
           </a:xfrm>
           <a:prstGeom prst="rect">
             <a:avLst/>
@@ -24366,7 +24210,7 @@
               <a:buNone/>
             </a:pPr>
             <a:r>
-              <a:rPr b="1" lang="en-US" sz="1200" spc="58" strike="noStrike">
+              <a:rPr b="1" lang="en-US" sz="1200" spc="55" strike="noStrike">
                 <a:solidFill>
                   <a:srgbClr val="0984e3"/>
                 </a:solidFill>
@@ -24390,7 +24234,7 @@
         <p:spPr>
           <a:xfrm>
             <a:off x="380880" y="685800"/>
-            <a:ext cx="11658240" cy="456840"/>
+            <a:ext cx="11657880" cy="456480"/>
           </a:xfrm>
           <a:prstGeom prst="rect">
             <a:avLst/>
@@ -24442,7 +24286,7 @@
         <p:spPr>
           <a:xfrm>
             <a:off x="380880" y="1371600"/>
-            <a:ext cx="6829200" cy="1238040"/>
+            <a:ext cx="6828840" cy="1237680"/>
           </a:xfrm>
           <a:prstGeom prst="rect">
             <a:avLst/>
@@ -24472,7 +24316,7 @@
             <a:r>
               <a:rPr b="1" i="1" lang="en-US" sz="1500" spc="-1" strike="noStrike">
                 <a:solidFill>
-                  <a:srgbClr val="55308d"/>
+                  <a:srgbClr val="00008b"/>
                 </a:solidFill>
                 <a:latin typeface="Quattrocento Sans"/>
                 <a:ea typeface="Quattrocento Sans"/>
@@ -24482,16 +24326,16 @@
             <a:r>
               <a:rPr b="0" i="1" lang="en-US" sz="1500" spc="-1" strike="noStrike">
                 <a:solidFill>
-                  <a:srgbClr val="55308d"/>
+                  <a:srgbClr val="00008b"/>
                 </a:solidFill>
                 <a:latin typeface="Quattrocento Sans"/>
                 <a:ea typeface="Quattrocento Sans"/>
               </a:rPr>
               <a:t> It provides a structured approach to understanding how individuals or groups make decisions in situations where the outcome depends on the choices of multiple participants.</a:t>
             </a:r>
-            <a:endParaRPr b="0" i="1" lang="en-HK" sz="1500" spc="-1" strike="noStrike">
+            <a:endParaRPr b="0" lang="en-HK" sz="1500" spc="-1" strike="noStrike">
               <a:solidFill>
-                <a:srgbClr val="55308d"/>
+                <a:srgbClr val="00008b"/>
               </a:solidFill>
               <a:latin typeface="Arial"/>
             </a:endParaRPr>
@@ -24507,7 +24351,7 @@
         <p:spPr>
           <a:xfrm>
             <a:off x="380880" y="2838600"/>
-            <a:ext cx="6819480" cy="1114200"/>
+            <a:ext cx="6819120" cy="1113840"/>
           </a:xfrm>
           <a:prstGeom prst="rect">
             <a:avLst/>
@@ -24535,16 +24379,19 @@
               <a:buNone/>
             </a:pPr>
             <a:r>
-              <a:rPr b="0" lang="en-US" sz="1350" spc="-1" strike="noStrike">
-                <a:solidFill>
-                  <a:srgbClr val="636e72"/>
+              <a:rPr b="0" i="1" lang="en-US" sz="1350" spc="-1" strike="noStrike">
+                <a:solidFill>
+                  <a:srgbClr val="00008b"/>
                 </a:solidFill>
                 <a:latin typeface="Quattrocento Sans"/>
                 <a:ea typeface="Quattrocento Sans"/>
               </a:rPr>
               <a:t>Originally developed to investigate rational and economic behavior, game theory has evolved into a powerful tool with applications spanning economics, political science, biology, psychology, and computer science. It helps us predict behavior, design optimal strategies, and understand the dynamics of cooperation and competition.</a:t>
             </a:r>
-            <a:endParaRPr b="0" lang="en-HK" sz="1350" spc="-1" strike="noStrike">
+            <a:endParaRPr b="0" i="1" lang="en-HK" sz="1350" spc="-1" strike="noStrike">
+              <a:solidFill>
+                <a:srgbClr val="00008b"/>
+              </a:solidFill>
               <a:latin typeface="Arial"/>
             </a:endParaRPr>
           </a:p>
@@ -24559,7 +24406,7 @@
         <p:spPr>
           <a:xfrm>
             <a:off x="399960" y="4986360"/>
-            <a:ext cx="6714720" cy="1361880"/>
+            <a:ext cx="6714360" cy="1361520"/>
           </a:xfrm>
           <a:custGeom>
             <a:avLst/>
@@ -24610,7 +24457,7 @@
         <p:spPr>
           <a:xfrm>
             <a:off x="399960" y="4986360"/>
-            <a:ext cx="37800" cy="1361880"/>
+            <a:ext cx="37440" cy="1361520"/>
           </a:xfrm>
           <a:custGeom>
             <a:avLst/>
@@ -24661,7 +24508,7 @@
         <p:spPr>
           <a:xfrm>
             <a:off x="647640" y="5214960"/>
-            <a:ext cx="6324120" cy="561600"/>
+            <a:ext cx="6323760" cy="561240"/>
           </a:xfrm>
           <a:prstGeom prst="rect">
             <a:avLst/>
@@ -24689,16 +24536,19 @@
               <a:buNone/>
             </a:pPr>
             <a:r>
-              <a:rPr b="0" lang="en-US" sz="1350" spc="-1" strike="noStrike">
-                <a:solidFill>
-                  <a:srgbClr val="1e272e"/>
+              <a:rPr b="0" i="1" lang="en-US" sz="1350" spc="-1" strike="noStrike">
+                <a:solidFill>
+                  <a:srgbClr val="00008b"/>
                 </a:solidFill>
                 <a:latin typeface="Quattrocento Sans"/>
                 <a:ea typeface="Quattrocento Sans"/>
               </a:rPr>
               <a:t>"Game theory is the study of mathematical models of strategic interaction among rational decision-makers."</a:t>
             </a:r>
-            <a:endParaRPr b="0" lang="en-HK" sz="1350" spc="-1" strike="noStrike">
+            <a:endParaRPr b="0" i="1" lang="en-HK" sz="1350" spc="-1" strike="noStrike">
+              <a:solidFill>
+                <a:srgbClr val="00008b"/>
+              </a:solidFill>
               <a:latin typeface="Arial"/>
             </a:endParaRPr>
           </a:p>
@@ -24713,7 +24563,7 @@
         <p:spPr>
           <a:xfrm>
             <a:off x="647640" y="5886360"/>
-            <a:ext cx="6314760" cy="228240"/>
+            <a:ext cx="6314400" cy="227880"/>
           </a:xfrm>
           <a:prstGeom prst="rect">
             <a:avLst/>
@@ -24775,7 +24625,7 @@
         <p:spPr>
           <a:xfrm>
             <a:off x="7426440" y="1376280"/>
-            <a:ext cx="4381200" cy="1495080"/>
+            <a:ext cx="4380840" cy="1494720"/>
           </a:xfrm>
           <a:custGeom>
             <a:avLst/>
@@ -24829,7 +24679,7 @@
         <p:spPr>
           <a:xfrm>
             <a:off x="7660080" y="1609560"/>
-            <a:ext cx="380520" cy="380520"/>
+            <a:ext cx="380160" cy="380160"/>
           </a:xfrm>
           <a:custGeom>
             <a:avLst/>
@@ -24880,7 +24730,7 @@
         <p:spPr>
           <a:xfrm>
             <a:off x="7745760" y="1714680"/>
-            <a:ext cx="213840" cy="171000"/>
+            <a:ext cx="213480" cy="170640"/>
           </a:xfrm>
           <a:custGeom>
             <a:avLst/>
@@ -25096,7 +24946,7 @@
         <p:spPr>
           <a:xfrm>
             <a:off x="8155440" y="1666800"/>
-            <a:ext cx="637920" cy="266400"/>
+            <a:ext cx="637560" cy="266040"/>
           </a:xfrm>
           <a:prstGeom prst="rect">
             <a:avLst/>
@@ -25148,7 +24998,7 @@
         <p:spPr>
           <a:xfrm>
             <a:off x="7660080" y="2143080"/>
-            <a:ext cx="3990600" cy="495000"/>
+            <a:ext cx="3990240" cy="494640"/>
           </a:xfrm>
           <a:prstGeom prst="rect">
             <a:avLst/>
@@ -25176,16 +25026,19 @@
               <a:buNone/>
             </a:pPr>
             <a:r>
-              <a:rPr b="0" lang="en-US" sz="1200" spc="-1" strike="noStrike">
-                <a:solidFill>
-                  <a:srgbClr val="636e72"/>
+              <a:rPr b="0" i="1" lang="en-US" sz="1200" spc="-1" strike="noStrike">
+                <a:solidFill>
+                  <a:srgbClr val="00008b"/>
                 </a:solidFill>
                 <a:latin typeface="Quattrocento Sans"/>
                 <a:ea typeface="Quattrocento Sans"/>
               </a:rPr>
               <a:t>Decision-makers whose choices influence outcomes. Games may involve two players or many.</a:t>
             </a:r>
-            <a:endParaRPr b="0" lang="en-HK" sz="1200" spc="-1" strike="noStrike">
+            <a:endParaRPr b="0" i="1" lang="en-HK" sz="1200" spc="-1" strike="noStrike">
+              <a:solidFill>
+                <a:srgbClr val="00008b"/>
+              </a:solidFill>
               <a:latin typeface="Arial"/>
             </a:endParaRPr>
           </a:p>
@@ -25200,7 +25053,7 @@
         <p:spPr>
           <a:xfrm>
             <a:off x="7426440" y="3110040"/>
-            <a:ext cx="4381200" cy="1495080"/>
+            <a:ext cx="4380840" cy="1494720"/>
           </a:xfrm>
           <a:custGeom>
             <a:avLst/>
@@ -25254,7 +25107,7 @@
         <p:spPr>
           <a:xfrm>
             <a:off x="7660080" y="3343320"/>
-            <a:ext cx="380520" cy="380520"/>
+            <a:ext cx="380160" cy="380160"/>
           </a:xfrm>
           <a:custGeom>
             <a:avLst/>
@@ -25305,7 +25158,7 @@
         <p:spPr>
           <a:xfrm>
             <a:off x="7767000" y="3448080"/>
-            <a:ext cx="171000" cy="171000"/>
+            <a:ext cx="170640" cy="170640"/>
           </a:xfrm>
           <a:custGeom>
             <a:avLst/>
@@ -25581,7 +25434,7 @@
         <p:spPr>
           <a:xfrm>
             <a:off x="8155440" y="3400560"/>
-            <a:ext cx="866520" cy="266400"/>
+            <a:ext cx="866160" cy="266040"/>
           </a:xfrm>
           <a:prstGeom prst="rect">
             <a:avLst/>
@@ -25633,7 +25486,7 @@
         <p:spPr>
           <a:xfrm>
             <a:off x="7660080" y="3876840"/>
-            <a:ext cx="3990600" cy="495000"/>
+            <a:ext cx="3990240" cy="494640"/>
           </a:xfrm>
           <a:prstGeom prst="rect">
             <a:avLst/>
@@ -25661,16 +25514,19 @@
               <a:buNone/>
             </a:pPr>
             <a:r>
-              <a:rPr b="0" lang="en-US" sz="1200" spc="-1" strike="noStrike">
-                <a:solidFill>
-                  <a:srgbClr val="636e72"/>
+              <a:rPr b="0" i="1" lang="en-US" sz="1200" spc="-1" strike="noStrike">
+                <a:solidFill>
+                  <a:srgbClr val="00008b"/>
                 </a:solidFill>
                 <a:latin typeface="Quattrocento Sans"/>
                 <a:ea typeface="Quattrocento Sans"/>
               </a:rPr>
               <a:t>Complete plans of action available to each player, specifying choices at every decision point.</a:t>
             </a:r>
-            <a:endParaRPr b="0" lang="en-HK" sz="1200" spc="-1" strike="noStrike">
+            <a:endParaRPr b="0" i="1" lang="en-HK" sz="1200" spc="-1" strike="noStrike">
+              <a:solidFill>
+                <a:srgbClr val="00008b"/>
+              </a:solidFill>
               <a:latin typeface="Arial"/>
             </a:endParaRPr>
           </a:p>
@@ -25685,7 +25541,7 @@
         <p:spPr>
           <a:xfrm>
             <a:off x="7426440" y="4843440"/>
-            <a:ext cx="4381200" cy="1495080"/>
+            <a:ext cx="4380840" cy="1494720"/>
           </a:xfrm>
           <a:custGeom>
             <a:avLst/>
@@ -25739,7 +25595,7 @@
         <p:spPr>
           <a:xfrm>
             <a:off x="7660080" y="5076720"/>
-            <a:ext cx="380520" cy="380520"/>
+            <a:ext cx="380160" cy="380160"/>
           </a:xfrm>
           <a:custGeom>
             <a:avLst/>
@@ -25790,7 +25646,7 @@
         <p:spPr>
           <a:xfrm>
             <a:off x="7767000" y="5181480"/>
-            <a:ext cx="171000" cy="171000"/>
+            <a:ext cx="170640" cy="170640"/>
           </a:xfrm>
           <a:custGeom>
             <a:avLst/>
@@ -25967,7 +25823,7 @@
         <p:spPr>
           <a:xfrm>
             <a:off x="8155440" y="5133960"/>
-            <a:ext cx="657000" cy="266400"/>
+            <a:ext cx="656640" cy="266040"/>
           </a:xfrm>
           <a:prstGeom prst="rect">
             <a:avLst/>
@@ -26019,7 +25875,7 @@
         <p:spPr>
           <a:xfrm>
             <a:off x="7660080" y="5610240"/>
-            <a:ext cx="3990600" cy="495000"/>
+            <a:ext cx="3990240" cy="494640"/>
           </a:xfrm>
           <a:prstGeom prst="rect">
             <a:avLst/>
@@ -26047,16 +25903,19 @@
               <a:buNone/>
             </a:pPr>
             <a:r>
-              <a:rPr b="0" lang="en-US" sz="1200" spc="-1" strike="noStrike">
-                <a:solidFill>
-                  <a:srgbClr val="636e72"/>
+              <a:rPr b="0" i="1" lang="en-US" sz="1200" spc="-1" strike="noStrike">
+                <a:solidFill>
+                  <a:srgbClr val="00008b"/>
                 </a:solidFill>
                 <a:latin typeface="Quattrocento Sans"/>
                 <a:ea typeface="Quattrocento Sans"/>
               </a:rPr>
               <a:t>Numerical values representing utility or benefit received by players for each outcome.</a:t>
             </a:r>
-            <a:endParaRPr b="0" lang="en-HK" sz="1200" spc="-1" strike="noStrike">
+            <a:endParaRPr b="0" i="1" lang="en-HK" sz="1200" spc="-1" strike="noStrike">
+              <a:solidFill>
+                <a:srgbClr val="00008b"/>
+              </a:solidFill>
               <a:latin typeface="Arial"/>
             </a:endParaRPr>
           </a:p>
@@ -26108,7 +25967,7 @@
         <p:spPr>
           <a:xfrm>
             <a:off x="609480" y="1781280"/>
-            <a:ext cx="12191760" cy="1218960"/>
+            <a:ext cx="12191400" cy="1218600"/>
           </a:xfrm>
           <a:prstGeom prst="rect">
             <a:avLst/>
@@ -26162,7 +26021,7 @@
         <p:spPr>
           <a:xfrm>
             <a:off x="609480" y="3152880"/>
-            <a:ext cx="11867760" cy="1142640"/>
+            <a:ext cx="11867400" cy="1142280"/>
           </a:xfrm>
           <a:prstGeom prst="rect">
             <a:avLst/>
@@ -26235,7 +26094,7 @@
         <p:spPr>
           <a:xfrm>
             <a:off x="609480" y="4524480"/>
-            <a:ext cx="1218960" cy="18720"/>
+            <a:ext cx="1218600" cy="18360"/>
           </a:xfrm>
           <a:custGeom>
             <a:avLst/>
@@ -26286,7 +26145,7 @@
         <p:spPr>
           <a:xfrm>
             <a:off x="609480" y="4772160"/>
-            <a:ext cx="11696400" cy="304560"/>
+            <a:ext cx="11696040" cy="304200"/>
           </a:xfrm>
           <a:prstGeom prst="rect">
             <a:avLst/>
@@ -26375,7 +26234,7 @@
         <p:spPr>
           <a:xfrm>
             <a:off x="324360" y="324360"/>
-            <a:ext cx="11607840" cy="194040"/>
+            <a:ext cx="11607480" cy="193680"/>
           </a:xfrm>
           <a:prstGeom prst="rect">
             <a:avLst/>
@@ -26403,7 +26262,7 @@
               <a:buNone/>
             </a:pPr>
             <a:r>
-              <a:rPr b="1" lang="en-US" sz="1020" spc="49" strike="noStrike">
+              <a:rPr b="1" lang="en-US" sz="1020" spc="46" strike="noStrike">
                 <a:solidFill>
                   <a:srgbClr val="0984e3"/>
                 </a:solidFill>
@@ -26427,7 +26286,7 @@
         <p:spPr>
           <a:xfrm>
             <a:off x="324360" y="583560"/>
-            <a:ext cx="11737800" cy="388800"/>
+            <a:ext cx="11737440" cy="388440"/>
           </a:xfrm>
           <a:prstGeom prst="rect">
             <a:avLst/>
@@ -26479,7 +26338,7 @@
         <p:spPr>
           <a:xfrm>
             <a:off x="6095880" y="1167480"/>
-            <a:ext cx="15840" cy="4977000"/>
+            <a:ext cx="15480" cy="4976640"/>
           </a:xfrm>
           <a:custGeom>
             <a:avLst/>
@@ -26530,7 +26389,7 @@
         <p:spPr>
           <a:xfrm>
             <a:off x="1638000" y="1171440"/>
-            <a:ext cx="3866400" cy="721080"/>
+            <a:ext cx="3866040" cy="720720"/>
           </a:xfrm>
           <a:custGeom>
             <a:avLst/>
@@ -26584,7 +26443,7 @@
         <p:spPr>
           <a:xfrm>
             <a:off x="1698840" y="1305000"/>
-            <a:ext cx="3672000" cy="226440"/>
+            <a:ext cx="3671640" cy="226080"/>
           </a:xfrm>
           <a:prstGeom prst="rect">
             <a:avLst/>
@@ -26636,7 +26495,7 @@
         <p:spPr>
           <a:xfrm>
             <a:off x="1706760" y="1564560"/>
-            <a:ext cx="3663720" cy="194040"/>
+            <a:ext cx="3663360" cy="193680"/>
           </a:xfrm>
           <a:prstGeom prst="rect">
             <a:avLst/>
@@ -26688,7 +26547,7 @@
         <p:spPr>
           <a:xfrm>
             <a:off x="6683760" y="2030760"/>
-            <a:ext cx="3290760" cy="721080"/>
+            <a:ext cx="3290400" cy="720720"/>
           </a:xfrm>
           <a:custGeom>
             <a:avLst/>
@@ -26742,7 +26601,7 @@
         <p:spPr>
           <a:xfrm>
             <a:off x="6817320" y="2164320"/>
-            <a:ext cx="3096360" cy="226440"/>
+            <a:ext cx="3096000" cy="226080"/>
           </a:xfrm>
           <a:prstGeom prst="rect">
             <a:avLst/>
@@ -26794,7 +26653,7 @@
         <p:spPr>
           <a:xfrm>
             <a:off x="6817320" y="2423880"/>
-            <a:ext cx="3088080" cy="194040"/>
+            <a:ext cx="3087720" cy="193680"/>
           </a:xfrm>
           <a:prstGeom prst="rect">
             <a:avLst/>
@@ -26846,7 +26705,7 @@
         <p:spPr>
           <a:xfrm>
             <a:off x="633600" y="2885760"/>
-            <a:ext cx="4879800" cy="713160"/>
+            <a:ext cx="4879440" cy="712800"/>
           </a:xfrm>
           <a:custGeom>
             <a:avLst/>
@@ -26897,7 +26756,7 @@
         <p:spPr>
           <a:xfrm>
             <a:off x="633600" y="2885760"/>
-            <a:ext cx="32040" cy="713160"/>
+            <a:ext cx="31680" cy="712800"/>
           </a:xfrm>
           <a:custGeom>
             <a:avLst/>
@@ -26948,7 +26807,7 @@
         <p:spPr>
           <a:xfrm>
             <a:off x="706680" y="3015720"/>
-            <a:ext cx="4677120" cy="226440"/>
+            <a:ext cx="4676760" cy="226080"/>
           </a:xfrm>
           <a:prstGeom prst="rect">
             <a:avLst/>
@@ -27000,7 +26859,7 @@
         <p:spPr>
           <a:xfrm>
             <a:off x="714960" y="3274920"/>
-            <a:ext cx="4668840" cy="194040"/>
+            <a:ext cx="4668480" cy="193680"/>
           </a:xfrm>
           <a:prstGeom prst="rect">
             <a:avLst/>
@@ -27062,7 +26921,7 @@
         <p:spPr>
           <a:xfrm>
             <a:off x="6696000" y="3728880"/>
-            <a:ext cx="5017320" cy="713160"/>
+            <a:ext cx="5016960" cy="712800"/>
           </a:xfrm>
           <a:custGeom>
             <a:avLst/>
@@ -27113,7 +26972,7 @@
         <p:spPr>
           <a:xfrm>
             <a:off x="6696000" y="3728880"/>
-            <a:ext cx="32040" cy="713160"/>
+            <a:ext cx="31680" cy="712800"/>
           </a:xfrm>
           <a:custGeom>
             <a:avLst/>
@@ -27164,7 +27023,7 @@
         <p:spPr>
           <a:xfrm>
             <a:off x="6841800" y="3858480"/>
-            <a:ext cx="4815000" cy="226440"/>
+            <a:ext cx="4814640" cy="226080"/>
           </a:xfrm>
           <a:prstGeom prst="rect">
             <a:avLst/>
@@ -27216,7 +27075,7 @@
         <p:spPr>
           <a:xfrm>
             <a:off x="6841800" y="4118040"/>
-            <a:ext cx="4806720" cy="194040"/>
+            <a:ext cx="4806360" cy="193680"/>
           </a:xfrm>
           <a:prstGeom prst="rect">
             <a:avLst/>
@@ -27278,7 +27137,7 @@
         <p:spPr>
           <a:xfrm>
             <a:off x="1476360" y="4572000"/>
-            <a:ext cx="4036680" cy="713160"/>
+            <a:ext cx="4036320" cy="712800"/>
           </a:xfrm>
           <a:custGeom>
             <a:avLst/>
@@ -27329,7 +27188,7 @@
         <p:spPr>
           <a:xfrm>
             <a:off x="1532880" y="4701600"/>
-            <a:ext cx="3850200" cy="226440"/>
+            <a:ext cx="3849840" cy="226080"/>
           </a:xfrm>
           <a:prstGeom prst="rect">
             <a:avLst/>
@@ -27381,7 +27240,7 @@
         <p:spPr>
           <a:xfrm>
             <a:off x="1541160" y="4961160"/>
-            <a:ext cx="3841920" cy="194040"/>
+            <a:ext cx="3841560" cy="193680"/>
           </a:xfrm>
           <a:prstGeom prst="rect">
             <a:avLst/>
@@ -27443,7 +27302,7 @@
         <p:spPr>
           <a:xfrm>
             <a:off x="6683760" y="5419080"/>
-            <a:ext cx="3988080" cy="721080"/>
+            <a:ext cx="3987720" cy="720720"/>
           </a:xfrm>
           <a:custGeom>
             <a:avLst/>
@@ -27497,7 +27356,7 @@
         <p:spPr>
           <a:xfrm>
             <a:off x="6817320" y="5553000"/>
-            <a:ext cx="3793320" cy="226440"/>
+            <a:ext cx="3792960" cy="226080"/>
           </a:xfrm>
           <a:prstGeom prst="rect">
             <a:avLst/>
@@ -27549,7 +27408,7 @@
         <p:spPr>
           <a:xfrm>
             <a:off x="6817320" y="5812200"/>
-            <a:ext cx="3785400" cy="194040"/>
+            <a:ext cx="3785040" cy="193680"/>
           </a:xfrm>
           <a:prstGeom prst="rect">
             <a:avLst/>
@@ -27601,7 +27460,7 @@
         <p:spPr>
           <a:xfrm>
             <a:off x="6031080" y="1467360"/>
-            <a:ext cx="129240" cy="129240"/>
+            <a:ext cx="128880" cy="128880"/>
           </a:xfrm>
           <a:custGeom>
             <a:avLst/>
@@ -27672,7 +27531,7 @@
         <p:spPr>
           <a:xfrm>
             <a:off x="6031080" y="2326680"/>
-            <a:ext cx="129240" cy="129240"/>
+            <a:ext cx="128880" cy="128880"/>
           </a:xfrm>
           <a:custGeom>
             <a:avLst/>
@@ -27743,7 +27602,7 @@
         <p:spPr>
           <a:xfrm>
             <a:off x="6031080" y="3177720"/>
-            <a:ext cx="129240" cy="129240"/>
+            <a:ext cx="128880" cy="128880"/>
           </a:xfrm>
           <a:custGeom>
             <a:avLst/>
@@ -27814,7 +27673,7 @@
         <p:spPr>
           <a:xfrm>
             <a:off x="6031080" y="4020840"/>
-            <a:ext cx="129240" cy="129240"/>
+            <a:ext cx="128880" cy="128880"/>
           </a:xfrm>
           <a:custGeom>
             <a:avLst/>
@@ -27885,7 +27744,7 @@
         <p:spPr>
           <a:xfrm>
             <a:off x="6031080" y="4863960"/>
-            <a:ext cx="129240" cy="129240"/>
+            <a:ext cx="128880" cy="128880"/>
           </a:xfrm>
           <a:custGeom>
             <a:avLst/>
@@ -27956,7 +27815,7 @@
         <p:spPr>
           <a:xfrm>
             <a:off x="6031080" y="5715000"/>
-            <a:ext cx="129240" cy="129240"/>
+            <a:ext cx="128880" cy="128880"/>
           </a:xfrm>
           <a:custGeom>
             <a:avLst/>
@@ -28064,7 +27923,7 @@
         <p:spPr>
           <a:xfrm>
             <a:off x="380880" y="380880"/>
-            <a:ext cx="11505960" cy="228240"/>
+            <a:ext cx="11505600" cy="227880"/>
           </a:xfrm>
           <a:prstGeom prst="rect">
             <a:avLst/>
@@ -28092,7 +27951,7 @@
               <a:buNone/>
             </a:pPr>
             <a:r>
-              <a:rPr b="1" lang="en-US" sz="1200" spc="58" strike="noStrike">
+              <a:rPr b="1" lang="en-US" sz="1200" spc="55" strike="noStrike">
                 <a:solidFill>
                   <a:srgbClr val="0984e3"/>
                 </a:solidFill>
@@ -28116,7 +27975,7 @@
         <p:spPr>
           <a:xfrm>
             <a:off x="380880" y="685800"/>
-            <a:ext cx="11658240" cy="456840"/>
+            <a:ext cx="11657880" cy="456480"/>
           </a:xfrm>
           <a:prstGeom prst="rect">
             <a:avLst/>
@@ -28168,7 +28027,7 @@
         <p:spPr>
           <a:xfrm>
             <a:off x="380880" y="1371600"/>
-            <a:ext cx="4390560" cy="3047760"/>
+            <a:ext cx="4390200" cy="3047400"/>
           </a:xfrm>
           <a:prstGeom prst="roundRect">
             <a:avLst>
@@ -28200,7 +28059,7 @@
         <p:spPr>
           <a:xfrm>
             <a:off x="399960" y="4648320"/>
-            <a:ext cx="4371480" cy="1142640"/>
+            <a:ext cx="4371120" cy="1142280"/>
           </a:xfrm>
           <a:custGeom>
             <a:avLst/>
@@ -28251,7 +28110,7 @@
         <p:spPr>
           <a:xfrm>
             <a:off x="399960" y="4648320"/>
-            <a:ext cx="37800" cy="1142640"/>
+            <a:ext cx="37440" cy="1142280"/>
           </a:xfrm>
           <a:custGeom>
             <a:avLst/>
@@ -28302,7 +28161,7 @@
         <p:spPr>
           <a:xfrm>
             <a:off x="609480" y="4838760"/>
-            <a:ext cx="4047840" cy="495000"/>
+            <a:ext cx="4047480" cy="494640"/>
           </a:xfrm>
           <a:prstGeom prst="rect">
             <a:avLst/>
@@ -28354,7 +28213,7 @@
         <p:spPr>
           <a:xfrm>
             <a:off x="609480" y="5410080"/>
-            <a:ext cx="4038120" cy="190080"/>
+            <a:ext cx="4037760" cy="189720"/>
           </a:xfrm>
           <a:prstGeom prst="rect">
             <a:avLst/>
@@ -28416,7 +28275,7 @@
         <p:spPr>
           <a:xfrm>
             <a:off x="5074920" y="1371600"/>
-            <a:ext cx="6848280" cy="304560"/>
+            <a:ext cx="6847920" cy="304200"/>
           </a:xfrm>
           <a:prstGeom prst="rect">
             <a:avLst/>
@@ -28468,7 +28327,7 @@
         <p:spPr>
           <a:xfrm>
             <a:off x="5074920" y="1752480"/>
-            <a:ext cx="6810120" cy="990360"/>
+            <a:ext cx="6809760" cy="990000"/>
           </a:xfrm>
           <a:prstGeom prst="rect">
             <a:avLst/>
@@ -28520,7 +28379,7 @@
         <p:spPr>
           <a:xfrm>
             <a:off x="5074920" y="2895480"/>
-            <a:ext cx="6848280" cy="304560"/>
+            <a:ext cx="6847920" cy="304200"/>
           </a:xfrm>
           <a:prstGeom prst="rect">
             <a:avLst/>
@@ -28572,7 +28431,7 @@
         <p:spPr>
           <a:xfrm>
             <a:off x="5074920" y="3276720"/>
-            <a:ext cx="6810120" cy="990360"/>
+            <a:ext cx="6809760" cy="990000"/>
           </a:xfrm>
           <a:prstGeom prst="rect">
             <a:avLst/>
@@ -28644,7 +28503,7 @@
         <p:spPr>
           <a:xfrm>
             <a:off x="5074920" y="4419720"/>
-            <a:ext cx="6848280" cy="304560"/>
+            <a:ext cx="6847920" cy="304200"/>
           </a:xfrm>
           <a:prstGeom prst="rect">
             <a:avLst/>
@@ -28696,7 +28555,7 @@
         <p:spPr>
           <a:xfrm>
             <a:off x="5074920" y="4800600"/>
-            <a:ext cx="6810120" cy="990360"/>
+            <a:ext cx="6809760" cy="990000"/>
           </a:xfrm>
           <a:prstGeom prst="rect">
             <a:avLst/>
@@ -28805,7 +28664,7 @@
         <p:spPr>
           <a:xfrm>
             <a:off x="609480" y="1781280"/>
-            <a:ext cx="12191760" cy="1218960"/>
+            <a:ext cx="12191400" cy="1218600"/>
           </a:xfrm>
           <a:prstGeom prst="rect">
             <a:avLst/>
@@ -28859,7 +28718,7 @@
         <p:spPr>
           <a:xfrm>
             <a:off x="609480" y="3152880"/>
-            <a:ext cx="11867760" cy="1142640"/>
+            <a:ext cx="11867400" cy="1142280"/>
           </a:xfrm>
           <a:prstGeom prst="rect">
             <a:avLst/>
@@ -28932,7 +28791,7 @@
         <p:spPr>
           <a:xfrm>
             <a:off x="609480" y="4524480"/>
-            <a:ext cx="1218960" cy="18720"/>
+            <a:ext cx="1218600" cy="18360"/>
           </a:xfrm>
           <a:custGeom>
             <a:avLst/>
@@ -28983,7 +28842,7 @@
         <p:spPr>
           <a:xfrm>
             <a:off x="609480" y="4772160"/>
-            <a:ext cx="11696400" cy="304560"/>
+            <a:ext cx="11696040" cy="304200"/>
           </a:xfrm>
           <a:prstGeom prst="rect">
             <a:avLst/>
@@ -29072,7 +28931,7 @@
         <p:spPr>
           <a:xfrm>
             <a:off x="380880" y="380880"/>
-            <a:ext cx="11505960" cy="228240"/>
+            <a:ext cx="11505600" cy="227880"/>
           </a:xfrm>
           <a:prstGeom prst="rect">
             <a:avLst/>
@@ -29100,7 +28959,7 @@
               <a:buNone/>
             </a:pPr>
             <a:r>
-              <a:rPr b="1" lang="en-US" sz="1200" spc="58" strike="noStrike">
+              <a:rPr b="1" lang="en-US" sz="1200" spc="55" strike="noStrike">
                 <a:solidFill>
                   <a:srgbClr val="0984e3"/>
                 </a:solidFill>
@@ -29124,7 +28983,7 @@
         <p:spPr>
           <a:xfrm>
             <a:off x="380880" y="685800"/>
-            <a:ext cx="11658240" cy="456840"/>
+            <a:ext cx="11657880" cy="456480"/>
           </a:xfrm>
           <a:prstGeom prst="rect">
             <a:avLst/>
@@ -29176,7 +29035,7 @@
         <p:spPr>
           <a:xfrm>
             <a:off x="380880" y="1371600"/>
-            <a:ext cx="5657400" cy="1238040"/>
+            <a:ext cx="5657040" cy="1237680"/>
           </a:xfrm>
           <a:prstGeom prst="rect">
             <a:avLst/>
@@ -29238,7 +29097,7 @@
         <p:spPr>
           <a:xfrm>
             <a:off x="380880" y="2762280"/>
-            <a:ext cx="5648040" cy="837720"/>
+            <a:ext cx="5647680" cy="837360"/>
           </a:xfrm>
           <a:prstGeom prst="rect">
             <a:avLst/>
@@ -29290,7 +29149,7 @@
         <p:spPr>
           <a:xfrm>
             <a:off x="399960" y="3750480"/>
-            <a:ext cx="5543280" cy="1599840"/>
+            <a:ext cx="5542920" cy="1599480"/>
           </a:xfrm>
           <a:custGeom>
             <a:avLst/>
@@ -29341,7 +29200,7 @@
         <p:spPr>
           <a:xfrm>
             <a:off x="399960" y="3750480"/>
-            <a:ext cx="37800" cy="1599840"/>
+            <a:ext cx="37440" cy="1599480"/>
           </a:xfrm>
           <a:custGeom>
             <a:avLst/>
@@ -29392,7 +29251,7 @@
         <p:spPr>
           <a:xfrm>
             <a:off x="609480" y="3940920"/>
-            <a:ext cx="5238360" cy="266400"/>
+            <a:ext cx="5238000" cy="266040"/>
           </a:xfrm>
           <a:prstGeom prst="rect">
             <a:avLst/>
@@ -29444,7 +29303,7 @@
         <p:spPr>
           <a:xfrm>
             <a:off x="609480" y="4321800"/>
-            <a:ext cx="5219280" cy="228240"/>
+            <a:ext cx="5218920" cy="227880"/>
           </a:xfrm>
           <a:prstGeom prst="rect">
             <a:avLst/>
@@ -29506,7 +29365,7 @@
         <p:spPr>
           <a:xfrm>
             <a:off x="609480" y="4626720"/>
-            <a:ext cx="5219280" cy="228240"/>
+            <a:ext cx="5218920" cy="227880"/>
           </a:xfrm>
           <a:prstGeom prst="rect">
             <a:avLst/>
@@ -29568,7 +29427,7 @@
         <p:spPr>
           <a:xfrm>
             <a:off x="609480" y="4931640"/>
-            <a:ext cx="5219280" cy="228240"/>
+            <a:ext cx="5218920" cy="227880"/>
           </a:xfrm>
           <a:prstGeom prst="rect">
             <a:avLst/>
@@ -29630,7 +29489,7 @@
         <p:spPr>
           <a:xfrm>
             <a:off x="6253200" y="1618200"/>
-            <a:ext cx="5552640" cy="3485880"/>
+            <a:ext cx="5552280" cy="3485520"/>
           </a:xfrm>
           <a:custGeom>
             <a:avLst/>
@@ -29684,7 +29543,7 @@
         <p:spPr>
           <a:xfrm>
             <a:off x="6438960" y="1851480"/>
-            <a:ext cx="5181120" cy="266400"/>
+            <a:ext cx="5180760" cy="266040"/>
           </a:xfrm>
           <a:prstGeom prst="rect">
             <a:avLst/>
@@ -29736,7 +29595,7 @@
         <p:spPr>
           <a:xfrm>
             <a:off x="6448320" y="2270520"/>
-            <a:ext cx="5162040" cy="228240"/>
+            <a:ext cx="5161680" cy="227880"/>
           </a:xfrm>
           <a:prstGeom prst="rect">
             <a:avLst/>
@@ -29787,7 +29646,7 @@
         </p:nvGraphicFramePr>
         <p:xfrm>
           <a:off x="6486480" y="2651400"/>
-          <a:ext cx="5086080" cy="1409400"/>
+          <a:ext cx="5085720" cy="1409040"/>
         </p:xfrm>
         <a:graphic>
           <a:graphicData uri="http://schemas.openxmlformats.org/drawingml/2006/table">
@@ -29828,7 +29687,7 @@
                 </a:tc>
                 <a:tc>
                   <a:txBody>
-                    <a:bodyPr lIns="114120" rIns="114120" tIns="114120" bIns="114120" anchor="ctr">
+                    <a:bodyPr lIns="114120" rIns="114120" anchor="ctr">
                       <a:noAutofit/>
                     </a:bodyPr>
                     <a:p>
@@ -29881,7 +29740,7 @@
                 </a:tc>
                 <a:tc>
                   <a:txBody>
-                    <a:bodyPr lIns="114120" rIns="114120" tIns="114120" bIns="114120" anchor="ctr">
+                    <a:bodyPr lIns="114120" rIns="114120" anchor="ctr">
                       <a:noAutofit/>
                     </a:bodyPr>
                     <a:p>
@@ -29936,7 +29795,7 @@
               <a:tr h="469800">
                 <a:tc>
                   <a:txBody>
-                    <a:bodyPr lIns="114120" rIns="114120" tIns="114120" bIns="114120" anchor="ctr">
+                    <a:bodyPr lIns="114120" rIns="114120" anchor="ctr">
                       <a:noAutofit/>
                     </a:bodyPr>
                     <a:p>
@@ -29989,7 +29848,7 @@
                 </a:tc>
                 <a:tc>
                   <a:txBody>
-                    <a:bodyPr lIns="114120" rIns="114120" tIns="114120" bIns="114120" anchor="ctr">
+                    <a:bodyPr lIns="114120" rIns="114120" anchor="ctr">
                       <a:noAutofit/>
                     </a:bodyPr>
                     <a:p>
@@ -30040,7 +29899,7 @@
                 </a:tc>
                 <a:tc>
                   <a:txBody>
-                    <a:bodyPr lIns="114120" rIns="114120" tIns="114120" bIns="114120" anchor="ctr">
+                    <a:bodyPr lIns="114120" rIns="114120" anchor="ctr">
                       <a:noAutofit/>
                     </a:bodyPr>
                     <a:p>
@@ -30093,7 +29952,7 @@
               <a:tr h="469800">
                 <a:tc>
                   <a:txBody>
-                    <a:bodyPr lIns="114120" rIns="114120" tIns="114120" bIns="114120" anchor="ctr">
+                    <a:bodyPr lIns="114120" rIns="114120" anchor="ctr">
                       <a:noAutofit/>
                     </a:bodyPr>
                     <a:p>
@@ -30146,7 +30005,7 @@
                 </a:tc>
                 <a:tc>
                   <a:txBody>
-                    <a:bodyPr lIns="114120" rIns="114120" tIns="114120" bIns="114120" anchor="ctr">
+                    <a:bodyPr lIns="114120" rIns="114120" anchor="ctr">
                       <a:noAutofit/>
                     </a:bodyPr>
                     <a:p>
@@ -30197,7 +30056,7 @@
                 </a:tc>
                 <a:tc>
                   <a:txBody>
-                    <a:bodyPr lIns="114120" rIns="114120" tIns="114120" bIns="114120" anchor="ctr">
+                    <a:bodyPr lIns="114120" rIns="114120" anchor="ctr">
                       <a:noAutofit/>
                     </a:bodyPr>
                     <a:p>
@@ -30260,7 +30119,7 @@
         <p:spPr>
           <a:xfrm>
             <a:off x="6486480" y="4218480"/>
-            <a:ext cx="5086080" cy="9000"/>
+            <a:ext cx="5085720" cy="8640"/>
           </a:xfrm>
           <a:custGeom>
             <a:avLst/>
@@ -30311,7 +30170,7 @@
         <p:spPr>
           <a:xfrm>
             <a:off x="6486480" y="4375440"/>
-            <a:ext cx="5162040" cy="495000"/>
+            <a:ext cx="5161680" cy="494640"/>
           </a:xfrm>
           <a:prstGeom prst="rect">
             <a:avLst/>

--- a/assets/libreoffice_impr_njc/3be4747b-a8aa-4b79-8f0c-0c7326a3d169/Game Theory.pptx
+++ b/assets/libreoffice_impr_njc/3be4747b-a8aa-4b79-8f0c-0c7326a3d169/Game Theory.pptx
@@ -312,7 +312,7 @@
             <a:pPr algn="r">
               <a:buNone/>
             </a:pPr>
-            <a:fld id="{EE353743-CC35-4A8F-8E6C-2AFC1E49CE30}" type="slidenum">
+            <a:fld id="{94B36BBD-3D9E-4270-AA0A-A1CEFE0F42F4}" type="slidenum">
               <a:rPr b="0" lang="en-HK" sz="1400" spc="-1" strike="noStrike">
                 <a:latin typeface="Times New Roman"/>
               </a:rPr>
@@ -360,7 +360,7 @@
         <p:spPr>
           <a:xfrm>
             <a:off x="685800" y="1143000"/>
-            <a:ext cx="5485680" cy="3085560"/>
+            <a:ext cx="5485320" cy="3085200"/>
           </a:xfrm>
           <a:prstGeom prst="rect">
             <a:avLst/>
@@ -383,7 +383,7 @@
         <p:spPr>
           <a:xfrm>
             <a:off x="685800" y="4400640"/>
-            <a:ext cx="5485680" cy="3599640"/>
+            <a:ext cx="5485320" cy="3599280"/>
           </a:xfrm>
           <a:prstGeom prst="rect">
             <a:avLst/>
@@ -417,7 +417,7 @@
         <p:spPr>
           <a:xfrm>
             <a:off x="3884760" y="8685360"/>
-            <a:ext cx="2971080" cy="457920"/>
+            <a:ext cx="2970720" cy="457560"/>
           </a:xfrm>
           <a:prstGeom prst="rect">
             <a:avLst/>
@@ -449,7 +449,7 @@
               </a:lnSpc>
               <a:buNone/>
             </a:pPr>
-            <a:fld id="{4A430E89-643C-4D17-AA29-200EBF802120}" type="slidenum">
+            <a:fld id="{A89F1729-7E23-4D15-9DC2-E0204A522688}" type="slidenum">
               <a:rPr b="0" lang="en-US" sz="1200" spc="-1" strike="noStrike">
                 <a:latin typeface="Times New Roman"/>
               </a:rPr>
@@ -496,7 +496,7 @@
         <p:spPr>
           <a:xfrm>
             <a:off x="685800" y="1143000"/>
-            <a:ext cx="5485680" cy="3085560"/>
+            <a:ext cx="5485320" cy="3085200"/>
           </a:xfrm>
           <a:prstGeom prst="rect">
             <a:avLst/>
@@ -519,7 +519,7 @@
         <p:spPr>
           <a:xfrm>
             <a:off x="685800" y="4400640"/>
-            <a:ext cx="5485680" cy="3599640"/>
+            <a:ext cx="5485320" cy="3599280"/>
           </a:xfrm>
           <a:prstGeom prst="rect">
             <a:avLst/>
@@ -553,7 +553,7 @@
         <p:spPr>
           <a:xfrm>
             <a:off x="3884760" y="8685360"/>
-            <a:ext cx="2971080" cy="457920"/>
+            <a:ext cx="2970720" cy="457560"/>
           </a:xfrm>
           <a:prstGeom prst="rect">
             <a:avLst/>
@@ -585,7 +585,7 @@
               </a:lnSpc>
               <a:buNone/>
             </a:pPr>
-            <a:fld id="{D285E54F-260F-4038-86AD-22D360527799}" type="slidenum">
+            <a:fld id="{4D74A47C-6719-4EDF-AA33-6E3FD0314EBC}" type="slidenum">
               <a:rPr b="0" lang="en-US" sz="1200" spc="-1" strike="noStrike">
                 <a:latin typeface="Times New Roman"/>
               </a:rPr>
@@ -632,7 +632,7 @@
         <p:spPr>
           <a:xfrm>
             <a:off x="685800" y="1143000"/>
-            <a:ext cx="5485680" cy="3085560"/>
+            <a:ext cx="5485320" cy="3085200"/>
           </a:xfrm>
           <a:prstGeom prst="rect">
             <a:avLst/>
@@ -655,7 +655,7 @@
         <p:spPr>
           <a:xfrm>
             <a:off x="685800" y="4400640"/>
-            <a:ext cx="5485680" cy="3599640"/>
+            <a:ext cx="5485320" cy="3599280"/>
           </a:xfrm>
           <a:prstGeom prst="rect">
             <a:avLst/>
@@ -689,7 +689,7 @@
         <p:spPr>
           <a:xfrm>
             <a:off x="3884760" y="8685360"/>
-            <a:ext cx="2971080" cy="457920"/>
+            <a:ext cx="2970720" cy="457560"/>
           </a:xfrm>
           <a:prstGeom prst="rect">
             <a:avLst/>
@@ -721,7 +721,7 @@
               </a:lnSpc>
               <a:buNone/>
             </a:pPr>
-            <a:fld id="{63BFEB29-AFCE-4512-8835-015A322B281B}" type="slidenum">
+            <a:fld id="{524F59DD-F28E-40A5-8582-379CC6DC1860}" type="slidenum">
               <a:rPr b="0" lang="en-US" sz="1200" spc="-1" strike="noStrike">
                 <a:latin typeface="Times New Roman"/>
               </a:rPr>
@@ -768,7 +768,7 @@
         <p:spPr>
           <a:xfrm>
             <a:off x="685800" y="1143000"/>
-            <a:ext cx="5485680" cy="3085560"/>
+            <a:ext cx="5485320" cy="3085200"/>
           </a:xfrm>
           <a:prstGeom prst="rect">
             <a:avLst/>
@@ -791,7 +791,7 @@
         <p:spPr>
           <a:xfrm>
             <a:off x="685800" y="4400640"/>
-            <a:ext cx="5485680" cy="3599640"/>
+            <a:ext cx="5485320" cy="3599280"/>
           </a:xfrm>
           <a:prstGeom prst="rect">
             <a:avLst/>
@@ -825,7 +825,7 @@
         <p:spPr>
           <a:xfrm>
             <a:off x="3884760" y="8685360"/>
-            <a:ext cx="2971080" cy="457920"/>
+            <a:ext cx="2970720" cy="457560"/>
           </a:xfrm>
           <a:prstGeom prst="rect">
             <a:avLst/>
@@ -857,7 +857,7 @@
               </a:lnSpc>
               <a:buNone/>
             </a:pPr>
-            <a:fld id="{66EBB481-FB15-4DA4-A8E1-002B3CC70F7B}" type="slidenum">
+            <a:fld id="{69B80F13-6234-4540-98E2-3A20B67DACB5}" type="slidenum">
               <a:rPr b="0" lang="en-US" sz="1200" spc="-1" strike="noStrike">
                 <a:latin typeface="Times New Roman"/>
               </a:rPr>
@@ -904,7 +904,7 @@
         <p:spPr>
           <a:xfrm>
             <a:off x="685800" y="1143000"/>
-            <a:ext cx="5485680" cy="3085560"/>
+            <a:ext cx="5485320" cy="3085200"/>
           </a:xfrm>
           <a:prstGeom prst="rect">
             <a:avLst/>
@@ -927,7 +927,7 @@
         <p:spPr>
           <a:xfrm>
             <a:off x="685800" y="4400640"/>
-            <a:ext cx="5485680" cy="3599640"/>
+            <a:ext cx="5485320" cy="3599280"/>
           </a:xfrm>
           <a:prstGeom prst="rect">
             <a:avLst/>
@@ -961,7 +961,7 @@
         <p:spPr>
           <a:xfrm>
             <a:off x="3884760" y="8685360"/>
-            <a:ext cx="2971080" cy="457920"/>
+            <a:ext cx="2970720" cy="457560"/>
           </a:xfrm>
           <a:prstGeom prst="rect">
             <a:avLst/>
@@ -993,7 +993,7 @@
               </a:lnSpc>
               <a:buNone/>
             </a:pPr>
-            <a:fld id="{FD3AFC48-B7D0-4A65-B059-079324CAB2DB}" type="slidenum">
+            <a:fld id="{909D4077-68AE-4B2D-B9EE-EDD54F0AB00C}" type="slidenum">
               <a:rPr b="0" lang="en-US" sz="1200" spc="-1" strike="noStrike">
                 <a:latin typeface="Times New Roman"/>
               </a:rPr>
@@ -1040,7 +1040,7 @@
         <p:spPr>
           <a:xfrm>
             <a:off x="685800" y="1143000"/>
-            <a:ext cx="5485680" cy="3085560"/>
+            <a:ext cx="5485320" cy="3085200"/>
           </a:xfrm>
           <a:prstGeom prst="rect">
             <a:avLst/>
@@ -1063,7 +1063,7 @@
         <p:spPr>
           <a:xfrm>
             <a:off x="685800" y="4400640"/>
-            <a:ext cx="5485680" cy="3599640"/>
+            <a:ext cx="5485320" cy="3599280"/>
           </a:xfrm>
           <a:prstGeom prst="rect">
             <a:avLst/>
@@ -1097,7 +1097,7 @@
         <p:spPr>
           <a:xfrm>
             <a:off x="3884760" y="8685360"/>
-            <a:ext cx="2971080" cy="457920"/>
+            <a:ext cx="2970720" cy="457560"/>
           </a:xfrm>
           <a:prstGeom prst="rect">
             <a:avLst/>
@@ -1129,7 +1129,7 @@
               </a:lnSpc>
               <a:buNone/>
             </a:pPr>
-            <a:fld id="{A4FBBBB9-AF1E-469B-A959-E52C685F85E2}" type="slidenum">
+            <a:fld id="{47A7911D-0114-4BB3-94FA-9E565CD302C7}" type="slidenum">
               <a:rPr b="0" lang="en-US" sz="1200" spc="-1" strike="noStrike">
                 <a:latin typeface="Times New Roman"/>
               </a:rPr>
@@ -1176,7 +1176,7 @@
         <p:spPr>
           <a:xfrm>
             <a:off x="685800" y="1143000"/>
-            <a:ext cx="5485680" cy="3085560"/>
+            <a:ext cx="5485320" cy="3085200"/>
           </a:xfrm>
           <a:prstGeom prst="rect">
             <a:avLst/>
@@ -1199,7 +1199,7 @@
         <p:spPr>
           <a:xfrm>
             <a:off x="685800" y="4400640"/>
-            <a:ext cx="5485680" cy="3599640"/>
+            <a:ext cx="5485320" cy="3599280"/>
           </a:xfrm>
           <a:prstGeom prst="rect">
             <a:avLst/>
@@ -1233,7 +1233,7 @@
         <p:spPr>
           <a:xfrm>
             <a:off x="3884760" y="8685360"/>
-            <a:ext cx="2971080" cy="457920"/>
+            <a:ext cx="2970720" cy="457560"/>
           </a:xfrm>
           <a:prstGeom prst="rect">
             <a:avLst/>
@@ -1265,7 +1265,7 @@
               </a:lnSpc>
               <a:buNone/>
             </a:pPr>
-            <a:fld id="{1F144D53-9954-4DFC-A9A5-9ECD89DE661D}" type="slidenum">
+            <a:fld id="{AFC1DE17-0338-4339-8E63-D1BC1763AE3E}" type="slidenum">
               <a:rPr b="0" lang="en-US" sz="1200" spc="-1" strike="noStrike">
                 <a:latin typeface="Times New Roman"/>
               </a:rPr>
@@ -1312,7 +1312,7 @@
         <p:spPr>
           <a:xfrm>
             <a:off x="685800" y="1143000"/>
-            <a:ext cx="5485680" cy="3085560"/>
+            <a:ext cx="5485320" cy="3085200"/>
           </a:xfrm>
           <a:prstGeom prst="rect">
             <a:avLst/>
@@ -1335,7 +1335,7 @@
         <p:spPr>
           <a:xfrm>
             <a:off x="685800" y="4400640"/>
-            <a:ext cx="5485680" cy="3599640"/>
+            <a:ext cx="5485320" cy="3599280"/>
           </a:xfrm>
           <a:prstGeom prst="rect">
             <a:avLst/>
@@ -1369,7 +1369,7 @@
         <p:spPr>
           <a:xfrm>
             <a:off x="3884760" y="8685360"/>
-            <a:ext cx="2971080" cy="457920"/>
+            <a:ext cx="2970720" cy="457560"/>
           </a:xfrm>
           <a:prstGeom prst="rect">
             <a:avLst/>
@@ -1401,7 +1401,7 @@
               </a:lnSpc>
               <a:buNone/>
             </a:pPr>
-            <a:fld id="{05DF149A-4554-479C-8B6C-8DC09A8D75A0}" type="slidenum">
+            <a:fld id="{01C49605-3FED-4D9C-ACA7-B35A1044E6E6}" type="slidenum">
               <a:rPr b="0" lang="en-US" sz="1200" spc="-1" strike="noStrike">
                 <a:latin typeface="Times New Roman"/>
               </a:rPr>
@@ -1448,7 +1448,7 @@
         <p:spPr>
           <a:xfrm>
             <a:off x="685800" y="1143000"/>
-            <a:ext cx="5485680" cy="3085560"/>
+            <a:ext cx="5485320" cy="3085200"/>
           </a:xfrm>
           <a:prstGeom prst="rect">
             <a:avLst/>
@@ -1471,7 +1471,7 @@
         <p:spPr>
           <a:xfrm>
             <a:off x="685800" y="4400640"/>
-            <a:ext cx="5485680" cy="3599640"/>
+            <a:ext cx="5485320" cy="3599280"/>
           </a:xfrm>
           <a:prstGeom prst="rect">
             <a:avLst/>
@@ -1505,7 +1505,7 @@
         <p:spPr>
           <a:xfrm>
             <a:off x="3884760" y="8685360"/>
-            <a:ext cx="2971080" cy="457920"/>
+            <a:ext cx="2970720" cy="457560"/>
           </a:xfrm>
           <a:prstGeom prst="rect">
             <a:avLst/>
@@ -1537,7 +1537,7 @@
               </a:lnSpc>
               <a:buNone/>
             </a:pPr>
-            <a:fld id="{E7AC03C1-5267-4DA8-8F1A-90EF257BC471}" type="slidenum">
+            <a:fld id="{82948815-F6CC-4E8D-9C3C-741BA64D6F9C}" type="slidenum">
               <a:rPr b="0" lang="en-US" sz="1200" spc="-1" strike="noStrike">
                 <a:latin typeface="Times New Roman"/>
               </a:rPr>
@@ -1584,7 +1584,7 @@
         <p:spPr>
           <a:xfrm>
             <a:off x="685800" y="1143000"/>
-            <a:ext cx="5485680" cy="3085560"/>
+            <a:ext cx="5485320" cy="3085200"/>
           </a:xfrm>
           <a:prstGeom prst="rect">
             <a:avLst/>
@@ -1607,7 +1607,7 @@
         <p:spPr>
           <a:xfrm>
             <a:off x="685800" y="4400640"/>
-            <a:ext cx="5485680" cy="3599640"/>
+            <a:ext cx="5485320" cy="3599280"/>
           </a:xfrm>
           <a:prstGeom prst="rect">
             <a:avLst/>
@@ -1641,7 +1641,7 @@
         <p:spPr>
           <a:xfrm>
             <a:off x="3884760" y="8685360"/>
-            <a:ext cx="2971080" cy="457920"/>
+            <a:ext cx="2970720" cy="457560"/>
           </a:xfrm>
           <a:prstGeom prst="rect">
             <a:avLst/>
@@ -1673,7 +1673,7 @@
               </a:lnSpc>
               <a:buNone/>
             </a:pPr>
-            <a:fld id="{88A64624-D49B-4D72-BEE0-FC1E9285CB1C}" type="slidenum">
+            <a:fld id="{DE4A07FD-2326-4302-9A75-9E41E06C6C9C}" type="slidenum">
               <a:rPr b="0" lang="en-US" sz="1200" spc="-1" strike="noStrike">
                 <a:latin typeface="Times New Roman"/>
               </a:rPr>
@@ -1720,7 +1720,7 @@
         <p:spPr>
           <a:xfrm>
             <a:off x="685800" y="1143000"/>
-            <a:ext cx="5485680" cy="3085560"/>
+            <a:ext cx="5485320" cy="3085200"/>
           </a:xfrm>
           <a:prstGeom prst="rect">
             <a:avLst/>
@@ -1743,7 +1743,7 @@
         <p:spPr>
           <a:xfrm>
             <a:off x="685800" y="4400640"/>
-            <a:ext cx="5485680" cy="3599640"/>
+            <a:ext cx="5485320" cy="3599280"/>
           </a:xfrm>
           <a:prstGeom prst="rect">
             <a:avLst/>
@@ -1777,7 +1777,7 @@
         <p:spPr>
           <a:xfrm>
             <a:off x="3884760" y="8685360"/>
-            <a:ext cx="2971080" cy="457920"/>
+            <a:ext cx="2970720" cy="457560"/>
           </a:xfrm>
           <a:prstGeom prst="rect">
             <a:avLst/>
@@ -1809,7 +1809,7 @@
               </a:lnSpc>
               <a:buNone/>
             </a:pPr>
-            <a:fld id="{504AD6D5-3B54-41AB-8DBB-1F0ECE50D82B}" type="slidenum">
+            <a:fld id="{60D42350-FE0E-43C4-BE4A-45FAE3D850E2}" type="slidenum">
               <a:rPr b="0" lang="en-US" sz="1200" spc="-1" strike="noStrike">
                 <a:latin typeface="Times New Roman"/>
               </a:rPr>
@@ -1856,7 +1856,7 @@
         <p:spPr>
           <a:xfrm>
             <a:off x="685800" y="1143000"/>
-            <a:ext cx="5485680" cy="3085560"/>
+            <a:ext cx="5485320" cy="3085200"/>
           </a:xfrm>
           <a:prstGeom prst="rect">
             <a:avLst/>
@@ -1879,7 +1879,7 @@
         <p:spPr>
           <a:xfrm>
             <a:off x="685800" y="4400640"/>
-            <a:ext cx="5485680" cy="3599640"/>
+            <a:ext cx="5485320" cy="3599280"/>
           </a:xfrm>
           <a:prstGeom prst="rect">
             <a:avLst/>
@@ -1913,7 +1913,7 @@
         <p:spPr>
           <a:xfrm>
             <a:off x="3884760" y="8685360"/>
-            <a:ext cx="2971080" cy="457920"/>
+            <a:ext cx="2970720" cy="457560"/>
           </a:xfrm>
           <a:prstGeom prst="rect">
             <a:avLst/>
@@ -1945,7 +1945,7 @@
               </a:lnSpc>
               <a:buNone/>
             </a:pPr>
-            <a:fld id="{02EA3664-82B7-4C7F-8A7A-5684340A4244}" type="slidenum">
+            <a:fld id="{80E089FC-6135-42AD-84A6-3D5A894AF527}" type="slidenum">
               <a:rPr b="0" lang="en-US" sz="1200" spc="-1" strike="noStrike">
                 <a:latin typeface="Times New Roman"/>
               </a:rPr>
@@ -1992,7 +1992,7 @@
         <p:spPr>
           <a:xfrm>
             <a:off x="685800" y="1143000"/>
-            <a:ext cx="5485680" cy="3085560"/>
+            <a:ext cx="5485320" cy="3085200"/>
           </a:xfrm>
           <a:prstGeom prst="rect">
             <a:avLst/>
@@ -2015,7 +2015,7 @@
         <p:spPr>
           <a:xfrm>
             <a:off x="685800" y="4400640"/>
-            <a:ext cx="5485680" cy="3599640"/>
+            <a:ext cx="5485320" cy="3599280"/>
           </a:xfrm>
           <a:prstGeom prst="rect">
             <a:avLst/>
@@ -2049,7 +2049,7 @@
         <p:spPr>
           <a:xfrm>
             <a:off x="3884760" y="8685360"/>
-            <a:ext cx="2971080" cy="457920"/>
+            <a:ext cx="2970720" cy="457560"/>
           </a:xfrm>
           <a:prstGeom prst="rect">
             <a:avLst/>
@@ -2081,7 +2081,7 @@
               </a:lnSpc>
               <a:buNone/>
             </a:pPr>
-            <a:fld id="{F916DDF1-8597-4F47-997E-7F68C078C1D6}" type="slidenum">
+            <a:fld id="{29636E88-0D1D-487D-99FD-549889DDE361}" type="slidenum">
               <a:rPr b="0" lang="en-US" sz="1200" spc="-1" strike="noStrike">
                 <a:latin typeface="Times New Roman"/>
               </a:rPr>
@@ -2128,7 +2128,7 @@
         <p:spPr>
           <a:xfrm>
             <a:off x="685800" y="1143000"/>
-            <a:ext cx="5485680" cy="3085560"/>
+            <a:ext cx="5485320" cy="3085200"/>
           </a:xfrm>
           <a:prstGeom prst="rect">
             <a:avLst/>
@@ -2151,7 +2151,7 @@
         <p:spPr>
           <a:xfrm>
             <a:off x="685800" y="4400640"/>
-            <a:ext cx="5485680" cy="3599640"/>
+            <a:ext cx="5485320" cy="3599280"/>
           </a:xfrm>
           <a:prstGeom prst="rect">
             <a:avLst/>
@@ -2185,7 +2185,7 @@
         <p:spPr>
           <a:xfrm>
             <a:off x="3884760" y="8685360"/>
-            <a:ext cx="2971080" cy="457920"/>
+            <a:ext cx="2970720" cy="457560"/>
           </a:xfrm>
           <a:prstGeom prst="rect">
             <a:avLst/>
@@ -2217,7 +2217,7 @@
               </a:lnSpc>
               <a:buNone/>
             </a:pPr>
-            <a:fld id="{04B21C55-20DC-41C9-8550-C22537D8933A}" type="slidenum">
+            <a:fld id="{CB7B5D7A-D472-48D0-BCE0-AC4B5D3F4264}" type="slidenum">
               <a:rPr b="0" lang="en-US" sz="1200" spc="-1" strike="noStrike">
                 <a:latin typeface="Times New Roman"/>
               </a:rPr>
@@ -2264,7 +2264,7 @@
         <p:spPr>
           <a:xfrm>
             <a:off x="685800" y="1143000"/>
-            <a:ext cx="5485680" cy="3085560"/>
+            <a:ext cx="5485320" cy="3085200"/>
           </a:xfrm>
           <a:prstGeom prst="rect">
             <a:avLst/>
@@ -2287,7 +2287,7 @@
         <p:spPr>
           <a:xfrm>
             <a:off x="685800" y="4400640"/>
-            <a:ext cx="5485680" cy="3599640"/>
+            <a:ext cx="5485320" cy="3599280"/>
           </a:xfrm>
           <a:prstGeom prst="rect">
             <a:avLst/>
@@ -2321,7 +2321,7 @@
         <p:spPr>
           <a:xfrm>
             <a:off x="3884760" y="8685360"/>
-            <a:ext cx="2971080" cy="457920"/>
+            <a:ext cx="2970720" cy="457560"/>
           </a:xfrm>
           <a:prstGeom prst="rect">
             <a:avLst/>
@@ -2353,7 +2353,7 @@
               </a:lnSpc>
               <a:buNone/>
             </a:pPr>
-            <a:fld id="{FFF0DFF0-4919-47F2-9765-40820A45A29C}" type="slidenum">
+            <a:fld id="{120C2021-1030-4988-87F8-77A8B31B48BC}" type="slidenum">
               <a:rPr b="0" lang="en-US" sz="1200" spc="-1" strike="noStrike">
                 <a:latin typeface="Times New Roman"/>
               </a:rPr>
@@ -2400,7 +2400,7 @@
         <p:spPr>
           <a:xfrm>
             <a:off x="685800" y="1143000"/>
-            <a:ext cx="5485680" cy="3085560"/>
+            <a:ext cx="5485320" cy="3085200"/>
           </a:xfrm>
           <a:prstGeom prst="rect">
             <a:avLst/>
@@ -2423,7 +2423,7 @@
         <p:spPr>
           <a:xfrm>
             <a:off x="685800" y="4400640"/>
-            <a:ext cx="5485680" cy="3599640"/>
+            <a:ext cx="5485320" cy="3599280"/>
           </a:xfrm>
           <a:prstGeom prst="rect">
             <a:avLst/>
@@ -2457,7 +2457,7 @@
         <p:spPr>
           <a:xfrm>
             <a:off x="3884760" y="8685360"/>
-            <a:ext cx="2971080" cy="457920"/>
+            <a:ext cx="2970720" cy="457560"/>
           </a:xfrm>
           <a:prstGeom prst="rect">
             <a:avLst/>
@@ -2489,7 +2489,7 @@
               </a:lnSpc>
               <a:buNone/>
             </a:pPr>
-            <a:fld id="{97FDDC73-3650-4C0D-8666-0D37E5F617C8}" type="slidenum">
+            <a:fld id="{1E63A79E-C749-4AE8-8B5B-A8FCD6C57288}" type="slidenum">
               <a:rPr b="0" lang="en-US" sz="1200" spc="-1" strike="noStrike">
                 <a:latin typeface="Times New Roman"/>
               </a:rPr>
@@ -2536,7 +2536,7 @@
         <p:spPr>
           <a:xfrm>
             <a:off x="685800" y="1143000"/>
-            <a:ext cx="5485680" cy="3085560"/>
+            <a:ext cx="5485320" cy="3085200"/>
           </a:xfrm>
           <a:prstGeom prst="rect">
             <a:avLst/>
@@ -2559,7 +2559,7 @@
         <p:spPr>
           <a:xfrm>
             <a:off x="685800" y="4400640"/>
-            <a:ext cx="5485680" cy="3599640"/>
+            <a:ext cx="5485320" cy="3599280"/>
           </a:xfrm>
           <a:prstGeom prst="rect">
             <a:avLst/>
@@ -2593,7 +2593,7 @@
         <p:spPr>
           <a:xfrm>
             <a:off x="3884760" y="8685360"/>
-            <a:ext cx="2971080" cy="457920"/>
+            <a:ext cx="2970720" cy="457560"/>
           </a:xfrm>
           <a:prstGeom prst="rect">
             <a:avLst/>
@@ -2625,7 +2625,7 @@
               </a:lnSpc>
               <a:buNone/>
             </a:pPr>
-            <a:fld id="{584C36DC-86F2-44AD-A4B3-C5843C861B4E}" type="slidenum">
+            <a:fld id="{D93D1799-1BD7-49BE-90CF-23B0F600DAE2}" type="slidenum">
               <a:rPr b="0" lang="en-US" sz="1200" spc="-1" strike="noStrike">
                 <a:latin typeface="Times New Roman"/>
               </a:rPr>
@@ -2672,7 +2672,7 @@
         <p:spPr>
           <a:xfrm>
             <a:off x="685800" y="1143000"/>
-            <a:ext cx="5485680" cy="3085560"/>
+            <a:ext cx="5485320" cy="3085200"/>
           </a:xfrm>
           <a:prstGeom prst="rect">
             <a:avLst/>
@@ -2695,7 +2695,7 @@
         <p:spPr>
           <a:xfrm>
             <a:off x="685800" y="4400640"/>
-            <a:ext cx="5485680" cy="3599640"/>
+            <a:ext cx="5485320" cy="3599280"/>
           </a:xfrm>
           <a:prstGeom prst="rect">
             <a:avLst/>
@@ -2729,7 +2729,7 @@
         <p:spPr>
           <a:xfrm>
             <a:off x="3884760" y="8685360"/>
-            <a:ext cx="2971080" cy="457920"/>
+            <a:ext cx="2970720" cy="457560"/>
           </a:xfrm>
           <a:prstGeom prst="rect">
             <a:avLst/>
@@ -2761,7 +2761,7 @@
               </a:lnSpc>
               <a:buNone/>
             </a:pPr>
-            <a:fld id="{6C22E38A-11C8-4D6E-8FAB-4CE7A7871A1C}" type="slidenum">
+            <a:fld id="{02EF6FD3-C1B7-4026-B3AC-E43584CB0904}" type="slidenum">
               <a:rPr b="0" lang="en-US" sz="1200" spc="-1" strike="noStrike">
                 <a:latin typeface="Times New Roman"/>
               </a:rPr>
@@ -2808,7 +2808,7 @@
         <p:spPr>
           <a:xfrm>
             <a:off x="685800" y="1143000"/>
-            <a:ext cx="5485680" cy="3085560"/>
+            <a:ext cx="5485320" cy="3085200"/>
           </a:xfrm>
           <a:prstGeom prst="rect">
             <a:avLst/>
@@ -2831,7 +2831,7 @@
         <p:spPr>
           <a:xfrm>
             <a:off x="685800" y="4400640"/>
-            <a:ext cx="5485680" cy="3599640"/>
+            <a:ext cx="5485320" cy="3599280"/>
           </a:xfrm>
           <a:prstGeom prst="rect">
             <a:avLst/>
@@ -2865,7 +2865,7 @@
         <p:spPr>
           <a:xfrm>
             <a:off x="3884760" y="8685360"/>
-            <a:ext cx="2971080" cy="457920"/>
+            <a:ext cx="2970720" cy="457560"/>
           </a:xfrm>
           <a:prstGeom prst="rect">
             <a:avLst/>
@@ -2897,7 +2897,7 @@
               </a:lnSpc>
               <a:buNone/>
             </a:pPr>
-            <a:fld id="{44FED2E1-4599-46C8-9A25-5209E41910CD}" type="slidenum">
+            <a:fld id="{CF652E16-76D9-4576-9F05-09F007C673F1}" type="slidenum">
               <a:rPr b="0" lang="en-US" sz="1200" spc="-1" strike="noStrike">
                 <a:latin typeface="Times New Roman"/>
               </a:rPr>
@@ -2944,7 +2944,7 @@
         <p:spPr>
           <a:xfrm>
             <a:off x="685800" y="1143000"/>
-            <a:ext cx="5485680" cy="3085560"/>
+            <a:ext cx="5485320" cy="3085200"/>
           </a:xfrm>
           <a:prstGeom prst="rect">
             <a:avLst/>
@@ -2967,7 +2967,7 @@
         <p:spPr>
           <a:xfrm>
             <a:off x="685800" y="4400640"/>
-            <a:ext cx="5485680" cy="3599640"/>
+            <a:ext cx="5485320" cy="3599280"/>
           </a:xfrm>
           <a:prstGeom prst="rect">
             <a:avLst/>
@@ -3001,7 +3001,7 @@
         <p:spPr>
           <a:xfrm>
             <a:off x="3884760" y="8685360"/>
-            <a:ext cx="2971080" cy="457920"/>
+            <a:ext cx="2970720" cy="457560"/>
           </a:xfrm>
           <a:prstGeom prst="rect">
             <a:avLst/>
@@ -3033,7 +3033,7 @@
               </a:lnSpc>
               <a:buNone/>
             </a:pPr>
-            <a:fld id="{040A806A-1855-451E-9364-603AD7932EF9}" type="slidenum">
+            <a:fld id="{D682E927-06A7-4421-B2F3-7EBAC31AE1A0}" type="slidenum">
               <a:rPr b="0" lang="en-US" sz="1200" spc="-1" strike="noStrike">
                 <a:latin typeface="Times New Roman"/>
               </a:rPr>
@@ -3080,7 +3080,7 @@
         <p:spPr>
           <a:xfrm>
             <a:off x="685800" y="1143000"/>
-            <a:ext cx="5485680" cy="3085560"/>
+            <a:ext cx="5485320" cy="3085200"/>
           </a:xfrm>
           <a:prstGeom prst="rect">
             <a:avLst/>
@@ -3103,7 +3103,7 @@
         <p:spPr>
           <a:xfrm>
             <a:off x="685800" y="4400640"/>
-            <a:ext cx="5485680" cy="3599640"/>
+            <a:ext cx="5485320" cy="3599280"/>
           </a:xfrm>
           <a:prstGeom prst="rect">
             <a:avLst/>
@@ -3137,7 +3137,7 @@
         <p:spPr>
           <a:xfrm>
             <a:off x="3884760" y="8685360"/>
-            <a:ext cx="2971080" cy="457920"/>
+            <a:ext cx="2970720" cy="457560"/>
           </a:xfrm>
           <a:prstGeom prst="rect">
             <a:avLst/>
@@ -3169,7 +3169,7 @@
               </a:lnSpc>
               <a:buNone/>
             </a:pPr>
-            <a:fld id="{B6AB4465-3FC7-45D4-A04A-61D723BF3930}" type="slidenum">
+            <a:fld id="{8B87F8C4-7A33-4D32-B933-FB6388F0CA08}" type="slidenum">
               <a:rPr b="0" lang="en-US" sz="1200" spc="-1" strike="noStrike">
                 <a:latin typeface="Times New Roman"/>
               </a:rPr>
@@ -5013,7 +5013,7 @@
         <p:spPr>
           <a:xfrm>
             <a:off x="5638680" y="2266920"/>
-            <a:ext cx="913680" cy="18360"/>
+            <a:ext cx="913320" cy="18000"/>
           </a:xfrm>
           <a:custGeom>
             <a:avLst/>
@@ -5064,7 +5064,7 @@
         <p:spPr>
           <a:xfrm>
             <a:off x="3633840" y="2514600"/>
-            <a:ext cx="4923720" cy="913680"/>
+            <a:ext cx="4923360" cy="913320"/>
           </a:xfrm>
           <a:prstGeom prst="rect">
             <a:avLst/>
@@ -5116,7 +5116,7 @@
         <p:spPr>
           <a:xfrm>
             <a:off x="5638680" y="3657600"/>
-            <a:ext cx="913680" cy="18360"/>
+            <a:ext cx="913320" cy="18000"/>
           </a:xfrm>
           <a:custGeom>
             <a:avLst/>
@@ -5167,7 +5167,7 @@
         <p:spPr>
           <a:xfrm>
             <a:off x="3545640" y="4286160"/>
-            <a:ext cx="5095080" cy="304200"/>
+            <a:ext cx="5094720" cy="303840"/>
           </a:xfrm>
           <a:prstGeom prst="rect">
             <a:avLst/>
@@ -5195,7 +5195,7 @@
               <a:buNone/>
             </a:pPr>
             <a:r>
-              <a:rPr b="0" lang="en-US" sz="1800" spc="41" strike="noStrike">
+              <a:rPr b="0" lang="en-US" sz="1800" spc="38" strike="noStrike">
                 <a:solidFill>
                   <a:srgbClr val="636e72"/>
                 </a:solidFill>
@@ -5256,7 +5256,7 @@
         <p:spPr>
           <a:xfrm>
             <a:off x="380880" y="380880"/>
-            <a:ext cx="11505600" cy="227880"/>
+            <a:ext cx="11505240" cy="227520"/>
           </a:xfrm>
           <a:prstGeom prst="rect">
             <a:avLst/>
@@ -5284,7 +5284,7 @@
               <a:buNone/>
             </a:pPr>
             <a:r>
-              <a:rPr b="1" lang="en-US" sz="1200" spc="55" strike="noStrike">
+              <a:rPr b="1" lang="en-US" sz="1200" spc="52" strike="noStrike">
                 <a:solidFill>
                   <a:srgbClr val="0984e3"/>
                 </a:solidFill>
@@ -5308,7 +5308,7 @@
         <p:spPr>
           <a:xfrm>
             <a:off x="380880" y="685800"/>
-            <a:ext cx="11657880" cy="456480"/>
+            <a:ext cx="11657520" cy="456120"/>
           </a:xfrm>
           <a:prstGeom prst="rect">
             <a:avLst/>
@@ -5360,7 +5360,7 @@
         <p:spPr>
           <a:xfrm>
             <a:off x="380880" y="1419120"/>
-            <a:ext cx="5496480" cy="828000"/>
+            <a:ext cx="5496120" cy="827640"/>
           </a:xfrm>
           <a:prstGeom prst="rect">
             <a:avLst/>
@@ -5412,7 +5412,7 @@
         <p:spPr>
           <a:xfrm>
             <a:off x="380880" y="2452680"/>
-            <a:ext cx="5647680" cy="837360"/>
+            <a:ext cx="5647320" cy="837000"/>
           </a:xfrm>
           <a:prstGeom prst="rect">
             <a:avLst/>
@@ -5464,7 +5464,7 @@
         <p:spPr>
           <a:xfrm>
             <a:off x="380880" y="3867120"/>
-            <a:ext cx="5562000" cy="2018520"/>
+            <a:ext cx="5561640" cy="2018160"/>
           </a:xfrm>
           <a:custGeom>
             <a:avLst/>
@@ -5515,7 +5515,7 @@
         <p:spPr>
           <a:xfrm>
             <a:off x="609480" y="4095720"/>
-            <a:ext cx="5199840" cy="266040"/>
+            <a:ext cx="5199480" cy="265680"/>
           </a:xfrm>
           <a:prstGeom prst="rect">
             <a:avLst/>
@@ -5567,7 +5567,7 @@
         <p:spPr>
           <a:xfrm>
             <a:off x="609480" y="4476600"/>
-            <a:ext cx="5180760" cy="246960"/>
+            <a:ext cx="5180400" cy="246600"/>
           </a:xfrm>
           <a:prstGeom prst="rect">
             <a:avLst/>
@@ -5659,7 +5659,7 @@
         <p:spPr>
           <a:xfrm>
             <a:off x="609480" y="4838760"/>
-            <a:ext cx="5104800" cy="456480"/>
+            <a:ext cx="5104440" cy="456120"/>
           </a:xfrm>
           <a:custGeom>
             <a:avLst/>
@@ -5710,24 +5710,24 @@
         <p:spPr>
           <a:xfrm>
             <a:off x="609480" y="4838760"/>
-            <a:ext cx="5180760" cy="456480"/>
-          </a:xfrm>
-          <a:prstGeom prst="rect">
-            <a:avLst/>
-          </a:prstGeom>
-          <a:noFill/>
-          <a:ln w="0">
-            <a:noFill/>
-          </a:ln>
-        </p:spPr>
-        <p:style>
-          <a:lnRef idx="0"/>
-          <a:fillRef idx="0"/>
-          <a:effectRef idx="0"/>
-          <a:fontRef idx="minor"/>
-        </p:style>
-        <p:txBody>
-          <a:bodyPr lIns="114480" rIns="114480" tIns="457200" bIns="457200" anchor="ctr">
+            <a:ext cx="5180400" cy="456120"/>
+          </a:xfrm>
+          <a:prstGeom prst="rect">
+            <a:avLst/>
+          </a:prstGeom>
+          <a:noFill/>
+          <a:ln w="0">
+            <a:noFill/>
+          </a:ln>
+        </p:spPr>
+        <p:style>
+          <a:lnRef idx="0"/>
+          <a:fillRef idx="0"/>
+          <a:effectRef idx="0"/>
+          <a:fontRef idx="minor"/>
+        </p:style>
+        <p:txBody>
+          <a:bodyPr lIns="114480" rIns="114480" tIns="456480" bIns="456480" anchor="ctr">
             <a:noAutofit/>
           </a:bodyPr>
           <a:p>
@@ -5762,7 +5762,7 @@
         <p:spPr>
           <a:xfrm>
             <a:off x="609480" y="5410080"/>
-            <a:ext cx="5180760" cy="246960"/>
+            <a:ext cx="5180400" cy="246600"/>
           </a:xfrm>
           <a:prstGeom prst="rect">
             <a:avLst/>
@@ -5834,7 +5834,7 @@
         <p:spPr>
           <a:xfrm>
             <a:off x="6253200" y="1376280"/>
-            <a:ext cx="5552280" cy="3209040"/>
+            <a:ext cx="5551920" cy="3208680"/>
           </a:xfrm>
           <a:custGeom>
             <a:avLst/>
@@ -5888,7 +5888,7 @@
         <p:spPr>
           <a:xfrm>
             <a:off x="6486480" y="1609560"/>
-            <a:ext cx="5180760" cy="266040"/>
+            <a:ext cx="5180400" cy="265680"/>
           </a:xfrm>
           <a:prstGeom prst="rect">
             <a:avLst/>
@@ -5940,7 +5940,7 @@
         <p:spPr>
           <a:xfrm>
             <a:off x="6486480" y="2028960"/>
-            <a:ext cx="304200" cy="304200"/>
+            <a:ext cx="303840" cy="303840"/>
           </a:xfrm>
           <a:custGeom>
             <a:avLst/>
@@ -5991,7 +5991,7 @@
         <p:spPr>
           <a:xfrm>
             <a:off x="6453360" y="2028960"/>
-            <a:ext cx="370800" cy="304200"/>
+            <a:ext cx="370440" cy="303840"/>
           </a:xfrm>
           <a:prstGeom prst="rect">
             <a:avLst/>
@@ -6043,7 +6043,7 @@
         <p:spPr>
           <a:xfrm>
             <a:off x="6905520" y="2028960"/>
-            <a:ext cx="3066480" cy="227880"/>
+            <a:ext cx="3066120" cy="227520"/>
           </a:xfrm>
           <a:prstGeom prst="rect">
             <a:avLst/>
@@ -6095,7 +6095,7 @@
         <p:spPr>
           <a:xfrm>
             <a:off x="6905520" y="2295360"/>
-            <a:ext cx="3066480" cy="227880"/>
+            <a:ext cx="3066120" cy="227520"/>
           </a:xfrm>
           <a:prstGeom prst="rect">
             <a:avLst/>
@@ -6147,7 +6147,7 @@
         <p:spPr>
           <a:xfrm>
             <a:off x="6486480" y="2638440"/>
-            <a:ext cx="304200" cy="304200"/>
+            <a:ext cx="303840" cy="303840"/>
           </a:xfrm>
           <a:custGeom>
             <a:avLst/>
@@ -6198,7 +6198,7 @@
         <p:spPr>
           <a:xfrm>
             <a:off x="6453360" y="2638440"/>
-            <a:ext cx="370800" cy="304200"/>
+            <a:ext cx="370440" cy="303840"/>
           </a:xfrm>
           <a:prstGeom prst="rect">
             <a:avLst/>
@@ -6250,7 +6250,7 @@
         <p:spPr>
           <a:xfrm>
             <a:off x="6905520" y="2638440"/>
-            <a:ext cx="3666240" cy="227880"/>
+            <a:ext cx="3665880" cy="227520"/>
           </a:xfrm>
           <a:prstGeom prst="rect">
             <a:avLst/>
@@ -6302,7 +6302,7 @@
         <p:spPr>
           <a:xfrm>
             <a:off x="6905520" y="2905200"/>
-            <a:ext cx="3666240" cy="227880"/>
+            <a:ext cx="3665880" cy="227520"/>
           </a:xfrm>
           <a:prstGeom prst="rect">
             <a:avLst/>
@@ -6354,7 +6354,7 @@
         <p:spPr>
           <a:xfrm>
             <a:off x="6486480" y="3247920"/>
-            <a:ext cx="304200" cy="304200"/>
+            <a:ext cx="303840" cy="303840"/>
           </a:xfrm>
           <a:custGeom>
             <a:avLst/>
@@ -6405,7 +6405,7 @@
         <p:spPr>
           <a:xfrm>
             <a:off x="6453360" y="3247920"/>
-            <a:ext cx="370800" cy="304200"/>
+            <a:ext cx="370440" cy="303840"/>
           </a:xfrm>
           <a:prstGeom prst="rect">
             <a:avLst/>
@@ -6457,7 +6457,7 @@
         <p:spPr>
           <a:xfrm>
             <a:off x="6905520" y="3247920"/>
-            <a:ext cx="3285360" cy="227880"/>
+            <a:ext cx="3285000" cy="227520"/>
           </a:xfrm>
           <a:prstGeom prst="rect">
             <a:avLst/>
@@ -6509,7 +6509,7 @@
         <p:spPr>
           <a:xfrm>
             <a:off x="6905520" y="3514680"/>
-            <a:ext cx="3285360" cy="227880"/>
+            <a:ext cx="3285000" cy="227520"/>
           </a:xfrm>
           <a:prstGeom prst="rect">
             <a:avLst/>
@@ -6561,7 +6561,7 @@
         <p:spPr>
           <a:xfrm>
             <a:off x="6486480" y="3857760"/>
-            <a:ext cx="304200" cy="304200"/>
+            <a:ext cx="303840" cy="303840"/>
           </a:xfrm>
           <a:custGeom>
             <a:avLst/>
@@ -6612,7 +6612,7 @@
         <p:spPr>
           <a:xfrm>
             <a:off x="6453360" y="3857760"/>
-            <a:ext cx="370800" cy="304200"/>
+            <a:ext cx="370440" cy="303840"/>
           </a:xfrm>
           <a:prstGeom prst="rect">
             <a:avLst/>
@@ -6664,7 +6664,7 @@
         <p:spPr>
           <a:xfrm>
             <a:off x="6905520" y="3857760"/>
-            <a:ext cx="4133160" cy="227880"/>
+            <a:ext cx="4132800" cy="227520"/>
           </a:xfrm>
           <a:prstGeom prst="rect">
             <a:avLst/>
@@ -6716,7 +6716,7 @@
         <p:spPr>
           <a:xfrm>
             <a:off x="6905520" y="4124160"/>
-            <a:ext cx="4133160" cy="227880"/>
+            <a:ext cx="4132800" cy="227520"/>
           </a:xfrm>
           <a:prstGeom prst="rect">
             <a:avLst/>
@@ -6768,7 +6768,7 @@
         <p:spPr>
           <a:xfrm>
             <a:off x="6267600" y="4743360"/>
-            <a:ext cx="5542920" cy="1142280"/>
+            <a:ext cx="5542560" cy="1141920"/>
           </a:xfrm>
           <a:custGeom>
             <a:avLst/>
@@ -6819,7 +6819,7 @@
         <p:spPr>
           <a:xfrm>
             <a:off x="6267600" y="4743360"/>
-            <a:ext cx="37440" cy="1142280"/>
+            <a:ext cx="37080" cy="1141920"/>
           </a:xfrm>
           <a:custGeom>
             <a:avLst/>
@@ -6870,7 +6870,7 @@
         <p:spPr>
           <a:xfrm>
             <a:off x="6477120" y="4933800"/>
-            <a:ext cx="5218920" cy="494640"/>
+            <a:ext cx="5218560" cy="494280"/>
           </a:xfrm>
           <a:prstGeom prst="rect">
             <a:avLst/>
@@ -6922,7 +6922,7 @@
         <p:spPr>
           <a:xfrm>
             <a:off x="6477120" y="5505480"/>
-            <a:ext cx="5209560" cy="189720"/>
+            <a:ext cx="5209200" cy="189360"/>
           </a:xfrm>
           <a:prstGeom prst="rect">
             <a:avLst/>
@@ -7021,7 +7021,7 @@
         <p:spPr>
           <a:xfrm>
             <a:off x="379440" y="379440"/>
-            <a:ext cx="11508120" cy="227160"/>
+            <a:ext cx="11507760" cy="226800"/>
           </a:xfrm>
           <a:prstGeom prst="rect">
             <a:avLst/>
@@ -7049,7 +7049,7 @@
               <a:buNone/>
             </a:pPr>
             <a:r>
-              <a:rPr b="1" lang="en-US" sz="1200" spc="55" strike="noStrike">
+              <a:rPr b="1" lang="en-US" sz="1200" spc="52" strike="noStrike">
                 <a:solidFill>
                   <a:srgbClr val="0984e3"/>
                 </a:solidFill>
@@ -7073,7 +7073,7 @@
         <p:spPr>
           <a:xfrm>
             <a:off x="379440" y="683280"/>
-            <a:ext cx="11660040" cy="454680"/>
+            <a:ext cx="11659680" cy="454320"/>
           </a:xfrm>
           <a:prstGeom prst="rect">
             <a:avLst/>
@@ -7125,7 +7125,7 @@
         <p:spPr>
           <a:xfrm>
             <a:off x="379440" y="1366200"/>
-            <a:ext cx="5682600" cy="302760"/>
+            <a:ext cx="5682240" cy="302400"/>
           </a:xfrm>
           <a:prstGeom prst="rect">
             <a:avLst/>
@@ -7177,7 +7177,7 @@
         <p:spPr>
           <a:xfrm>
             <a:off x="379440" y="1826280"/>
-            <a:ext cx="5096520" cy="466560"/>
+            <a:ext cx="5096160" cy="466200"/>
           </a:xfrm>
           <a:prstGeom prst="rect">
             <a:avLst/>
@@ -7229,7 +7229,7 @@
         <p:spPr>
           <a:xfrm>
             <a:off x="379440" y="2452680"/>
-            <a:ext cx="5644440" cy="739440"/>
+            <a:ext cx="5644080" cy="739080"/>
           </a:xfrm>
           <a:prstGeom prst="rect">
             <a:avLst/>
@@ -7281,7 +7281,7 @@
         <p:spPr>
           <a:xfrm>
             <a:off x="398520" y="3306600"/>
-            <a:ext cx="5549760" cy="758160"/>
+            <a:ext cx="5549400" cy="757800"/>
           </a:xfrm>
           <a:custGeom>
             <a:avLst/>
@@ -7332,7 +7332,7 @@
         <p:spPr>
           <a:xfrm>
             <a:off x="398520" y="3306600"/>
-            <a:ext cx="37080" cy="758160"/>
+            <a:ext cx="36720" cy="757800"/>
           </a:xfrm>
           <a:custGeom>
             <a:avLst/>
@@ -7383,7 +7383,7 @@
         <p:spPr>
           <a:xfrm>
             <a:off x="569160" y="3458520"/>
-            <a:ext cx="5303160" cy="454680"/>
+            <a:ext cx="5302800" cy="454320"/>
           </a:xfrm>
           <a:prstGeom prst="rect">
             <a:avLst/>
@@ -7476,7 +7476,7 @@
         <p:spPr>
           <a:xfrm>
             <a:off x="379440" y="4217400"/>
-            <a:ext cx="5682600" cy="302760"/>
+            <a:ext cx="5682240" cy="302400"/>
           </a:xfrm>
           <a:prstGeom prst="rect">
             <a:avLst/>
@@ -7528,7 +7528,7 @@
         <p:spPr>
           <a:xfrm>
             <a:off x="379440" y="4635000"/>
-            <a:ext cx="5644440" cy="739440"/>
+            <a:ext cx="5644080" cy="739080"/>
           </a:xfrm>
           <a:prstGeom prst="rect">
             <a:avLst/>
@@ -7580,7 +7580,7 @@
         <p:spPr>
           <a:xfrm>
             <a:off x="6249240" y="1366200"/>
-            <a:ext cx="5682600" cy="302760"/>
+            <a:ext cx="5682240" cy="302400"/>
           </a:xfrm>
           <a:prstGeom prst="rect">
             <a:avLst/>
@@ -7632,7 +7632,7 @@
         <p:spPr>
           <a:xfrm>
             <a:off x="6249240" y="1826280"/>
-            <a:ext cx="5249880" cy="466560"/>
+            <a:ext cx="5249520" cy="466200"/>
           </a:xfrm>
           <a:prstGeom prst="rect">
             <a:avLst/>
@@ -7684,7 +7684,7 @@
         <p:spPr>
           <a:xfrm>
             <a:off x="6249240" y="2452680"/>
-            <a:ext cx="5644440" cy="739440"/>
+            <a:ext cx="5644080" cy="739080"/>
           </a:xfrm>
           <a:prstGeom prst="rect">
             <a:avLst/>
@@ -7736,7 +7736,7 @@
         <p:spPr>
           <a:xfrm>
             <a:off x="6249240" y="3344400"/>
-            <a:ext cx="5568840" cy="2181600"/>
+            <a:ext cx="5568480" cy="2181240"/>
           </a:xfrm>
           <a:custGeom>
             <a:avLst/>
@@ -7787,7 +7787,7 @@
         <p:spPr>
           <a:xfrm>
             <a:off x="6438960" y="3534120"/>
-            <a:ext cx="5284080" cy="264960"/>
+            <a:ext cx="5283720" cy="264600"/>
           </a:xfrm>
           <a:prstGeom prst="rect">
             <a:avLst/>
@@ -7839,7 +7839,7 @@
         <p:spPr>
           <a:xfrm>
             <a:off x="6438960" y="3913920"/>
-            <a:ext cx="5265000" cy="245880"/>
+            <a:ext cx="5264640" cy="245520"/>
           </a:xfrm>
           <a:prstGeom prst="rect">
             <a:avLst/>
@@ -7891,7 +7891,7 @@
         <p:spPr>
           <a:xfrm>
             <a:off x="6438960" y="4274280"/>
-            <a:ext cx="5189040" cy="454680"/>
+            <a:ext cx="5188680" cy="454320"/>
           </a:xfrm>
           <a:custGeom>
             <a:avLst/>
@@ -7942,24 +7942,24 @@
         <p:spPr>
           <a:xfrm>
             <a:off x="6438960" y="4274280"/>
-            <a:ext cx="5265000" cy="454680"/>
-          </a:xfrm>
-          <a:prstGeom prst="rect">
-            <a:avLst/>
-          </a:prstGeom>
-          <a:noFill/>
-          <a:ln w="0">
-            <a:noFill/>
-          </a:ln>
-        </p:spPr>
-        <p:style>
-          <a:lnRef idx="0"/>
-          <a:fillRef idx="0"/>
-          <a:effectRef idx="0"/>
-          <a:fontRef idx="minor"/>
-        </p:style>
-        <p:txBody>
-          <a:bodyPr lIns="113760" rIns="113760" tIns="113760" bIns="113760" anchor="ctr">
+            <a:ext cx="5264640" cy="454320"/>
+          </a:xfrm>
+          <a:prstGeom prst="rect">
+            <a:avLst/>
+          </a:prstGeom>
+          <a:noFill/>
+          <a:ln w="0">
+            <a:noFill/>
+          </a:ln>
+        </p:spPr>
+        <p:style>
+          <a:lnRef idx="0"/>
+          <a:fillRef idx="0"/>
+          <a:effectRef idx="0"/>
+          <a:fontRef idx="minor"/>
+        </p:style>
+        <p:txBody>
+          <a:bodyPr lIns="113760" rIns="113760" tIns="227520" bIns="227520" anchor="ctr">
             <a:noAutofit/>
           </a:bodyPr>
           <a:p>
@@ -7994,7 +7994,7 @@
         <p:spPr>
           <a:xfrm>
             <a:off x="6438960" y="4843440"/>
-            <a:ext cx="5265000" cy="492480"/>
+            <a:ext cx="5264640" cy="492120"/>
           </a:xfrm>
           <a:prstGeom prst="rect">
             <a:avLst/>
@@ -8046,7 +8046,7 @@
         <p:spPr>
           <a:xfrm>
             <a:off x="6268320" y="5678640"/>
-            <a:ext cx="5549760" cy="796320"/>
+            <a:ext cx="5549400" cy="795960"/>
           </a:xfrm>
           <a:custGeom>
             <a:avLst/>
@@ -8097,7 +8097,7 @@
         <p:spPr>
           <a:xfrm>
             <a:off x="6268320" y="5678640"/>
-            <a:ext cx="37080" cy="796320"/>
+            <a:ext cx="36720" cy="795960"/>
           </a:xfrm>
           <a:custGeom>
             <a:avLst/>
@@ -8148,7 +8148,7 @@
         <p:spPr>
           <a:xfrm>
             <a:off x="6438960" y="5830200"/>
-            <a:ext cx="5303160" cy="492480"/>
+            <a:ext cx="5302800" cy="492120"/>
           </a:xfrm>
           <a:prstGeom prst="rect">
             <a:avLst/>
@@ -8247,7 +8247,7 @@
         <p:spPr>
           <a:xfrm>
             <a:off x="609480" y="2066760"/>
-            <a:ext cx="12191400" cy="1218600"/>
+            <a:ext cx="12191040" cy="1218240"/>
           </a:xfrm>
           <a:prstGeom prst="rect">
             <a:avLst/>
@@ -8301,7 +8301,7 @@
         <p:spPr>
           <a:xfrm>
             <a:off x="609480" y="3438360"/>
-            <a:ext cx="11867400" cy="570960"/>
+            <a:ext cx="11867040" cy="570600"/>
           </a:xfrm>
           <a:prstGeom prst="rect">
             <a:avLst/>
@@ -8353,7 +8353,7 @@
         <p:spPr>
           <a:xfrm>
             <a:off x="609480" y="4238640"/>
-            <a:ext cx="1218600" cy="18360"/>
+            <a:ext cx="1218240" cy="18000"/>
           </a:xfrm>
           <a:custGeom>
             <a:avLst/>
@@ -8404,7 +8404,7 @@
         <p:spPr>
           <a:xfrm>
             <a:off x="609480" y="4486320"/>
-            <a:ext cx="11696040" cy="304200"/>
+            <a:ext cx="11695680" cy="303840"/>
           </a:xfrm>
           <a:prstGeom prst="rect">
             <a:avLst/>
@@ -8493,7 +8493,7 @@
         <p:spPr>
           <a:xfrm>
             <a:off x="356400" y="356400"/>
-            <a:ext cx="11550240" cy="213120"/>
+            <a:ext cx="11549880" cy="212760"/>
           </a:xfrm>
           <a:prstGeom prst="rect">
             <a:avLst/>
@@ -8521,7 +8521,7 @@
               <a:buNone/>
             </a:pPr>
             <a:r>
-              <a:rPr b="1" lang="en-US" sz="1120" spc="52" strike="noStrike">
+              <a:rPr b="1" lang="en-US" sz="1120" spc="49" strike="noStrike">
                 <a:solidFill>
                   <a:srgbClr val="0984e3"/>
                 </a:solidFill>
@@ -8545,7 +8545,7 @@
         <p:spPr>
           <a:xfrm>
             <a:off x="356400" y="641160"/>
-            <a:ext cx="11692440" cy="426600"/>
+            <a:ext cx="11692080" cy="426240"/>
           </a:xfrm>
           <a:prstGeom prst="rect">
             <a:avLst/>
@@ -8597,7 +8597,7 @@
         <p:spPr>
           <a:xfrm>
             <a:off x="360720" y="1287000"/>
-            <a:ext cx="3695040" cy="2626560"/>
+            <a:ext cx="3694680" cy="2626200"/>
           </a:xfrm>
           <a:custGeom>
             <a:avLst/>
@@ -8651,7 +8651,7 @@
         <p:spPr>
           <a:xfrm>
             <a:off x="543240" y="1469520"/>
-            <a:ext cx="426600" cy="426600"/>
+            <a:ext cx="426240" cy="426240"/>
           </a:xfrm>
           <a:custGeom>
             <a:avLst/>
@@ -8702,7 +8702,7 @@
         <p:spPr>
           <a:xfrm>
             <a:off x="656640" y="1594080"/>
-            <a:ext cx="199800" cy="177480"/>
+            <a:ext cx="199440" cy="177120"/>
           </a:xfrm>
           <a:custGeom>
             <a:avLst/>
@@ -8899,7 +8899,7 @@
         <p:spPr>
           <a:xfrm>
             <a:off x="1077480" y="1558440"/>
-            <a:ext cx="2341440" cy="248760"/>
+            <a:ext cx="2341080" cy="248400"/>
           </a:xfrm>
           <a:prstGeom prst="rect">
             <a:avLst/>
@@ -8951,7 +8951,7 @@
         <p:spPr>
           <a:xfrm>
             <a:off x="543240" y="2003760"/>
-            <a:ext cx="3401280" cy="694080"/>
+            <a:ext cx="3400920" cy="693720"/>
           </a:xfrm>
           <a:prstGeom prst="rect">
             <a:avLst/>
@@ -9013,7 +9013,7 @@
         <p:spPr>
           <a:xfrm>
             <a:off x="543240" y="2805480"/>
-            <a:ext cx="3401280" cy="925560"/>
+            <a:ext cx="3400920" cy="925200"/>
           </a:xfrm>
           <a:prstGeom prst="rect">
             <a:avLst/>
@@ -9075,7 +9075,7 @@
         <p:spPr>
           <a:xfrm>
             <a:off x="4246200" y="1287000"/>
-            <a:ext cx="3695040" cy="2626560"/>
+            <a:ext cx="3694680" cy="2626200"/>
           </a:xfrm>
           <a:custGeom>
             <a:avLst/>
@@ -9129,7 +9129,7 @@
         <p:spPr>
           <a:xfrm>
             <a:off x="4428720" y="1469520"/>
-            <a:ext cx="426600" cy="426600"/>
+            <a:ext cx="426240" cy="426240"/>
           </a:xfrm>
           <a:custGeom>
             <a:avLst/>
@@ -9180,7 +9180,7 @@
         <p:spPr>
           <a:xfrm>
             <a:off x="4542120" y="1594080"/>
-            <a:ext cx="199800" cy="177480"/>
+            <a:ext cx="199440" cy="177120"/>
           </a:xfrm>
           <a:custGeom>
             <a:avLst/>
@@ -9332,7 +9332,7 @@
         <p:spPr>
           <a:xfrm>
             <a:off x="4962960" y="1558440"/>
-            <a:ext cx="2430720" cy="248760"/>
+            <a:ext cx="2430360" cy="248400"/>
           </a:xfrm>
           <a:prstGeom prst="rect">
             <a:avLst/>
@@ -9384,7 +9384,7 @@
         <p:spPr>
           <a:xfrm>
             <a:off x="4428720" y="2003760"/>
-            <a:ext cx="3401280" cy="694080"/>
+            <a:ext cx="3400920" cy="693720"/>
           </a:xfrm>
           <a:prstGeom prst="rect">
             <a:avLst/>
@@ -9446,7 +9446,7 @@
         <p:spPr>
           <a:xfrm>
             <a:off x="4428720" y="2805480"/>
-            <a:ext cx="3401280" cy="694080"/>
+            <a:ext cx="3400920" cy="693720"/>
           </a:xfrm>
           <a:prstGeom prst="rect">
             <a:avLst/>
@@ -9508,7 +9508,7 @@
         <p:spPr>
           <a:xfrm>
             <a:off x="8131680" y="1287000"/>
-            <a:ext cx="3695040" cy="2626560"/>
+            <a:ext cx="3694680" cy="2626200"/>
           </a:xfrm>
           <a:custGeom>
             <a:avLst/>
@@ -9562,7 +9562,7 @@
         <p:spPr>
           <a:xfrm>
             <a:off x="8314200" y="1469520"/>
-            <a:ext cx="426600" cy="426600"/>
+            <a:ext cx="426240" cy="426240"/>
           </a:xfrm>
           <a:custGeom>
             <a:avLst/>
@@ -9613,7 +9613,7 @@
         <p:spPr>
           <a:xfrm>
             <a:off x="8439120" y="1594080"/>
-            <a:ext cx="177480" cy="177480"/>
+            <a:ext cx="177120" cy="177120"/>
           </a:xfrm>
           <a:custGeom>
             <a:avLst/>
@@ -9713,7 +9713,7 @@
         <p:spPr>
           <a:xfrm>
             <a:off x="8848800" y="1558440"/>
-            <a:ext cx="2038680" cy="248760"/>
+            <a:ext cx="2038320" cy="248400"/>
           </a:xfrm>
           <a:prstGeom prst="rect">
             <a:avLst/>
@@ -9765,7 +9765,7 @@
         <p:spPr>
           <a:xfrm>
             <a:off x="8314200" y="2003760"/>
-            <a:ext cx="3401280" cy="694080"/>
+            <a:ext cx="3400920" cy="693720"/>
           </a:xfrm>
           <a:prstGeom prst="rect">
             <a:avLst/>
@@ -9827,7 +9827,7 @@
         <p:spPr>
           <a:xfrm>
             <a:off x="8314200" y="2805480"/>
-            <a:ext cx="3401280" cy="694080"/>
+            <a:ext cx="3400920" cy="693720"/>
           </a:xfrm>
           <a:prstGeom prst="rect">
             <a:avLst/>
@@ -9889,7 +9889,7 @@
         <p:spPr>
           <a:xfrm>
             <a:off x="360720" y="4101120"/>
-            <a:ext cx="3695040" cy="2395080"/>
+            <a:ext cx="3694680" cy="2394720"/>
           </a:xfrm>
           <a:custGeom>
             <a:avLst/>
@@ -9943,7 +9943,7 @@
         <p:spPr>
           <a:xfrm>
             <a:off x="543240" y="4283640"/>
-            <a:ext cx="426600" cy="426600"/>
+            <a:ext cx="426240" cy="426240"/>
           </a:xfrm>
           <a:custGeom>
             <a:avLst/>
@@ -9994,7 +9994,7 @@
         <p:spPr>
           <a:xfrm>
             <a:off x="645840" y="4408200"/>
-            <a:ext cx="221760" cy="177480"/>
+            <a:ext cx="221400" cy="177120"/>
           </a:xfrm>
           <a:custGeom>
             <a:avLst/>
@@ -10226,7 +10226,7 @@
         <p:spPr>
           <a:xfrm>
             <a:off x="1077480" y="4372560"/>
-            <a:ext cx="1931760" cy="248760"/>
+            <a:ext cx="1931400" cy="248400"/>
           </a:xfrm>
           <a:prstGeom prst="rect">
             <a:avLst/>
@@ -10278,7 +10278,7 @@
         <p:spPr>
           <a:xfrm>
             <a:off x="543240" y="4817880"/>
-            <a:ext cx="3401280" cy="694080"/>
+            <a:ext cx="3400920" cy="693720"/>
           </a:xfrm>
           <a:prstGeom prst="rect">
             <a:avLst/>
@@ -10340,7 +10340,7 @@
         <p:spPr>
           <a:xfrm>
             <a:off x="543240" y="5619600"/>
-            <a:ext cx="3401280" cy="694080"/>
+            <a:ext cx="3400920" cy="693720"/>
           </a:xfrm>
           <a:prstGeom prst="rect">
             <a:avLst/>
@@ -10402,7 +10402,7 @@
         <p:spPr>
           <a:xfrm>
             <a:off x="4246200" y="4101120"/>
-            <a:ext cx="7587000" cy="2395080"/>
+            <a:ext cx="7586640" cy="2394720"/>
           </a:xfrm>
           <a:custGeom>
             <a:avLst/>
@@ -10456,7 +10456,7 @@
         <p:spPr>
           <a:xfrm>
             <a:off x="4428720" y="4283640"/>
-            <a:ext cx="426600" cy="426600"/>
+            <a:ext cx="426240" cy="426240"/>
           </a:xfrm>
           <a:custGeom>
             <a:avLst/>
@@ -10507,7 +10507,7 @@
         <p:spPr>
           <a:xfrm>
             <a:off x="4553280" y="4408200"/>
-            <a:ext cx="177480" cy="177480"/>
+            <a:ext cx="177120" cy="177120"/>
           </a:xfrm>
           <a:custGeom>
             <a:avLst/>
@@ -10640,7 +10640,7 @@
         <p:spPr>
           <a:xfrm>
             <a:off x="4962960" y="4372560"/>
-            <a:ext cx="2047680" cy="248760"/>
+            <a:ext cx="2047320" cy="248400"/>
           </a:xfrm>
           <a:prstGeom prst="rect">
             <a:avLst/>
@@ -10692,7 +10692,7 @@
         <p:spPr>
           <a:xfrm>
             <a:off x="4428720" y="4817880"/>
-            <a:ext cx="3606120" cy="694080"/>
+            <a:ext cx="3605760" cy="693720"/>
           </a:xfrm>
           <a:prstGeom prst="rect">
             <a:avLst/>
@@ -10754,7 +10754,7 @@
         <p:spPr>
           <a:xfrm>
             <a:off x="4428720" y="5583960"/>
-            <a:ext cx="3606120" cy="462240"/>
+            <a:ext cx="3605760" cy="461880"/>
           </a:xfrm>
           <a:prstGeom prst="rect">
             <a:avLst/>
@@ -10806,7 +10806,7 @@
         <p:spPr>
           <a:xfrm>
             <a:off x="8109360" y="4817880"/>
-            <a:ext cx="3606120" cy="694080"/>
+            <a:ext cx="3605760" cy="693720"/>
           </a:xfrm>
           <a:prstGeom prst="rect">
             <a:avLst/>
@@ -10868,7 +10868,7 @@
         <p:spPr>
           <a:xfrm>
             <a:off x="8109360" y="5583960"/>
-            <a:ext cx="3606120" cy="462240"/>
+            <a:ext cx="3605760" cy="461880"/>
           </a:xfrm>
           <a:prstGeom prst="rect">
             <a:avLst/>
@@ -10957,7 +10957,7 @@
         <p:spPr>
           <a:xfrm>
             <a:off x="609480" y="2066760"/>
-            <a:ext cx="12191400" cy="1218600"/>
+            <a:ext cx="12191040" cy="1218240"/>
           </a:xfrm>
           <a:prstGeom prst="rect">
             <a:avLst/>
@@ -11011,7 +11011,7 @@
         <p:spPr>
           <a:xfrm>
             <a:off x="609480" y="3438360"/>
-            <a:ext cx="11867400" cy="570960"/>
+            <a:ext cx="11867040" cy="570600"/>
           </a:xfrm>
           <a:prstGeom prst="rect">
             <a:avLst/>
@@ -11063,7 +11063,7 @@
         <p:spPr>
           <a:xfrm>
             <a:off x="609480" y="4238640"/>
-            <a:ext cx="1218600" cy="18360"/>
+            <a:ext cx="1218240" cy="18000"/>
           </a:xfrm>
           <a:custGeom>
             <a:avLst/>
@@ -11114,7 +11114,7 @@
         <p:spPr>
           <a:xfrm>
             <a:off x="609480" y="4486320"/>
-            <a:ext cx="11696040" cy="304200"/>
+            <a:ext cx="11695680" cy="303840"/>
           </a:xfrm>
           <a:prstGeom prst="rect">
             <a:avLst/>
@@ -11203,7 +11203,7 @@
         <p:spPr>
           <a:xfrm>
             <a:off x="380880" y="380880"/>
-            <a:ext cx="11505600" cy="227880"/>
+            <a:ext cx="11505240" cy="227520"/>
           </a:xfrm>
           <a:prstGeom prst="rect">
             <a:avLst/>
@@ -11231,7 +11231,7 @@
               <a:buNone/>
             </a:pPr>
             <a:r>
-              <a:rPr b="1" lang="en-US" sz="1200" spc="55" strike="noStrike">
+              <a:rPr b="1" lang="en-US" sz="1200" spc="52" strike="noStrike">
                 <a:solidFill>
                   <a:srgbClr val="0984e3"/>
                 </a:solidFill>
@@ -11255,7 +11255,7 @@
         <p:spPr>
           <a:xfrm>
             <a:off x="380880" y="685800"/>
-            <a:ext cx="11657880" cy="456480"/>
+            <a:ext cx="11657520" cy="456120"/>
           </a:xfrm>
           <a:prstGeom prst="rect">
             <a:avLst/>
@@ -11307,7 +11307,7 @@
         <p:spPr>
           <a:xfrm>
             <a:off x="380880" y="1295280"/>
-            <a:ext cx="5657040" cy="1237680"/>
+            <a:ext cx="5656680" cy="1237320"/>
           </a:xfrm>
           <a:prstGeom prst="rect">
             <a:avLst/>
@@ -11369,7 +11369,7 @@
         <p:spPr>
           <a:xfrm>
             <a:off x="380880" y="2647800"/>
-            <a:ext cx="5637960" cy="742320"/>
+            <a:ext cx="5637600" cy="741960"/>
           </a:xfrm>
           <a:prstGeom prst="rect">
             <a:avLst/>
@@ -11421,7 +11421,7 @@
         <p:spPr>
           <a:xfrm>
             <a:off x="385920" y="3548160"/>
-            <a:ext cx="5552280" cy="2028240"/>
+            <a:ext cx="5551920" cy="2027880"/>
           </a:xfrm>
           <a:custGeom>
             <a:avLst/>
@@ -11475,7 +11475,7 @@
         <p:spPr>
           <a:xfrm>
             <a:off x="495360" y="3705120"/>
-            <a:ext cx="5333400" cy="266040"/>
+            <a:ext cx="5333040" cy="265680"/>
           </a:xfrm>
           <a:prstGeom prst="rect">
             <a:avLst/>
@@ -12001,7 +12001,7 @@
         <p:spPr>
           <a:xfrm>
             <a:off x="509760" y="5229360"/>
-            <a:ext cx="5304600" cy="189720"/>
+            <a:ext cx="5304240" cy="189360"/>
           </a:xfrm>
           <a:prstGeom prst="rect">
             <a:avLst/>
@@ -12053,7 +12053,7 @@
         <p:spPr>
           <a:xfrm>
             <a:off x="6253200" y="1300320"/>
-            <a:ext cx="5552280" cy="1608840"/>
+            <a:ext cx="5551920" cy="1608480"/>
           </a:xfrm>
           <a:custGeom>
             <a:avLst/>
@@ -12107,7 +12107,7 @@
         <p:spPr>
           <a:xfrm>
             <a:off x="6448320" y="1495440"/>
-            <a:ext cx="5257080" cy="266040"/>
+            <a:ext cx="5256720" cy="265680"/>
           </a:xfrm>
           <a:prstGeom prst="rect">
             <a:avLst/>
@@ -12159,7 +12159,7 @@
         <p:spPr>
           <a:xfrm>
             <a:off x="6448320" y="1876320"/>
-            <a:ext cx="5238000" cy="227880"/>
+            <a:ext cx="5237640" cy="227520"/>
           </a:xfrm>
           <a:prstGeom prst="rect">
             <a:avLst/>
@@ -12221,7 +12221,7 @@
         <p:spPr>
           <a:xfrm>
             <a:off x="6448320" y="2181240"/>
-            <a:ext cx="5238000" cy="227880"/>
+            <a:ext cx="5237640" cy="227520"/>
           </a:xfrm>
           <a:prstGeom prst="rect">
             <a:avLst/>
@@ -12283,7 +12283,7 @@
         <p:spPr>
           <a:xfrm>
             <a:off x="6448320" y="2486160"/>
-            <a:ext cx="5238000" cy="227880"/>
+            <a:ext cx="5237640" cy="227520"/>
           </a:xfrm>
           <a:prstGeom prst="rect">
             <a:avLst/>
@@ -12335,7 +12335,7 @@
         <p:spPr>
           <a:xfrm>
             <a:off x="6267600" y="3067200"/>
-            <a:ext cx="5542920" cy="2133000"/>
+            <a:ext cx="5542560" cy="2132640"/>
           </a:xfrm>
           <a:custGeom>
             <a:avLst/>
@@ -12386,7 +12386,7 @@
         <p:spPr>
           <a:xfrm>
             <a:off x="6267600" y="3067200"/>
-            <a:ext cx="37440" cy="2133000"/>
+            <a:ext cx="37080" cy="2132640"/>
           </a:xfrm>
           <a:custGeom>
             <a:avLst/>
@@ -12437,7 +12437,7 @@
         <p:spPr>
           <a:xfrm>
             <a:off x="6477120" y="3257640"/>
-            <a:ext cx="5238000" cy="266040"/>
+            <a:ext cx="5237640" cy="265680"/>
           </a:xfrm>
           <a:prstGeom prst="rect">
             <a:avLst/>
@@ -12489,7 +12489,7 @@
         <p:spPr>
           <a:xfrm>
             <a:off x="6496200" y="3672000"/>
-            <a:ext cx="151560" cy="151560"/>
+            <a:ext cx="151200" cy="151200"/>
           </a:xfrm>
           <a:custGeom>
             <a:avLst/>
@@ -12613,7 +12613,7 @@
         <p:spPr>
           <a:xfrm>
             <a:off x="6724800" y="3638520"/>
-            <a:ext cx="4971240" cy="456480"/>
+            <a:ext cx="4970880" cy="456120"/>
           </a:xfrm>
           <a:prstGeom prst="rect">
             <a:avLst/>
@@ -12675,7 +12675,7 @@
         <p:spPr>
           <a:xfrm>
             <a:off x="6496200" y="4205160"/>
-            <a:ext cx="151560" cy="151560"/>
+            <a:ext cx="151200" cy="151200"/>
           </a:xfrm>
           <a:custGeom>
             <a:avLst/>
@@ -12798,7 +12798,7 @@
         <p:spPr>
           <a:xfrm>
             <a:off x="6724800" y="4172040"/>
-            <a:ext cx="4971240" cy="227880"/>
+            <a:ext cx="4970880" cy="227520"/>
           </a:xfrm>
           <a:prstGeom prst="rect">
             <a:avLst/>
@@ -12860,7 +12860,7 @@
         <p:spPr>
           <a:xfrm>
             <a:off x="6515280" y="4510080"/>
-            <a:ext cx="113760" cy="151560"/>
+            <a:ext cx="113400" cy="151200"/>
           </a:xfrm>
           <a:custGeom>
             <a:avLst/>
@@ -13101,7 +13101,7 @@
         <p:spPr>
           <a:xfrm>
             <a:off x="6724800" y="4476600"/>
-            <a:ext cx="4971240" cy="227880"/>
+            <a:ext cx="4970880" cy="227520"/>
           </a:xfrm>
           <a:prstGeom prst="rect">
             <a:avLst/>
@@ -13163,7 +13163,7 @@
         <p:spPr>
           <a:xfrm>
             <a:off x="6486480" y="4815000"/>
-            <a:ext cx="170640" cy="151560"/>
+            <a:ext cx="170280" cy="151200"/>
           </a:xfrm>
           <a:custGeom>
             <a:avLst/>
@@ -13399,7 +13399,7 @@
         <p:spPr>
           <a:xfrm>
             <a:off x="6724800" y="4781520"/>
-            <a:ext cx="4971240" cy="227880"/>
+            <a:ext cx="4970880" cy="227520"/>
           </a:xfrm>
           <a:prstGeom prst="rect">
             <a:avLst/>
@@ -13498,7 +13498,7 @@
         <p:spPr>
           <a:xfrm>
             <a:off x="358560" y="358560"/>
-            <a:ext cx="11545920" cy="214560"/>
+            <a:ext cx="11545560" cy="214200"/>
           </a:xfrm>
           <a:prstGeom prst="rect">
             <a:avLst/>
@@ -13526,7 +13526,7 @@
               <a:buNone/>
             </a:pPr>
             <a:r>
-              <a:rPr b="1" lang="en-US" sz="1130" spc="52" strike="noStrike">
+              <a:rPr b="1" lang="en-US" sz="1130" spc="49" strike="noStrike">
                 <a:solidFill>
                   <a:srgbClr val="0984e3"/>
                 </a:solidFill>
@@ -13550,7 +13550,7 @@
         <p:spPr>
           <a:xfrm>
             <a:off x="358560" y="645480"/>
-            <a:ext cx="11689200" cy="429480"/>
+            <a:ext cx="11688840" cy="429120"/>
           </a:xfrm>
           <a:prstGeom prst="rect">
             <a:avLst/>
@@ -13602,7 +13602,7 @@
         <p:spPr>
           <a:xfrm>
             <a:off x="358560" y="1290960"/>
-            <a:ext cx="5700960" cy="286200"/>
+            <a:ext cx="5700600" cy="285840"/>
           </a:xfrm>
           <a:prstGeom prst="rect">
             <a:avLst/>
@@ -13654,7 +13654,7 @@
         <p:spPr>
           <a:xfrm>
             <a:off x="358560" y="1725840"/>
-            <a:ext cx="5473800" cy="440640"/>
+            <a:ext cx="5473440" cy="440280"/>
           </a:xfrm>
           <a:prstGeom prst="rect">
             <a:avLst/>
@@ -13706,7 +13706,7 @@
         <p:spPr>
           <a:xfrm>
             <a:off x="358560" y="2317320"/>
-            <a:ext cx="5664960" cy="465480"/>
+            <a:ext cx="5664600" cy="465120"/>
           </a:xfrm>
           <a:prstGeom prst="rect">
             <a:avLst/>
@@ -13758,7 +13758,7 @@
         <p:spPr>
           <a:xfrm>
             <a:off x="363240" y="2931480"/>
-            <a:ext cx="5584320" cy="1873080"/>
+            <a:ext cx="5583960" cy="1872720"/>
           </a:xfrm>
           <a:custGeom>
             <a:avLst/>
@@ -13812,7 +13812,7 @@
         <p:spPr>
           <a:xfrm>
             <a:off x="470520" y="3079440"/>
-            <a:ext cx="5369040" cy="250200"/>
+            <a:ext cx="5368680" cy="249840"/>
           </a:xfrm>
           <a:prstGeom prst="rect">
             <a:avLst/>
@@ -14340,7 +14340,7 @@
         <p:spPr>
           <a:xfrm>
             <a:off x="479520" y="4478040"/>
-            <a:ext cx="5351040" cy="178560"/>
+            <a:ext cx="5350680" cy="178200"/>
           </a:xfrm>
           <a:prstGeom prst="rect">
             <a:avLst/>
@@ -14392,7 +14392,7 @@
         <p:spPr>
           <a:xfrm>
             <a:off x="376560" y="4952880"/>
-            <a:ext cx="5575320" cy="752400"/>
+            <a:ext cx="5574960" cy="752040"/>
           </a:xfrm>
           <a:custGeom>
             <a:avLst/>
@@ -14443,7 +14443,7 @@
         <p:spPr>
           <a:xfrm>
             <a:off x="376560" y="4952880"/>
-            <a:ext cx="35280" cy="752400"/>
+            <a:ext cx="34920" cy="752040"/>
           </a:xfrm>
           <a:custGeom>
             <a:avLst/>
@@ -14494,7 +14494,7 @@
         <p:spPr>
           <a:xfrm>
             <a:off x="537840" y="5096520"/>
-            <a:ext cx="5342400" cy="465480"/>
+            <a:ext cx="5342040" cy="465120"/>
           </a:xfrm>
           <a:prstGeom prst="rect">
             <a:avLst/>
@@ -14556,7 +14556,7 @@
         <p:spPr>
           <a:xfrm>
             <a:off x="6239520" y="1290960"/>
-            <a:ext cx="5700960" cy="286200"/>
+            <a:ext cx="5700600" cy="285840"/>
           </a:xfrm>
           <a:prstGeom prst="rect">
             <a:avLst/>
@@ -14608,7 +14608,7 @@
         <p:spPr>
           <a:xfrm>
             <a:off x="6239520" y="1685520"/>
-            <a:ext cx="5673960" cy="528120"/>
+            <a:ext cx="5673600" cy="527760"/>
           </a:xfrm>
           <a:prstGeom prst="rect">
             <a:avLst/>
@@ -14670,7 +14670,7 @@
         <p:spPr>
           <a:xfrm>
             <a:off x="6239520" y="2317320"/>
-            <a:ext cx="5664960" cy="698400"/>
+            <a:ext cx="5664600" cy="698040"/>
           </a:xfrm>
           <a:prstGeom prst="rect">
             <a:avLst/>
@@ -14722,7 +14722,7 @@
         <p:spPr>
           <a:xfrm>
             <a:off x="6243840" y="3164400"/>
-            <a:ext cx="5584320" cy="1873080"/>
+            <a:ext cx="5583960" cy="1872720"/>
           </a:xfrm>
           <a:custGeom>
             <a:avLst/>
@@ -14776,7 +14776,7 @@
         <p:spPr>
           <a:xfrm>
             <a:off x="6351480" y="3312360"/>
-            <a:ext cx="5369040" cy="250200"/>
+            <a:ext cx="5368680" cy="249840"/>
           </a:xfrm>
           <a:prstGeom prst="rect">
             <a:avLst/>
@@ -15302,7 +15302,7 @@
         <p:spPr>
           <a:xfrm>
             <a:off x="6360480" y="4710960"/>
-            <a:ext cx="5351040" cy="178560"/>
+            <a:ext cx="5350680" cy="178200"/>
           </a:xfrm>
           <a:prstGeom prst="rect">
             <a:avLst/>
@@ -15354,7 +15354,7 @@
         <p:spPr>
           <a:xfrm>
             <a:off x="6239520" y="5186160"/>
-            <a:ext cx="5593320" cy="1308240"/>
+            <a:ext cx="5592960" cy="1307880"/>
           </a:xfrm>
           <a:custGeom>
             <a:avLst/>
@@ -15405,7 +15405,7 @@
         <p:spPr>
           <a:xfrm>
             <a:off x="6382800" y="5329440"/>
-            <a:ext cx="5387040" cy="250200"/>
+            <a:ext cx="5386680" cy="249840"/>
           </a:xfrm>
           <a:prstGeom prst="rect">
             <a:avLst/>
@@ -15457,7 +15457,7 @@
         <p:spPr>
           <a:xfrm>
             <a:off x="6382800" y="5652360"/>
-            <a:ext cx="5378040" cy="698400"/>
+            <a:ext cx="5377680" cy="698040"/>
           </a:xfrm>
           <a:prstGeom prst="rect">
             <a:avLst/>
@@ -15546,7 +15546,7 @@
         <p:spPr>
           <a:xfrm>
             <a:off x="609480" y="1781280"/>
-            <a:ext cx="12191400" cy="1218600"/>
+            <a:ext cx="12191040" cy="1218240"/>
           </a:xfrm>
           <a:prstGeom prst="rect">
             <a:avLst/>
@@ -15600,7 +15600,7 @@
         <p:spPr>
           <a:xfrm>
             <a:off x="609480" y="3152880"/>
-            <a:ext cx="11867400" cy="1142280"/>
+            <a:ext cx="11867040" cy="1141920"/>
           </a:xfrm>
           <a:prstGeom prst="rect">
             <a:avLst/>
@@ -15673,7 +15673,7 @@
         <p:spPr>
           <a:xfrm>
             <a:off x="609480" y="4524480"/>
-            <a:ext cx="1218600" cy="18360"/>
+            <a:ext cx="1218240" cy="18000"/>
           </a:xfrm>
           <a:custGeom>
             <a:avLst/>
@@ -15724,7 +15724,7 @@
         <p:spPr>
           <a:xfrm>
             <a:off x="609480" y="4772160"/>
-            <a:ext cx="11696040" cy="304200"/>
+            <a:ext cx="11695680" cy="303840"/>
           </a:xfrm>
           <a:prstGeom prst="rect">
             <a:avLst/>
@@ -15813,7 +15813,7 @@
         <p:spPr>
           <a:xfrm>
             <a:off x="380880" y="380880"/>
-            <a:ext cx="11505600" cy="227880"/>
+            <a:ext cx="11505240" cy="227520"/>
           </a:xfrm>
           <a:prstGeom prst="rect">
             <a:avLst/>
@@ -15841,7 +15841,7 @@
               <a:buNone/>
             </a:pPr>
             <a:r>
-              <a:rPr b="1" lang="en-US" sz="1200" spc="55" strike="noStrike">
+              <a:rPr b="1" lang="en-US" sz="1200" spc="52" strike="noStrike">
                 <a:solidFill>
                   <a:srgbClr val="0984e3"/>
                 </a:solidFill>
@@ -15865,7 +15865,7 @@
         <p:spPr>
           <a:xfrm>
             <a:off x="380880" y="685800"/>
-            <a:ext cx="11657880" cy="456480"/>
+            <a:ext cx="11657520" cy="456120"/>
           </a:xfrm>
           <a:prstGeom prst="rect">
             <a:avLst/>
@@ -15917,7 +15917,7 @@
         <p:spPr>
           <a:xfrm>
             <a:off x="380880" y="1295280"/>
-            <a:ext cx="7647840" cy="932760"/>
+            <a:ext cx="7647480" cy="932400"/>
           </a:xfrm>
           <a:prstGeom prst="rect">
             <a:avLst/>
@@ -15979,7 +15979,7 @@
         <p:spPr>
           <a:xfrm>
             <a:off x="385920" y="2381400"/>
-            <a:ext cx="3695040" cy="1723320"/>
+            <a:ext cx="3694680" cy="1722960"/>
           </a:xfrm>
           <a:custGeom>
             <a:avLst/>
@@ -16033,7 +16033,7 @@
         <p:spPr>
           <a:xfrm>
             <a:off x="542880" y="2538360"/>
-            <a:ext cx="3475800" cy="266040"/>
+            <a:ext cx="3475440" cy="265680"/>
           </a:xfrm>
           <a:prstGeom prst="rect">
             <a:avLst/>
@@ -16085,7 +16085,7 @@
         <p:spPr>
           <a:xfrm>
             <a:off x="542880" y="2881440"/>
-            <a:ext cx="3456720" cy="494640"/>
+            <a:ext cx="3456360" cy="494280"/>
           </a:xfrm>
           <a:prstGeom prst="rect">
             <a:avLst/>
@@ -16147,7 +16147,7 @@
         <p:spPr>
           <a:xfrm>
             <a:off x="542880" y="3452760"/>
-            <a:ext cx="3456720" cy="494640"/>
+            <a:ext cx="3456360" cy="494280"/>
           </a:xfrm>
           <a:prstGeom prst="rect">
             <a:avLst/>
@@ -16209,7 +16209,7 @@
         <p:spPr>
           <a:xfrm>
             <a:off x="4240080" y="2381400"/>
-            <a:ext cx="3695040" cy="1723320"/>
+            <a:ext cx="3694680" cy="1722960"/>
           </a:xfrm>
           <a:custGeom>
             <a:avLst/>
@@ -16263,7 +16263,7 @@
         <p:spPr>
           <a:xfrm>
             <a:off x="4397400" y="2538360"/>
-            <a:ext cx="3475800" cy="266040"/>
+            <a:ext cx="3475440" cy="265680"/>
           </a:xfrm>
           <a:prstGeom prst="rect">
             <a:avLst/>
@@ -16315,7 +16315,7 @@
         <p:spPr>
           <a:xfrm>
             <a:off x="4397400" y="2881440"/>
-            <a:ext cx="3456720" cy="494640"/>
+            <a:ext cx="3456360" cy="494280"/>
           </a:xfrm>
           <a:prstGeom prst="rect">
             <a:avLst/>
@@ -16377,7 +16377,7 @@
         <p:spPr>
           <a:xfrm>
             <a:off x="4397400" y="3452760"/>
-            <a:ext cx="3456720" cy="494640"/>
+            <a:ext cx="3456360" cy="494280"/>
           </a:xfrm>
           <a:prstGeom prst="rect">
             <a:avLst/>
@@ -16439,7 +16439,7 @@
         <p:spPr>
           <a:xfrm>
             <a:off x="399960" y="4262400"/>
-            <a:ext cx="7533720" cy="1637640"/>
+            <a:ext cx="7533360" cy="1637280"/>
           </a:xfrm>
           <a:custGeom>
             <a:avLst/>
@@ -16490,7 +16490,7 @@
         <p:spPr>
           <a:xfrm>
             <a:off x="399960" y="4262400"/>
-            <a:ext cx="37440" cy="1637640"/>
+            <a:ext cx="37080" cy="1637280"/>
           </a:xfrm>
           <a:custGeom>
             <a:avLst/>
@@ -16541,7 +16541,7 @@
         <p:spPr>
           <a:xfrm>
             <a:off x="571680" y="4414680"/>
-            <a:ext cx="7305120" cy="266040"/>
+            <a:ext cx="7304760" cy="265680"/>
           </a:xfrm>
           <a:prstGeom prst="rect">
             <a:avLst/>
@@ -16593,7 +16593,7 @@
         <p:spPr>
           <a:xfrm>
             <a:off x="619200" y="4791240"/>
-            <a:ext cx="94680" cy="151560"/>
+            <a:ext cx="94320" cy="151200"/>
           </a:xfrm>
           <a:custGeom>
             <a:avLst/>
@@ -16748,7 +16748,7 @@
         <p:spPr>
           <a:xfrm>
             <a:off x="819000" y="4757760"/>
-            <a:ext cx="3361680" cy="456480"/>
+            <a:ext cx="3361320" cy="456120"/>
           </a:xfrm>
           <a:prstGeom prst="rect">
             <a:avLst/>
@@ -16810,7 +16810,7 @@
         <p:spPr>
           <a:xfrm>
             <a:off x="4282920" y="4791240"/>
-            <a:ext cx="132480" cy="151560"/>
+            <a:ext cx="132120" cy="151200"/>
           </a:xfrm>
           <a:custGeom>
             <a:avLst/>
@@ -16942,7 +16942,7 @@
         <p:spPr>
           <a:xfrm>
             <a:off x="4502160" y="4757760"/>
-            <a:ext cx="3361680" cy="456480"/>
+            <a:ext cx="3361320" cy="456120"/>
           </a:xfrm>
           <a:prstGeom prst="rect">
             <a:avLst/>
@@ -17004,7 +17004,7 @@
         <p:spPr>
           <a:xfrm>
             <a:off x="590400" y="5324400"/>
-            <a:ext cx="151560" cy="151560"/>
+            <a:ext cx="151200" cy="151200"/>
           </a:xfrm>
           <a:custGeom>
             <a:avLst/>
@@ -17227,7 +17227,7 @@
         <p:spPr>
           <a:xfrm>
             <a:off x="819000" y="5291280"/>
-            <a:ext cx="3361680" cy="456480"/>
+            <a:ext cx="3361320" cy="456120"/>
           </a:xfrm>
           <a:prstGeom prst="rect">
             <a:avLst/>
@@ -17289,7 +17289,7 @@
         <p:spPr>
           <a:xfrm>
             <a:off x="4263840" y="5324400"/>
-            <a:ext cx="170640" cy="151560"/>
+            <a:ext cx="170280" cy="151200"/>
           </a:xfrm>
           <a:custGeom>
             <a:avLst/>
@@ -17486,7 +17486,7 @@
         <p:spPr>
           <a:xfrm>
             <a:off x="4502160" y="5291280"/>
-            <a:ext cx="3361680" cy="456480"/>
+            <a:ext cx="3361320" cy="456120"/>
           </a:xfrm>
           <a:prstGeom prst="rect">
             <a:avLst/>
@@ -17548,7 +17548,7 @@
         <p:spPr>
           <a:xfrm>
             <a:off x="8132760" y="1300320"/>
-            <a:ext cx="3675960" cy="2637720"/>
+            <a:ext cx="3675600" cy="2637360"/>
           </a:xfrm>
           <a:custGeom>
             <a:avLst/>
@@ -17602,7 +17602,7 @@
         <p:spPr>
           <a:xfrm>
             <a:off x="8242200" y="1457280"/>
-            <a:ext cx="3456720" cy="266040"/>
+            <a:ext cx="3456360" cy="265680"/>
           </a:xfrm>
           <a:prstGeom prst="rect">
             <a:avLst/>
@@ -17654,7 +17654,7 @@
         <p:spPr>
           <a:xfrm>
             <a:off x="8289720" y="1838160"/>
-            <a:ext cx="3361680" cy="1332720"/>
+            <a:ext cx="3361320" cy="1332360"/>
           </a:xfrm>
           <a:prstGeom prst="roundRect">
             <a:avLst>
@@ -17686,7 +17686,7 @@
         <p:spPr>
           <a:xfrm>
             <a:off x="8251920" y="3286080"/>
-            <a:ext cx="3437640" cy="494640"/>
+            <a:ext cx="3437280" cy="494280"/>
           </a:xfrm>
           <a:prstGeom prst="rect">
             <a:avLst/>
@@ -17738,7 +17738,7 @@
         <p:spPr>
           <a:xfrm>
             <a:off x="8128080" y="4095720"/>
-            <a:ext cx="3685320" cy="1637640"/>
+            <a:ext cx="3684960" cy="1637280"/>
           </a:xfrm>
           <a:custGeom>
             <a:avLst/>
@@ -17789,7 +17789,7 @@
         <p:spPr>
           <a:xfrm>
             <a:off x="8280360" y="4248000"/>
-            <a:ext cx="3466440" cy="266040"/>
+            <a:ext cx="3466080" cy="265680"/>
           </a:xfrm>
           <a:prstGeom prst="rect">
             <a:avLst/>
@@ -17841,7 +17841,7 @@
         <p:spPr>
           <a:xfrm>
             <a:off x="8280360" y="4591080"/>
-            <a:ext cx="3456720" cy="990000"/>
+            <a:ext cx="3456360" cy="989640"/>
           </a:xfrm>
           <a:prstGeom prst="rect">
             <a:avLst/>
@@ -17930,7 +17930,7 @@
         <p:spPr>
           <a:xfrm>
             <a:off x="370440" y="370440"/>
-            <a:ext cx="11524320" cy="221760"/>
+            <a:ext cx="11523960" cy="221400"/>
           </a:xfrm>
           <a:prstGeom prst="rect">
             <a:avLst/>
@@ -17958,7 +17958,7 @@
               <a:buNone/>
             </a:pPr>
             <a:r>
-              <a:rPr b="1" lang="en-US" sz="1170" spc="52" strike="noStrike">
+              <a:rPr b="1" lang="en-US" sz="1170" spc="49" strike="noStrike">
                 <a:solidFill>
                   <a:srgbClr val="0984e3"/>
                 </a:solidFill>
@@ -17982,7 +17982,7 @@
         <p:spPr>
           <a:xfrm>
             <a:off x="370440" y="667080"/>
-            <a:ext cx="11672640" cy="443880"/>
+            <a:ext cx="11672280" cy="443520"/>
           </a:xfrm>
           <a:prstGeom prst="rect">
             <a:avLst/>
@@ -18034,7 +18034,7 @@
         <p:spPr>
           <a:xfrm>
             <a:off x="370440" y="1334160"/>
-            <a:ext cx="5669280" cy="1203480"/>
+            <a:ext cx="5668920" cy="1203120"/>
           </a:xfrm>
           <a:prstGeom prst="rect">
             <a:avLst/>
@@ -18096,7 +18096,7 @@
         <p:spPr>
           <a:xfrm>
             <a:off x="375120" y="2691360"/>
-            <a:ext cx="5567040" cy="2157840"/>
+            <a:ext cx="5566680" cy="2157480"/>
           </a:xfrm>
           <a:custGeom>
             <a:avLst/>
@@ -18150,7 +18150,7 @@
         <p:spPr>
           <a:xfrm>
             <a:off x="565200" y="2881080"/>
-            <a:ext cx="5280120" cy="258840"/>
+            <a:ext cx="5279760" cy="258480"/>
           </a:xfrm>
           <a:prstGeom prst="rect">
             <a:avLst/>
@@ -18202,7 +18202,7 @@
         <p:spPr>
           <a:xfrm>
             <a:off x="565200" y="3251880"/>
-            <a:ext cx="5261400" cy="480960"/>
+            <a:ext cx="5261040" cy="480600"/>
           </a:xfrm>
           <a:prstGeom prst="rect">
             <a:avLst/>
@@ -18254,7 +18254,7 @@
         <p:spPr>
           <a:xfrm>
             <a:off x="592920" y="3877200"/>
-            <a:ext cx="128880" cy="147600"/>
+            <a:ext cx="128520" cy="147240"/>
           </a:xfrm>
           <a:custGeom>
             <a:avLst/>
@@ -18335,7 +18335,7 @@
         <p:spPr>
           <a:xfrm>
             <a:off x="804600" y="3844800"/>
-            <a:ext cx="5022000" cy="221760"/>
+            <a:ext cx="5021640" cy="221400"/>
           </a:xfrm>
           <a:prstGeom prst="rect">
             <a:avLst/>
@@ -18387,7 +18387,7 @@
         <p:spPr>
           <a:xfrm>
             <a:off x="592920" y="4173480"/>
-            <a:ext cx="128880" cy="147600"/>
+            <a:ext cx="128520" cy="147240"/>
           </a:xfrm>
           <a:custGeom>
             <a:avLst/>
@@ -18468,7 +18468,7 @@
         <p:spPr>
           <a:xfrm>
             <a:off x="804600" y="4141080"/>
-            <a:ext cx="5022000" cy="221760"/>
+            <a:ext cx="5021640" cy="221400"/>
           </a:xfrm>
           <a:prstGeom prst="rect">
             <a:avLst/>
@@ -18520,7 +18520,7 @@
         <p:spPr>
           <a:xfrm>
             <a:off x="592920" y="4470120"/>
-            <a:ext cx="128880" cy="147600"/>
+            <a:ext cx="128520" cy="147240"/>
           </a:xfrm>
           <a:custGeom>
             <a:avLst/>
@@ -18601,7 +18601,7 @@
         <p:spPr>
           <a:xfrm>
             <a:off x="804600" y="4437720"/>
-            <a:ext cx="5022000" cy="221760"/>
+            <a:ext cx="5021640" cy="221400"/>
           </a:xfrm>
           <a:prstGeom prst="rect">
             <a:avLst/>
@@ -18653,7 +18653,7 @@
         <p:spPr>
           <a:xfrm>
             <a:off x="375120" y="5007600"/>
-            <a:ext cx="5567040" cy="1472400"/>
+            <a:ext cx="5566680" cy="1472040"/>
           </a:xfrm>
           <a:custGeom>
             <a:avLst/>
@@ -18707,7 +18707,7 @@
         <p:spPr>
           <a:xfrm>
             <a:off x="565200" y="5197320"/>
-            <a:ext cx="5280120" cy="258840"/>
+            <a:ext cx="5279760" cy="258480"/>
           </a:xfrm>
           <a:prstGeom prst="rect">
             <a:avLst/>
@@ -18759,7 +18759,7 @@
         <p:spPr>
           <a:xfrm>
             <a:off x="565200" y="5567760"/>
-            <a:ext cx="5261400" cy="721800"/>
+            <a:ext cx="5261040" cy="721440"/>
           </a:xfrm>
           <a:prstGeom prst="rect">
             <a:avLst/>
@@ -18811,7 +18811,7 @@
         <p:spPr>
           <a:xfrm>
             <a:off x="6242040" y="1334160"/>
-            <a:ext cx="5576400" cy="2843640"/>
+            <a:ext cx="5576040" cy="2843280"/>
           </a:xfrm>
           <a:custGeom>
             <a:avLst/>
@@ -18862,7 +18862,7 @@
         <p:spPr>
           <a:xfrm>
             <a:off x="6427440" y="1519200"/>
-            <a:ext cx="5317200" cy="295920"/>
+            <a:ext cx="5316840" cy="295560"/>
           </a:xfrm>
           <a:prstGeom prst="rect">
             <a:avLst/>
@@ -18914,7 +18914,7 @@
         <p:spPr>
           <a:xfrm>
             <a:off x="6427440" y="1968840"/>
-            <a:ext cx="5145840" cy="455400"/>
+            <a:ext cx="5145480" cy="455040"/>
           </a:xfrm>
           <a:prstGeom prst="rect">
             <a:avLst/>
@@ -18966,7 +18966,7 @@
         <p:spPr>
           <a:xfrm>
             <a:off x="6427440" y="2580120"/>
-            <a:ext cx="5280120" cy="480960"/>
+            <a:ext cx="5279760" cy="480600"/>
           </a:xfrm>
           <a:prstGeom prst="rect">
             <a:avLst/>
@@ -19018,7 +19018,7 @@
         <p:spPr>
           <a:xfrm>
             <a:off x="6436800" y="3205440"/>
-            <a:ext cx="165960" cy="147600"/>
+            <a:ext cx="165600" cy="147240"/>
           </a:xfrm>
           <a:custGeom>
             <a:avLst/>
@@ -19203,7 +19203,7 @@
         <p:spPr>
           <a:xfrm>
             <a:off x="6666840" y="3173040"/>
-            <a:ext cx="5040720" cy="221760"/>
+            <a:ext cx="5040360" cy="221400"/>
           </a:xfrm>
           <a:prstGeom prst="rect">
             <a:avLst/>
@@ -19265,7 +19265,7 @@
         <p:spPr>
           <a:xfrm>
             <a:off x="6445800" y="3502080"/>
-            <a:ext cx="147600" cy="147600"/>
+            <a:ext cx="147240" cy="147240"/>
           </a:xfrm>
           <a:custGeom>
             <a:avLst/>
@@ -19432,7 +19432,7 @@
         <p:spPr>
           <a:xfrm>
             <a:off x="6666840" y="3469680"/>
-            <a:ext cx="5040720" cy="221760"/>
+            <a:ext cx="5040360" cy="221400"/>
           </a:xfrm>
           <a:prstGeom prst="rect">
             <a:avLst/>
@@ -19494,7 +19494,7 @@
         <p:spPr>
           <a:xfrm>
             <a:off x="6427440" y="3798360"/>
-            <a:ext cx="184680" cy="147600"/>
+            <a:ext cx="184320" cy="147240"/>
           </a:xfrm>
           <a:custGeom>
             <a:avLst/>
@@ -19726,7 +19726,7 @@
         <p:spPr>
           <a:xfrm>
             <a:off x="6666840" y="3765960"/>
-            <a:ext cx="5040720" cy="221760"/>
+            <a:ext cx="5040360" cy="221400"/>
           </a:xfrm>
           <a:prstGeom prst="rect">
             <a:avLst/>
@@ -19788,7 +19788,7 @@
         <p:spPr>
           <a:xfrm>
             <a:off x="6260760" y="4321800"/>
-            <a:ext cx="5558040" cy="870120"/>
+            <a:ext cx="5557680" cy="869760"/>
           </a:xfrm>
           <a:custGeom>
             <a:avLst/>
@@ -19839,7 +19839,7 @@
         <p:spPr>
           <a:xfrm>
             <a:off x="6260760" y="4321800"/>
-            <a:ext cx="36360" cy="870120"/>
+            <a:ext cx="36000" cy="869760"/>
           </a:xfrm>
           <a:custGeom>
             <a:avLst/>
@@ -19890,7 +19890,7 @@
         <p:spPr>
           <a:xfrm>
             <a:off x="6464520" y="4507200"/>
-            <a:ext cx="5243040" cy="240120"/>
+            <a:ext cx="5242680" cy="239760"/>
           </a:xfrm>
           <a:prstGeom prst="rect">
             <a:avLst/>
@@ -19942,7 +19942,7 @@
         <p:spPr>
           <a:xfrm>
             <a:off x="6464520" y="4822200"/>
-            <a:ext cx="5233680" cy="184680"/>
+            <a:ext cx="5233320" cy="184320"/>
           </a:xfrm>
           <a:prstGeom prst="rect">
             <a:avLst/>
@@ -20041,7 +20041,7 @@
         <p:spPr>
           <a:xfrm>
             <a:off x="380880" y="380880"/>
-            <a:ext cx="11657880" cy="456480"/>
+            <a:ext cx="11657520" cy="456120"/>
           </a:xfrm>
           <a:prstGeom prst="rect">
             <a:avLst/>
@@ -20093,7 +20093,7 @@
         <p:spPr>
           <a:xfrm>
             <a:off x="380880" y="952560"/>
-            <a:ext cx="761400" cy="18360"/>
+            <a:ext cx="761040" cy="18000"/>
           </a:xfrm>
           <a:custGeom>
             <a:avLst/>
@@ -20144,7 +20144,7 @@
         <p:spPr>
           <a:xfrm>
             <a:off x="380880" y="1428840"/>
-            <a:ext cx="751680" cy="570960"/>
+            <a:ext cx="751320" cy="570600"/>
           </a:xfrm>
           <a:prstGeom prst="rect">
             <a:avLst/>
@@ -20198,7 +20198,7 @@
         <p:spPr>
           <a:xfrm>
             <a:off x="1034280" y="1504800"/>
-            <a:ext cx="4190400" cy="304200"/>
+            <a:ext cx="4190040" cy="303840"/>
           </a:xfrm>
           <a:prstGeom prst="rect">
             <a:avLst/>
@@ -20250,7 +20250,7 @@
         <p:spPr>
           <a:xfrm>
             <a:off x="1034280" y="1886040"/>
-            <a:ext cx="4161600" cy="275400"/>
+            <a:ext cx="4161240" cy="275040"/>
           </a:xfrm>
           <a:prstGeom prst="rect">
             <a:avLst/>
@@ -20302,7 +20302,7 @@
         <p:spPr>
           <a:xfrm>
             <a:off x="6400800" y="1428840"/>
-            <a:ext cx="856440" cy="570960"/>
+            <a:ext cx="856080" cy="570600"/>
           </a:xfrm>
           <a:prstGeom prst="rect">
             <a:avLst/>
@@ -20356,7 +20356,7 @@
         <p:spPr>
           <a:xfrm>
             <a:off x="7160040" y="1504800"/>
-            <a:ext cx="4761720" cy="304200"/>
+            <a:ext cx="4761360" cy="303840"/>
           </a:xfrm>
           <a:prstGeom prst="rect">
             <a:avLst/>
@@ -20408,7 +20408,7 @@
         <p:spPr>
           <a:xfrm>
             <a:off x="7160040" y="1886040"/>
-            <a:ext cx="4733280" cy="561240"/>
+            <a:ext cx="4732920" cy="560880"/>
           </a:xfrm>
           <a:prstGeom prst="rect">
             <a:avLst/>
@@ -20460,7 +20460,7 @@
         <p:spPr>
           <a:xfrm>
             <a:off x="380880" y="2824200"/>
-            <a:ext cx="856440" cy="570960"/>
+            <a:ext cx="856080" cy="570600"/>
           </a:xfrm>
           <a:prstGeom prst="rect">
             <a:avLst/>
@@ -20514,7 +20514,7 @@
         <p:spPr>
           <a:xfrm>
             <a:off x="1143000" y="2900520"/>
-            <a:ext cx="3971160" cy="304200"/>
+            <a:ext cx="3970800" cy="303840"/>
           </a:xfrm>
           <a:prstGeom prst="rect">
             <a:avLst/>
@@ -20566,7 +20566,7 @@
         <p:spPr>
           <a:xfrm>
             <a:off x="1143000" y="3281400"/>
-            <a:ext cx="3942720" cy="275400"/>
+            <a:ext cx="3942360" cy="275040"/>
           </a:xfrm>
           <a:prstGeom prst="rect">
             <a:avLst/>
@@ -20618,7 +20618,7 @@
         <p:spPr>
           <a:xfrm>
             <a:off x="6400800" y="2824200"/>
-            <a:ext cx="885240" cy="570960"/>
+            <a:ext cx="884880" cy="570600"/>
           </a:xfrm>
           <a:prstGeom prst="rect">
             <a:avLst/>
@@ -20672,7 +20672,7 @@
         <p:spPr>
           <a:xfrm>
             <a:off x="7188480" y="2900520"/>
-            <a:ext cx="2475720" cy="304200"/>
+            <a:ext cx="2475360" cy="303840"/>
           </a:xfrm>
           <a:prstGeom prst="rect">
             <a:avLst/>
@@ -20724,7 +20724,7 @@
         <p:spPr>
           <a:xfrm>
             <a:off x="7188480" y="3281400"/>
-            <a:ext cx="2447280" cy="275400"/>
+            <a:ext cx="2446920" cy="275040"/>
           </a:xfrm>
           <a:prstGeom prst="rect">
             <a:avLst/>
@@ -20776,7 +20776,7 @@
         <p:spPr>
           <a:xfrm>
             <a:off x="380880" y="3940920"/>
-            <a:ext cx="847080" cy="570960"/>
+            <a:ext cx="846720" cy="570600"/>
           </a:xfrm>
           <a:prstGeom prst="rect">
             <a:avLst/>
@@ -20830,7 +20830,7 @@
         <p:spPr>
           <a:xfrm>
             <a:off x="1137240" y="4017240"/>
-            <a:ext cx="2866320" cy="304200"/>
+            <a:ext cx="2865960" cy="303840"/>
           </a:xfrm>
           <a:prstGeom prst="rect">
             <a:avLst/>
@@ -20882,7 +20882,7 @@
         <p:spPr>
           <a:xfrm>
             <a:off x="1137240" y="4398120"/>
-            <a:ext cx="2837880" cy="275400"/>
+            <a:ext cx="2837520" cy="275040"/>
           </a:xfrm>
           <a:prstGeom prst="rect">
             <a:avLst/>
@@ -20934,7 +20934,7 @@
         <p:spPr>
           <a:xfrm>
             <a:off x="6400800" y="3940920"/>
-            <a:ext cx="866160" cy="570960"/>
+            <a:ext cx="865800" cy="570600"/>
           </a:xfrm>
           <a:prstGeom prst="rect">
             <a:avLst/>
@@ -20988,7 +20988,7 @@
         <p:spPr>
           <a:xfrm>
             <a:off x="7171560" y="4017240"/>
-            <a:ext cx="3075840" cy="304200"/>
+            <a:ext cx="3075480" cy="303840"/>
           </a:xfrm>
           <a:prstGeom prst="rect">
             <a:avLst/>
@@ -21040,7 +21040,7 @@
         <p:spPr>
           <a:xfrm>
             <a:off x="7171560" y="4398120"/>
-            <a:ext cx="3047400" cy="275400"/>
+            <a:ext cx="3047040" cy="275040"/>
           </a:xfrm>
           <a:prstGeom prst="rect">
             <a:avLst/>
@@ -21129,7 +21129,7 @@
         <p:spPr>
           <a:xfrm>
             <a:off x="335880" y="335880"/>
-            <a:ext cx="11586600" cy="200880"/>
+            <a:ext cx="11586240" cy="200520"/>
           </a:xfrm>
           <a:prstGeom prst="rect">
             <a:avLst/>
@@ -21157,7 +21157,7 @@
               <a:buNone/>
             </a:pPr>
             <a:r>
-              <a:rPr b="1" lang="en-US" sz="1060" spc="49" strike="noStrike">
+              <a:rPr b="1" lang="en-US" sz="1060" spc="46" strike="noStrike">
                 <a:solidFill>
                   <a:srgbClr val="0984e3"/>
                 </a:solidFill>
@@ -21181,7 +21181,7 @@
         <p:spPr>
           <a:xfrm>
             <a:off x="335880" y="604440"/>
-            <a:ext cx="11721240" cy="402480"/>
+            <a:ext cx="11720880" cy="402120"/>
           </a:xfrm>
           <a:prstGeom prst="rect">
             <a:avLst/>
@@ -21233,7 +21233,7 @@
         <p:spPr>
           <a:xfrm>
             <a:off x="335880" y="1251000"/>
-            <a:ext cx="5995440" cy="456840"/>
+            <a:ext cx="5995080" cy="456480"/>
           </a:xfrm>
           <a:prstGeom prst="rect">
             <a:avLst/>
@@ -21285,7 +21285,7 @@
         <p:spPr>
           <a:xfrm>
             <a:off x="335880" y="1889280"/>
-            <a:ext cx="6876000" cy="654120"/>
+            <a:ext cx="6875640" cy="653760"/>
           </a:xfrm>
           <a:prstGeom prst="rect">
             <a:avLst/>
@@ -21337,7 +21337,7 @@
         <p:spPr>
           <a:xfrm>
             <a:off x="340200" y="2682720"/>
-            <a:ext cx="6800760" cy="1955880"/>
+            <a:ext cx="6800400" cy="1955520"/>
           </a:xfrm>
           <a:custGeom>
             <a:avLst/>
@@ -21391,7 +21391,7 @@
         <p:spPr>
           <a:xfrm>
             <a:off x="512280" y="2854800"/>
-            <a:ext cx="6540480" cy="234360"/>
+            <a:ext cx="6540120" cy="234000"/>
           </a:xfrm>
           <a:prstGeom prst="rect">
             <a:avLst/>
@@ -21443,7 +21443,7 @@
         <p:spPr>
           <a:xfrm>
             <a:off x="512280" y="3190680"/>
-            <a:ext cx="6523560" cy="217440"/>
+            <a:ext cx="6523200" cy="217080"/>
           </a:xfrm>
           <a:prstGeom prst="rect">
             <a:avLst/>
@@ -21495,7 +21495,7 @@
         <p:spPr>
           <a:xfrm>
             <a:off x="512280" y="3509640"/>
-            <a:ext cx="6456240" cy="637560"/>
+            <a:ext cx="6455880" cy="637200"/>
           </a:xfrm>
           <a:custGeom>
             <a:avLst/>
@@ -21546,7 +21546,7 @@
         <p:spPr>
           <a:xfrm>
             <a:off x="613080" y="3610440"/>
-            <a:ext cx="6321960" cy="200880"/>
+            <a:ext cx="6321600" cy="200520"/>
           </a:xfrm>
           <a:prstGeom prst="rect">
             <a:avLst/>
@@ -21598,7 +21598,7 @@
         <p:spPr>
           <a:xfrm>
             <a:off x="613080" y="3845520"/>
-            <a:ext cx="6321960" cy="200880"/>
+            <a:ext cx="6321600" cy="200520"/>
           </a:xfrm>
           <a:prstGeom prst="rect">
             <a:avLst/>
@@ -21650,7 +21650,7 @@
         <p:spPr>
           <a:xfrm>
             <a:off x="512280" y="4248720"/>
-            <a:ext cx="6523560" cy="217440"/>
+            <a:ext cx="6523200" cy="217080"/>
           </a:xfrm>
           <a:prstGeom prst="rect">
             <a:avLst/>
@@ -21702,7 +21702,7 @@
         <p:spPr>
           <a:xfrm>
             <a:off x="352800" y="4777560"/>
-            <a:ext cx="6792120" cy="1527480"/>
+            <a:ext cx="6791760" cy="1527120"/>
           </a:xfrm>
           <a:custGeom>
             <a:avLst/>
@@ -21753,7 +21753,7 @@
         <p:spPr>
           <a:xfrm>
             <a:off x="352800" y="4777560"/>
-            <a:ext cx="32760" cy="1527480"/>
+            <a:ext cx="32400" cy="1527120"/>
           </a:xfrm>
           <a:custGeom>
             <a:avLst/>
@@ -21804,7 +21804,7 @@
         <p:spPr>
           <a:xfrm>
             <a:off x="537480" y="4945680"/>
-            <a:ext cx="6523560" cy="234360"/>
+            <a:ext cx="6523200" cy="234000"/>
           </a:xfrm>
           <a:prstGeom prst="rect">
             <a:avLst/>
@@ -21856,7 +21856,7 @@
         <p:spPr>
           <a:xfrm>
             <a:off x="537480" y="5281560"/>
-            <a:ext cx="6506640" cy="217440"/>
+            <a:ext cx="6506280" cy="217080"/>
           </a:xfrm>
           <a:prstGeom prst="rect">
             <a:avLst/>
@@ -21908,7 +21908,7 @@
         <p:spPr>
           <a:xfrm>
             <a:off x="537480" y="5600520"/>
-            <a:ext cx="3215160" cy="200880"/>
+            <a:ext cx="3214800" cy="200520"/>
           </a:xfrm>
           <a:prstGeom prst="rect">
             <a:avLst/>
@@ -21970,7 +21970,7 @@
         <p:spPr>
           <a:xfrm>
             <a:off x="3823200" y="5600520"/>
-            <a:ext cx="3215160" cy="200880"/>
+            <a:ext cx="3214800" cy="200520"/>
           </a:xfrm>
           <a:prstGeom prst="rect">
             <a:avLst/>
@@ -22032,7 +22032,7 @@
         <p:spPr>
           <a:xfrm>
             <a:off x="537480" y="5936400"/>
-            <a:ext cx="3215160" cy="200880"/>
+            <a:ext cx="3214800" cy="200520"/>
           </a:xfrm>
           <a:prstGeom prst="rect">
             <a:avLst/>
@@ -22094,7 +22094,7 @@
         <p:spPr>
           <a:xfrm>
             <a:off x="3823200" y="5936400"/>
-            <a:ext cx="3215160" cy="200880"/>
+            <a:ext cx="3214800" cy="200520"/>
           </a:xfrm>
           <a:prstGeom prst="rect">
             <a:avLst/>
@@ -22156,7 +22156,7 @@
         <p:spPr>
           <a:xfrm>
             <a:off x="7415640" y="1213200"/>
-            <a:ext cx="4440960" cy="3500640"/>
+            <a:ext cx="4440600" cy="3500280"/>
           </a:xfrm>
           <a:custGeom>
             <a:avLst/>
@@ -22210,7 +22210,7 @@
         <p:spPr>
           <a:xfrm>
             <a:off x="7587720" y="1385280"/>
-            <a:ext cx="4096800" cy="1678680"/>
+            <a:ext cx="4096440" cy="1678320"/>
           </a:xfrm>
           <a:prstGeom prst="roundRect">
             <a:avLst>
@@ -22242,7 +22242,7 @@
         <p:spPr>
           <a:xfrm>
             <a:off x="7545600" y="3199320"/>
-            <a:ext cx="4180680" cy="234360"/>
+            <a:ext cx="4180320" cy="234000"/>
           </a:xfrm>
           <a:prstGeom prst="rect">
             <a:avLst/>
@@ -22294,7 +22294,7 @@
         <p:spPr>
           <a:xfrm>
             <a:off x="7621200" y="3564360"/>
-            <a:ext cx="100080" cy="133560"/>
+            <a:ext cx="99720" cy="133200"/>
           </a:xfrm>
           <a:custGeom>
             <a:avLst/>
@@ -22493,7 +22493,7 @@
         <p:spPr>
           <a:xfrm>
             <a:off x="7800120" y="3534840"/>
-            <a:ext cx="3951720" cy="200880"/>
+            <a:ext cx="3951360" cy="200520"/>
           </a:xfrm>
           <a:prstGeom prst="rect">
             <a:avLst/>
@@ -22555,7 +22555,7 @@
         <p:spPr>
           <a:xfrm>
             <a:off x="7604640" y="3832920"/>
-            <a:ext cx="133560" cy="133560"/>
+            <a:ext cx="133200" cy="133200"/>
           </a:xfrm>
           <a:custGeom>
             <a:avLst/>
@@ -22762,7 +22762,7 @@
         <p:spPr>
           <a:xfrm>
             <a:off x="7800120" y="3803760"/>
-            <a:ext cx="3951720" cy="200880"/>
+            <a:ext cx="3951360" cy="200520"/>
           </a:xfrm>
           <a:prstGeom prst="rect">
             <a:avLst/>
@@ -22824,7 +22824,7 @@
         <p:spPr>
           <a:xfrm>
             <a:off x="7604640" y="4101840"/>
-            <a:ext cx="133560" cy="133560"/>
+            <a:ext cx="133200" cy="133200"/>
           </a:xfrm>
           <a:custGeom>
             <a:avLst/>
@@ -23015,7 +23015,7 @@
         <p:spPr>
           <a:xfrm>
             <a:off x="7800120" y="4072320"/>
-            <a:ext cx="3951720" cy="200880"/>
+            <a:ext cx="3951360" cy="200520"/>
           </a:xfrm>
           <a:prstGeom prst="rect">
             <a:avLst/>
@@ -23077,7 +23077,7 @@
         <p:spPr>
           <a:xfrm>
             <a:off x="7587720" y="4370400"/>
-            <a:ext cx="167040" cy="133560"/>
+            <a:ext cx="166680" cy="133200"/>
           </a:xfrm>
           <a:custGeom>
             <a:avLst/>
@@ -23293,7 +23293,7 @@
         <p:spPr>
           <a:xfrm>
             <a:off x="7800120" y="4341240"/>
-            <a:ext cx="3951720" cy="200880"/>
+            <a:ext cx="3951360" cy="200520"/>
           </a:xfrm>
           <a:prstGeom prst="rect">
             <a:avLst/>
@@ -23355,7 +23355,7 @@
         <p:spPr>
           <a:xfrm>
             <a:off x="7411320" y="4853160"/>
-            <a:ext cx="4449600" cy="1292400"/>
+            <a:ext cx="4449240" cy="1292040"/>
           </a:xfrm>
           <a:custGeom>
             <a:avLst/>
@@ -23406,7 +23406,7 @@
         <p:spPr>
           <a:xfrm>
             <a:off x="7579440" y="5021280"/>
-            <a:ext cx="4189320" cy="234360"/>
+            <a:ext cx="4188960" cy="234000"/>
           </a:xfrm>
           <a:prstGeom prst="rect">
             <a:avLst/>
@@ -23458,7 +23458,7 @@
         <p:spPr>
           <a:xfrm>
             <a:off x="7579440" y="5323680"/>
-            <a:ext cx="4180680" cy="654120"/>
+            <a:ext cx="4180320" cy="653760"/>
           </a:xfrm>
           <a:prstGeom prst="rect">
             <a:avLst/>
@@ -23547,7 +23547,7 @@
         <p:spPr>
           <a:xfrm>
             <a:off x="5486400" y="585720"/>
-            <a:ext cx="1218600" cy="18360"/>
+            <a:ext cx="1218240" cy="18000"/>
           </a:xfrm>
           <a:custGeom>
             <a:avLst/>
@@ -23598,7 +23598,7 @@
         <p:spPr>
           <a:xfrm>
             <a:off x="3664080" y="909720"/>
-            <a:ext cx="4866480" cy="1428120"/>
+            <a:ext cx="4866120" cy="1427760"/>
           </a:xfrm>
           <a:prstGeom prst="rect">
             <a:avLst/>
@@ -23671,7 +23671,7 @@
         <p:spPr>
           <a:xfrm>
             <a:off x="5486400" y="2643120"/>
-            <a:ext cx="1218600" cy="18360"/>
+            <a:ext cx="1218240" cy="18000"/>
           </a:xfrm>
           <a:custGeom>
             <a:avLst/>
@@ -23722,7 +23722,7 @@
         <p:spPr>
           <a:xfrm>
             <a:off x="1771560" y="2967120"/>
-            <a:ext cx="8647920" cy="1113840"/>
+            <a:ext cx="8647560" cy="1113480"/>
           </a:xfrm>
           <a:prstGeom prst="rect">
             <a:avLst/>
@@ -23774,7 +23774,7 @@
         <p:spPr>
           <a:xfrm>
             <a:off x="1781280" y="4309920"/>
-            <a:ext cx="8628840" cy="1237680"/>
+            <a:ext cx="8628480" cy="1237320"/>
           </a:xfrm>
           <a:prstGeom prst="rect">
             <a:avLst/>
@@ -23826,7 +23826,7 @@
         <p:spPr>
           <a:xfrm>
             <a:off x="2615400" y="6005520"/>
-            <a:ext cx="6962040" cy="266040"/>
+            <a:ext cx="6961680" cy="265680"/>
           </a:xfrm>
           <a:prstGeom prst="rect">
             <a:avLst/>
@@ -23915,7 +23915,7 @@
         <p:spPr>
           <a:xfrm>
             <a:off x="609480" y="1781280"/>
-            <a:ext cx="12191400" cy="1218600"/>
+            <a:ext cx="12191040" cy="1218240"/>
           </a:xfrm>
           <a:prstGeom prst="rect">
             <a:avLst/>
@@ -23969,7 +23969,7 @@
         <p:spPr>
           <a:xfrm>
             <a:off x="609480" y="3152880"/>
-            <a:ext cx="11867400" cy="1142280"/>
+            <a:ext cx="11867040" cy="1141920"/>
           </a:xfrm>
           <a:prstGeom prst="rect">
             <a:avLst/>
@@ -24042,7 +24042,7 @@
         <p:spPr>
           <a:xfrm>
             <a:off x="609480" y="4524480"/>
-            <a:ext cx="1218600" cy="18360"/>
+            <a:ext cx="1218240" cy="18000"/>
           </a:xfrm>
           <a:custGeom>
             <a:avLst/>
@@ -24093,7 +24093,7 @@
         <p:spPr>
           <a:xfrm>
             <a:off x="609480" y="4772160"/>
-            <a:ext cx="11696040" cy="304200"/>
+            <a:ext cx="11695680" cy="303840"/>
           </a:xfrm>
           <a:prstGeom prst="rect">
             <a:avLst/>
@@ -24182,7 +24182,7 @@
         <p:spPr>
           <a:xfrm>
             <a:off x="380880" y="380880"/>
-            <a:ext cx="11505600" cy="227880"/>
+            <a:ext cx="11505240" cy="227520"/>
           </a:xfrm>
           <a:prstGeom prst="rect">
             <a:avLst/>
@@ -24210,7 +24210,7 @@
               <a:buNone/>
             </a:pPr>
             <a:r>
-              <a:rPr b="1" lang="en-US" sz="1200" spc="55" strike="noStrike">
+              <a:rPr b="1" lang="en-US" sz="1200" spc="52" strike="noStrike">
                 <a:solidFill>
                   <a:srgbClr val="0984e3"/>
                 </a:solidFill>
@@ -24234,7 +24234,7 @@
         <p:spPr>
           <a:xfrm>
             <a:off x="380880" y="685800"/>
-            <a:ext cx="11657880" cy="456480"/>
+            <a:ext cx="11657520" cy="456120"/>
           </a:xfrm>
           <a:prstGeom prst="rect">
             <a:avLst/>
@@ -24286,7 +24286,7 @@
         <p:spPr>
           <a:xfrm>
             <a:off x="380880" y="1371600"/>
-            <a:ext cx="6828840" cy="1237680"/>
+            <a:ext cx="6828480" cy="1237320"/>
           </a:xfrm>
           <a:prstGeom prst="rect">
             <a:avLst/>
@@ -24314,7 +24314,7 @@
               <a:buNone/>
             </a:pPr>
             <a:r>
-              <a:rPr b="1" i="1" lang="en-US" sz="1500" spc="-1" strike="noStrike">
+              <a:rPr b="1" lang="en-US" sz="1500" spc="-1" strike="noStrike">
                 <a:solidFill>
                   <a:srgbClr val="00008b"/>
                 </a:solidFill>
@@ -24324,7 +24324,7 @@
               <a:t>Game theory is a mathematical framework for analyzing strategic interactions among rational decision-makers.</a:t>
             </a:r>
             <a:r>
-              <a:rPr b="0" i="1" lang="en-US" sz="1500" spc="-1" strike="noStrike">
+              <a:rPr b="0" lang="en-US" sz="1500" spc="-1" strike="noStrike">
                 <a:solidFill>
                   <a:srgbClr val="00008b"/>
                 </a:solidFill>
@@ -24351,7 +24351,7 @@
         <p:spPr>
           <a:xfrm>
             <a:off x="380880" y="2838600"/>
-            <a:ext cx="6819120" cy="1113840"/>
+            <a:ext cx="6818760" cy="1113480"/>
           </a:xfrm>
           <a:prstGeom prst="rect">
             <a:avLst/>
@@ -24388,10 +24388,7 @@
               </a:rPr>
               <a:t>Originally developed to investigate rational and economic behavior, game theory has evolved into a powerful tool with applications spanning economics, political science, biology, psychology, and computer science. It helps us predict behavior, design optimal strategies, and understand the dynamics of cooperation and competition.</a:t>
             </a:r>
-            <a:endParaRPr b="0" i="1" lang="en-HK" sz="1350" spc="-1" strike="noStrike">
-              <a:solidFill>
-                <a:srgbClr val="00008b"/>
-              </a:solidFill>
+            <a:endParaRPr b="0" lang="en-HK" sz="1350" spc="-1" strike="noStrike">
               <a:latin typeface="Arial"/>
             </a:endParaRPr>
           </a:p>
@@ -24406,7 +24403,7 @@
         <p:spPr>
           <a:xfrm>
             <a:off x="399960" y="4986360"/>
-            <a:ext cx="6714360" cy="1361520"/>
+            <a:ext cx="6714000" cy="1361160"/>
           </a:xfrm>
           <a:custGeom>
             <a:avLst/>
@@ -24457,7 +24454,7 @@
         <p:spPr>
           <a:xfrm>
             <a:off x="399960" y="4986360"/>
-            <a:ext cx="37440" cy="1361520"/>
+            <a:ext cx="37080" cy="1361160"/>
           </a:xfrm>
           <a:custGeom>
             <a:avLst/>
@@ -24508,7 +24505,7 @@
         <p:spPr>
           <a:xfrm>
             <a:off x="647640" y="5214960"/>
-            <a:ext cx="6323760" cy="561240"/>
+            <a:ext cx="6323400" cy="560880"/>
           </a:xfrm>
           <a:prstGeom prst="rect">
             <a:avLst/>
@@ -24545,10 +24542,7 @@
               </a:rPr>
               <a:t>"Game theory is the study of mathematical models of strategic interaction among rational decision-makers."</a:t>
             </a:r>
-            <a:endParaRPr b="0" i="1" lang="en-HK" sz="1350" spc="-1" strike="noStrike">
-              <a:solidFill>
-                <a:srgbClr val="00008b"/>
-              </a:solidFill>
+            <a:endParaRPr b="0" lang="en-HK" sz="1350" spc="-1" strike="noStrike">
               <a:latin typeface="Arial"/>
             </a:endParaRPr>
           </a:p>
@@ -24563,7 +24557,7 @@
         <p:spPr>
           <a:xfrm>
             <a:off x="647640" y="5886360"/>
-            <a:ext cx="6314400" cy="227880"/>
+            <a:ext cx="6314040" cy="227520"/>
           </a:xfrm>
           <a:prstGeom prst="rect">
             <a:avLst/>
@@ -24625,7 +24619,7 @@
         <p:spPr>
           <a:xfrm>
             <a:off x="7426440" y="1376280"/>
-            <a:ext cx="4380840" cy="1494720"/>
+            <a:ext cx="4380480" cy="1494360"/>
           </a:xfrm>
           <a:custGeom>
             <a:avLst/>
@@ -24679,7 +24673,7 @@
         <p:spPr>
           <a:xfrm>
             <a:off x="7660080" y="1609560"/>
-            <a:ext cx="380160" cy="380160"/>
+            <a:ext cx="379800" cy="379800"/>
           </a:xfrm>
           <a:custGeom>
             <a:avLst/>
@@ -24730,7 +24724,7 @@
         <p:spPr>
           <a:xfrm>
             <a:off x="7745760" y="1714680"/>
-            <a:ext cx="213480" cy="170640"/>
+            <a:ext cx="213120" cy="170280"/>
           </a:xfrm>
           <a:custGeom>
             <a:avLst/>
@@ -24946,7 +24940,7 @@
         <p:spPr>
           <a:xfrm>
             <a:off x="8155440" y="1666800"/>
-            <a:ext cx="637560" cy="266040"/>
+            <a:ext cx="637200" cy="265680"/>
           </a:xfrm>
           <a:prstGeom prst="rect">
             <a:avLst/>
@@ -24998,7 +24992,7 @@
         <p:spPr>
           <a:xfrm>
             <a:off x="7660080" y="2143080"/>
-            <a:ext cx="3990240" cy="494640"/>
+            <a:ext cx="3989880" cy="494280"/>
           </a:xfrm>
           <a:prstGeom prst="rect">
             <a:avLst/>
@@ -25035,10 +25029,7 @@
               </a:rPr>
               <a:t>Decision-makers whose choices influence outcomes. Games may involve two players or many.</a:t>
             </a:r>
-            <a:endParaRPr b="0" i="1" lang="en-HK" sz="1200" spc="-1" strike="noStrike">
-              <a:solidFill>
-                <a:srgbClr val="00008b"/>
-              </a:solidFill>
+            <a:endParaRPr b="0" lang="en-HK" sz="1200" spc="-1" strike="noStrike">
               <a:latin typeface="Arial"/>
             </a:endParaRPr>
           </a:p>
@@ -25053,7 +25044,7 @@
         <p:spPr>
           <a:xfrm>
             <a:off x="7426440" y="3110040"/>
-            <a:ext cx="4380840" cy="1494720"/>
+            <a:ext cx="4380480" cy="1494360"/>
           </a:xfrm>
           <a:custGeom>
             <a:avLst/>
@@ -25107,7 +25098,7 @@
         <p:spPr>
           <a:xfrm>
             <a:off x="7660080" y="3343320"/>
-            <a:ext cx="380160" cy="380160"/>
+            <a:ext cx="379800" cy="379800"/>
           </a:xfrm>
           <a:custGeom>
             <a:avLst/>
@@ -25158,7 +25149,7 @@
         <p:spPr>
           <a:xfrm>
             <a:off x="7767000" y="3448080"/>
-            <a:ext cx="170640" cy="170640"/>
+            <a:ext cx="170280" cy="170280"/>
           </a:xfrm>
           <a:custGeom>
             <a:avLst/>
@@ -25434,7 +25425,7 @@
         <p:spPr>
           <a:xfrm>
             <a:off x="8155440" y="3400560"/>
-            <a:ext cx="866160" cy="266040"/>
+            <a:ext cx="865800" cy="265680"/>
           </a:xfrm>
           <a:prstGeom prst="rect">
             <a:avLst/>
@@ -25486,7 +25477,7 @@
         <p:spPr>
           <a:xfrm>
             <a:off x="7660080" y="3876840"/>
-            <a:ext cx="3990240" cy="494640"/>
+            <a:ext cx="3989880" cy="494280"/>
           </a:xfrm>
           <a:prstGeom prst="rect">
             <a:avLst/>
@@ -25523,10 +25514,7 @@
               </a:rPr>
               <a:t>Complete plans of action available to each player, specifying choices at every decision point.</a:t>
             </a:r>
-            <a:endParaRPr b="0" i="1" lang="en-HK" sz="1200" spc="-1" strike="noStrike">
-              <a:solidFill>
-                <a:srgbClr val="00008b"/>
-              </a:solidFill>
+            <a:endParaRPr b="0" lang="en-HK" sz="1200" spc="-1" strike="noStrike">
               <a:latin typeface="Arial"/>
             </a:endParaRPr>
           </a:p>
@@ -25541,7 +25529,7 @@
         <p:spPr>
           <a:xfrm>
             <a:off x="7426440" y="4843440"/>
-            <a:ext cx="4380840" cy="1494720"/>
+            <a:ext cx="4380480" cy="1494360"/>
           </a:xfrm>
           <a:custGeom>
             <a:avLst/>
@@ -25595,7 +25583,7 @@
         <p:spPr>
           <a:xfrm>
             <a:off x="7660080" y="5076720"/>
-            <a:ext cx="380160" cy="380160"/>
+            <a:ext cx="379800" cy="379800"/>
           </a:xfrm>
           <a:custGeom>
             <a:avLst/>
@@ -25646,7 +25634,7 @@
         <p:spPr>
           <a:xfrm>
             <a:off x="7767000" y="5181480"/>
-            <a:ext cx="170640" cy="170640"/>
+            <a:ext cx="170280" cy="170280"/>
           </a:xfrm>
           <a:custGeom>
             <a:avLst/>
@@ -25823,7 +25811,7 @@
         <p:spPr>
           <a:xfrm>
             <a:off x="8155440" y="5133960"/>
-            <a:ext cx="656640" cy="266040"/>
+            <a:ext cx="656280" cy="265680"/>
           </a:xfrm>
           <a:prstGeom prst="rect">
             <a:avLst/>
@@ -25875,7 +25863,7 @@
         <p:spPr>
           <a:xfrm>
             <a:off x="7660080" y="5610240"/>
-            <a:ext cx="3990240" cy="494640"/>
+            <a:ext cx="3989880" cy="494280"/>
           </a:xfrm>
           <a:prstGeom prst="rect">
             <a:avLst/>
@@ -25912,10 +25900,7 @@
               </a:rPr>
               <a:t>Numerical values representing utility or benefit received by players for each outcome.</a:t>
             </a:r>
-            <a:endParaRPr b="0" i="1" lang="en-HK" sz="1200" spc="-1" strike="noStrike">
-              <a:solidFill>
-                <a:srgbClr val="00008b"/>
-              </a:solidFill>
+            <a:endParaRPr b="0" lang="en-HK" sz="1200" spc="-1" strike="noStrike">
               <a:latin typeface="Arial"/>
             </a:endParaRPr>
           </a:p>
@@ -25967,7 +25952,7 @@
         <p:spPr>
           <a:xfrm>
             <a:off x="609480" y="1781280"/>
-            <a:ext cx="12191400" cy="1218600"/>
+            <a:ext cx="12191040" cy="1218240"/>
           </a:xfrm>
           <a:prstGeom prst="rect">
             <a:avLst/>
@@ -26021,7 +26006,7 @@
         <p:spPr>
           <a:xfrm>
             <a:off x="609480" y="3152880"/>
-            <a:ext cx="11867400" cy="1142280"/>
+            <a:ext cx="11867040" cy="1141920"/>
           </a:xfrm>
           <a:prstGeom prst="rect">
             <a:avLst/>
@@ -26094,7 +26079,7 @@
         <p:spPr>
           <a:xfrm>
             <a:off x="609480" y="4524480"/>
-            <a:ext cx="1218600" cy="18360"/>
+            <a:ext cx="1218240" cy="18000"/>
           </a:xfrm>
           <a:custGeom>
             <a:avLst/>
@@ -26145,7 +26130,7 @@
         <p:spPr>
           <a:xfrm>
             <a:off x="609480" y="4772160"/>
-            <a:ext cx="11696040" cy="304200"/>
+            <a:ext cx="11695680" cy="303840"/>
           </a:xfrm>
           <a:prstGeom prst="rect">
             <a:avLst/>
@@ -26234,7 +26219,7 @@
         <p:spPr>
           <a:xfrm>
             <a:off x="324360" y="324360"/>
-            <a:ext cx="11607480" cy="193680"/>
+            <a:ext cx="11607120" cy="193320"/>
           </a:xfrm>
           <a:prstGeom prst="rect">
             <a:avLst/>
@@ -26262,7 +26247,7 @@
               <a:buNone/>
             </a:pPr>
             <a:r>
-              <a:rPr b="1" lang="en-US" sz="1020" spc="46" strike="noStrike">
+              <a:rPr b="1" lang="en-US" sz="1020" spc="43" strike="noStrike">
                 <a:solidFill>
                   <a:srgbClr val="0984e3"/>
                 </a:solidFill>
@@ -26286,7 +26271,7 @@
         <p:spPr>
           <a:xfrm>
             <a:off x="324360" y="583560"/>
-            <a:ext cx="11737440" cy="388440"/>
+            <a:ext cx="11737080" cy="388080"/>
           </a:xfrm>
           <a:prstGeom prst="rect">
             <a:avLst/>
@@ -26338,7 +26323,7 @@
         <p:spPr>
           <a:xfrm>
             <a:off x="6095880" y="1167480"/>
-            <a:ext cx="15480" cy="4976640"/>
+            <a:ext cx="15120" cy="4976280"/>
           </a:xfrm>
           <a:custGeom>
             <a:avLst/>
@@ -26389,7 +26374,7 @@
         <p:spPr>
           <a:xfrm>
             <a:off x="1638000" y="1171440"/>
-            <a:ext cx="3866040" cy="720720"/>
+            <a:ext cx="3865680" cy="720360"/>
           </a:xfrm>
           <a:custGeom>
             <a:avLst/>
@@ -26443,7 +26428,7 @@
         <p:spPr>
           <a:xfrm>
             <a:off x="1698840" y="1305000"/>
-            <a:ext cx="3671640" cy="226080"/>
+            <a:ext cx="3671280" cy="225720"/>
           </a:xfrm>
           <a:prstGeom prst="rect">
             <a:avLst/>
@@ -26495,7 +26480,7 @@
         <p:spPr>
           <a:xfrm>
             <a:off x="1706760" y="1564560"/>
-            <a:ext cx="3663360" cy="193680"/>
+            <a:ext cx="3663000" cy="193320"/>
           </a:xfrm>
           <a:prstGeom prst="rect">
             <a:avLst/>
@@ -26547,7 +26532,7 @@
         <p:spPr>
           <a:xfrm>
             <a:off x="6683760" y="2030760"/>
-            <a:ext cx="3290400" cy="720720"/>
+            <a:ext cx="3290040" cy="720360"/>
           </a:xfrm>
           <a:custGeom>
             <a:avLst/>
@@ -26601,7 +26586,7 @@
         <p:spPr>
           <a:xfrm>
             <a:off x="6817320" y="2164320"/>
-            <a:ext cx="3096000" cy="226080"/>
+            <a:ext cx="3095640" cy="225720"/>
           </a:xfrm>
           <a:prstGeom prst="rect">
             <a:avLst/>
@@ -26653,7 +26638,7 @@
         <p:spPr>
           <a:xfrm>
             <a:off x="6817320" y="2423880"/>
-            <a:ext cx="3087720" cy="193680"/>
+            <a:ext cx="3087360" cy="193320"/>
           </a:xfrm>
           <a:prstGeom prst="rect">
             <a:avLst/>
@@ -26705,7 +26690,7 @@
         <p:spPr>
           <a:xfrm>
             <a:off x="633600" y="2885760"/>
-            <a:ext cx="4879440" cy="712800"/>
+            <a:ext cx="4879080" cy="712440"/>
           </a:xfrm>
           <a:custGeom>
             <a:avLst/>
@@ -26756,7 +26741,7 @@
         <p:spPr>
           <a:xfrm>
             <a:off x="633600" y="2885760"/>
-            <a:ext cx="31680" cy="712800"/>
+            <a:ext cx="31320" cy="712440"/>
           </a:xfrm>
           <a:custGeom>
             <a:avLst/>
@@ -26807,7 +26792,7 @@
         <p:spPr>
           <a:xfrm>
             <a:off x="706680" y="3015720"/>
-            <a:ext cx="4676760" cy="226080"/>
+            <a:ext cx="4676400" cy="225720"/>
           </a:xfrm>
           <a:prstGeom prst="rect">
             <a:avLst/>
@@ -26859,7 +26844,7 @@
         <p:spPr>
           <a:xfrm>
             <a:off x="714960" y="3274920"/>
-            <a:ext cx="4668480" cy="193680"/>
+            <a:ext cx="4668120" cy="193320"/>
           </a:xfrm>
           <a:prstGeom prst="rect">
             <a:avLst/>
@@ -26921,7 +26906,7 @@
         <p:spPr>
           <a:xfrm>
             <a:off x="6696000" y="3728880"/>
-            <a:ext cx="5016960" cy="712800"/>
+            <a:ext cx="5016600" cy="712440"/>
           </a:xfrm>
           <a:custGeom>
             <a:avLst/>
@@ -26972,7 +26957,7 @@
         <p:spPr>
           <a:xfrm>
             <a:off x="6696000" y="3728880"/>
-            <a:ext cx="31680" cy="712800"/>
+            <a:ext cx="31320" cy="712440"/>
           </a:xfrm>
           <a:custGeom>
             <a:avLst/>
@@ -27023,7 +27008,7 @@
         <p:spPr>
           <a:xfrm>
             <a:off x="6841800" y="3858480"/>
-            <a:ext cx="4814640" cy="226080"/>
+            <a:ext cx="4814280" cy="225720"/>
           </a:xfrm>
           <a:prstGeom prst="rect">
             <a:avLst/>
@@ -27075,7 +27060,7 @@
         <p:spPr>
           <a:xfrm>
             <a:off x="6841800" y="4118040"/>
-            <a:ext cx="4806360" cy="193680"/>
+            <a:ext cx="4806000" cy="193320"/>
           </a:xfrm>
           <a:prstGeom prst="rect">
             <a:avLst/>
@@ -27137,7 +27122,7 @@
         <p:spPr>
           <a:xfrm>
             <a:off x="1476360" y="4572000"/>
-            <a:ext cx="4036320" cy="712800"/>
+            <a:ext cx="4035960" cy="712440"/>
           </a:xfrm>
           <a:custGeom>
             <a:avLst/>
@@ -27188,7 +27173,7 @@
         <p:spPr>
           <a:xfrm>
             <a:off x="1532880" y="4701600"/>
-            <a:ext cx="3849840" cy="226080"/>
+            <a:ext cx="3849480" cy="225720"/>
           </a:xfrm>
           <a:prstGeom prst="rect">
             <a:avLst/>
@@ -27240,7 +27225,7 @@
         <p:spPr>
           <a:xfrm>
             <a:off x="1541160" y="4961160"/>
-            <a:ext cx="3841560" cy="193680"/>
+            <a:ext cx="3841200" cy="193320"/>
           </a:xfrm>
           <a:prstGeom prst="rect">
             <a:avLst/>
@@ -27302,7 +27287,7 @@
         <p:spPr>
           <a:xfrm>
             <a:off x="6683760" y="5419080"/>
-            <a:ext cx="3987720" cy="720720"/>
+            <a:ext cx="3987360" cy="720360"/>
           </a:xfrm>
           <a:custGeom>
             <a:avLst/>
@@ -27356,7 +27341,7 @@
         <p:spPr>
           <a:xfrm>
             <a:off x="6817320" y="5553000"/>
-            <a:ext cx="3792960" cy="226080"/>
+            <a:ext cx="3792600" cy="225720"/>
           </a:xfrm>
           <a:prstGeom prst="rect">
             <a:avLst/>
@@ -27408,7 +27393,7 @@
         <p:spPr>
           <a:xfrm>
             <a:off x="6817320" y="5812200"/>
-            <a:ext cx="3785040" cy="193680"/>
+            <a:ext cx="3784680" cy="193320"/>
           </a:xfrm>
           <a:prstGeom prst="rect">
             <a:avLst/>
@@ -27460,7 +27445,7 @@
         <p:spPr>
           <a:xfrm>
             <a:off x="6031080" y="1467360"/>
-            <a:ext cx="128880" cy="128880"/>
+            <a:ext cx="128520" cy="128520"/>
           </a:xfrm>
           <a:custGeom>
             <a:avLst/>
@@ -27531,7 +27516,7 @@
         <p:spPr>
           <a:xfrm>
             <a:off x="6031080" y="2326680"/>
-            <a:ext cx="128880" cy="128880"/>
+            <a:ext cx="128520" cy="128520"/>
           </a:xfrm>
           <a:custGeom>
             <a:avLst/>
@@ -27602,7 +27587,7 @@
         <p:spPr>
           <a:xfrm>
             <a:off x="6031080" y="3177720"/>
-            <a:ext cx="128880" cy="128880"/>
+            <a:ext cx="128520" cy="128520"/>
           </a:xfrm>
           <a:custGeom>
             <a:avLst/>
@@ -27673,7 +27658,7 @@
         <p:spPr>
           <a:xfrm>
             <a:off x="6031080" y="4020840"/>
-            <a:ext cx="128880" cy="128880"/>
+            <a:ext cx="128520" cy="128520"/>
           </a:xfrm>
           <a:custGeom>
             <a:avLst/>
@@ -27744,7 +27729,7 @@
         <p:spPr>
           <a:xfrm>
             <a:off x="6031080" y="4863960"/>
-            <a:ext cx="128880" cy="128880"/>
+            <a:ext cx="128520" cy="128520"/>
           </a:xfrm>
           <a:custGeom>
             <a:avLst/>
@@ -27815,7 +27800,7 @@
         <p:spPr>
           <a:xfrm>
             <a:off x="6031080" y="5715000"/>
-            <a:ext cx="128880" cy="128880"/>
+            <a:ext cx="128520" cy="128520"/>
           </a:xfrm>
           <a:custGeom>
             <a:avLst/>
@@ -27923,7 +27908,7 @@
         <p:spPr>
           <a:xfrm>
             <a:off x="380880" y="380880"/>
-            <a:ext cx="11505600" cy="227880"/>
+            <a:ext cx="11505240" cy="227520"/>
           </a:xfrm>
           <a:prstGeom prst="rect">
             <a:avLst/>
@@ -27951,7 +27936,7 @@
               <a:buNone/>
             </a:pPr>
             <a:r>
-              <a:rPr b="1" lang="en-US" sz="1200" spc="55" strike="noStrike">
+              <a:rPr b="1" lang="en-US" sz="1200" spc="52" strike="noStrike">
                 <a:solidFill>
                   <a:srgbClr val="0984e3"/>
                 </a:solidFill>
@@ -27975,7 +27960,7 @@
         <p:spPr>
           <a:xfrm>
             <a:off x="380880" y="685800"/>
-            <a:ext cx="11657880" cy="456480"/>
+            <a:ext cx="11657520" cy="456120"/>
           </a:xfrm>
           <a:prstGeom prst="rect">
             <a:avLst/>
@@ -28027,7 +28012,7 @@
         <p:spPr>
           <a:xfrm>
             <a:off x="380880" y="1371600"/>
-            <a:ext cx="4390200" cy="3047400"/>
+            <a:ext cx="4389840" cy="3047040"/>
           </a:xfrm>
           <a:prstGeom prst="roundRect">
             <a:avLst>
@@ -28059,7 +28044,7 @@
         <p:spPr>
           <a:xfrm>
             <a:off x="399960" y="4648320"/>
-            <a:ext cx="4371120" cy="1142280"/>
+            <a:ext cx="4370760" cy="1141920"/>
           </a:xfrm>
           <a:custGeom>
             <a:avLst/>
@@ -28110,7 +28095,7 @@
         <p:spPr>
           <a:xfrm>
             <a:off x="399960" y="4648320"/>
-            <a:ext cx="37440" cy="1142280"/>
+            <a:ext cx="37080" cy="1141920"/>
           </a:xfrm>
           <a:custGeom>
             <a:avLst/>
@@ -28161,7 +28146,7 @@
         <p:spPr>
           <a:xfrm>
             <a:off x="609480" y="4838760"/>
-            <a:ext cx="4047480" cy="494640"/>
+            <a:ext cx="4047120" cy="494280"/>
           </a:xfrm>
           <a:prstGeom prst="rect">
             <a:avLst/>
@@ -28213,7 +28198,7 @@
         <p:spPr>
           <a:xfrm>
             <a:off x="609480" y="5410080"/>
-            <a:ext cx="4037760" cy="189720"/>
+            <a:ext cx="4037400" cy="189360"/>
           </a:xfrm>
           <a:prstGeom prst="rect">
             <a:avLst/>
@@ -28275,7 +28260,7 @@
         <p:spPr>
           <a:xfrm>
             <a:off x="5074920" y="1371600"/>
-            <a:ext cx="6847920" cy="304200"/>
+            <a:ext cx="6847560" cy="303840"/>
           </a:xfrm>
           <a:prstGeom prst="rect">
             <a:avLst/>
@@ -28327,7 +28312,7 @@
         <p:spPr>
           <a:xfrm>
             <a:off x="5074920" y="1752480"/>
-            <a:ext cx="6809760" cy="990000"/>
+            <a:ext cx="6809400" cy="989640"/>
           </a:xfrm>
           <a:prstGeom prst="rect">
             <a:avLst/>
@@ -28379,7 +28364,7 @@
         <p:spPr>
           <a:xfrm>
             <a:off x="5074920" y="2895480"/>
-            <a:ext cx="6847920" cy="304200"/>
+            <a:ext cx="6847560" cy="303840"/>
           </a:xfrm>
           <a:prstGeom prst="rect">
             <a:avLst/>
@@ -28431,7 +28416,7 @@
         <p:spPr>
           <a:xfrm>
             <a:off x="5074920" y="3276720"/>
-            <a:ext cx="6809760" cy="990000"/>
+            <a:ext cx="6809400" cy="989640"/>
           </a:xfrm>
           <a:prstGeom prst="rect">
             <a:avLst/>
@@ -28503,7 +28488,7 @@
         <p:spPr>
           <a:xfrm>
             <a:off x="5074920" y="4419720"/>
-            <a:ext cx="6847920" cy="304200"/>
+            <a:ext cx="6847560" cy="303840"/>
           </a:xfrm>
           <a:prstGeom prst="rect">
             <a:avLst/>
@@ -28555,7 +28540,7 @@
         <p:spPr>
           <a:xfrm>
             <a:off x="5074920" y="4800600"/>
-            <a:ext cx="6809760" cy="990000"/>
+            <a:ext cx="6809400" cy="989640"/>
           </a:xfrm>
           <a:prstGeom prst="rect">
             <a:avLst/>
@@ -28664,7 +28649,7 @@
         <p:spPr>
           <a:xfrm>
             <a:off x="609480" y="1781280"/>
-            <a:ext cx="12191400" cy="1218600"/>
+            <a:ext cx="12191040" cy="1218240"/>
           </a:xfrm>
           <a:prstGeom prst="rect">
             <a:avLst/>
@@ -28718,7 +28703,7 @@
         <p:spPr>
           <a:xfrm>
             <a:off x="609480" y="3152880"/>
-            <a:ext cx="11867400" cy="1142280"/>
+            <a:ext cx="11867040" cy="1141920"/>
           </a:xfrm>
           <a:prstGeom prst="rect">
             <a:avLst/>
@@ -28791,7 +28776,7 @@
         <p:spPr>
           <a:xfrm>
             <a:off x="609480" y="4524480"/>
-            <a:ext cx="1218600" cy="18360"/>
+            <a:ext cx="1218240" cy="18000"/>
           </a:xfrm>
           <a:custGeom>
             <a:avLst/>
@@ -28842,7 +28827,7 @@
         <p:spPr>
           <a:xfrm>
             <a:off x="609480" y="4772160"/>
-            <a:ext cx="11696040" cy="304200"/>
+            <a:ext cx="11695680" cy="303840"/>
           </a:xfrm>
           <a:prstGeom prst="rect">
             <a:avLst/>
@@ -28931,7 +28916,7 @@
         <p:spPr>
           <a:xfrm>
             <a:off x="380880" y="380880"/>
-            <a:ext cx="11505600" cy="227880"/>
+            <a:ext cx="11505240" cy="227520"/>
           </a:xfrm>
           <a:prstGeom prst="rect">
             <a:avLst/>
@@ -28959,7 +28944,7 @@
               <a:buNone/>
             </a:pPr>
             <a:r>
-              <a:rPr b="1" lang="en-US" sz="1200" spc="55" strike="noStrike">
+              <a:rPr b="1" lang="en-US" sz="1200" spc="52" strike="noStrike">
                 <a:solidFill>
                   <a:srgbClr val="0984e3"/>
                 </a:solidFill>
@@ -28983,7 +28968,7 @@
         <p:spPr>
           <a:xfrm>
             <a:off x="380880" y="685800"/>
-            <a:ext cx="11657880" cy="456480"/>
+            <a:ext cx="11657520" cy="456120"/>
           </a:xfrm>
           <a:prstGeom prst="rect">
             <a:avLst/>
@@ -29035,7 +29020,7 @@
         <p:spPr>
           <a:xfrm>
             <a:off x="380880" y="1371600"/>
-            <a:ext cx="5657040" cy="1237680"/>
+            <a:ext cx="5656680" cy="1237320"/>
           </a:xfrm>
           <a:prstGeom prst="rect">
             <a:avLst/>
@@ -29097,7 +29082,7 @@
         <p:spPr>
           <a:xfrm>
             <a:off x="380880" y="2762280"/>
-            <a:ext cx="5647680" cy="837360"/>
+            <a:ext cx="5647320" cy="837000"/>
           </a:xfrm>
           <a:prstGeom prst="rect">
             <a:avLst/>
@@ -29149,7 +29134,7 @@
         <p:spPr>
           <a:xfrm>
             <a:off x="399960" y="3750480"/>
-            <a:ext cx="5542920" cy="1599480"/>
+            <a:ext cx="5542560" cy="1599120"/>
           </a:xfrm>
           <a:custGeom>
             <a:avLst/>
@@ -29200,7 +29185,7 @@
         <p:spPr>
           <a:xfrm>
             <a:off x="399960" y="3750480"/>
-            <a:ext cx="37440" cy="1599480"/>
+            <a:ext cx="37080" cy="1599120"/>
           </a:xfrm>
           <a:custGeom>
             <a:avLst/>
@@ -29251,7 +29236,7 @@
         <p:spPr>
           <a:xfrm>
             <a:off x="609480" y="3940920"/>
-            <a:ext cx="5238000" cy="266040"/>
+            <a:ext cx="5237640" cy="265680"/>
           </a:xfrm>
           <a:prstGeom prst="rect">
             <a:avLst/>
@@ -29303,7 +29288,7 @@
         <p:spPr>
           <a:xfrm>
             <a:off x="609480" y="4321800"/>
-            <a:ext cx="5218920" cy="227880"/>
+            <a:ext cx="5218560" cy="227520"/>
           </a:xfrm>
           <a:prstGeom prst="rect">
             <a:avLst/>
@@ -29365,7 +29350,7 @@
         <p:spPr>
           <a:xfrm>
             <a:off x="609480" y="4626720"/>
-            <a:ext cx="5218920" cy="227880"/>
+            <a:ext cx="5218560" cy="227520"/>
           </a:xfrm>
           <a:prstGeom prst="rect">
             <a:avLst/>
@@ -29427,7 +29412,7 @@
         <p:spPr>
           <a:xfrm>
             <a:off x="609480" y="4931640"/>
-            <a:ext cx="5218920" cy="227880"/>
+            <a:ext cx="5218560" cy="227520"/>
           </a:xfrm>
           <a:prstGeom prst="rect">
             <a:avLst/>
@@ -29489,7 +29474,7 @@
         <p:spPr>
           <a:xfrm>
             <a:off x="6253200" y="1618200"/>
-            <a:ext cx="5552280" cy="3485520"/>
+            <a:ext cx="5551920" cy="3485160"/>
           </a:xfrm>
           <a:custGeom>
             <a:avLst/>
@@ -29543,7 +29528,7 @@
         <p:spPr>
           <a:xfrm>
             <a:off x="6438960" y="1851480"/>
-            <a:ext cx="5180760" cy="266040"/>
+            <a:ext cx="5180400" cy="265680"/>
           </a:xfrm>
           <a:prstGeom prst="rect">
             <a:avLst/>
@@ -29595,7 +29580,7 @@
         <p:spPr>
           <a:xfrm>
             <a:off x="6448320" y="2270520"/>
-            <a:ext cx="5161680" cy="227880"/>
+            <a:ext cx="5161320" cy="227520"/>
           </a:xfrm>
           <a:prstGeom prst="rect">
             <a:avLst/>
@@ -29970,7 +29955,7 @@
                           <a:latin typeface="微软雅黑"/>
                           <a:ea typeface="微软雅黑"/>
                         </a:rPr>
-                        <a:t>Firm A: Keep</a:t>
+                        <a:t>Firm A: Lower Prices</a:t>
                       </a:r>
                       <a:endParaRPr b="0" lang="en-HK" sz="1200" spc="-1" strike="noStrike">
                         <a:latin typeface="Arial"/>
@@ -30023,7 +30008,7 @@
                           <a:latin typeface="微软雅黑"/>
                           <a:ea typeface="微软雅黑"/>
                         </a:rPr>
-                        <a:t>(2, 10)</a:t>
+                        <a:t>(4, 4)</a:t>
                       </a:r>
                       <a:endParaRPr b="0" lang="en-HK" sz="1200" spc="-1" strike="noStrike">
                         <a:latin typeface="Arial"/>
@@ -30074,7 +30059,7 @@
                           <a:latin typeface="微软雅黑"/>
                           <a:ea typeface="微软雅黑"/>
                         </a:rPr>
-                        <a:t>(8, 8)</a:t>
+                        <a:t>(9, 2)</a:t>
                       </a:r>
                       <a:endParaRPr b="0" lang="en-HK" sz="1200" spc="-1" strike="noStrike">
                         <a:latin typeface="Arial"/>
@@ -30119,7 +30104,7 @@
         <p:spPr>
           <a:xfrm>
             <a:off x="6486480" y="4218480"/>
-            <a:ext cx="5085720" cy="8640"/>
+            <a:ext cx="5085360" cy="8280"/>
           </a:xfrm>
           <a:custGeom>
             <a:avLst/>
@@ -30170,7 +30155,7 @@
         <p:spPr>
           <a:xfrm>
             <a:off x="6486480" y="4375440"/>
-            <a:ext cx="5161680" cy="494640"/>
+            <a:ext cx="5161320" cy="494280"/>
           </a:xfrm>
           <a:prstGeom prst="rect">
             <a:avLst/>

--- a/assets/libreoffice_impr_njc/3be4747b-a8aa-4b79-8f0c-0c7326a3d169/Game Theory.pptx
+++ b/assets/libreoffice_impr_njc/3be4747b-a8aa-4b79-8f0c-0c7326a3d169/Game Theory.pptx
@@ -312,7 +312,7 @@
             <a:pPr algn="r">
               <a:buNone/>
             </a:pPr>
-            <a:fld id="{94B36BBD-3D9E-4270-AA0A-A1CEFE0F42F4}" type="slidenum">
+            <a:fld id="{EDE17819-4E61-4988-B3DC-C28BA27EED78}" type="slidenum">
               <a:rPr b="0" lang="en-HK" sz="1400" spc="-1" strike="noStrike">
                 <a:latin typeface="Times New Roman"/>
               </a:rPr>
@@ -360,7 +360,7 @@
         <p:spPr>
           <a:xfrm>
             <a:off x="685800" y="1143000"/>
-            <a:ext cx="5485320" cy="3085200"/>
+            <a:ext cx="5484960" cy="3084840"/>
           </a:xfrm>
           <a:prstGeom prst="rect">
             <a:avLst/>
@@ -383,7 +383,7 @@
         <p:spPr>
           <a:xfrm>
             <a:off x="685800" y="4400640"/>
-            <a:ext cx="5485320" cy="3599280"/>
+            <a:ext cx="5484960" cy="3598920"/>
           </a:xfrm>
           <a:prstGeom prst="rect">
             <a:avLst/>
@@ -417,7 +417,7 @@
         <p:spPr>
           <a:xfrm>
             <a:off x="3884760" y="8685360"/>
-            <a:ext cx="2970720" cy="457560"/>
+            <a:ext cx="2970360" cy="457200"/>
           </a:xfrm>
           <a:prstGeom prst="rect">
             <a:avLst/>
@@ -449,7 +449,7 @@
               </a:lnSpc>
               <a:buNone/>
             </a:pPr>
-            <a:fld id="{A89F1729-7E23-4D15-9DC2-E0204A522688}" type="slidenum">
+            <a:fld id="{0F249DD9-04D3-49AF-9156-F9638A3BB4CC}" type="slidenum">
               <a:rPr b="0" lang="en-US" sz="1200" spc="-1" strike="noStrike">
                 <a:latin typeface="Times New Roman"/>
               </a:rPr>
@@ -496,7 +496,7 @@
         <p:spPr>
           <a:xfrm>
             <a:off x="685800" y="1143000"/>
-            <a:ext cx="5485320" cy="3085200"/>
+            <a:ext cx="5484960" cy="3084840"/>
           </a:xfrm>
           <a:prstGeom prst="rect">
             <a:avLst/>
@@ -519,7 +519,7 @@
         <p:spPr>
           <a:xfrm>
             <a:off x="685800" y="4400640"/>
-            <a:ext cx="5485320" cy="3599280"/>
+            <a:ext cx="5484960" cy="3598920"/>
           </a:xfrm>
           <a:prstGeom prst="rect">
             <a:avLst/>
@@ -553,7 +553,7 @@
         <p:spPr>
           <a:xfrm>
             <a:off x="3884760" y="8685360"/>
-            <a:ext cx="2970720" cy="457560"/>
+            <a:ext cx="2970360" cy="457200"/>
           </a:xfrm>
           <a:prstGeom prst="rect">
             <a:avLst/>
@@ -585,7 +585,7 @@
               </a:lnSpc>
               <a:buNone/>
             </a:pPr>
-            <a:fld id="{4D74A47C-6719-4EDF-AA33-6E3FD0314EBC}" type="slidenum">
+            <a:fld id="{FE8CDD32-BC0A-498E-AE72-EDB50D7CD85E}" type="slidenum">
               <a:rPr b="0" lang="en-US" sz="1200" spc="-1" strike="noStrike">
                 <a:latin typeface="Times New Roman"/>
               </a:rPr>
@@ -632,7 +632,7 @@
         <p:spPr>
           <a:xfrm>
             <a:off x="685800" y="1143000"/>
-            <a:ext cx="5485320" cy="3085200"/>
+            <a:ext cx="5484960" cy="3084840"/>
           </a:xfrm>
           <a:prstGeom prst="rect">
             <a:avLst/>
@@ -655,7 +655,7 @@
         <p:spPr>
           <a:xfrm>
             <a:off x="685800" y="4400640"/>
-            <a:ext cx="5485320" cy="3599280"/>
+            <a:ext cx="5484960" cy="3598920"/>
           </a:xfrm>
           <a:prstGeom prst="rect">
             <a:avLst/>
@@ -689,7 +689,7 @@
         <p:spPr>
           <a:xfrm>
             <a:off x="3884760" y="8685360"/>
-            <a:ext cx="2970720" cy="457560"/>
+            <a:ext cx="2970360" cy="457200"/>
           </a:xfrm>
           <a:prstGeom prst="rect">
             <a:avLst/>
@@ -721,7 +721,7 @@
               </a:lnSpc>
               <a:buNone/>
             </a:pPr>
-            <a:fld id="{524F59DD-F28E-40A5-8582-379CC6DC1860}" type="slidenum">
+            <a:fld id="{F170834E-2CBD-4D1D-BF3F-8160001F531B}" type="slidenum">
               <a:rPr b="0" lang="en-US" sz="1200" spc="-1" strike="noStrike">
                 <a:latin typeface="Times New Roman"/>
               </a:rPr>
@@ -768,7 +768,7 @@
         <p:spPr>
           <a:xfrm>
             <a:off x="685800" y="1143000"/>
-            <a:ext cx="5485320" cy="3085200"/>
+            <a:ext cx="5484960" cy="3084840"/>
           </a:xfrm>
           <a:prstGeom prst="rect">
             <a:avLst/>
@@ -791,7 +791,7 @@
         <p:spPr>
           <a:xfrm>
             <a:off x="685800" y="4400640"/>
-            <a:ext cx="5485320" cy="3599280"/>
+            <a:ext cx="5484960" cy="3598920"/>
           </a:xfrm>
           <a:prstGeom prst="rect">
             <a:avLst/>
@@ -825,7 +825,7 @@
         <p:spPr>
           <a:xfrm>
             <a:off x="3884760" y="8685360"/>
-            <a:ext cx="2970720" cy="457560"/>
+            <a:ext cx="2970360" cy="457200"/>
           </a:xfrm>
           <a:prstGeom prst="rect">
             <a:avLst/>
@@ -857,7 +857,7 @@
               </a:lnSpc>
               <a:buNone/>
             </a:pPr>
-            <a:fld id="{69B80F13-6234-4540-98E2-3A20B67DACB5}" type="slidenum">
+            <a:fld id="{7BE7C717-1176-4DBF-937B-CE728EC0951A}" type="slidenum">
               <a:rPr b="0" lang="en-US" sz="1200" spc="-1" strike="noStrike">
                 <a:latin typeface="Times New Roman"/>
               </a:rPr>
@@ -904,7 +904,7 @@
         <p:spPr>
           <a:xfrm>
             <a:off x="685800" y="1143000"/>
-            <a:ext cx="5485320" cy="3085200"/>
+            <a:ext cx="5484960" cy="3084840"/>
           </a:xfrm>
           <a:prstGeom prst="rect">
             <a:avLst/>
@@ -927,7 +927,7 @@
         <p:spPr>
           <a:xfrm>
             <a:off x="685800" y="4400640"/>
-            <a:ext cx="5485320" cy="3599280"/>
+            <a:ext cx="5484960" cy="3598920"/>
           </a:xfrm>
           <a:prstGeom prst="rect">
             <a:avLst/>
@@ -961,7 +961,7 @@
         <p:spPr>
           <a:xfrm>
             <a:off x="3884760" y="8685360"/>
-            <a:ext cx="2970720" cy="457560"/>
+            <a:ext cx="2970360" cy="457200"/>
           </a:xfrm>
           <a:prstGeom prst="rect">
             <a:avLst/>
@@ -993,7 +993,7 @@
               </a:lnSpc>
               <a:buNone/>
             </a:pPr>
-            <a:fld id="{909D4077-68AE-4B2D-B9EE-EDD54F0AB00C}" type="slidenum">
+            <a:fld id="{C32E9AA7-D62B-4DDD-8FD9-ABC39B7A086D}" type="slidenum">
               <a:rPr b="0" lang="en-US" sz="1200" spc="-1" strike="noStrike">
                 <a:latin typeface="Times New Roman"/>
               </a:rPr>
@@ -1040,7 +1040,7 @@
         <p:spPr>
           <a:xfrm>
             <a:off x="685800" y="1143000"/>
-            <a:ext cx="5485320" cy="3085200"/>
+            <a:ext cx="5484960" cy="3084840"/>
           </a:xfrm>
           <a:prstGeom prst="rect">
             <a:avLst/>
@@ -1063,7 +1063,7 @@
         <p:spPr>
           <a:xfrm>
             <a:off x="685800" y="4400640"/>
-            <a:ext cx="5485320" cy="3599280"/>
+            <a:ext cx="5484960" cy="3598920"/>
           </a:xfrm>
           <a:prstGeom prst="rect">
             <a:avLst/>
@@ -1097,7 +1097,7 @@
         <p:spPr>
           <a:xfrm>
             <a:off x="3884760" y="8685360"/>
-            <a:ext cx="2970720" cy="457560"/>
+            <a:ext cx="2970360" cy="457200"/>
           </a:xfrm>
           <a:prstGeom prst="rect">
             <a:avLst/>
@@ -1129,7 +1129,7 @@
               </a:lnSpc>
               <a:buNone/>
             </a:pPr>
-            <a:fld id="{47A7911D-0114-4BB3-94FA-9E565CD302C7}" type="slidenum">
+            <a:fld id="{51C37B64-01E7-4EB7-9532-6587ECCD3613}" type="slidenum">
               <a:rPr b="0" lang="en-US" sz="1200" spc="-1" strike="noStrike">
                 <a:latin typeface="Times New Roman"/>
               </a:rPr>
@@ -1176,7 +1176,7 @@
         <p:spPr>
           <a:xfrm>
             <a:off x="685800" y="1143000"/>
-            <a:ext cx="5485320" cy="3085200"/>
+            <a:ext cx="5484960" cy="3084840"/>
           </a:xfrm>
           <a:prstGeom prst="rect">
             <a:avLst/>
@@ -1199,7 +1199,7 @@
         <p:spPr>
           <a:xfrm>
             <a:off x="685800" y="4400640"/>
-            <a:ext cx="5485320" cy="3599280"/>
+            <a:ext cx="5484960" cy="3598920"/>
           </a:xfrm>
           <a:prstGeom prst="rect">
             <a:avLst/>
@@ -1233,7 +1233,7 @@
         <p:spPr>
           <a:xfrm>
             <a:off x="3884760" y="8685360"/>
-            <a:ext cx="2970720" cy="457560"/>
+            <a:ext cx="2970360" cy="457200"/>
           </a:xfrm>
           <a:prstGeom prst="rect">
             <a:avLst/>
@@ -1265,7 +1265,7 @@
               </a:lnSpc>
               <a:buNone/>
             </a:pPr>
-            <a:fld id="{AFC1DE17-0338-4339-8E63-D1BC1763AE3E}" type="slidenum">
+            <a:fld id="{2443EFDA-E1B6-42DA-9E60-65FA0DF9D057}" type="slidenum">
               <a:rPr b="0" lang="en-US" sz="1200" spc="-1" strike="noStrike">
                 <a:latin typeface="Times New Roman"/>
               </a:rPr>
@@ -1312,7 +1312,7 @@
         <p:spPr>
           <a:xfrm>
             <a:off x="685800" y="1143000"/>
-            <a:ext cx="5485320" cy="3085200"/>
+            <a:ext cx="5484960" cy="3084840"/>
           </a:xfrm>
           <a:prstGeom prst="rect">
             <a:avLst/>
@@ -1335,7 +1335,7 @@
         <p:spPr>
           <a:xfrm>
             <a:off x="685800" y="4400640"/>
-            <a:ext cx="5485320" cy="3599280"/>
+            <a:ext cx="5484960" cy="3598920"/>
           </a:xfrm>
           <a:prstGeom prst="rect">
             <a:avLst/>
@@ -1369,7 +1369,7 @@
         <p:spPr>
           <a:xfrm>
             <a:off x="3884760" y="8685360"/>
-            <a:ext cx="2970720" cy="457560"/>
+            <a:ext cx="2970360" cy="457200"/>
           </a:xfrm>
           <a:prstGeom prst="rect">
             <a:avLst/>
@@ -1401,7 +1401,7 @@
               </a:lnSpc>
               <a:buNone/>
             </a:pPr>
-            <a:fld id="{01C49605-3FED-4D9C-ACA7-B35A1044E6E6}" type="slidenum">
+            <a:fld id="{F9A7FF5F-0721-4E25-8CA2-73584397BC87}" type="slidenum">
               <a:rPr b="0" lang="en-US" sz="1200" spc="-1" strike="noStrike">
                 <a:latin typeface="Times New Roman"/>
               </a:rPr>
@@ -1448,7 +1448,7 @@
         <p:spPr>
           <a:xfrm>
             <a:off x="685800" y="1143000"/>
-            <a:ext cx="5485320" cy="3085200"/>
+            <a:ext cx="5484960" cy="3084840"/>
           </a:xfrm>
           <a:prstGeom prst="rect">
             <a:avLst/>
@@ -1471,7 +1471,7 @@
         <p:spPr>
           <a:xfrm>
             <a:off x="685800" y="4400640"/>
-            <a:ext cx="5485320" cy="3599280"/>
+            <a:ext cx="5484960" cy="3598920"/>
           </a:xfrm>
           <a:prstGeom prst="rect">
             <a:avLst/>
@@ -1505,7 +1505,7 @@
         <p:spPr>
           <a:xfrm>
             <a:off x="3884760" y="8685360"/>
-            <a:ext cx="2970720" cy="457560"/>
+            <a:ext cx="2970360" cy="457200"/>
           </a:xfrm>
           <a:prstGeom prst="rect">
             <a:avLst/>
@@ -1537,7 +1537,7 @@
               </a:lnSpc>
               <a:buNone/>
             </a:pPr>
-            <a:fld id="{82948815-F6CC-4E8D-9C3C-741BA64D6F9C}" type="slidenum">
+            <a:fld id="{F29D6781-3545-45E6-9D4E-726AA3242CEC}" type="slidenum">
               <a:rPr b="0" lang="en-US" sz="1200" spc="-1" strike="noStrike">
                 <a:latin typeface="Times New Roman"/>
               </a:rPr>
@@ -1584,7 +1584,7 @@
         <p:spPr>
           <a:xfrm>
             <a:off x="685800" y="1143000"/>
-            <a:ext cx="5485320" cy="3085200"/>
+            <a:ext cx="5484960" cy="3084840"/>
           </a:xfrm>
           <a:prstGeom prst="rect">
             <a:avLst/>
@@ -1607,7 +1607,7 @@
         <p:spPr>
           <a:xfrm>
             <a:off x="685800" y="4400640"/>
-            <a:ext cx="5485320" cy="3599280"/>
+            <a:ext cx="5484960" cy="3598920"/>
           </a:xfrm>
           <a:prstGeom prst="rect">
             <a:avLst/>
@@ -1641,7 +1641,7 @@
         <p:spPr>
           <a:xfrm>
             <a:off x="3884760" y="8685360"/>
-            <a:ext cx="2970720" cy="457560"/>
+            <a:ext cx="2970360" cy="457200"/>
           </a:xfrm>
           <a:prstGeom prst="rect">
             <a:avLst/>
@@ -1673,7 +1673,7 @@
               </a:lnSpc>
               <a:buNone/>
             </a:pPr>
-            <a:fld id="{DE4A07FD-2326-4302-9A75-9E41E06C6C9C}" type="slidenum">
+            <a:fld id="{1EBE8B5E-A0A7-45DE-9AB6-1B8370F4D384}" type="slidenum">
               <a:rPr b="0" lang="en-US" sz="1200" spc="-1" strike="noStrike">
                 <a:latin typeface="Times New Roman"/>
               </a:rPr>
@@ -1720,7 +1720,7 @@
         <p:spPr>
           <a:xfrm>
             <a:off x="685800" y="1143000"/>
-            <a:ext cx="5485320" cy="3085200"/>
+            <a:ext cx="5484960" cy="3084840"/>
           </a:xfrm>
           <a:prstGeom prst="rect">
             <a:avLst/>
@@ -1743,7 +1743,7 @@
         <p:spPr>
           <a:xfrm>
             <a:off x="685800" y="4400640"/>
-            <a:ext cx="5485320" cy="3599280"/>
+            <a:ext cx="5484960" cy="3598920"/>
           </a:xfrm>
           <a:prstGeom prst="rect">
             <a:avLst/>
@@ -1777,7 +1777,7 @@
         <p:spPr>
           <a:xfrm>
             <a:off x="3884760" y="8685360"/>
-            <a:ext cx="2970720" cy="457560"/>
+            <a:ext cx="2970360" cy="457200"/>
           </a:xfrm>
           <a:prstGeom prst="rect">
             <a:avLst/>
@@ -1809,7 +1809,7 @@
               </a:lnSpc>
               <a:buNone/>
             </a:pPr>
-            <a:fld id="{60D42350-FE0E-43C4-BE4A-45FAE3D850E2}" type="slidenum">
+            <a:fld id="{08A43EC0-934C-412E-8C78-3DD3B93B6D54}" type="slidenum">
               <a:rPr b="0" lang="en-US" sz="1200" spc="-1" strike="noStrike">
                 <a:latin typeface="Times New Roman"/>
               </a:rPr>
@@ -1856,7 +1856,7 @@
         <p:spPr>
           <a:xfrm>
             <a:off x="685800" y="1143000"/>
-            <a:ext cx="5485320" cy="3085200"/>
+            <a:ext cx="5484960" cy="3084840"/>
           </a:xfrm>
           <a:prstGeom prst="rect">
             <a:avLst/>
@@ -1879,7 +1879,7 @@
         <p:spPr>
           <a:xfrm>
             <a:off x="685800" y="4400640"/>
-            <a:ext cx="5485320" cy="3599280"/>
+            <a:ext cx="5484960" cy="3598920"/>
           </a:xfrm>
           <a:prstGeom prst="rect">
             <a:avLst/>
@@ -1913,7 +1913,7 @@
         <p:spPr>
           <a:xfrm>
             <a:off x="3884760" y="8685360"/>
-            <a:ext cx="2970720" cy="457560"/>
+            <a:ext cx="2970360" cy="457200"/>
           </a:xfrm>
           <a:prstGeom prst="rect">
             <a:avLst/>
@@ -1945,7 +1945,7 @@
               </a:lnSpc>
               <a:buNone/>
             </a:pPr>
-            <a:fld id="{80E089FC-6135-42AD-84A6-3D5A894AF527}" type="slidenum">
+            <a:fld id="{A2E9DB7E-1869-4F56-969D-25CFD737AF72}" type="slidenum">
               <a:rPr b="0" lang="en-US" sz="1200" spc="-1" strike="noStrike">
                 <a:latin typeface="Times New Roman"/>
               </a:rPr>
@@ -1992,7 +1992,7 @@
         <p:spPr>
           <a:xfrm>
             <a:off x="685800" y="1143000"/>
-            <a:ext cx="5485320" cy="3085200"/>
+            <a:ext cx="5484960" cy="3084840"/>
           </a:xfrm>
           <a:prstGeom prst="rect">
             <a:avLst/>
@@ -2015,7 +2015,7 @@
         <p:spPr>
           <a:xfrm>
             <a:off x="685800" y="4400640"/>
-            <a:ext cx="5485320" cy="3599280"/>
+            <a:ext cx="5484960" cy="3598920"/>
           </a:xfrm>
           <a:prstGeom prst="rect">
             <a:avLst/>
@@ -2049,7 +2049,7 @@
         <p:spPr>
           <a:xfrm>
             <a:off x="3884760" y="8685360"/>
-            <a:ext cx="2970720" cy="457560"/>
+            <a:ext cx="2970360" cy="457200"/>
           </a:xfrm>
           <a:prstGeom prst="rect">
             <a:avLst/>
@@ -2081,7 +2081,7 @@
               </a:lnSpc>
               <a:buNone/>
             </a:pPr>
-            <a:fld id="{29636E88-0D1D-487D-99FD-549889DDE361}" type="slidenum">
+            <a:fld id="{9DBFF776-BD76-477C-A5F6-EE95F38307C1}" type="slidenum">
               <a:rPr b="0" lang="en-US" sz="1200" spc="-1" strike="noStrike">
                 <a:latin typeface="Times New Roman"/>
               </a:rPr>
@@ -2128,7 +2128,7 @@
         <p:spPr>
           <a:xfrm>
             <a:off x="685800" y="1143000"/>
-            <a:ext cx="5485320" cy="3085200"/>
+            <a:ext cx="5484960" cy="3084840"/>
           </a:xfrm>
           <a:prstGeom prst="rect">
             <a:avLst/>
@@ -2151,7 +2151,7 @@
         <p:spPr>
           <a:xfrm>
             <a:off x="685800" y="4400640"/>
-            <a:ext cx="5485320" cy="3599280"/>
+            <a:ext cx="5484960" cy="3598920"/>
           </a:xfrm>
           <a:prstGeom prst="rect">
             <a:avLst/>
@@ -2185,7 +2185,7 @@
         <p:spPr>
           <a:xfrm>
             <a:off x="3884760" y="8685360"/>
-            <a:ext cx="2970720" cy="457560"/>
+            <a:ext cx="2970360" cy="457200"/>
           </a:xfrm>
           <a:prstGeom prst="rect">
             <a:avLst/>
@@ -2217,7 +2217,7 @@
               </a:lnSpc>
               <a:buNone/>
             </a:pPr>
-            <a:fld id="{CB7B5D7A-D472-48D0-BCE0-AC4B5D3F4264}" type="slidenum">
+            <a:fld id="{AF49C7A3-C3F8-4BC3-B47E-34AEFC5816E7}" type="slidenum">
               <a:rPr b="0" lang="en-US" sz="1200" spc="-1" strike="noStrike">
                 <a:latin typeface="Times New Roman"/>
               </a:rPr>
@@ -2264,7 +2264,7 @@
         <p:spPr>
           <a:xfrm>
             <a:off x="685800" y="1143000"/>
-            <a:ext cx="5485320" cy="3085200"/>
+            <a:ext cx="5484960" cy="3084840"/>
           </a:xfrm>
           <a:prstGeom prst="rect">
             <a:avLst/>
@@ -2287,7 +2287,7 @@
         <p:spPr>
           <a:xfrm>
             <a:off x="685800" y="4400640"/>
-            <a:ext cx="5485320" cy="3599280"/>
+            <a:ext cx="5484960" cy="3598920"/>
           </a:xfrm>
           <a:prstGeom prst="rect">
             <a:avLst/>
@@ -2321,7 +2321,7 @@
         <p:spPr>
           <a:xfrm>
             <a:off x="3884760" y="8685360"/>
-            <a:ext cx="2970720" cy="457560"/>
+            <a:ext cx="2970360" cy="457200"/>
           </a:xfrm>
           <a:prstGeom prst="rect">
             <a:avLst/>
@@ -2353,7 +2353,7 @@
               </a:lnSpc>
               <a:buNone/>
             </a:pPr>
-            <a:fld id="{120C2021-1030-4988-87F8-77A8B31B48BC}" type="slidenum">
+            <a:fld id="{A146B983-5825-4158-B44E-96F9EEF207F5}" type="slidenum">
               <a:rPr b="0" lang="en-US" sz="1200" spc="-1" strike="noStrike">
                 <a:latin typeface="Times New Roman"/>
               </a:rPr>
@@ -2400,7 +2400,7 @@
         <p:spPr>
           <a:xfrm>
             <a:off x="685800" y="1143000"/>
-            <a:ext cx="5485320" cy="3085200"/>
+            <a:ext cx="5484960" cy="3084840"/>
           </a:xfrm>
           <a:prstGeom prst="rect">
             <a:avLst/>
@@ -2423,7 +2423,7 @@
         <p:spPr>
           <a:xfrm>
             <a:off x="685800" y="4400640"/>
-            <a:ext cx="5485320" cy="3599280"/>
+            <a:ext cx="5484960" cy="3598920"/>
           </a:xfrm>
           <a:prstGeom prst="rect">
             <a:avLst/>
@@ -2457,7 +2457,7 @@
         <p:spPr>
           <a:xfrm>
             <a:off x="3884760" y="8685360"/>
-            <a:ext cx="2970720" cy="457560"/>
+            <a:ext cx="2970360" cy="457200"/>
           </a:xfrm>
           <a:prstGeom prst="rect">
             <a:avLst/>
@@ -2489,7 +2489,7 @@
               </a:lnSpc>
               <a:buNone/>
             </a:pPr>
-            <a:fld id="{1E63A79E-C749-4AE8-8B5B-A8FCD6C57288}" type="slidenum">
+            <a:fld id="{FBA4BE3D-402E-4E2E-82AC-700F40EA960F}" type="slidenum">
               <a:rPr b="0" lang="en-US" sz="1200" spc="-1" strike="noStrike">
                 <a:latin typeface="Times New Roman"/>
               </a:rPr>
@@ -2536,7 +2536,7 @@
         <p:spPr>
           <a:xfrm>
             <a:off x="685800" y="1143000"/>
-            <a:ext cx="5485320" cy="3085200"/>
+            <a:ext cx="5484960" cy="3084840"/>
           </a:xfrm>
           <a:prstGeom prst="rect">
             <a:avLst/>
@@ -2559,7 +2559,7 @@
         <p:spPr>
           <a:xfrm>
             <a:off x="685800" y="4400640"/>
-            <a:ext cx="5485320" cy="3599280"/>
+            <a:ext cx="5484960" cy="3598920"/>
           </a:xfrm>
           <a:prstGeom prst="rect">
             <a:avLst/>
@@ -2593,7 +2593,7 @@
         <p:spPr>
           <a:xfrm>
             <a:off x="3884760" y="8685360"/>
-            <a:ext cx="2970720" cy="457560"/>
+            <a:ext cx="2970360" cy="457200"/>
           </a:xfrm>
           <a:prstGeom prst="rect">
             <a:avLst/>
@@ -2625,7 +2625,7 @@
               </a:lnSpc>
               <a:buNone/>
             </a:pPr>
-            <a:fld id="{D93D1799-1BD7-49BE-90CF-23B0F600DAE2}" type="slidenum">
+            <a:fld id="{689C2BB8-BCBA-4E10-BB01-39CE83F73952}" type="slidenum">
               <a:rPr b="0" lang="en-US" sz="1200" spc="-1" strike="noStrike">
                 <a:latin typeface="Times New Roman"/>
               </a:rPr>
@@ -2672,7 +2672,7 @@
         <p:spPr>
           <a:xfrm>
             <a:off x="685800" y="1143000"/>
-            <a:ext cx="5485320" cy="3085200"/>
+            <a:ext cx="5484960" cy="3084840"/>
           </a:xfrm>
           <a:prstGeom prst="rect">
             <a:avLst/>
@@ -2695,7 +2695,7 @@
         <p:spPr>
           <a:xfrm>
             <a:off x="685800" y="4400640"/>
-            <a:ext cx="5485320" cy="3599280"/>
+            <a:ext cx="5484960" cy="3598920"/>
           </a:xfrm>
           <a:prstGeom prst="rect">
             <a:avLst/>
@@ -2729,7 +2729,7 @@
         <p:spPr>
           <a:xfrm>
             <a:off x="3884760" y="8685360"/>
-            <a:ext cx="2970720" cy="457560"/>
+            <a:ext cx="2970360" cy="457200"/>
           </a:xfrm>
           <a:prstGeom prst="rect">
             <a:avLst/>
@@ -2761,7 +2761,7 @@
               </a:lnSpc>
               <a:buNone/>
             </a:pPr>
-            <a:fld id="{02EF6FD3-C1B7-4026-B3AC-E43584CB0904}" type="slidenum">
+            <a:fld id="{9DF01770-A7FA-4D4D-BD59-990079766E58}" type="slidenum">
               <a:rPr b="0" lang="en-US" sz="1200" spc="-1" strike="noStrike">
                 <a:latin typeface="Times New Roman"/>
               </a:rPr>
@@ -2808,7 +2808,7 @@
         <p:spPr>
           <a:xfrm>
             <a:off x="685800" y="1143000"/>
-            <a:ext cx="5485320" cy="3085200"/>
+            <a:ext cx="5484960" cy="3084840"/>
           </a:xfrm>
           <a:prstGeom prst="rect">
             <a:avLst/>
@@ -2831,7 +2831,7 @@
         <p:spPr>
           <a:xfrm>
             <a:off x="685800" y="4400640"/>
-            <a:ext cx="5485320" cy="3599280"/>
+            <a:ext cx="5484960" cy="3598920"/>
           </a:xfrm>
           <a:prstGeom prst="rect">
             <a:avLst/>
@@ -2865,7 +2865,7 @@
         <p:spPr>
           <a:xfrm>
             <a:off x="3884760" y="8685360"/>
-            <a:ext cx="2970720" cy="457560"/>
+            <a:ext cx="2970360" cy="457200"/>
           </a:xfrm>
           <a:prstGeom prst="rect">
             <a:avLst/>
@@ -2897,7 +2897,7 @@
               </a:lnSpc>
               <a:buNone/>
             </a:pPr>
-            <a:fld id="{CF652E16-76D9-4576-9F05-09F007C673F1}" type="slidenum">
+            <a:fld id="{E9DEA413-EBBF-4054-9F0C-D094C50E50EC}" type="slidenum">
               <a:rPr b="0" lang="en-US" sz="1200" spc="-1" strike="noStrike">
                 <a:latin typeface="Times New Roman"/>
               </a:rPr>
@@ -2944,7 +2944,7 @@
         <p:spPr>
           <a:xfrm>
             <a:off x="685800" y="1143000"/>
-            <a:ext cx="5485320" cy="3085200"/>
+            <a:ext cx="5484960" cy="3084840"/>
           </a:xfrm>
           <a:prstGeom prst="rect">
             <a:avLst/>
@@ -2967,7 +2967,7 @@
         <p:spPr>
           <a:xfrm>
             <a:off x="685800" y="4400640"/>
-            <a:ext cx="5485320" cy="3599280"/>
+            <a:ext cx="5484960" cy="3598920"/>
           </a:xfrm>
           <a:prstGeom prst="rect">
             <a:avLst/>
@@ -3001,7 +3001,7 @@
         <p:spPr>
           <a:xfrm>
             <a:off x="3884760" y="8685360"/>
-            <a:ext cx="2970720" cy="457560"/>
+            <a:ext cx="2970360" cy="457200"/>
           </a:xfrm>
           <a:prstGeom prst="rect">
             <a:avLst/>
@@ -3033,7 +3033,7 @@
               </a:lnSpc>
               <a:buNone/>
             </a:pPr>
-            <a:fld id="{D682E927-06A7-4421-B2F3-7EBAC31AE1A0}" type="slidenum">
+            <a:fld id="{C83D4984-F26B-43E9-AAC5-9F6BA3B705B0}" type="slidenum">
               <a:rPr b="0" lang="en-US" sz="1200" spc="-1" strike="noStrike">
                 <a:latin typeface="Times New Roman"/>
               </a:rPr>
@@ -3080,7 +3080,7 @@
         <p:spPr>
           <a:xfrm>
             <a:off x="685800" y="1143000"/>
-            <a:ext cx="5485320" cy="3085200"/>
+            <a:ext cx="5484960" cy="3084840"/>
           </a:xfrm>
           <a:prstGeom prst="rect">
             <a:avLst/>
@@ -3103,7 +3103,7 @@
         <p:spPr>
           <a:xfrm>
             <a:off x="685800" y="4400640"/>
-            <a:ext cx="5485320" cy="3599280"/>
+            <a:ext cx="5484960" cy="3598920"/>
           </a:xfrm>
           <a:prstGeom prst="rect">
             <a:avLst/>
@@ -3137,7 +3137,7 @@
         <p:spPr>
           <a:xfrm>
             <a:off x="3884760" y="8685360"/>
-            <a:ext cx="2970720" cy="457560"/>
+            <a:ext cx="2970360" cy="457200"/>
           </a:xfrm>
           <a:prstGeom prst="rect">
             <a:avLst/>
@@ -3169,7 +3169,7 @@
               </a:lnSpc>
               <a:buNone/>
             </a:pPr>
-            <a:fld id="{8B87F8C4-7A33-4D32-B933-FB6388F0CA08}" type="slidenum">
+            <a:fld id="{D16A26F5-0FC3-4D63-90AC-AE08FA23385A}" type="slidenum">
               <a:rPr b="0" lang="en-US" sz="1200" spc="-1" strike="noStrike">
                 <a:latin typeface="Times New Roman"/>
               </a:rPr>
@@ -5013,7 +5013,7 @@
         <p:spPr>
           <a:xfrm>
             <a:off x="5638680" y="2266920"/>
-            <a:ext cx="913320" cy="18000"/>
+            <a:ext cx="912960" cy="17640"/>
           </a:xfrm>
           <a:custGeom>
             <a:avLst/>
@@ -5064,7 +5064,7 @@
         <p:spPr>
           <a:xfrm>
             <a:off x="3633840" y="2514600"/>
-            <a:ext cx="4923360" cy="913320"/>
+            <a:ext cx="4923000" cy="912960"/>
           </a:xfrm>
           <a:prstGeom prst="rect">
             <a:avLst/>
@@ -5116,7 +5116,7 @@
         <p:spPr>
           <a:xfrm>
             <a:off x="5638680" y="3657600"/>
-            <a:ext cx="913320" cy="18000"/>
+            <a:ext cx="912960" cy="17640"/>
           </a:xfrm>
           <a:custGeom>
             <a:avLst/>
@@ -5167,7 +5167,7 @@
         <p:spPr>
           <a:xfrm>
             <a:off x="3545640" y="4286160"/>
-            <a:ext cx="5094720" cy="303840"/>
+            <a:ext cx="5094360" cy="303480"/>
           </a:xfrm>
           <a:prstGeom prst="rect">
             <a:avLst/>
@@ -5195,7 +5195,7 @@
               <a:buNone/>
             </a:pPr>
             <a:r>
-              <a:rPr b="0" lang="en-US" sz="1800" spc="38" strike="noStrike">
+              <a:rPr b="0" lang="en-US" sz="1800" spc="35" strike="noStrike">
                 <a:solidFill>
                   <a:srgbClr val="636e72"/>
                 </a:solidFill>
@@ -5256,7 +5256,7 @@
         <p:spPr>
           <a:xfrm>
             <a:off x="380880" y="380880"/>
-            <a:ext cx="11505240" cy="227520"/>
+            <a:ext cx="11504880" cy="227160"/>
           </a:xfrm>
           <a:prstGeom prst="rect">
             <a:avLst/>
@@ -5284,7 +5284,7 @@
               <a:buNone/>
             </a:pPr>
             <a:r>
-              <a:rPr b="1" lang="en-US" sz="1200" spc="52" strike="noStrike">
+              <a:rPr b="1" lang="en-US" sz="1200" spc="49" strike="noStrike">
                 <a:solidFill>
                   <a:srgbClr val="0984e3"/>
                 </a:solidFill>
@@ -5308,7 +5308,7 @@
         <p:spPr>
           <a:xfrm>
             <a:off x="380880" y="685800"/>
-            <a:ext cx="11657520" cy="456120"/>
+            <a:ext cx="11657160" cy="455760"/>
           </a:xfrm>
           <a:prstGeom prst="rect">
             <a:avLst/>
@@ -5360,7 +5360,7 @@
         <p:spPr>
           <a:xfrm>
             <a:off x="380880" y="1419120"/>
-            <a:ext cx="5496120" cy="827640"/>
+            <a:ext cx="5495760" cy="827280"/>
           </a:xfrm>
           <a:prstGeom prst="rect">
             <a:avLst/>
@@ -5412,7 +5412,7 @@
         <p:spPr>
           <a:xfrm>
             <a:off x="380880" y="2452680"/>
-            <a:ext cx="5647320" cy="837000"/>
+            <a:ext cx="5646960" cy="836640"/>
           </a:xfrm>
           <a:prstGeom prst="rect">
             <a:avLst/>
@@ -5464,7 +5464,7 @@
         <p:spPr>
           <a:xfrm>
             <a:off x="380880" y="3867120"/>
-            <a:ext cx="5561640" cy="2018160"/>
+            <a:ext cx="5561280" cy="2017800"/>
           </a:xfrm>
           <a:custGeom>
             <a:avLst/>
@@ -5515,7 +5515,7 @@
         <p:spPr>
           <a:xfrm>
             <a:off x="609480" y="4095720"/>
-            <a:ext cx="5199480" cy="265680"/>
+            <a:ext cx="5199120" cy="265320"/>
           </a:xfrm>
           <a:prstGeom prst="rect">
             <a:avLst/>
@@ -5567,7 +5567,7 @@
         <p:spPr>
           <a:xfrm>
             <a:off x="609480" y="4476600"/>
-            <a:ext cx="5180400" cy="246600"/>
+            <a:ext cx="5180040" cy="246240"/>
           </a:xfrm>
           <a:prstGeom prst="rect">
             <a:avLst/>
@@ -5659,7 +5659,7 @@
         <p:spPr>
           <a:xfrm>
             <a:off x="609480" y="4838760"/>
-            <a:ext cx="5104440" cy="456120"/>
+            <a:ext cx="5104080" cy="455760"/>
           </a:xfrm>
           <a:custGeom>
             <a:avLst/>
@@ -5710,7 +5710,7 @@
         <p:spPr>
           <a:xfrm>
             <a:off x="609480" y="4838760"/>
-            <a:ext cx="5180400" cy="456120"/>
+            <a:ext cx="5180040" cy="455760"/>
           </a:xfrm>
           <a:prstGeom prst="rect">
             <a:avLst/>
@@ -5762,7 +5762,7 @@
         <p:spPr>
           <a:xfrm>
             <a:off x="609480" y="5410080"/>
-            <a:ext cx="5180400" cy="246600"/>
+            <a:ext cx="5180040" cy="246240"/>
           </a:xfrm>
           <a:prstGeom prst="rect">
             <a:avLst/>
@@ -5834,7 +5834,7 @@
         <p:spPr>
           <a:xfrm>
             <a:off x="6253200" y="1376280"/>
-            <a:ext cx="5551920" cy="3208680"/>
+            <a:ext cx="5551560" cy="3208320"/>
           </a:xfrm>
           <a:custGeom>
             <a:avLst/>
@@ -5888,7 +5888,7 @@
         <p:spPr>
           <a:xfrm>
             <a:off x="6486480" y="1609560"/>
-            <a:ext cx="5180400" cy="265680"/>
+            <a:ext cx="5180040" cy="265320"/>
           </a:xfrm>
           <a:prstGeom prst="rect">
             <a:avLst/>
@@ -5940,7 +5940,7 @@
         <p:spPr>
           <a:xfrm>
             <a:off x="6486480" y="2028960"/>
-            <a:ext cx="303840" cy="303840"/>
+            <a:ext cx="303480" cy="303480"/>
           </a:xfrm>
           <a:custGeom>
             <a:avLst/>
@@ -5991,7 +5991,7 @@
         <p:spPr>
           <a:xfrm>
             <a:off x="6453360" y="2028960"/>
-            <a:ext cx="370440" cy="303840"/>
+            <a:ext cx="370080" cy="303480"/>
           </a:xfrm>
           <a:prstGeom prst="rect">
             <a:avLst/>
@@ -6043,7 +6043,7 @@
         <p:spPr>
           <a:xfrm>
             <a:off x="6905520" y="2028960"/>
-            <a:ext cx="3066120" cy="227520"/>
+            <a:ext cx="3065760" cy="227160"/>
           </a:xfrm>
           <a:prstGeom prst="rect">
             <a:avLst/>
@@ -6095,7 +6095,7 @@
         <p:spPr>
           <a:xfrm>
             <a:off x="6905520" y="2295360"/>
-            <a:ext cx="3066120" cy="227520"/>
+            <a:ext cx="3065760" cy="227160"/>
           </a:xfrm>
           <a:prstGeom prst="rect">
             <a:avLst/>
@@ -6147,7 +6147,7 @@
         <p:spPr>
           <a:xfrm>
             <a:off x="6486480" y="2638440"/>
-            <a:ext cx="303840" cy="303840"/>
+            <a:ext cx="303480" cy="303480"/>
           </a:xfrm>
           <a:custGeom>
             <a:avLst/>
@@ -6198,7 +6198,7 @@
         <p:spPr>
           <a:xfrm>
             <a:off x="6453360" y="2638440"/>
-            <a:ext cx="370440" cy="303840"/>
+            <a:ext cx="370080" cy="303480"/>
           </a:xfrm>
           <a:prstGeom prst="rect">
             <a:avLst/>
@@ -6250,7 +6250,7 @@
         <p:spPr>
           <a:xfrm>
             <a:off x="6905520" y="2638440"/>
-            <a:ext cx="3665880" cy="227520"/>
+            <a:ext cx="3665520" cy="227160"/>
           </a:xfrm>
           <a:prstGeom prst="rect">
             <a:avLst/>
@@ -6302,7 +6302,7 @@
         <p:spPr>
           <a:xfrm>
             <a:off x="6905520" y="2905200"/>
-            <a:ext cx="3665880" cy="227520"/>
+            <a:ext cx="3665520" cy="227160"/>
           </a:xfrm>
           <a:prstGeom prst="rect">
             <a:avLst/>
@@ -6354,7 +6354,7 @@
         <p:spPr>
           <a:xfrm>
             <a:off x="6486480" y="3247920"/>
-            <a:ext cx="303840" cy="303840"/>
+            <a:ext cx="303480" cy="303480"/>
           </a:xfrm>
           <a:custGeom>
             <a:avLst/>
@@ -6405,7 +6405,7 @@
         <p:spPr>
           <a:xfrm>
             <a:off x="6453360" y="3247920"/>
-            <a:ext cx="370440" cy="303840"/>
+            <a:ext cx="370080" cy="303480"/>
           </a:xfrm>
           <a:prstGeom prst="rect">
             <a:avLst/>
@@ -6457,7 +6457,7 @@
         <p:spPr>
           <a:xfrm>
             <a:off x="6905520" y="3247920"/>
-            <a:ext cx="3285000" cy="227520"/>
+            <a:ext cx="3284640" cy="227160"/>
           </a:xfrm>
           <a:prstGeom prst="rect">
             <a:avLst/>
@@ -6509,7 +6509,7 @@
         <p:spPr>
           <a:xfrm>
             <a:off x="6905520" y="3514680"/>
-            <a:ext cx="3285000" cy="227520"/>
+            <a:ext cx="3284640" cy="227160"/>
           </a:xfrm>
           <a:prstGeom prst="rect">
             <a:avLst/>
@@ -6561,7 +6561,7 @@
         <p:spPr>
           <a:xfrm>
             <a:off x="6486480" y="3857760"/>
-            <a:ext cx="303840" cy="303840"/>
+            <a:ext cx="303480" cy="303480"/>
           </a:xfrm>
           <a:custGeom>
             <a:avLst/>
@@ -6612,7 +6612,7 @@
         <p:spPr>
           <a:xfrm>
             <a:off x="6453360" y="3857760"/>
-            <a:ext cx="370440" cy="303840"/>
+            <a:ext cx="370080" cy="303480"/>
           </a:xfrm>
           <a:prstGeom prst="rect">
             <a:avLst/>
@@ -6664,7 +6664,7 @@
         <p:spPr>
           <a:xfrm>
             <a:off x="6905520" y="3857760"/>
-            <a:ext cx="4132800" cy="227520"/>
+            <a:ext cx="4132440" cy="227160"/>
           </a:xfrm>
           <a:prstGeom prst="rect">
             <a:avLst/>
@@ -6716,7 +6716,7 @@
         <p:spPr>
           <a:xfrm>
             <a:off x="6905520" y="4124160"/>
-            <a:ext cx="4132800" cy="227520"/>
+            <a:ext cx="4132440" cy="227160"/>
           </a:xfrm>
           <a:prstGeom prst="rect">
             <a:avLst/>
@@ -6768,7 +6768,7 @@
         <p:spPr>
           <a:xfrm>
             <a:off x="6267600" y="4743360"/>
-            <a:ext cx="5542560" cy="1141920"/>
+            <a:ext cx="5542200" cy="1141560"/>
           </a:xfrm>
           <a:custGeom>
             <a:avLst/>
@@ -6819,7 +6819,7 @@
         <p:spPr>
           <a:xfrm>
             <a:off x="6267600" y="4743360"/>
-            <a:ext cx="37080" cy="1141920"/>
+            <a:ext cx="36720" cy="1141560"/>
           </a:xfrm>
           <a:custGeom>
             <a:avLst/>
@@ -6870,7 +6870,7 @@
         <p:spPr>
           <a:xfrm>
             <a:off x="6477120" y="4933800"/>
-            <a:ext cx="5218560" cy="494280"/>
+            <a:ext cx="5218200" cy="493920"/>
           </a:xfrm>
           <a:prstGeom prst="rect">
             <a:avLst/>
@@ -6922,7 +6922,7 @@
         <p:spPr>
           <a:xfrm>
             <a:off x="6477120" y="5505480"/>
-            <a:ext cx="5209200" cy="189360"/>
+            <a:ext cx="5208840" cy="189000"/>
           </a:xfrm>
           <a:prstGeom prst="rect">
             <a:avLst/>
@@ -7021,7 +7021,7 @@
         <p:spPr>
           <a:xfrm>
             <a:off x="379440" y="379440"/>
-            <a:ext cx="11507760" cy="226800"/>
+            <a:ext cx="11507400" cy="226440"/>
           </a:xfrm>
           <a:prstGeom prst="rect">
             <a:avLst/>
@@ -7049,7 +7049,7 @@
               <a:buNone/>
             </a:pPr>
             <a:r>
-              <a:rPr b="1" lang="en-US" sz="1200" spc="52" strike="noStrike">
+              <a:rPr b="1" lang="en-US" sz="1200" spc="49" strike="noStrike">
                 <a:solidFill>
                   <a:srgbClr val="0984e3"/>
                 </a:solidFill>
@@ -7073,7 +7073,7 @@
         <p:spPr>
           <a:xfrm>
             <a:off x="379440" y="683280"/>
-            <a:ext cx="11659680" cy="454320"/>
+            <a:ext cx="11659320" cy="453960"/>
           </a:xfrm>
           <a:prstGeom prst="rect">
             <a:avLst/>
@@ -7125,7 +7125,7 @@
         <p:spPr>
           <a:xfrm>
             <a:off x="379440" y="1366200"/>
-            <a:ext cx="5682240" cy="302400"/>
+            <a:ext cx="5681880" cy="302040"/>
           </a:xfrm>
           <a:prstGeom prst="rect">
             <a:avLst/>
@@ -7177,7 +7177,7 @@
         <p:spPr>
           <a:xfrm>
             <a:off x="379440" y="1826280"/>
-            <a:ext cx="5096160" cy="466200"/>
+            <a:ext cx="5095800" cy="465840"/>
           </a:xfrm>
           <a:prstGeom prst="rect">
             <a:avLst/>
@@ -7229,7 +7229,7 @@
         <p:spPr>
           <a:xfrm>
             <a:off x="379440" y="2452680"/>
-            <a:ext cx="5644080" cy="739080"/>
+            <a:ext cx="5643720" cy="738720"/>
           </a:xfrm>
           <a:prstGeom prst="rect">
             <a:avLst/>
@@ -7281,7 +7281,7 @@
         <p:spPr>
           <a:xfrm>
             <a:off x="398520" y="3306600"/>
-            <a:ext cx="5549400" cy="757800"/>
+            <a:ext cx="5549040" cy="757440"/>
           </a:xfrm>
           <a:custGeom>
             <a:avLst/>
@@ -7332,7 +7332,7 @@
         <p:spPr>
           <a:xfrm>
             <a:off x="398520" y="3306600"/>
-            <a:ext cx="36720" cy="757800"/>
+            <a:ext cx="36360" cy="757440"/>
           </a:xfrm>
           <a:custGeom>
             <a:avLst/>
@@ -7383,7 +7383,7 @@
         <p:spPr>
           <a:xfrm>
             <a:off x="569160" y="3458520"/>
-            <a:ext cx="5302800" cy="454320"/>
+            <a:ext cx="5302440" cy="453960"/>
           </a:xfrm>
           <a:prstGeom prst="rect">
             <a:avLst/>
@@ -7476,7 +7476,7 @@
         <p:spPr>
           <a:xfrm>
             <a:off x="379440" y="4217400"/>
-            <a:ext cx="5682240" cy="302400"/>
+            <a:ext cx="5681880" cy="302040"/>
           </a:xfrm>
           <a:prstGeom prst="rect">
             <a:avLst/>
@@ -7528,7 +7528,7 @@
         <p:spPr>
           <a:xfrm>
             <a:off x="379440" y="4635000"/>
-            <a:ext cx="5644080" cy="739080"/>
+            <a:ext cx="5643720" cy="738720"/>
           </a:xfrm>
           <a:prstGeom prst="rect">
             <a:avLst/>
@@ -7580,7 +7580,7 @@
         <p:spPr>
           <a:xfrm>
             <a:off x="6249240" y="1366200"/>
-            <a:ext cx="5682240" cy="302400"/>
+            <a:ext cx="5681880" cy="302040"/>
           </a:xfrm>
           <a:prstGeom prst="rect">
             <a:avLst/>
@@ -7632,7 +7632,7 @@
         <p:spPr>
           <a:xfrm>
             <a:off x="6249240" y="1826280"/>
-            <a:ext cx="5249520" cy="466200"/>
+            <a:ext cx="5249160" cy="465840"/>
           </a:xfrm>
           <a:prstGeom prst="rect">
             <a:avLst/>
@@ -7684,7 +7684,7 @@
         <p:spPr>
           <a:xfrm>
             <a:off x="6249240" y="2452680"/>
-            <a:ext cx="5644080" cy="739080"/>
+            <a:ext cx="5643720" cy="738720"/>
           </a:xfrm>
           <a:prstGeom prst="rect">
             <a:avLst/>
@@ -7736,7 +7736,7 @@
         <p:spPr>
           <a:xfrm>
             <a:off x="6249240" y="3344400"/>
-            <a:ext cx="5568480" cy="2181240"/>
+            <a:ext cx="5568120" cy="2180880"/>
           </a:xfrm>
           <a:custGeom>
             <a:avLst/>
@@ -7787,7 +7787,7 @@
         <p:spPr>
           <a:xfrm>
             <a:off x="6438960" y="3534120"/>
-            <a:ext cx="5283720" cy="264600"/>
+            <a:ext cx="5283360" cy="264240"/>
           </a:xfrm>
           <a:prstGeom prst="rect">
             <a:avLst/>
@@ -7839,7 +7839,7 @@
         <p:spPr>
           <a:xfrm>
             <a:off x="6438960" y="3913920"/>
-            <a:ext cx="5264640" cy="245520"/>
+            <a:ext cx="5264280" cy="245160"/>
           </a:xfrm>
           <a:prstGeom prst="rect">
             <a:avLst/>
@@ -7891,7 +7891,7 @@
         <p:spPr>
           <a:xfrm>
             <a:off x="6438960" y="4274280"/>
-            <a:ext cx="5188680" cy="454320"/>
+            <a:ext cx="5188320" cy="453960"/>
           </a:xfrm>
           <a:custGeom>
             <a:avLst/>
@@ -7942,24 +7942,24 @@
         <p:spPr>
           <a:xfrm>
             <a:off x="6438960" y="4274280"/>
-            <a:ext cx="5264640" cy="454320"/>
-          </a:xfrm>
-          <a:prstGeom prst="rect">
-            <a:avLst/>
-          </a:prstGeom>
-          <a:noFill/>
-          <a:ln w="0">
-            <a:noFill/>
-          </a:ln>
-        </p:spPr>
-        <p:style>
-          <a:lnRef idx="0"/>
-          <a:fillRef idx="0"/>
-          <a:effectRef idx="0"/>
-          <a:fontRef idx="minor"/>
-        </p:style>
-        <p:txBody>
-          <a:bodyPr lIns="113760" rIns="113760" tIns="227520" bIns="227520" anchor="ctr">
+            <a:ext cx="5264280" cy="453960"/>
+          </a:xfrm>
+          <a:prstGeom prst="rect">
+            <a:avLst/>
+          </a:prstGeom>
+          <a:noFill/>
+          <a:ln w="0">
+            <a:noFill/>
+          </a:ln>
+        </p:spPr>
+        <p:style>
+          <a:lnRef idx="0"/>
+          <a:fillRef idx="0"/>
+          <a:effectRef idx="0"/>
+          <a:fontRef idx="minor"/>
+        </p:style>
+        <p:txBody>
+          <a:bodyPr lIns="113760" rIns="113760" tIns="454320" bIns="454320" anchor="ctr">
             <a:noAutofit/>
           </a:bodyPr>
           <a:p>
@@ -7994,7 +7994,7 @@
         <p:spPr>
           <a:xfrm>
             <a:off x="6438960" y="4843440"/>
-            <a:ext cx="5264640" cy="492120"/>
+            <a:ext cx="5264280" cy="491760"/>
           </a:xfrm>
           <a:prstGeom prst="rect">
             <a:avLst/>
@@ -8046,7 +8046,7 @@
         <p:spPr>
           <a:xfrm>
             <a:off x="6268320" y="5678640"/>
-            <a:ext cx="5549400" cy="795960"/>
+            <a:ext cx="5549040" cy="795600"/>
           </a:xfrm>
           <a:custGeom>
             <a:avLst/>
@@ -8097,7 +8097,7 @@
         <p:spPr>
           <a:xfrm>
             <a:off x="6268320" y="5678640"/>
-            <a:ext cx="36720" cy="795960"/>
+            <a:ext cx="36360" cy="795600"/>
           </a:xfrm>
           <a:custGeom>
             <a:avLst/>
@@ -8148,7 +8148,7 @@
         <p:spPr>
           <a:xfrm>
             <a:off x="6438960" y="5830200"/>
-            <a:ext cx="5302800" cy="492120"/>
+            <a:ext cx="5302440" cy="491760"/>
           </a:xfrm>
           <a:prstGeom prst="rect">
             <a:avLst/>
@@ -8247,7 +8247,7 @@
         <p:spPr>
           <a:xfrm>
             <a:off x="609480" y="2066760"/>
-            <a:ext cx="12191040" cy="1218240"/>
+            <a:ext cx="12190680" cy="1217880"/>
           </a:xfrm>
           <a:prstGeom prst="rect">
             <a:avLst/>
@@ -8301,7 +8301,7 @@
         <p:spPr>
           <a:xfrm>
             <a:off x="609480" y="3438360"/>
-            <a:ext cx="11867040" cy="570600"/>
+            <a:ext cx="11866680" cy="570240"/>
           </a:xfrm>
           <a:prstGeom prst="rect">
             <a:avLst/>
@@ -8353,7 +8353,7 @@
         <p:spPr>
           <a:xfrm>
             <a:off x="609480" y="4238640"/>
-            <a:ext cx="1218240" cy="18000"/>
+            <a:ext cx="1217880" cy="17640"/>
           </a:xfrm>
           <a:custGeom>
             <a:avLst/>
@@ -8404,7 +8404,7 @@
         <p:spPr>
           <a:xfrm>
             <a:off x="609480" y="4486320"/>
-            <a:ext cx="11695680" cy="303840"/>
+            <a:ext cx="11695320" cy="303480"/>
           </a:xfrm>
           <a:prstGeom prst="rect">
             <a:avLst/>
@@ -8493,7 +8493,7 @@
         <p:spPr>
           <a:xfrm>
             <a:off x="356400" y="356400"/>
-            <a:ext cx="11549880" cy="212760"/>
+            <a:ext cx="11549520" cy="212400"/>
           </a:xfrm>
           <a:prstGeom prst="rect">
             <a:avLst/>
@@ -8521,7 +8521,7 @@
               <a:buNone/>
             </a:pPr>
             <a:r>
-              <a:rPr b="1" lang="en-US" sz="1120" spc="49" strike="noStrike">
+              <a:rPr b="1" lang="en-US" sz="1120" spc="46" strike="noStrike">
                 <a:solidFill>
                   <a:srgbClr val="0984e3"/>
                 </a:solidFill>
@@ -8545,7 +8545,7 @@
         <p:spPr>
           <a:xfrm>
             <a:off x="356400" y="641160"/>
-            <a:ext cx="11692080" cy="426240"/>
+            <a:ext cx="11691720" cy="425880"/>
           </a:xfrm>
           <a:prstGeom prst="rect">
             <a:avLst/>
@@ -8597,7 +8597,7 @@
         <p:spPr>
           <a:xfrm>
             <a:off x="360720" y="1287000"/>
-            <a:ext cx="3694680" cy="2626200"/>
+            <a:ext cx="3694320" cy="2625840"/>
           </a:xfrm>
           <a:custGeom>
             <a:avLst/>
@@ -8651,7 +8651,7 @@
         <p:spPr>
           <a:xfrm>
             <a:off x="543240" y="1469520"/>
-            <a:ext cx="426240" cy="426240"/>
+            <a:ext cx="425880" cy="425880"/>
           </a:xfrm>
           <a:custGeom>
             <a:avLst/>
@@ -8702,7 +8702,7 @@
         <p:spPr>
           <a:xfrm>
             <a:off x="656640" y="1594080"/>
-            <a:ext cx="199440" cy="177120"/>
+            <a:ext cx="199080" cy="176760"/>
           </a:xfrm>
           <a:custGeom>
             <a:avLst/>
@@ -8899,7 +8899,7 @@
         <p:spPr>
           <a:xfrm>
             <a:off x="1077480" y="1558440"/>
-            <a:ext cx="2341080" cy="248400"/>
+            <a:ext cx="2340720" cy="248040"/>
           </a:xfrm>
           <a:prstGeom prst="rect">
             <a:avLst/>
@@ -8951,7 +8951,7 @@
         <p:spPr>
           <a:xfrm>
             <a:off x="543240" y="2003760"/>
-            <a:ext cx="3400920" cy="693720"/>
+            <a:ext cx="3400560" cy="693360"/>
           </a:xfrm>
           <a:prstGeom prst="rect">
             <a:avLst/>
@@ -9013,7 +9013,7 @@
         <p:spPr>
           <a:xfrm>
             <a:off x="543240" y="2805480"/>
-            <a:ext cx="3400920" cy="925200"/>
+            <a:ext cx="3400560" cy="924840"/>
           </a:xfrm>
           <a:prstGeom prst="rect">
             <a:avLst/>
@@ -9075,7 +9075,7 @@
         <p:spPr>
           <a:xfrm>
             <a:off x="4246200" y="1287000"/>
-            <a:ext cx="3694680" cy="2626200"/>
+            <a:ext cx="3694320" cy="2625840"/>
           </a:xfrm>
           <a:custGeom>
             <a:avLst/>
@@ -9129,7 +9129,7 @@
         <p:spPr>
           <a:xfrm>
             <a:off x="4428720" y="1469520"/>
-            <a:ext cx="426240" cy="426240"/>
+            <a:ext cx="425880" cy="425880"/>
           </a:xfrm>
           <a:custGeom>
             <a:avLst/>
@@ -9180,7 +9180,7 @@
         <p:spPr>
           <a:xfrm>
             <a:off x="4542120" y="1594080"/>
-            <a:ext cx="199440" cy="177120"/>
+            <a:ext cx="199080" cy="176760"/>
           </a:xfrm>
           <a:custGeom>
             <a:avLst/>
@@ -9332,7 +9332,7 @@
         <p:spPr>
           <a:xfrm>
             <a:off x="4962960" y="1558440"/>
-            <a:ext cx="2430360" cy="248400"/>
+            <a:ext cx="2430000" cy="248040"/>
           </a:xfrm>
           <a:prstGeom prst="rect">
             <a:avLst/>
@@ -9384,7 +9384,7 @@
         <p:spPr>
           <a:xfrm>
             <a:off x="4428720" y="2003760"/>
-            <a:ext cx="3400920" cy="693720"/>
+            <a:ext cx="3400560" cy="693360"/>
           </a:xfrm>
           <a:prstGeom prst="rect">
             <a:avLst/>
@@ -9446,7 +9446,7 @@
         <p:spPr>
           <a:xfrm>
             <a:off x="4428720" y="2805480"/>
-            <a:ext cx="3400920" cy="693720"/>
+            <a:ext cx="3400560" cy="693360"/>
           </a:xfrm>
           <a:prstGeom prst="rect">
             <a:avLst/>
@@ -9508,7 +9508,7 @@
         <p:spPr>
           <a:xfrm>
             <a:off x="8131680" y="1287000"/>
-            <a:ext cx="3694680" cy="2626200"/>
+            <a:ext cx="3694320" cy="2625840"/>
           </a:xfrm>
           <a:custGeom>
             <a:avLst/>
@@ -9562,7 +9562,7 @@
         <p:spPr>
           <a:xfrm>
             <a:off x="8314200" y="1469520"/>
-            <a:ext cx="426240" cy="426240"/>
+            <a:ext cx="425880" cy="425880"/>
           </a:xfrm>
           <a:custGeom>
             <a:avLst/>
@@ -9613,7 +9613,7 @@
         <p:spPr>
           <a:xfrm>
             <a:off x="8439120" y="1594080"/>
-            <a:ext cx="177120" cy="177120"/>
+            <a:ext cx="176760" cy="176760"/>
           </a:xfrm>
           <a:custGeom>
             <a:avLst/>
@@ -9713,7 +9713,7 @@
         <p:spPr>
           <a:xfrm>
             <a:off x="8848800" y="1558440"/>
-            <a:ext cx="2038320" cy="248400"/>
+            <a:ext cx="2037960" cy="248040"/>
           </a:xfrm>
           <a:prstGeom prst="rect">
             <a:avLst/>
@@ -9765,7 +9765,7 @@
         <p:spPr>
           <a:xfrm>
             <a:off x="8314200" y="2003760"/>
-            <a:ext cx="3400920" cy="693720"/>
+            <a:ext cx="3400560" cy="693360"/>
           </a:xfrm>
           <a:prstGeom prst="rect">
             <a:avLst/>
@@ -9827,7 +9827,7 @@
         <p:spPr>
           <a:xfrm>
             <a:off x="8314200" y="2805480"/>
-            <a:ext cx="3400920" cy="693720"/>
+            <a:ext cx="3400560" cy="693360"/>
           </a:xfrm>
           <a:prstGeom prst="rect">
             <a:avLst/>
@@ -9889,7 +9889,7 @@
         <p:spPr>
           <a:xfrm>
             <a:off x="360720" y="4101120"/>
-            <a:ext cx="3694680" cy="2394720"/>
+            <a:ext cx="3694320" cy="2394360"/>
           </a:xfrm>
           <a:custGeom>
             <a:avLst/>
@@ -9943,7 +9943,7 @@
         <p:spPr>
           <a:xfrm>
             <a:off x="543240" y="4283640"/>
-            <a:ext cx="426240" cy="426240"/>
+            <a:ext cx="425880" cy="425880"/>
           </a:xfrm>
           <a:custGeom>
             <a:avLst/>
@@ -9994,7 +9994,7 @@
         <p:spPr>
           <a:xfrm>
             <a:off x="645840" y="4408200"/>
-            <a:ext cx="221400" cy="177120"/>
+            <a:ext cx="221040" cy="176760"/>
           </a:xfrm>
           <a:custGeom>
             <a:avLst/>
@@ -10226,7 +10226,7 @@
         <p:spPr>
           <a:xfrm>
             <a:off x="1077480" y="4372560"/>
-            <a:ext cx="1931400" cy="248400"/>
+            <a:ext cx="1931040" cy="248040"/>
           </a:xfrm>
           <a:prstGeom prst="rect">
             <a:avLst/>
@@ -10278,7 +10278,7 @@
         <p:spPr>
           <a:xfrm>
             <a:off x="543240" y="4817880"/>
-            <a:ext cx="3400920" cy="693720"/>
+            <a:ext cx="3400560" cy="693360"/>
           </a:xfrm>
           <a:prstGeom prst="rect">
             <a:avLst/>
@@ -10340,7 +10340,7 @@
         <p:spPr>
           <a:xfrm>
             <a:off x="543240" y="5619600"/>
-            <a:ext cx="3400920" cy="693720"/>
+            <a:ext cx="3400560" cy="693360"/>
           </a:xfrm>
           <a:prstGeom prst="rect">
             <a:avLst/>
@@ -10402,7 +10402,7 @@
         <p:spPr>
           <a:xfrm>
             <a:off x="4246200" y="4101120"/>
-            <a:ext cx="7586640" cy="2394720"/>
+            <a:ext cx="7586280" cy="2394360"/>
           </a:xfrm>
           <a:custGeom>
             <a:avLst/>
@@ -10456,7 +10456,7 @@
         <p:spPr>
           <a:xfrm>
             <a:off x="4428720" y="4283640"/>
-            <a:ext cx="426240" cy="426240"/>
+            <a:ext cx="425880" cy="425880"/>
           </a:xfrm>
           <a:custGeom>
             <a:avLst/>
@@ -10507,7 +10507,7 @@
         <p:spPr>
           <a:xfrm>
             <a:off x="4553280" y="4408200"/>
-            <a:ext cx="177120" cy="177120"/>
+            <a:ext cx="176760" cy="176760"/>
           </a:xfrm>
           <a:custGeom>
             <a:avLst/>
@@ -10640,7 +10640,7 @@
         <p:spPr>
           <a:xfrm>
             <a:off x="4962960" y="4372560"/>
-            <a:ext cx="2047320" cy="248400"/>
+            <a:ext cx="2046960" cy="248040"/>
           </a:xfrm>
           <a:prstGeom prst="rect">
             <a:avLst/>
@@ -10692,7 +10692,7 @@
         <p:spPr>
           <a:xfrm>
             <a:off x="4428720" y="4817880"/>
-            <a:ext cx="3605760" cy="693720"/>
+            <a:ext cx="3605400" cy="693360"/>
           </a:xfrm>
           <a:prstGeom prst="rect">
             <a:avLst/>
@@ -10754,7 +10754,7 @@
         <p:spPr>
           <a:xfrm>
             <a:off x="4428720" y="5583960"/>
-            <a:ext cx="3605760" cy="461880"/>
+            <a:ext cx="3605400" cy="461520"/>
           </a:xfrm>
           <a:prstGeom prst="rect">
             <a:avLst/>
@@ -10806,7 +10806,7 @@
         <p:spPr>
           <a:xfrm>
             <a:off x="8109360" y="4817880"/>
-            <a:ext cx="3605760" cy="693720"/>
+            <a:ext cx="3605400" cy="693360"/>
           </a:xfrm>
           <a:prstGeom prst="rect">
             <a:avLst/>
@@ -10868,7 +10868,7 @@
         <p:spPr>
           <a:xfrm>
             <a:off x="8109360" y="5583960"/>
-            <a:ext cx="3605760" cy="461880"/>
+            <a:ext cx="3605400" cy="461520"/>
           </a:xfrm>
           <a:prstGeom prst="rect">
             <a:avLst/>
@@ -10957,7 +10957,7 @@
         <p:spPr>
           <a:xfrm>
             <a:off x="609480" y="2066760"/>
-            <a:ext cx="12191040" cy="1218240"/>
+            <a:ext cx="12190680" cy="1217880"/>
           </a:xfrm>
           <a:prstGeom prst="rect">
             <a:avLst/>
@@ -11011,7 +11011,7 @@
         <p:spPr>
           <a:xfrm>
             <a:off x="609480" y="3438360"/>
-            <a:ext cx="11867040" cy="570600"/>
+            <a:ext cx="11866680" cy="570240"/>
           </a:xfrm>
           <a:prstGeom prst="rect">
             <a:avLst/>
@@ -11063,7 +11063,7 @@
         <p:spPr>
           <a:xfrm>
             <a:off x="609480" y="4238640"/>
-            <a:ext cx="1218240" cy="18000"/>
+            <a:ext cx="1217880" cy="17640"/>
           </a:xfrm>
           <a:custGeom>
             <a:avLst/>
@@ -11114,7 +11114,7 @@
         <p:spPr>
           <a:xfrm>
             <a:off x="609480" y="4486320"/>
-            <a:ext cx="11695680" cy="303840"/>
+            <a:ext cx="11695320" cy="303480"/>
           </a:xfrm>
           <a:prstGeom prst="rect">
             <a:avLst/>
@@ -11203,7 +11203,7 @@
         <p:spPr>
           <a:xfrm>
             <a:off x="380880" y="380880"/>
-            <a:ext cx="11505240" cy="227520"/>
+            <a:ext cx="11504880" cy="227160"/>
           </a:xfrm>
           <a:prstGeom prst="rect">
             <a:avLst/>
@@ -11231,7 +11231,7 @@
               <a:buNone/>
             </a:pPr>
             <a:r>
-              <a:rPr b="1" lang="en-US" sz="1200" spc="52" strike="noStrike">
+              <a:rPr b="1" lang="en-US" sz="1200" spc="49" strike="noStrike">
                 <a:solidFill>
                   <a:srgbClr val="0984e3"/>
                 </a:solidFill>
@@ -11255,7 +11255,7 @@
         <p:spPr>
           <a:xfrm>
             <a:off x="380880" y="685800"/>
-            <a:ext cx="11657520" cy="456120"/>
+            <a:ext cx="11657160" cy="455760"/>
           </a:xfrm>
           <a:prstGeom prst="rect">
             <a:avLst/>
@@ -11307,7 +11307,7 @@
         <p:spPr>
           <a:xfrm>
             <a:off x="380880" y="1295280"/>
-            <a:ext cx="5656680" cy="1237320"/>
+            <a:ext cx="5656320" cy="1236960"/>
           </a:xfrm>
           <a:prstGeom prst="rect">
             <a:avLst/>
@@ -11369,7 +11369,7 @@
         <p:spPr>
           <a:xfrm>
             <a:off x="380880" y="2647800"/>
-            <a:ext cx="5637600" cy="741960"/>
+            <a:ext cx="5637240" cy="741600"/>
           </a:xfrm>
           <a:prstGeom prst="rect">
             <a:avLst/>
@@ -11421,7 +11421,7 @@
         <p:spPr>
           <a:xfrm>
             <a:off x="385920" y="3548160"/>
-            <a:ext cx="5551920" cy="2027880"/>
+            <a:ext cx="5551560" cy="2027520"/>
           </a:xfrm>
           <a:custGeom>
             <a:avLst/>
@@ -11475,7 +11475,7 @@
         <p:spPr>
           <a:xfrm>
             <a:off x="495360" y="3705120"/>
-            <a:ext cx="5333040" cy="265680"/>
+            <a:ext cx="5332680" cy="265320"/>
           </a:xfrm>
           <a:prstGeom prst="rect">
             <a:avLst/>
@@ -12001,7 +12001,7 @@
         <p:spPr>
           <a:xfrm>
             <a:off x="509760" y="5229360"/>
-            <a:ext cx="5304240" cy="189360"/>
+            <a:ext cx="5303880" cy="189000"/>
           </a:xfrm>
           <a:prstGeom prst="rect">
             <a:avLst/>
@@ -12053,7 +12053,7 @@
         <p:spPr>
           <a:xfrm>
             <a:off x="6253200" y="1300320"/>
-            <a:ext cx="5551920" cy="1608480"/>
+            <a:ext cx="5551560" cy="1608120"/>
           </a:xfrm>
           <a:custGeom>
             <a:avLst/>
@@ -12107,7 +12107,7 @@
         <p:spPr>
           <a:xfrm>
             <a:off x="6448320" y="1495440"/>
-            <a:ext cx="5256720" cy="265680"/>
+            <a:ext cx="5256360" cy="265320"/>
           </a:xfrm>
           <a:prstGeom prst="rect">
             <a:avLst/>
@@ -12159,7 +12159,7 @@
         <p:spPr>
           <a:xfrm>
             <a:off x="6448320" y="1876320"/>
-            <a:ext cx="5237640" cy="227520"/>
+            <a:ext cx="5237280" cy="227160"/>
           </a:xfrm>
           <a:prstGeom prst="rect">
             <a:avLst/>
@@ -12221,7 +12221,7 @@
         <p:spPr>
           <a:xfrm>
             <a:off x="6448320" y="2181240"/>
-            <a:ext cx="5237640" cy="227520"/>
+            <a:ext cx="5237280" cy="227160"/>
           </a:xfrm>
           <a:prstGeom prst="rect">
             <a:avLst/>
@@ -12283,7 +12283,7 @@
         <p:spPr>
           <a:xfrm>
             <a:off x="6448320" y="2486160"/>
-            <a:ext cx="5237640" cy="227520"/>
+            <a:ext cx="5237280" cy="227160"/>
           </a:xfrm>
           <a:prstGeom prst="rect">
             <a:avLst/>
@@ -12335,7 +12335,7 @@
         <p:spPr>
           <a:xfrm>
             <a:off x="6267600" y="3067200"/>
-            <a:ext cx="5542560" cy="2132640"/>
+            <a:ext cx="5542200" cy="2132280"/>
           </a:xfrm>
           <a:custGeom>
             <a:avLst/>
@@ -12386,7 +12386,7 @@
         <p:spPr>
           <a:xfrm>
             <a:off x="6267600" y="3067200"/>
-            <a:ext cx="37080" cy="2132640"/>
+            <a:ext cx="36720" cy="2132280"/>
           </a:xfrm>
           <a:custGeom>
             <a:avLst/>
@@ -12437,7 +12437,7 @@
         <p:spPr>
           <a:xfrm>
             <a:off x="6477120" y="3257640"/>
-            <a:ext cx="5237640" cy="265680"/>
+            <a:ext cx="5237280" cy="265320"/>
           </a:xfrm>
           <a:prstGeom prst="rect">
             <a:avLst/>
@@ -12489,7 +12489,7 @@
         <p:spPr>
           <a:xfrm>
             <a:off x="6496200" y="3672000"/>
-            <a:ext cx="151200" cy="151200"/>
+            <a:ext cx="150840" cy="150840"/>
           </a:xfrm>
           <a:custGeom>
             <a:avLst/>
@@ -12613,7 +12613,7 @@
         <p:spPr>
           <a:xfrm>
             <a:off x="6724800" y="3638520"/>
-            <a:ext cx="4970880" cy="456120"/>
+            <a:ext cx="4970520" cy="455760"/>
           </a:xfrm>
           <a:prstGeom prst="rect">
             <a:avLst/>
@@ -12675,7 +12675,7 @@
         <p:spPr>
           <a:xfrm>
             <a:off x="6496200" y="4205160"/>
-            <a:ext cx="151200" cy="151200"/>
+            <a:ext cx="150840" cy="150840"/>
           </a:xfrm>
           <a:custGeom>
             <a:avLst/>
@@ -12798,7 +12798,7 @@
         <p:spPr>
           <a:xfrm>
             <a:off x="6724800" y="4172040"/>
-            <a:ext cx="4970880" cy="227520"/>
+            <a:ext cx="4970520" cy="227160"/>
           </a:xfrm>
           <a:prstGeom prst="rect">
             <a:avLst/>
@@ -12860,7 +12860,7 @@
         <p:spPr>
           <a:xfrm>
             <a:off x="6515280" y="4510080"/>
-            <a:ext cx="113400" cy="151200"/>
+            <a:ext cx="113040" cy="150840"/>
           </a:xfrm>
           <a:custGeom>
             <a:avLst/>
@@ -13101,7 +13101,7 @@
         <p:spPr>
           <a:xfrm>
             <a:off x="6724800" y="4476600"/>
-            <a:ext cx="4970880" cy="227520"/>
+            <a:ext cx="4970520" cy="227160"/>
           </a:xfrm>
           <a:prstGeom prst="rect">
             <a:avLst/>
@@ -13163,7 +13163,7 @@
         <p:spPr>
           <a:xfrm>
             <a:off x="6486480" y="4815000"/>
-            <a:ext cx="170280" cy="151200"/>
+            <a:ext cx="169920" cy="150840"/>
           </a:xfrm>
           <a:custGeom>
             <a:avLst/>
@@ -13399,7 +13399,7 @@
         <p:spPr>
           <a:xfrm>
             <a:off x="6724800" y="4781520"/>
-            <a:ext cx="4970880" cy="227520"/>
+            <a:ext cx="4970520" cy="227160"/>
           </a:xfrm>
           <a:prstGeom prst="rect">
             <a:avLst/>
@@ -13498,7 +13498,7 @@
         <p:spPr>
           <a:xfrm>
             <a:off x="358560" y="358560"/>
-            <a:ext cx="11545560" cy="214200"/>
+            <a:ext cx="11545200" cy="213840"/>
           </a:xfrm>
           <a:prstGeom prst="rect">
             <a:avLst/>
@@ -13526,7 +13526,7 @@
               <a:buNone/>
             </a:pPr>
             <a:r>
-              <a:rPr b="1" lang="en-US" sz="1130" spc="49" strike="noStrike">
+              <a:rPr b="1" lang="en-US" sz="1130" spc="46" strike="noStrike">
                 <a:solidFill>
                   <a:srgbClr val="0984e3"/>
                 </a:solidFill>
@@ -13550,7 +13550,7 @@
         <p:spPr>
           <a:xfrm>
             <a:off x="358560" y="645480"/>
-            <a:ext cx="11688840" cy="429120"/>
+            <a:ext cx="11688480" cy="428760"/>
           </a:xfrm>
           <a:prstGeom prst="rect">
             <a:avLst/>
@@ -13602,7 +13602,7 @@
         <p:spPr>
           <a:xfrm>
             <a:off x="358560" y="1290960"/>
-            <a:ext cx="5700600" cy="285840"/>
+            <a:ext cx="5700240" cy="285480"/>
           </a:xfrm>
           <a:prstGeom prst="rect">
             <a:avLst/>
@@ -13654,7 +13654,7 @@
         <p:spPr>
           <a:xfrm>
             <a:off x="358560" y="1725840"/>
-            <a:ext cx="5473440" cy="440280"/>
+            <a:ext cx="5473080" cy="439920"/>
           </a:xfrm>
           <a:prstGeom prst="rect">
             <a:avLst/>
@@ -13706,7 +13706,7 @@
         <p:spPr>
           <a:xfrm>
             <a:off x="358560" y="2317320"/>
-            <a:ext cx="5664600" cy="465120"/>
+            <a:ext cx="5664240" cy="464760"/>
           </a:xfrm>
           <a:prstGeom prst="rect">
             <a:avLst/>
@@ -13758,7 +13758,7 @@
         <p:spPr>
           <a:xfrm>
             <a:off x="363240" y="2931480"/>
-            <a:ext cx="5583960" cy="1872720"/>
+            <a:ext cx="5583600" cy="1872360"/>
           </a:xfrm>
           <a:custGeom>
             <a:avLst/>
@@ -13812,7 +13812,7 @@
         <p:spPr>
           <a:xfrm>
             <a:off x="470520" y="3079440"/>
-            <a:ext cx="5368680" cy="249840"/>
+            <a:ext cx="5368320" cy="249480"/>
           </a:xfrm>
           <a:prstGeom prst="rect">
             <a:avLst/>
@@ -14340,7 +14340,7 @@
         <p:spPr>
           <a:xfrm>
             <a:off x="479520" y="4478040"/>
-            <a:ext cx="5350680" cy="178200"/>
+            <a:ext cx="5350320" cy="177840"/>
           </a:xfrm>
           <a:prstGeom prst="rect">
             <a:avLst/>
@@ -14392,7 +14392,7 @@
         <p:spPr>
           <a:xfrm>
             <a:off x="376560" y="4952880"/>
-            <a:ext cx="5574960" cy="752040"/>
+            <a:ext cx="5574600" cy="751680"/>
           </a:xfrm>
           <a:custGeom>
             <a:avLst/>
@@ -14443,7 +14443,7 @@
         <p:spPr>
           <a:xfrm>
             <a:off x="376560" y="4952880"/>
-            <a:ext cx="34920" cy="752040"/>
+            <a:ext cx="34560" cy="751680"/>
           </a:xfrm>
           <a:custGeom>
             <a:avLst/>
@@ -14494,7 +14494,7 @@
         <p:spPr>
           <a:xfrm>
             <a:off x="537840" y="5096520"/>
-            <a:ext cx="5342040" cy="465120"/>
+            <a:ext cx="5341680" cy="464760"/>
           </a:xfrm>
           <a:prstGeom prst="rect">
             <a:avLst/>
@@ -14556,7 +14556,7 @@
         <p:spPr>
           <a:xfrm>
             <a:off x="6239520" y="1290960"/>
-            <a:ext cx="5700600" cy="285840"/>
+            <a:ext cx="5700240" cy="285480"/>
           </a:xfrm>
           <a:prstGeom prst="rect">
             <a:avLst/>
@@ -14608,7 +14608,7 @@
         <p:spPr>
           <a:xfrm>
             <a:off x="6239520" y="1685520"/>
-            <a:ext cx="5673600" cy="527760"/>
+            <a:ext cx="5673240" cy="527400"/>
           </a:xfrm>
           <a:prstGeom prst="rect">
             <a:avLst/>
@@ -14670,7 +14670,7 @@
         <p:spPr>
           <a:xfrm>
             <a:off x="6239520" y="2317320"/>
-            <a:ext cx="5664600" cy="698040"/>
+            <a:ext cx="5664240" cy="697680"/>
           </a:xfrm>
           <a:prstGeom prst="rect">
             <a:avLst/>
@@ -14722,7 +14722,7 @@
         <p:spPr>
           <a:xfrm>
             <a:off x="6243840" y="3164400"/>
-            <a:ext cx="5583960" cy="1872720"/>
+            <a:ext cx="5583600" cy="1872360"/>
           </a:xfrm>
           <a:custGeom>
             <a:avLst/>
@@ -14776,7 +14776,7 @@
         <p:spPr>
           <a:xfrm>
             <a:off x="6351480" y="3312360"/>
-            <a:ext cx="5368680" cy="249840"/>
+            <a:ext cx="5368320" cy="249480"/>
           </a:xfrm>
           <a:prstGeom prst="rect">
             <a:avLst/>
@@ -15302,7 +15302,7 @@
         <p:spPr>
           <a:xfrm>
             <a:off x="6360480" y="4710960"/>
-            <a:ext cx="5350680" cy="178200"/>
+            <a:ext cx="5350320" cy="177840"/>
           </a:xfrm>
           <a:prstGeom prst="rect">
             <a:avLst/>
@@ -15354,7 +15354,7 @@
         <p:spPr>
           <a:xfrm>
             <a:off x="6239520" y="5186160"/>
-            <a:ext cx="5592960" cy="1307880"/>
+            <a:ext cx="5592600" cy="1307520"/>
           </a:xfrm>
           <a:custGeom>
             <a:avLst/>
@@ -15405,7 +15405,7 @@
         <p:spPr>
           <a:xfrm>
             <a:off x="6382800" y="5329440"/>
-            <a:ext cx="5386680" cy="249840"/>
+            <a:ext cx="5386320" cy="249480"/>
           </a:xfrm>
           <a:prstGeom prst="rect">
             <a:avLst/>
@@ -15457,7 +15457,7 @@
         <p:spPr>
           <a:xfrm>
             <a:off x="6382800" y="5652360"/>
-            <a:ext cx="5377680" cy="698040"/>
+            <a:ext cx="5377320" cy="697680"/>
           </a:xfrm>
           <a:prstGeom prst="rect">
             <a:avLst/>
@@ -15546,7 +15546,7 @@
         <p:spPr>
           <a:xfrm>
             <a:off x="609480" y="1781280"/>
-            <a:ext cx="12191040" cy="1218240"/>
+            <a:ext cx="12190680" cy="1217880"/>
           </a:xfrm>
           <a:prstGeom prst="rect">
             <a:avLst/>
@@ -15600,7 +15600,7 @@
         <p:spPr>
           <a:xfrm>
             <a:off x="609480" y="3152880"/>
-            <a:ext cx="11867040" cy="1141920"/>
+            <a:ext cx="11866680" cy="1141560"/>
           </a:xfrm>
           <a:prstGeom prst="rect">
             <a:avLst/>
@@ -15673,7 +15673,7 @@
         <p:spPr>
           <a:xfrm>
             <a:off x="609480" y="4524480"/>
-            <a:ext cx="1218240" cy="18000"/>
+            <a:ext cx="1217880" cy="17640"/>
           </a:xfrm>
           <a:custGeom>
             <a:avLst/>
@@ -15724,7 +15724,7 @@
         <p:spPr>
           <a:xfrm>
             <a:off x="609480" y="4772160"/>
-            <a:ext cx="11695680" cy="303840"/>
+            <a:ext cx="11695320" cy="303480"/>
           </a:xfrm>
           <a:prstGeom prst="rect">
             <a:avLst/>
@@ -15813,7 +15813,7 @@
         <p:spPr>
           <a:xfrm>
             <a:off x="380880" y="380880"/>
-            <a:ext cx="11505240" cy="227520"/>
+            <a:ext cx="11504880" cy="227160"/>
           </a:xfrm>
           <a:prstGeom prst="rect">
             <a:avLst/>
@@ -15841,7 +15841,7 @@
               <a:buNone/>
             </a:pPr>
             <a:r>
-              <a:rPr b="1" lang="en-US" sz="1200" spc="52" strike="noStrike">
+              <a:rPr b="1" lang="en-US" sz="1200" spc="49" strike="noStrike">
                 <a:solidFill>
                   <a:srgbClr val="0984e3"/>
                 </a:solidFill>
@@ -15865,7 +15865,7 @@
         <p:spPr>
           <a:xfrm>
             <a:off x="380880" y="685800"/>
-            <a:ext cx="11657520" cy="456120"/>
+            <a:ext cx="11657160" cy="455760"/>
           </a:xfrm>
           <a:prstGeom prst="rect">
             <a:avLst/>
@@ -15917,7 +15917,7 @@
         <p:spPr>
           <a:xfrm>
             <a:off x="380880" y="1295280"/>
-            <a:ext cx="7647480" cy="932400"/>
+            <a:ext cx="7647120" cy="932040"/>
           </a:xfrm>
           <a:prstGeom prst="rect">
             <a:avLst/>
@@ -15979,7 +15979,7 @@
         <p:spPr>
           <a:xfrm>
             <a:off x="385920" y="2381400"/>
-            <a:ext cx="3694680" cy="1722960"/>
+            <a:ext cx="3694320" cy="1722600"/>
           </a:xfrm>
           <a:custGeom>
             <a:avLst/>
@@ -16033,7 +16033,7 @@
         <p:spPr>
           <a:xfrm>
             <a:off x="542880" y="2538360"/>
-            <a:ext cx="3475440" cy="265680"/>
+            <a:ext cx="3475080" cy="265320"/>
           </a:xfrm>
           <a:prstGeom prst="rect">
             <a:avLst/>
@@ -16085,7 +16085,7 @@
         <p:spPr>
           <a:xfrm>
             <a:off x="542880" y="2881440"/>
-            <a:ext cx="3456360" cy="494280"/>
+            <a:ext cx="3456000" cy="493920"/>
           </a:xfrm>
           <a:prstGeom prst="rect">
             <a:avLst/>
@@ -16147,7 +16147,7 @@
         <p:spPr>
           <a:xfrm>
             <a:off x="542880" y="3452760"/>
-            <a:ext cx="3456360" cy="494280"/>
+            <a:ext cx="3456000" cy="493920"/>
           </a:xfrm>
           <a:prstGeom prst="rect">
             <a:avLst/>
@@ -16209,7 +16209,7 @@
         <p:spPr>
           <a:xfrm>
             <a:off x="4240080" y="2381400"/>
-            <a:ext cx="3694680" cy="1722960"/>
+            <a:ext cx="3694320" cy="1722600"/>
           </a:xfrm>
           <a:custGeom>
             <a:avLst/>
@@ -16263,7 +16263,7 @@
         <p:spPr>
           <a:xfrm>
             <a:off x="4397400" y="2538360"/>
-            <a:ext cx="3475440" cy="265680"/>
+            <a:ext cx="3475080" cy="265320"/>
           </a:xfrm>
           <a:prstGeom prst="rect">
             <a:avLst/>
@@ -16315,7 +16315,7 @@
         <p:spPr>
           <a:xfrm>
             <a:off x="4397400" y="2881440"/>
-            <a:ext cx="3456360" cy="494280"/>
+            <a:ext cx="3456000" cy="493920"/>
           </a:xfrm>
           <a:prstGeom prst="rect">
             <a:avLst/>
@@ -16377,7 +16377,7 @@
         <p:spPr>
           <a:xfrm>
             <a:off x="4397400" y="3452760"/>
-            <a:ext cx="3456360" cy="494280"/>
+            <a:ext cx="3456000" cy="493920"/>
           </a:xfrm>
           <a:prstGeom prst="rect">
             <a:avLst/>
@@ -16439,7 +16439,7 @@
         <p:spPr>
           <a:xfrm>
             <a:off x="399960" y="4262400"/>
-            <a:ext cx="7533360" cy="1637280"/>
+            <a:ext cx="7533000" cy="1636920"/>
           </a:xfrm>
           <a:custGeom>
             <a:avLst/>
@@ -16490,7 +16490,7 @@
         <p:spPr>
           <a:xfrm>
             <a:off x="399960" y="4262400"/>
-            <a:ext cx="37080" cy="1637280"/>
+            <a:ext cx="36720" cy="1636920"/>
           </a:xfrm>
           <a:custGeom>
             <a:avLst/>
@@ -16541,7 +16541,7 @@
         <p:spPr>
           <a:xfrm>
             <a:off x="571680" y="4414680"/>
-            <a:ext cx="7304760" cy="265680"/>
+            <a:ext cx="7304400" cy="265320"/>
           </a:xfrm>
           <a:prstGeom prst="rect">
             <a:avLst/>
@@ -16593,7 +16593,7 @@
         <p:spPr>
           <a:xfrm>
             <a:off x="619200" y="4791240"/>
-            <a:ext cx="94320" cy="151200"/>
+            <a:ext cx="93960" cy="150840"/>
           </a:xfrm>
           <a:custGeom>
             <a:avLst/>
@@ -16748,7 +16748,7 @@
         <p:spPr>
           <a:xfrm>
             <a:off x="819000" y="4757760"/>
-            <a:ext cx="3361320" cy="456120"/>
+            <a:ext cx="3360960" cy="455760"/>
           </a:xfrm>
           <a:prstGeom prst="rect">
             <a:avLst/>
@@ -16810,7 +16810,7 @@
         <p:spPr>
           <a:xfrm>
             <a:off x="4282920" y="4791240"/>
-            <a:ext cx="132120" cy="151200"/>
+            <a:ext cx="131760" cy="150840"/>
           </a:xfrm>
           <a:custGeom>
             <a:avLst/>
@@ -16942,7 +16942,7 @@
         <p:spPr>
           <a:xfrm>
             <a:off x="4502160" y="4757760"/>
-            <a:ext cx="3361320" cy="456120"/>
+            <a:ext cx="3360960" cy="455760"/>
           </a:xfrm>
           <a:prstGeom prst="rect">
             <a:avLst/>
@@ -17004,7 +17004,7 @@
         <p:spPr>
           <a:xfrm>
             <a:off x="590400" y="5324400"/>
-            <a:ext cx="151200" cy="151200"/>
+            <a:ext cx="150840" cy="150840"/>
           </a:xfrm>
           <a:custGeom>
             <a:avLst/>
@@ -17227,7 +17227,7 @@
         <p:spPr>
           <a:xfrm>
             <a:off x="819000" y="5291280"/>
-            <a:ext cx="3361320" cy="456120"/>
+            <a:ext cx="3360960" cy="455760"/>
           </a:xfrm>
           <a:prstGeom prst="rect">
             <a:avLst/>
@@ -17289,7 +17289,7 @@
         <p:spPr>
           <a:xfrm>
             <a:off x="4263840" y="5324400"/>
-            <a:ext cx="170280" cy="151200"/>
+            <a:ext cx="169920" cy="150840"/>
           </a:xfrm>
           <a:custGeom>
             <a:avLst/>
@@ -17486,7 +17486,7 @@
         <p:spPr>
           <a:xfrm>
             <a:off x="4502160" y="5291280"/>
-            <a:ext cx="3361320" cy="456120"/>
+            <a:ext cx="3360960" cy="455760"/>
           </a:xfrm>
           <a:prstGeom prst="rect">
             <a:avLst/>
@@ -17548,7 +17548,7 @@
         <p:spPr>
           <a:xfrm>
             <a:off x="8132760" y="1300320"/>
-            <a:ext cx="3675600" cy="2637360"/>
+            <a:ext cx="3675240" cy="2637000"/>
           </a:xfrm>
           <a:custGeom>
             <a:avLst/>
@@ -17602,7 +17602,7 @@
         <p:spPr>
           <a:xfrm>
             <a:off x="8242200" y="1457280"/>
-            <a:ext cx="3456360" cy="265680"/>
+            <a:ext cx="3456000" cy="265320"/>
           </a:xfrm>
           <a:prstGeom prst="rect">
             <a:avLst/>
@@ -17654,7 +17654,7 @@
         <p:spPr>
           <a:xfrm>
             <a:off x="8289720" y="1838160"/>
-            <a:ext cx="3361320" cy="1332360"/>
+            <a:ext cx="3360960" cy="1332000"/>
           </a:xfrm>
           <a:prstGeom prst="roundRect">
             <a:avLst>
@@ -17686,7 +17686,7 @@
         <p:spPr>
           <a:xfrm>
             <a:off x="8251920" y="3286080"/>
-            <a:ext cx="3437280" cy="494280"/>
+            <a:ext cx="3436920" cy="493920"/>
           </a:xfrm>
           <a:prstGeom prst="rect">
             <a:avLst/>
@@ -17738,7 +17738,7 @@
         <p:spPr>
           <a:xfrm>
             <a:off x="8128080" y="4095720"/>
-            <a:ext cx="3684960" cy="1637280"/>
+            <a:ext cx="3684600" cy="1636920"/>
           </a:xfrm>
           <a:custGeom>
             <a:avLst/>
@@ -17789,7 +17789,7 @@
         <p:spPr>
           <a:xfrm>
             <a:off x="8280360" y="4248000"/>
-            <a:ext cx="3466080" cy="265680"/>
+            <a:ext cx="3465720" cy="265320"/>
           </a:xfrm>
           <a:prstGeom prst="rect">
             <a:avLst/>
@@ -17841,7 +17841,7 @@
         <p:spPr>
           <a:xfrm>
             <a:off x="8280360" y="4591080"/>
-            <a:ext cx="3456360" cy="989640"/>
+            <a:ext cx="3456000" cy="989280"/>
           </a:xfrm>
           <a:prstGeom prst="rect">
             <a:avLst/>
@@ -17930,7 +17930,7 @@
         <p:spPr>
           <a:xfrm>
             <a:off x="370440" y="370440"/>
-            <a:ext cx="11523960" cy="221400"/>
+            <a:ext cx="11523600" cy="221040"/>
           </a:xfrm>
           <a:prstGeom prst="rect">
             <a:avLst/>
@@ -17958,7 +17958,7 @@
               <a:buNone/>
             </a:pPr>
             <a:r>
-              <a:rPr b="1" lang="en-US" sz="1170" spc="49" strike="noStrike">
+              <a:rPr b="1" lang="en-US" sz="1170" spc="46" strike="noStrike">
                 <a:solidFill>
                   <a:srgbClr val="0984e3"/>
                 </a:solidFill>
@@ -17982,7 +17982,7 @@
         <p:spPr>
           <a:xfrm>
             <a:off x="370440" y="667080"/>
-            <a:ext cx="11672280" cy="443520"/>
+            <a:ext cx="11671920" cy="443160"/>
           </a:xfrm>
           <a:prstGeom prst="rect">
             <a:avLst/>
@@ -18034,7 +18034,7 @@
         <p:spPr>
           <a:xfrm>
             <a:off x="370440" y="1334160"/>
-            <a:ext cx="5668920" cy="1203120"/>
+            <a:ext cx="5668560" cy="1202760"/>
           </a:xfrm>
           <a:prstGeom prst="rect">
             <a:avLst/>
@@ -18096,7 +18096,7 @@
         <p:spPr>
           <a:xfrm>
             <a:off x="375120" y="2691360"/>
-            <a:ext cx="5566680" cy="2157480"/>
+            <a:ext cx="5566320" cy="2157120"/>
           </a:xfrm>
           <a:custGeom>
             <a:avLst/>
@@ -18150,7 +18150,7 @@
         <p:spPr>
           <a:xfrm>
             <a:off x="565200" y="2881080"/>
-            <a:ext cx="5279760" cy="258480"/>
+            <a:ext cx="5279400" cy="258120"/>
           </a:xfrm>
           <a:prstGeom prst="rect">
             <a:avLst/>
@@ -18202,7 +18202,7 @@
         <p:spPr>
           <a:xfrm>
             <a:off x="565200" y="3251880"/>
-            <a:ext cx="5261040" cy="480600"/>
+            <a:ext cx="5260680" cy="480240"/>
           </a:xfrm>
           <a:prstGeom prst="rect">
             <a:avLst/>
@@ -18254,7 +18254,7 @@
         <p:spPr>
           <a:xfrm>
             <a:off x="592920" y="3877200"/>
-            <a:ext cx="128520" cy="147240"/>
+            <a:ext cx="128160" cy="146880"/>
           </a:xfrm>
           <a:custGeom>
             <a:avLst/>
@@ -18335,7 +18335,7 @@
         <p:spPr>
           <a:xfrm>
             <a:off x="804600" y="3844800"/>
-            <a:ext cx="5021640" cy="221400"/>
+            <a:ext cx="5021280" cy="221040"/>
           </a:xfrm>
           <a:prstGeom prst="rect">
             <a:avLst/>
@@ -18387,7 +18387,7 @@
         <p:spPr>
           <a:xfrm>
             <a:off x="592920" y="4173480"/>
-            <a:ext cx="128520" cy="147240"/>
+            <a:ext cx="128160" cy="146880"/>
           </a:xfrm>
           <a:custGeom>
             <a:avLst/>
@@ -18468,7 +18468,7 @@
         <p:spPr>
           <a:xfrm>
             <a:off x="804600" y="4141080"/>
-            <a:ext cx="5021640" cy="221400"/>
+            <a:ext cx="5021280" cy="221040"/>
           </a:xfrm>
           <a:prstGeom prst="rect">
             <a:avLst/>
@@ -18520,7 +18520,7 @@
         <p:spPr>
           <a:xfrm>
             <a:off x="592920" y="4470120"/>
-            <a:ext cx="128520" cy="147240"/>
+            <a:ext cx="128160" cy="146880"/>
           </a:xfrm>
           <a:custGeom>
             <a:avLst/>
@@ -18601,7 +18601,7 @@
         <p:spPr>
           <a:xfrm>
             <a:off x="804600" y="4437720"/>
-            <a:ext cx="5021640" cy="221400"/>
+            <a:ext cx="5021280" cy="221040"/>
           </a:xfrm>
           <a:prstGeom prst="rect">
             <a:avLst/>
@@ -18653,7 +18653,7 @@
         <p:spPr>
           <a:xfrm>
             <a:off x="375120" y="5007600"/>
-            <a:ext cx="5566680" cy="1472040"/>
+            <a:ext cx="5566320" cy="1471680"/>
           </a:xfrm>
           <a:custGeom>
             <a:avLst/>
@@ -18707,7 +18707,7 @@
         <p:spPr>
           <a:xfrm>
             <a:off x="565200" y="5197320"/>
-            <a:ext cx="5279760" cy="258480"/>
+            <a:ext cx="5279400" cy="258120"/>
           </a:xfrm>
           <a:prstGeom prst="rect">
             <a:avLst/>
@@ -18759,7 +18759,7 @@
         <p:spPr>
           <a:xfrm>
             <a:off x="565200" y="5567760"/>
-            <a:ext cx="5261040" cy="721440"/>
+            <a:ext cx="5260680" cy="721080"/>
           </a:xfrm>
           <a:prstGeom prst="rect">
             <a:avLst/>
@@ -18811,7 +18811,7 @@
         <p:spPr>
           <a:xfrm>
             <a:off x="6242040" y="1334160"/>
-            <a:ext cx="5576040" cy="2843280"/>
+            <a:ext cx="5575680" cy="2842920"/>
           </a:xfrm>
           <a:custGeom>
             <a:avLst/>
@@ -18862,7 +18862,7 @@
         <p:spPr>
           <a:xfrm>
             <a:off x="6427440" y="1519200"/>
-            <a:ext cx="5316840" cy="295560"/>
+            <a:ext cx="5316480" cy="295200"/>
           </a:xfrm>
           <a:prstGeom prst="rect">
             <a:avLst/>
@@ -18914,7 +18914,7 @@
         <p:spPr>
           <a:xfrm>
             <a:off x="6427440" y="1968840"/>
-            <a:ext cx="5145480" cy="455040"/>
+            <a:ext cx="5145120" cy="454680"/>
           </a:xfrm>
           <a:prstGeom prst="rect">
             <a:avLst/>
@@ -18966,7 +18966,7 @@
         <p:spPr>
           <a:xfrm>
             <a:off x="6427440" y="2580120"/>
-            <a:ext cx="5279760" cy="480600"/>
+            <a:ext cx="5279400" cy="480240"/>
           </a:xfrm>
           <a:prstGeom prst="rect">
             <a:avLst/>
@@ -19018,7 +19018,7 @@
         <p:spPr>
           <a:xfrm>
             <a:off x="6436800" y="3205440"/>
-            <a:ext cx="165600" cy="147240"/>
+            <a:ext cx="165240" cy="146880"/>
           </a:xfrm>
           <a:custGeom>
             <a:avLst/>
@@ -19203,7 +19203,7 @@
         <p:spPr>
           <a:xfrm>
             <a:off x="6666840" y="3173040"/>
-            <a:ext cx="5040360" cy="221400"/>
+            <a:ext cx="5040000" cy="221040"/>
           </a:xfrm>
           <a:prstGeom prst="rect">
             <a:avLst/>
@@ -19265,7 +19265,7 @@
         <p:spPr>
           <a:xfrm>
             <a:off x="6445800" y="3502080"/>
-            <a:ext cx="147240" cy="147240"/>
+            <a:ext cx="146880" cy="146880"/>
           </a:xfrm>
           <a:custGeom>
             <a:avLst/>
@@ -19432,7 +19432,7 @@
         <p:spPr>
           <a:xfrm>
             <a:off x="6666840" y="3469680"/>
-            <a:ext cx="5040360" cy="221400"/>
+            <a:ext cx="5040000" cy="221040"/>
           </a:xfrm>
           <a:prstGeom prst="rect">
             <a:avLst/>
@@ -19494,7 +19494,7 @@
         <p:spPr>
           <a:xfrm>
             <a:off x="6427440" y="3798360"/>
-            <a:ext cx="184320" cy="147240"/>
+            <a:ext cx="183960" cy="146880"/>
           </a:xfrm>
           <a:custGeom>
             <a:avLst/>
@@ -19726,7 +19726,7 @@
         <p:spPr>
           <a:xfrm>
             <a:off x="6666840" y="3765960"/>
-            <a:ext cx="5040360" cy="221400"/>
+            <a:ext cx="5040000" cy="221040"/>
           </a:xfrm>
           <a:prstGeom prst="rect">
             <a:avLst/>
@@ -19788,7 +19788,7 @@
         <p:spPr>
           <a:xfrm>
             <a:off x="6260760" y="4321800"/>
-            <a:ext cx="5557680" cy="869760"/>
+            <a:ext cx="5557320" cy="869400"/>
           </a:xfrm>
           <a:custGeom>
             <a:avLst/>
@@ -19839,7 +19839,7 @@
         <p:spPr>
           <a:xfrm>
             <a:off x="6260760" y="4321800"/>
-            <a:ext cx="36000" cy="869760"/>
+            <a:ext cx="35640" cy="869400"/>
           </a:xfrm>
           <a:custGeom>
             <a:avLst/>
@@ -19890,7 +19890,7 @@
         <p:spPr>
           <a:xfrm>
             <a:off x="6464520" y="4507200"/>
-            <a:ext cx="5242680" cy="239760"/>
+            <a:ext cx="5242320" cy="239400"/>
           </a:xfrm>
           <a:prstGeom prst="rect">
             <a:avLst/>
@@ -19942,7 +19942,7 @@
         <p:spPr>
           <a:xfrm>
             <a:off x="6464520" y="4822200"/>
-            <a:ext cx="5233320" cy="184320"/>
+            <a:ext cx="5232960" cy="183960"/>
           </a:xfrm>
           <a:prstGeom prst="rect">
             <a:avLst/>
@@ -20041,7 +20041,7 @@
         <p:spPr>
           <a:xfrm>
             <a:off x="380880" y="380880"/>
-            <a:ext cx="11657520" cy="456120"/>
+            <a:ext cx="11657160" cy="455760"/>
           </a:xfrm>
           <a:prstGeom prst="rect">
             <a:avLst/>
@@ -20093,7 +20093,7 @@
         <p:spPr>
           <a:xfrm>
             <a:off x="380880" y="952560"/>
-            <a:ext cx="761040" cy="18000"/>
+            <a:ext cx="760680" cy="17640"/>
           </a:xfrm>
           <a:custGeom>
             <a:avLst/>
@@ -20144,7 +20144,7 @@
         <p:spPr>
           <a:xfrm>
             <a:off x="380880" y="1428840"/>
-            <a:ext cx="751320" cy="570600"/>
+            <a:ext cx="750960" cy="570240"/>
           </a:xfrm>
           <a:prstGeom prst="rect">
             <a:avLst/>
@@ -20198,7 +20198,7 @@
         <p:spPr>
           <a:xfrm>
             <a:off x="1034280" y="1504800"/>
-            <a:ext cx="4190040" cy="303840"/>
+            <a:ext cx="4189680" cy="303480"/>
           </a:xfrm>
           <a:prstGeom prst="rect">
             <a:avLst/>
@@ -20250,7 +20250,7 @@
         <p:spPr>
           <a:xfrm>
             <a:off x="1034280" y="1886040"/>
-            <a:ext cx="4161240" cy="275040"/>
+            <a:ext cx="4160880" cy="274680"/>
           </a:xfrm>
           <a:prstGeom prst="rect">
             <a:avLst/>
@@ -20302,7 +20302,7 @@
         <p:spPr>
           <a:xfrm>
             <a:off x="6400800" y="1428840"/>
-            <a:ext cx="856080" cy="570600"/>
+            <a:ext cx="855720" cy="570240"/>
           </a:xfrm>
           <a:prstGeom prst="rect">
             <a:avLst/>
@@ -20356,7 +20356,7 @@
         <p:spPr>
           <a:xfrm>
             <a:off x="7160040" y="1504800"/>
-            <a:ext cx="4761360" cy="303840"/>
+            <a:ext cx="4761000" cy="303480"/>
           </a:xfrm>
           <a:prstGeom prst="rect">
             <a:avLst/>
@@ -20408,7 +20408,7 @@
         <p:spPr>
           <a:xfrm>
             <a:off x="7160040" y="1886040"/>
-            <a:ext cx="4732920" cy="560880"/>
+            <a:ext cx="4732560" cy="560520"/>
           </a:xfrm>
           <a:prstGeom prst="rect">
             <a:avLst/>
@@ -20460,7 +20460,7 @@
         <p:spPr>
           <a:xfrm>
             <a:off x="380880" y="2824200"/>
-            <a:ext cx="856080" cy="570600"/>
+            <a:ext cx="855720" cy="570240"/>
           </a:xfrm>
           <a:prstGeom prst="rect">
             <a:avLst/>
@@ -20514,7 +20514,7 @@
         <p:spPr>
           <a:xfrm>
             <a:off x="1143000" y="2900520"/>
-            <a:ext cx="3970800" cy="303840"/>
+            <a:ext cx="3970440" cy="303480"/>
           </a:xfrm>
           <a:prstGeom prst="rect">
             <a:avLst/>
@@ -20566,7 +20566,7 @@
         <p:spPr>
           <a:xfrm>
             <a:off x="1143000" y="3281400"/>
-            <a:ext cx="3942360" cy="275040"/>
+            <a:ext cx="3942000" cy="274680"/>
           </a:xfrm>
           <a:prstGeom prst="rect">
             <a:avLst/>
@@ -20618,7 +20618,7 @@
         <p:spPr>
           <a:xfrm>
             <a:off x="6400800" y="2824200"/>
-            <a:ext cx="884880" cy="570600"/>
+            <a:ext cx="884520" cy="570240"/>
           </a:xfrm>
           <a:prstGeom prst="rect">
             <a:avLst/>
@@ -20672,7 +20672,7 @@
         <p:spPr>
           <a:xfrm>
             <a:off x="7188480" y="2900520"/>
-            <a:ext cx="2475360" cy="303840"/>
+            <a:ext cx="2475000" cy="303480"/>
           </a:xfrm>
           <a:prstGeom prst="rect">
             <a:avLst/>
@@ -20724,7 +20724,7 @@
         <p:spPr>
           <a:xfrm>
             <a:off x="7188480" y="3281400"/>
-            <a:ext cx="2446920" cy="275040"/>
+            <a:ext cx="2446560" cy="274680"/>
           </a:xfrm>
           <a:prstGeom prst="rect">
             <a:avLst/>
@@ -20776,7 +20776,7 @@
         <p:spPr>
           <a:xfrm>
             <a:off x="380880" y="3940920"/>
-            <a:ext cx="846720" cy="570600"/>
+            <a:ext cx="846360" cy="570240"/>
           </a:xfrm>
           <a:prstGeom prst="rect">
             <a:avLst/>
@@ -20830,7 +20830,7 @@
         <p:spPr>
           <a:xfrm>
             <a:off x="1137240" y="4017240"/>
-            <a:ext cx="2865960" cy="303840"/>
+            <a:ext cx="2865600" cy="303480"/>
           </a:xfrm>
           <a:prstGeom prst="rect">
             <a:avLst/>
@@ -20882,7 +20882,7 @@
         <p:spPr>
           <a:xfrm>
             <a:off x="1137240" y="4398120"/>
-            <a:ext cx="2837520" cy="275040"/>
+            <a:ext cx="2837160" cy="274680"/>
           </a:xfrm>
           <a:prstGeom prst="rect">
             <a:avLst/>
@@ -20934,7 +20934,7 @@
         <p:spPr>
           <a:xfrm>
             <a:off x="6400800" y="3940920"/>
-            <a:ext cx="865800" cy="570600"/>
+            <a:ext cx="865440" cy="570240"/>
           </a:xfrm>
           <a:prstGeom prst="rect">
             <a:avLst/>
@@ -20988,7 +20988,7 @@
         <p:spPr>
           <a:xfrm>
             <a:off x="7171560" y="4017240"/>
-            <a:ext cx="3075480" cy="303840"/>
+            <a:ext cx="3075120" cy="303480"/>
           </a:xfrm>
           <a:prstGeom prst="rect">
             <a:avLst/>
@@ -21040,7 +21040,7 @@
         <p:spPr>
           <a:xfrm>
             <a:off x="7171560" y="4398120"/>
-            <a:ext cx="3047040" cy="275040"/>
+            <a:ext cx="3046680" cy="274680"/>
           </a:xfrm>
           <a:prstGeom prst="rect">
             <a:avLst/>
@@ -21129,7 +21129,7 @@
         <p:spPr>
           <a:xfrm>
             <a:off x="335880" y="335880"/>
-            <a:ext cx="11586240" cy="200520"/>
+            <a:ext cx="11585880" cy="200160"/>
           </a:xfrm>
           <a:prstGeom prst="rect">
             <a:avLst/>
@@ -21157,7 +21157,7 @@
               <a:buNone/>
             </a:pPr>
             <a:r>
-              <a:rPr b="1" lang="en-US" sz="1060" spc="46" strike="noStrike">
+              <a:rPr b="1" lang="en-US" sz="1060" spc="43" strike="noStrike">
                 <a:solidFill>
                   <a:srgbClr val="0984e3"/>
                 </a:solidFill>
@@ -21181,7 +21181,7 @@
         <p:spPr>
           <a:xfrm>
             <a:off x="335880" y="604440"/>
-            <a:ext cx="11720880" cy="402120"/>
+            <a:ext cx="11720520" cy="401760"/>
           </a:xfrm>
           <a:prstGeom prst="rect">
             <a:avLst/>
@@ -21233,7 +21233,7 @@
         <p:spPr>
           <a:xfrm>
             <a:off x="335880" y="1251000"/>
-            <a:ext cx="5995080" cy="456480"/>
+            <a:ext cx="5994720" cy="456120"/>
           </a:xfrm>
           <a:prstGeom prst="rect">
             <a:avLst/>
@@ -21285,7 +21285,7 @@
         <p:spPr>
           <a:xfrm>
             <a:off x="335880" y="1889280"/>
-            <a:ext cx="6875640" cy="653760"/>
+            <a:ext cx="6875280" cy="653400"/>
           </a:xfrm>
           <a:prstGeom prst="rect">
             <a:avLst/>
@@ -21337,7 +21337,7 @@
         <p:spPr>
           <a:xfrm>
             <a:off x="340200" y="2682720"/>
-            <a:ext cx="6800400" cy="1955520"/>
+            <a:ext cx="6800040" cy="1955160"/>
           </a:xfrm>
           <a:custGeom>
             <a:avLst/>
@@ -21391,7 +21391,7 @@
         <p:spPr>
           <a:xfrm>
             <a:off x="512280" y="2854800"/>
-            <a:ext cx="6540120" cy="234000"/>
+            <a:ext cx="6539760" cy="233640"/>
           </a:xfrm>
           <a:prstGeom prst="rect">
             <a:avLst/>
@@ -21443,7 +21443,7 @@
         <p:spPr>
           <a:xfrm>
             <a:off x="512280" y="3190680"/>
-            <a:ext cx="6523200" cy="217080"/>
+            <a:ext cx="6522840" cy="216720"/>
           </a:xfrm>
           <a:prstGeom prst="rect">
             <a:avLst/>
@@ -21495,7 +21495,7 @@
         <p:spPr>
           <a:xfrm>
             <a:off x="512280" y="3509640"/>
-            <a:ext cx="6455880" cy="637200"/>
+            <a:ext cx="6455520" cy="636840"/>
           </a:xfrm>
           <a:custGeom>
             <a:avLst/>
@@ -21546,7 +21546,7 @@
         <p:spPr>
           <a:xfrm>
             <a:off x="613080" y="3610440"/>
-            <a:ext cx="6321600" cy="200520"/>
+            <a:ext cx="6321240" cy="200160"/>
           </a:xfrm>
           <a:prstGeom prst="rect">
             <a:avLst/>
@@ -21598,7 +21598,7 @@
         <p:spPr>
           <a:xfrm>
             <a:off x="613080" y="3845520"/>
-            <a:ext cx="6321600" cy="200520"/>
+            <a:ext cx="6321240" cy="200160"/>
           </a:xfrm>
           <a:prstGeom prst="rect">
             <a:avLst/>
@@ -21650,7 +21650,7 @@
         <p:spPr>
           <a:xfrm>
             <a:off x="512280" y="4248720"/>
-            <a:ext cx="6523200" cy="217080"/>
+            <a:ext cx="6522840" cy="216720"/>
           </a:xfrm>
           <a:prstGeom prst="rect">
             <a:avLst/>
@@ -21702,7 +21702,7 @@
         <p:spPr>
           <a:xfrm>
             <a:off x="352800" y="4777560"/>
-            <a:ext cx="6791760" cy="1527120"/>
+            <a:ext cx="6791400" cy="1526760"/>
           </a:xfrm>
           <a:custGeom>
             <a:avLst/>
@@ -21753,7 +21753,7 @@
         <p:spPr>
           <a:xfrm>
             <a:off x="352800" y="4777560"/>
-            <a:ext cx="32400" cy="1527120"/>
+            <a:ext cx="32040" cy="1526760"/>
           </a:xfrm>
           <a:custGeom>
             <a:avLst/>
@@ -21804,7 +21804,7 @@
         <p:spPr>
           <a:xfrm>
             <a:off x="537480" y="4945680"/>
-            <a:ext cx="6523200" cy="234000"/>
+            <a:ext cx="6522840" cy="233640"/>
           </a:xfrm>
           <a:prstGeom prst="rect">
             <a:avLst/>
@@ -21856,7 +21856,7 @@
         <p:spPr>
           <a:xfrm>
             <a:off x="537480" y="5281560"/>
-            <a:ext cx="6506280" cy="217080"/>
+            <a:ext cx="6505920" cy="216720"/>
           </a:xfrm>
           <a:prstGeom prst="rect">
             <a:avLst/>
@@ -21908,7 +21908,7 @@
         <p:spPr>
           <a:xfrm>
             <a:off x="537480" y="5600520"/>
-            <a:ext cx="3214800" cy="200520"/>
+            <a:ext cx="3214440" cy="200160"/>
           </a:xfrm>
           <a:prstGeom prst="rect">
             <a:avLst/>
@@ -21970,7 +21970,7 @@
         <p:spPr>
           <a:xfrm>
             <a:off x="3823200" y="5600520"/>
-            <a:ext cx="3214800" cy="200520"/>
+            <a:ext cx="3214440" cy="200160"/>
           </a:xfrm>
           <a:prstGeom prst="rect">
             <a:avLst/>
@@ -22032,7 +22032,7 @@
         <p:spPr>
           <a:xfrm>
             <a:off x="537480" y="5936400"/>
-            <a:ext cx="3214800" cy="200520"/>
+            <a:ext cx="3214440" cy="200160"/>
           </a:xfrm>
           <a:prstGeom prst="rect">
             <a:avLst/>
@@ -22094,7 +22094,7 @@
         <p:spPr>
           <a:xfrm>
             <a:off x="3823200" y="5936400"/>
-            <a:ext cx="3214800" cy="200520"/>
+            <a:ext cx="3214440" cy="200160"/>
           </a:xfrm>
           <a:prstGeom prst="rect">
             <a:avLst/>
@@ -22156,7 +22156,7 @@
         <p:spPr>
           <a:xfrm>
             <a:off x="7415640" y="1213200"/>
-            <a:ext cx="4440600" cy="3500280"/>
+            <a:ext cx="4440240" cy="3499920"/>
           </a:xfrm>
           <a:custGeom>
             <a:avLst/>
@@ -22210,7 +22210,7 @@
         <p:spPr>
           <a:xfrm>
             <a:off x="7587720" y="1385280"/>
-            <a:ext cx="4096440" cy="1678320"/>
+            <a:ext cx="4096080" cy="1677960"/>
           </a:xfrm>
           <a:prstGeom prst="roundRect">
             <a:avLst>
@@ -22242,7 +22242,7 @@
         <p:spPr>
           <a:xfrm>
             <a:off x="7545600" y="3199320"/>
-            <a:ext cx="4180320" cy="234000"/>
+            <a:ext cx="4179960" cy="233640"/>
           </a:xfrm>
           <a:prstGeom prst="rect">
             <a:avLst/>
@@ -22294,7 +22294,7 @@
         <p:spPr>
           <a:xfrm>
             <a:off x="7621200" y="3564360"/>
-            <a:ext cx="99720" cy="133200"/>
+            <a:ext cx="99360" cy="132840"/>
           </a:xfrm>
           <a:custGeom>
             <a:avLst/>
@@ -22493,7 +22493,7 @@
         <p:spPr>
           <a:xfrm>
             <a:off x="7800120" y="3534840"/>
-            <a:ext cx="3951360" cy="200520"/>
+            <a:ext cx="3951000" cy="200160"/>
           </a:xfrm>
           <a:prstGeom prst="rect">
             <a:avLst/>
@@ -22555,7 +22555,7 @@
         <p:spPr>
           <a:xfrm>
             <a:off x="7604640" y="3832920"/>
-            <a:ext cx="133200" cy="133200"/>
+            <a:ext cx="132840" cy="132840"/>
           </a:xfrm>
           <a:custGeom>
             <a:avLst/>
@@ -22762,7 +22762,7 @@
         <p:spPr>
           <a:xfrm>
             <a:off x="7800120" y="3803760"/>
-            <a:ext cx="3951360" cy="200520"/>
+            <a:ext cx="3951000" cy="200160"/>
           </a:xfrm>
           <a:prstGeom prst="rect">
             <a:avLst/>
@@ -22824,7 +22824,7 @@
         <p:spPr>
           <a:xfrm>
             <a:off x="7604640" y="4101840"/>
-            <a:ext cx="133200" cy="133200"/>
+            <a:ext cx="132840" cy="132840"/>
           </a:xfrm>
           <a:custGeom>
             <a:avLst/>
@@ -23015,7 +23015,7 @@
         <p:spPr>
           <a:xfrm>
             <a:off x="7800120" y="4072320"/>
-            <a:ext cx="3951360" cy="200520"/>
+            <a:ext cx="3951000" cy="200160"/>
           </a:xfrm>
           <a:prstGeom prst="rect">
             <a:avLst/>
@@ -23077,7 +23077,7 @@
         <p:spPr>
           <a:xfrm>
             <a:off x="7587720" y="4370400"/>
-            <a:ext cx="166680" cy="133200"/>
+            <a:ext cx="166320" cy="132840"/>
           </a:xfrm>
           <a:custGeom>
             <a:avLst/>
@@ -23293,7 +23293,7 @@
         <p:spPr>
           <a:xfrm>
             <a:off x="7800120" y="4341240"/>
-            <a:ext cx="3951360" cy="200520"/>
+            <a:ext cx="3951000" cy="200160"/>
           </a:xfrm>
           <a:prstGeom prst="rect">
             <a:avLst/>
@@ -23355,7 +23355,7 @@
         <p:spPr>
           <a:xfrm>
             <a:off x="7411320" y="4853160"/>
-            <a:ext cx="4449240" cy="1292040"/>
+            <a:ext cx="4448880" cy="1291680"/>
           </a:xfrm>
           <a:custGeom>
             <a:avLst/>
@@ -23406,7 +23406,7 @@
         <p:spPr>
           <a:xfrm>
             <a:off x="7579440" y="5021280"/>
-            <a:ext cx="4188960" cy="234000"/>
+            <a:ext cx="4188600" cy="233640"/>
           </a:xfrm>
           <a:prstGeom prst="rect">
             <a:avLst/>
@@ -23458,7 +23458,7 @@
         <p:spPr>
           <a:xfrm>
             <a:off x="7579440" y="5323680"/>
-            <a:ext cx="4180320" cy="653760"/>
+            <a:ext cx="4179960" cy="653400"/>
           </a:xfrm>
           <a:prstGeom prst="rect">
             <a:avLst/>
@@ -23547,7 +23547,7 @@
         <p:spPr>
           <a:xfrm>
             <a:off x="5486400" y="585720"/>
-            <a:ext cx="1218240" cy="18000"/>
+            <a:ext cx="1217880" cy="17640"/>
           </a:xfrm>
           <a:custGeom>
             <a:avLst/>
@@ -23598,7 +23598,7 @@
         <p:spPr>
           <a:xfrm>
             <a:off x="3664080" y="909720"/>
-            <a:ext cx="4866120" cy="1427760"/>
+            <a:ext cx="4865760" cy="1427400"/>
           </a:xfrm>
           <a:prstGeom prst="rect">
             <a:avLst/>
@@ -23671,7 +23671,7 @@
         <p:spPr>
           <a:xfrm>
             <a:off x="5486400" y="2643120"/>
-            <a:ext cx="1218240" cy="18000"/>
+            <a:ext cx="1217880" cy="17640"/>
           </a:xfrm>
           <a:custGeom>
             <a:avLst/>
@@ -23722,7 +23722,7 @@
         <p:spPr>
           <a:xfrm>
             <a:off x="1771560" y="2967120"/>
-            <a:ext cx="8647560" cy="1113480"/>
+            <a:ext cx="8647200" cy="1113120"/>
           </a:xfrm>
           <a:prstGeom prst="rect">
             <a:avLst/>
@@ -23774,7 +23774,7 @@
         <p:spPr>
           <a:xfrm>
             <a:off x="1781280" y="4309920"/>
-            <a:ext cx="8628480" cy="1237320"/>
+            <a:ext cx="8628120" cy="1236960"/>
           </a:xfrm>
           <a:prstGeom prst="rect">
             <a:avLst/>
@@ -23826,7 +23826,7 @@
         <p:spPr>
           <a:xfrm>
             <a:off x="2615400" y="6005520"/>
-            <a:ext cx="6961680" cy="265680"/>
+            <a:ext cx="6961320" cy="265320"/>
           </a:xfrm>
           <a:prstGeom prst="rect">
             <a:avLst/>
@@ -23915,7 +23915,7 @@
         <p:spPr>
           <a:xfrm>
             <a:off x="609480" y="1781280"/>
-            <a:ext cx="12191040" cy="1218240"/>
+            <a:ext cx="12190680" cy="1217880"/>
           </a:xfrm>
           <a:prstGeom prst="rect">
             <a:avLst/>
@@ -23969,7 +23969,7 @@
         <p:spPr>
           <a:xfrm>
             <a:off x="609480" y="3152880"/>
-            <a:ext cx="11867040" cy="1141920"/>
+            <a:ext cx="11866680" cy="1141560"/>
           </a:xfrm>
           <a:prstGeom prst="rect">
             <a:avLst/>
@@ -24042,7 +24042,7 @@
         <p:spPr>
           <a:xfrm>
             <a:off x="609480" y="4524480"/>
-            <a:ext cx="1218240" cy="18000"/>
+            <a:ext cx="1217880" cy="17640"/>
           </a:xfrm>
           <a:custGeom>
             <a:avLst/>
@@ -24093,7 +24093,7 @@
         <p:spPr>
           <a:xfrm>
             <a:off x="609480" y="4772160"/>
-            <a:ext cx="11695680" cy="303840"/>
+            <a:ext cx="11695320" cy="303480"/>
           </a:xfrm>
           <a:prstGeom prst="rect">
             <a:avLst/>
@@ -24182,7 +24182,7 @@
         <p:spPr>
           <a:xfrm>
             <a:off x="380880" y="380880"/>
-            <a:ext cx="11505240" cy="227520"/>
+            <a:ext cx="11504880" cy="227160"/>
           </a:xfrm>
           <a:prstGeom prst="rect">
             <a:avLst/>
@@ -24210,7 +24210,7 @@
               <a:buNone/>
             </a:pPr>
             <a:r>
-              <a:rPr b="1" lang="en-US" sz="1200" spc="52" strike="noStrike">
+              <a:rPr b="1" lang="en-US" sz="1200" spc="49" strike="noStrike">
                 <a:solidFill>
                   <a:srgbClr val="0984e3"/>
                 </a:solidFill>
@@ -24234,7 +24234,7 @@
         <p:spPr>
           <a:xfrm>
             <a:off x="380880" y="685800"/>
-            <a:ext cx="11657520" cy="456120"/>
+            <a:ext cx="11657160" cy="455760"/>
           </a:xfrm>
           <a:prstGeom prst="rect">
             <a:avLst/>
@@ -24286,7 +24286,7 @@
         <p:spPr>
           <a:xfrm>
             <a:off x="380880" y="1371600"/>
-            <a:ext cx="6828480" cy="1237320"/>
+            <a:ext cx="6828120" cy="1236960"/>
           </a:xfrm>
           <a:prstGeom prst="rect">
             <a:avLst/>
@@ -24314,29 +24314,38 @@
               <a:buNone/>
             </a:pPr>
             <a:r>
-              <a:rPr b="1" lang="en-US" sz="1500" spc="-1" strike="noStrike">
+              <a:rPr b="1" i="1" lang="en-US" sz="1500" spc="-1" strike="noStrike">
                 <a:solidFill>
                   <a:srgbClr val="00008b"/>
                 </a:solidFill>
+                <a:highlight>
+                  <a:srgbClr val="ffff00"/>
+                </a:highlight>
                 <a:latin typeface="Quattrocento Sans"/>
                 <a:ea typeface="Quattrocento Sans"/>
               </a:rPr>
               <a:t>Game theory is a mathematical framework for analyzing strategic interactions among rational decision-makers.</a:t>
             </a:r>
             <a:r>
-              <a:rPr b="0" lang="en-US" sz="1500" spc="-1" strike="noStrike">
+              <a:rPr b="0" i="1" lang="en-US" sz="1500" spc="-1" strike="noStrike">
                 <a:solidFill>
                   <a:srgbClr val="00008b"/>
                 </a:solidFill>
+                <a:highlight>
+                  <a:srgbClr val="ffff00"/>
+                </a:highlight>
                 <a:latin typeface="Quattrocento Sans"/>
                 <a:ea typeface="Quattrocento Sans"/>
               </a:rPr>
               <a:t> It provides a structured approach to understanding how individuals or groups make decisions in situations where the outcome depends on the choices of multiple participants.</a:t>
             </a:r>
-            <a:endParaRPr b="0" lang="en-HK" sz="1500" spc="-1" strike="noStrike">
+            <a:endParaRPr b="0" i="1" lang="en-HK" sz="1500" spc="-1" strike="noStrike">
               <a:solidFill>
                 <a:srgbClr val="00008b"/>
               </a:solidFill>
+              <a:highlight>
+                <a:srgbClr val="ffff00"/>
+              </a:highlight>
               <a:latin typeface="Arial"/>
             </a:endParaRPr>
           </a:p>
@@ -24351,7 +24360,7 @@
         <p:spPr>
           <a:xfrm>
             <a:off x="380880" y="2838600"/>
-            <a:ext cx="6818760" cy="1113480"/>
+            <a:ext cx="6818400" cy="1113120"/>
           </a:xfrm>
           <a:prstGeom prst="rect">
             <a:avLst/>
@@ -24403,7 +24412,7 @@
         <p:spPr>
           <a:xfrm>
             <a:off x="399960" y="4986360"/>
-            <a:ext cx="6714000" cy="1361160"/>
+            <a:ext cx="6713640" cy="1360800"/>
           </a:xfrm>
           <a:custGeom>
             <a:avLst/>
@@ -24454,7 +24463,7 @@
         <p:spPr>
           <a:xfrm>
             <a:off x="399960" y="4986360"/>
-            <a:ext cx="37080" cy="1361160"/>
+            <a:ext cx="36720" cy="1360800"/>
           </a:xfrm>
           <a:custGeom>
             <a:avLst/>
@@ -24505,7 +24514,7 @@
         <p:spPr>
           <a:xfrm>
             <a:off x="647640" y="5214960"/>
-            <a:ext cx="6323400" cy="560880"/>
+            <a:ext cx="6323040" cy="560520"/>
           </a:xfrm>
           <a:prstGeom prst="rect">
             <a:avLst/>
@@ -24557,7 +24566,7 @@
         <p:spPr>
           <a:xfrm>
             <a:off x="647640" y="5886360"/>
-            <a:ext cx="6314040" cy="227520"/>
+            <a:ext cx="6313680" cy="227160"/>
           </a:xfrm>
           <a:prstGeom prst="rect">
             <a:avLst/>
@@ -24619,7 +24628,7 @@
         <p:spPr>
           <a:xfrm>
             <a:off x="7426440" y="1376280"/>
-            <a:ext cx="4380480" cy="1494360"/>
+            <a:ext cx="4380120" cy="1494000"/>
           </a:xfrm>
           <a:custGeom>
             <a:avLst/>
@@ -24673,7 +24682,7 @@
         <p:spPr>
           <a:xfrm>
             <a:off x="7660080" y="1609560"/>
-            <a:ext cx="379800" cy="379800"/>
+            <a:ext cx="379440" cy="379440"/>
           </a:xfrm>
           <a:custGeom>
             <a:avLst/>
@@ -24724,7 +24733,7 @@
         <p:spPr>
           <a:xfrm>
             <a:off x="7745760" y="1714680"/>
-            <a:ext cx="213120" cy="170280"/>
+            <a:ext cx="212760" cy="169920"/>
           </a:xfrm>
           <a:custGeom>
             <a:avLst/>
@@ -24940,7 +24949,7 @@
         <p:spPr>
           <a:xfrm>
             <a:off x="8155440" y="1666800"/>
-            <a:ext cx="637200" cy="265680"/>
+            <a:ext cx="636840" cy="265320"/>
           </a:xfrm>
           <a:prstGeom prst="rect">
             <a:avLst/>
@@ -24992,7 +25001,7 @@
         <p:spPr>
           <a:xfrm>
             <a:off x="7660080" y="2143080"/>
-            <a:ext cx="3989880" cy="494280"/>
+            <a:ext cx="3989520" cy="493920"/>
           </a:xfrm>
           <a:prstGeom prst="rect">
             <a:avLst/>
@@ -25044,7 +25053,7 @@
         <p:spPr>
           <a:xfrm>
             <a:off x="7426440" y="3110040"/>
-            <a:ext cx="4380480" cy="1494360"/>
+            <a:ext cx="4380120" cy="1494000"/>
           </a:xfrm>
           <a:custGeom>
             <a:avLst/>
@@ -25098,7 +25107,7 @@
         <p:spPr>
           <a:xfrm>
             <a:off x="7660080" y="3343320"/>
-            <a:ext cx="379800" cy="379800"/>
+            <a:ext cx="379440" cy="379440"/>
           </a:xfrm>
           <a:custGeom>
             <a:avLst/>
@@ -25149,7 +25158,7 @@
         <p:spPr>
           <a:xfrm>
             <a:off x="7767000" y="3448080"/>
-            <a:ext cx="170280" cy="170280"/>
+            <a:ext cx="169920" cy="169920"/>
           </a:xfrm>
           <a:custGeom>
             <a:avLst/>
@@ -25425,7 +25434,7 @@
         <p:spPr>
           <a:xfrm>
             <a:off x="8155440" y="3400560"/>
-            <a:ext cx="865800" cy="265680"/>
+            <a:ext cx="865440" cy="265320"/>
           </a:xfrm>
           <a:prstGeom prst="rect">
             <a:avLst/>
@@ -25477,7 +25486,7 @@
         <p:spPr>
           <a:xfrm>
             <a:off x="7660080" y="3876840"/>
-            <a:ext cx="3989880" cy="494280"/>
+            <a:ext cx="3989520" cy="493920"/>
           </a:xfrm>
           <a:prstGeom prst="rect">
             <a:avLst/>
@@ -25529,7 +25538,7 @@
         <p:spPr>
           <a:xfrm>
             <a:off x="7426440" y="4843440"/>
-            <a:ext cx="4380480" cy="1494360"/>
+            <a:ext cx="4380120" cy="1494000"/>
           </a:xfrm>
           <a:custGeom>
             <a:avLst/>
@@ -25583,7 +25592,7 @@
         <p:spPr>
           <a:xfrm>
             <a:off x="7660080" y="5076720"/>
-            <a:ext cx="379800" cy="379800"/>
+            <a:ext cx="379440" cy="379440"/>
           </a:xfrm>
           <a:custGeom>
             <a:avLst/>
@@ -25634,7 +25643,7 @@
         <p:spPr>
           <a:xfrm>
             <a:off x="7767000" y="5181480"/>
-            <a:ext cx="170280" cy="170280"/>
+            <a:ext cx="169920" cy="169920"/>
           </a:xfrm>
           <a:custGeom>
             <a:avLst/>
@@ -25811,7 +25820,7 @@
         <p:spPr>
           <a:xfrm>
             <a:off x="8155440" y="5133960"/>
-            <a:ext cx="656280" cy="265680"/>
+            <a:ext cx="655920" cy="265320"/>
           </a:xfrm>
           <a:prstGeom prst="rect">
             <a:avLst/>
@@ -25863,7 +25872,7 @@
         <p:spPr>
           <a:xfrm>
             <a:off x="7660080" y="5610240"/>
-            <a:ext cx="3989880" cy="494280"/>
+            <a:ext cx="3989520" cy="493920"/>
           </a:xfrm>
           <a:prstGeom prst="rect">
             <a:avLst/>
@@ -25952,7 +25961,7 @@
         <p:spPr>
           <a:xfrm>
             <a:off x="609480" y="1781280"/>
-            <a:ext cx="12191040" cy="1218240"/>
+            <a:ext cx="12190680" cy="1217880"/>
           </a:xfrm>
           <a:prstGeom prst="rect">
             <a:avLst/>
@@ -26006,7 +26015,7 @@
         <p:spPr>
           <a:xfrm>
             <a:off x="609480" y="3152880"/>
-            <a:ext cx="11867040" cy="1141920"/>
+            <a:ext cx="11866680" cy="1141560"/>
           </a:xfrm>
           <a:prstGeom prst="rect">
             <a:avLst/>
@@ -26079,7 +26088,7 @@
         <p:spPr>
           <a:xfrm>
             <a:off x="609480" y="4524480"/>
-            <a:ext cx="1218240" cy="18000"/>
+            <a:ext cx="1217880" cy="17640"/>
           </a:xfrm>
           <a:custGeom>
             <a:avLst/>
@@ -26130,7 +26139,7 @@
         <p:spPr>
           <a:xfrm>
             <a:off x="609480" y="4772160"/>
-            <a:ext cx="11695680" cy="303840"/>
+            <a:ext cx="11695320" cy="303480"/>
           </a:xfrm>
           <a:prstGeom prst="rect">
             <a:avLst/>
@@ -26219,7 +26228,7 @@
         <p:spPr>
           <a:xfrm>
             <a:off x="324360" y="324360"/>
-            <a:ext cx="11607120" cy="193320"/>
+            <a:ext cx="11606760" cy="192960"/>
           </a:xfrm>
           <a:prstGeom prst="rect">
             <a:avLst/>
@@ -26247,7 +26256,7 @@
               <a:buNone/>
             </a:pPr>
             <a:r>
-              <a:rPr b="1" lang="en-US" sz="1020" spc="43" strike="noStrike">
+              <a:rPr b="1" lang="en-US" sz="1020" spc="41" strike="noStrike">
                 <a:solidFill>
                   <a:srgbClr val="0984e3"/>
                 </a:solidFill>
@@ -26271,7 +26280,7 @@
         <p:spPr>
           <a:xfrm>
             <a:off x="324360" y="583560"/>
-            <a:ext cx="11737080" cy="388080"/>
+            <a:ext cx="11736720" cy="387720"/>
           </a:xfrm>
           <a:prstGeom prst="rect">
             <a:avLst/>
@@ -26323,7 +26332,7 @@
         <p:spPr>
           <a:xfrm>
             <a:off x="6095880" y="1167480"/>
-            <a:ext cx="15120" cy="4976280"/>
+            <a:ext cx="14760" cy="4975920"/>
           </a:xfrm>
           <a:custGeom>
             <a:avLst/>
@@ -26374,7 +26383,7 @@
         <p:spPr>
           <a:xfrm>
             <a:off x="1638000" y="1171440"/>
-            <a:ext cx="3865680" cy="720360"/>
+            <a:ext cx="3865320" cy="720000"/>
           </a:xfrm>
           <a:custGeom>
             <a:avLst/>
@@ -26428,7 +26437,7 @@
         <p:spPr>
           <a:xfrm>
             <a:off x="1698840" y="1305000"/>
-            <a:ext cx="3671280" cy="225720"/>
+            <a:ext cx="3670920" cy="225360"/>
           </a:xfrm>
           <a:prstGeom prst="rect">
             <a:avLst/>
@@ -26480,7 +26489,7 @@
         <p:spPr>
           <a:xfrm>
             <a:off x="1706760" y="1564560"/>
-            <a:ext cx="3663000" cy="193320"/>
+            <a:ext cx="3662640" cy="192960"/>
           </a:xfrm>
           <a:prstGeom prst="rect">
             <a:avLst/>
@@ -26532,7 +26541,7 @@
         <p:spPr>
           <a:xfrm>
             <a:off x="6683760" y="2030760"/>
-            <a:ext cx="3290040" cy="720360"/>
+            <a:ext cx="3289680" cy="720000"/>
           </a:xfrm>
           <a:custGeom>
             <a:avLst/>
@@ -26586,7 +26595,7 @@
         <p:spPr>
           <a:xfrm>
             <a:off x="6817320" y="2164320"/>
-            <a:ext cx="3095640" cy="225720"/>
+            <a:ext cx="3095280" cy="225360"/>
           </a:xfrm>
           <a:prstGeom prst="rect">
             <a:avLst/>
@@ -26638,7 +26647,7 @@
         <p:spPr>
           <a:xfrm>
             <a:off x="6817320" y="2423880"/>
-            <a:ext cx="3087360" cy="193320"/>
+            <a:ext cx="3087000" cy="192960"/>
           </a:xfrm>
           <a:prstGeom prst="rect">
             <a:avLst/>
@@ -26690,7 +26699,7 @@
         <p:spPr>
           <a:xfrm>
             <a:off x="633600" y="2885760"/>
-            <a:ext cx="4879080" cy="712440"/>
+            <a:ext cx="4878720" cy="712080"/>
           </a:xfrm>
           <a:custGeom>
             <a:avLst/>
@@ -26741,7 +26750,7 @@
         <p:spPr>
           <a:xfrm>
             <a:off x="633600" y="2885760"/>
-            <a:ext cx="31320" cy="712440"/>
+            <a:ext cx="30960" cy="712080"/>
           </a:xfrm>
           <a:custGeom>
             <a:avLst/>
@@ -26792,7 +26801,7 @@
         <p:spPr>
           <a:xfrm>
             <a:off x="706680" y="3015720"/>
-            <a:ext cx="4676400" cy="225720"/>
+            <a:ext cx="4676040" cy="225360"/>
           </a:xfrm>
           <a:prstGeom prst="rect">
             <a:avLst/>
@@ -26844,7 +26853,7 @@
         <p:spPr>
           <a:xfrm>
             <a:off x="714960" y="3274920"/>
-            <a:ext cx="4668120" cy="193320"/>
+            <a:ext cx="4667760" cy="192960"/>
           </a:xfrm>
           <a:prstGeom prst="rect">
             <a:avLst/>
@@ -26906,7 +26915,7 @@
         <p:spPr>
           <a:xfrm>
             <a:off x="6696000" y="3728880"/>
-            <a:ext cx="5016600" cy="712440"/>
+            <a:ext cx="5016240" cy="712080"/>
           </a:xfrm>
           <a:custGeom>
             <a:avLst/>
@@ -26957,7 +26966,7 @@
         <p:spPr>
           <a:xfrm>
             <a:off x="6696000" y="3728880"/>
-            <a:ext cx="31320" cy="712440"/>
+            <a:ext cx="30960" cy="712080"/>
           </a:xfrm>
           <a:custGeom>
             <a:avLst/>
@@ -27008,7 +27017,7 @@
         <p:spPr>
           <a:xfrm>
             <a:off x="6841800" y="3858480"/>
-            <a:ext cx="4814280" cy="225720"/>
+            <a:ext cx="4813920" cy="225360"/>
           </a:xfrm>
           <a:prstGeom prst="rect">
             <a:avLst/>
@@ -27060,7 +27069,7 @@
         <p:spPr>
           <a:xfrm>
             <a:off x="6841800" y="4118040"/>
-            <a:ext cx="4806000" cy="193320"/>
+            <a:ext cx="4805640" cy="192960"/>
           </a:xfrm>
           <a:prstGeom prst="rect">
             <a:avLst/>
@@ -27122,7 +27131,7 @@
         <p:spPr>
           <a:xfrm>
             <a:off x="1476360" y="4572000"/>
-            <a:ext cx="4035960" cy="712440"/>
+            <a:ext cx="4035600" cy="712080"/>
           </a:xfrm>
           <a:custGeom>
             <a:avLst/>
@@ -27173,7 +27182,7 @@
         <p:spPr>
           <a:xfrm>
             <a:off x="1532880" y="4701600"/>
-            <a:ext cx="3849480" cy="225720"/>
+            <a:ext cx="3849120" cy="225360"/>
           </a:xfrm>
           <a:prstGeom prst="rect">
             <a:avLst/>
@@ -27225,7 +27234,7 @@
         <p:spPr>
           <a:xfrm>
             <a:off x="1541160" y="4961160"/>
-            <a:ext cx="3841200" cy="193320"/>
+            <a:ext cx="3840840" cy="192960"/>
           </a:xfrm>
           <a:prstGeom prst="rect">
             <a:avLst/>
@@ -27287,7 +27296,7 @@
         <p:spPr>
           <a:xfrm>
             <a:off x="6683760" y="5419080"/>
-            <a:ext cx="3987360" cy="720360"/>
+            <a:ext cx="3987000" cy="720000"/>
           </a:xfrm>
           <a:custGeom>
             <a:avLst/>
@@ -27341,7 +27350,7 @@
         <p:spPr>
           <a:xfrm>
             <a:off x="6817320" y="5553000"/>
-            <a:ext cx="3792600" cy="225720"/>
+            <a:ext cx="3792240" cy="225360"/>
           </a:xfrm>
           <a:prstGeom prst="rect">
             <a:avLst/>
@@ -27393,7 +27402,7 @@
         <p:spPr>
           <a:xfrm>
             <a:off x="6817320" y="5812200"/>
-            <a:ext cx="3784680" cy="193320"/>
+            <a:ext cx="3784320" cy="192960"/>
           </a:xfrm>
           <a:prstGeom prst="rect">
             <a:avLst/>
@@ -27445,7 +27454,7 @@
         <p:spPr>
           <a:xfrm>
             <a:off x="6031080" y="1467360"/>
-            <a:ext cx="128520" cy="128520"/>
+            <a:ext cx="128160" cy="128160"/>
           </a:xfrm>
           <a:custGeom>
             <a:avLst/>
@@ -27516,7 +27525,7 @@
         <p:spPr>
           <a:xfrm>
             <a:off x="6031080" y="2326680"/>
-            <a:ext cx="128520" cy="128520"/>
+            <a:ext cx="128160" cy="128160"/>
           </a:xfrm>
           <a:custGeom>
             <a:avLst/>
@@ -27587,7 +27596,7 @@
         <p:spPr>
           <a:xfrm>
             <a:off x="6031080" y="3177720"/>
-            <a:ext cx="128520" cy="128520"/>
+            <a:ext cx="128160" cy="128160"/>
           </a:xfrm>
           <a:custGeom>
             <a:avLst/>
@@ -27658,7 +27667,7 @@
         <p:spPr>
           <a:xfrm>
             <a:off x="6031080" y="4020840"/>
-            <a:ext cx="128520" cy="128520"/>
+            <a:ext cx="128160" cy="128160"/>
           </a:xfrm>
           <a:custGeom>
             <a:avLst/>
@@ -27729,7 +27738,7 @@
         <p:spPr>
           <a:xfrm>
             <a:off x="6031080" y="4863960"/>
-            <a:ext cx="128520" cy="128520"/>
+            <a:ext cx="128160" cy="128160"/>
           </a:xfrm>
           <a:custGeom>
             <a:avLst/>
@@ -27800,7 +27809,7 @@
         <p:spPr>
           <a:xfrm>
             <a:off x="6031080" y="5715000"/>
-            <a:ext cx="128520" cy="128520"/>
+            <a:ext cx="128160" cy="128160"/>
           </a:xfrm>
           <a:custGeom>
             <a:avLst/>
@@ -27908,7 +27917,7 @@
         <p:spPr>
           <a:xfrm>
             <a:off x="380880" y="380880"/>
-            <a:ext cx="11505240" cy="227520"/>
+            <a:ext cx="11504880" cy="227160"/>
           </a:xfrm>
           <a:prstGeom prst="rect">
             <a:avLst/>
@@ -27936,7 +27945,7 @@
               <a:buNone/>
             </a:pPr>
             <a:r>
-              <a:rPr b="1" lang="en-US" sz="1200" spc="52" strike="noStrike">
+              <a:rPr b="1" lang="en-US" sz="1200" spc="49" strike="noStrike">
                 <a:solidFill>
                   <a:srgbClr val="0984e3"/>
                 </a:solidFill>
@@ -27960,7 +27969,7 @@
         <p:spPr>
           <a:xfrm>
             <a:off x="380880" y="685800"/>
-            <a:ext cx="11657520" cy="456120"/>
+            <a:ext cx="11657160" cy="455760"/>
           </a:xfrm>
           <a:prstGeom prst="rect">
             <a:avLst/>
@@ -28012,7 +28021,7 @@
         <p:spPr>
           <a:xfrm>
             <a:off x="380880" y="1371600"/>
-            <a:ext cx="4389840" cy="3047040"/>
+            <a:ext cx="4389480" cy="3046680"/>
           </a:xfrm>
           <a:prstGeom prst="roundRect">
             <a:avLst>
@@ -28044,7 +28053,7 @@
         <p:spPr>
           <a:xfrm>
             <a:off x="399960" y="4648320"/>
-            <a:ext cx="4370760" cy="1141920"/>
+            <a:ext cx="4370400" cy="1141560"/>
           </a:xfrm>
           <a:custGeom>
             <a:avLst/>
@@ -28095,7 +28104,7 @@
         <p:spPr>
           <a:xfrm>
             <a:off x="399960" y="4648320"/>
-            <a:ext cx="37080" cy="1141920"/>
+            <a:ext cx="36720" cy="1141560"/>
           </a:xfrm>
           <a:custGeom>
             <a:avLst/>
@@ -28146,7 +28155,7 @@
         <p:spPr>
           <a:xfrm>
             <a:off x="609480" y="4838760"/>
-            <a:ext cx="4047120" cy="494280"/>
+            <a:ext cx="4046760" cy="493920"/>
           </a:xfrm>
           <a:prstGeom prst="rect">
             <a:avLst/>
@@ -28198,7 +28207,7 @@
         <p:spPr>
           <a:xfrm>
             <a:off x="609480" y="5410080"/>
-            <a:ext cx="4037400" cy="189360"/>
+            <a:ext cx="4037040" cy="189000"/>
           </a:xfrm>
           <a:prstGeom prst="rect">
             <a:avLst/>
@@ -28260,7 +28269,7 @@
         <p:spPr>
           <a:xfrm>
             <a:off x="5074920" y="1371600"/>
-            <a:ext cx="6847560" cy="303840"/>
+            <a:ext cx="6847200" cy="303480"/>
           </a:xfrm>
           <a:prstGeom prst="rect">
             <a:avLst/>
@@ -28312,7 +28321,7 @@
         <p:spPr>
           <a:xfrm>
             <a:off x="5074920" y="1752480"/>
-            <a:ext cx="6809400" cy="989640"/>
+            <a:ext cx="6809040" cy="989280"/>
           </a:xfrm>
           <a:prstGeom prst="rect">
             <a:avLst/>
@@ -28364,7 +28373,7 @@
         <p:spPr>
           <a:xfrm>
             <a:off x="5074920" y="2895480"/>
-            <a:ext cx="6847560" cy="303840"/>
+            <a:ext cx="6847200" cy="303480"/>
           </a:xfrm>
           <a:prstGeom prst="rect">
             <a:avLst/>
@@ -28416,7 +28425,7 @@
         <p:spPr>
           <a:xfrm>
             <a:off x="5074920" y="3276720"/>
-            <a:ext cx="6809400" cy="989640"/>
+            <a:ext cx="6809040" cy="989280"/>
           </a:xfrm>
           <a:prstGeom prst="rect">
             <a:avLst/>
@@ -28488,7 +28497,7 @@
         <p:spPr>
           <a:xfrm>
             <a:off x="5074920" y="4419720"/>
-            <a:ext cx="6847560" cy="303840"/>
+            <a:ext cx="6847200" cy="303480"/>
           </a:xfrm>
           <a:prstGeom prst="rect">
             <a:avLst/>
@@ -28540,7 +28549,7 @@
         <p:spPr>
           <a:xfrm>
             <a:off x="5074920" y="4800600"/>
-            <a:ext cx="6809400" cy="989640"/>
+            <a:ext cx="6809040" cy="989280"/>
           </a:xfrm>
           <a:prstGeom prst="rect">
             <a:avLst/>
@@ -28649,7 +28658,7 @@
         <p:spPr>
           <a:xfrm>
             <a:off x="609480" y="1781280"/>
-            <a:ext cx="12191040" cy="1218240"/>
+            <a:ext cx="12190680" cy="1217880"/>
           </a:xfrm>
           <a:prstGeom prst="rect">
             <a:avLst/>
@@ -28703,7 +28712,7 @@
         <p:spPr>
           <a:xfrm>
             <a:off x="609480" y="3152880"/>
-            <a:ext cx="11867040" cy="1141920"/>
+            <a:ext cx="11866680" cy="1141560"/>
           </a:xfrm>
           <a:prstGeom prst="rect">
             <a:avLst/>
@@ -28776,7 +28785,7 @@
         <p:spPr>
           <a:xfrm>
             <a:off x="609480" y="4524480"/>
-            <a:ext cx="1218240" cy="18000"/>
+            <a:ext cx="1217880" cy="17640"/>
           </a:xfrm>
           <a:custGeom>
             <a:avLst/>
@@ -28827,7 +28836,7 @@
         <p:spPr>
           <a:xfrm>
             <a:off x="609480" y="4772160"/>
-            <a:ext cx="11695680" cy="303840"/>
+            <a:ext cx="11695320" cy="303480"/>
           </a:xfrm>
           <a:prstGeom prst="rect">
             <a:avLst/>
@@ -28916,7 +28925,7 @@
         <p:spPr>
           <a:xfrm>
             <a:off x="380880" y="380880"/>
-            <a:ext cx="11505240" cy="227520"/>
+            <a:ext cx="11504880" cy="227160"/>
           </a:xfrm>
           <a:prstGeom prst="rect">
             <a:avLst/>
@@ -28944,7 +28953,7 @@
               <a:buNone/>
             </a:pPr>
             <a:r>
-              <a:rPr b="1" lang="en-US" sz="1200" spc="52" strike="noStrike">
+              <a:rPr b="1" lang="en-US" sz="1200" spc="49" strike="noStrike">
                 <a:solidFill>
                   <a:srgbClr val="0984e3"/>
                 </a:solidFill>
@@ -28968,7 +28977,7 @@
         <p:spPr>
           <a:xfrm>
             <a:off x="380880" y="685800"/>
-            <a:ext cx="11657520" cy="456120"/>
+            <a:ext cx="11657160" cy="455760"/>
           </a:xfrm>
           <a:prstGeom prst="rect">
             <a:avLst/>
@@ -29020,7 +29029,7 @@
         <p:spPr>
           <a:xfrm>
             <a:off x="380880" y="1371600"/>
-            <a:ext cx="5656680" cy="1237320"/>
+            <a:ext cx="5656320" cy="1236960"/>
           </a:xfrm>
           <a:prstGeom prst="rect">
             <a:avLst/>
@@ -29082,7 +29091,7 @@
         <p:spPr>
           <a:xfrm>
             <a:off x="380880" y="2762280"/>
-            <a:ext cx="5647320" cy="837000"/>
+            <a:ext cx="5646960" cy="836640"/>
           </a:xfrm>
           <a:prstGeom prst="rect">
             <a:avLst/>
@@ -29134,7 +29143,7 @@
         <p:spPr>
           <a:xfrm>
             <a:off x="399960" y="3750480"/>
-            <a:ext cx="5542560" cy="1599120"/>
+            <a:ext cx="5542200" cy="1598760"/>
           </a:xfrm>
           <a:custGeom>
             <a:avLst/>
@@ -29185,7 +29194,7 @@
         <p:spPr>
           <a:xfrm>
             <a:off x="399960" y="3750480"/>
-            <a:ext cx="37080" cy="1599120"/>
+            <a:ext cx="36720" cy="1598760"/>
           </a:xfrm>
           <a:custGeom>
             <a:avLst/>
@@ -29236,7 +29245,7 @@
         <p:spPr>
           <a:xfrm>
             <a:off x="609480" y="3940920"/>
-            <a:ext cx="5237640" cy="265680"/>
+            <a:ext cx="5237280" cy="265320"/>
           </a:xfrm>
           <a:prstGeom prst="rect">
             <a:avLst/>
@@ -29288,7 +29297,7 @@
         <p:spPr>
           <a:xfrm>
             <a:off x="609480" y="4321800"/>
-            <a:ext cx="5218560" cy="227520"/>
+            <a:ext cx="5218200" cy="227160"/>
           </a:xfrm>
           <a:prstGeom prst="rect">
             <a:avLst/>
@@ -29350,7 +29359,7 @@
         <p:spPr>
           <a:xfrm>
             <a:off x="609480" y="4626720"/>
-            <a:ext cx="5218560" cy="227520"/>
+            <a:ext cx="5218200" cy="227160"/>
           </a:xfrm>
           <a:prstGeom prst="rect">
             <a:avLst/>
@@ -29412,7 +29421,7 @@
         <p:spPr>
           <a:xfrm>
             <a:off x="609480" y="4931640"/>
-            <a:ext cx="5218560" cy="227520"/>
+            <a:ext cx="5218200" cy="227160"/>
           </a:xfrm>
           <a:prstGeom prst="rect">
             <a:avLst/>
@@ -29474,7 +29483,7 @@
         <p:spPr>
           <a:xfrm>
             <a:off x="6253200" y="1618200"/>
-            <a:ext cx="5551920" cy="3485160"/>
+            <a:ext cx="5551560" cy="3484800"/>
           </a:xfrm>
           <a:custGeom>
             <a:avLst/>
@@ -29528,7 +29537,7 @@
         <p:spPr>
           <a:xfrm>
             <a:off x="6438960" y="1851480"/>
-            <a:ext cx="5180400" cy="265680"/>
+            <a:ext cx="5180040" cy="265320"/>
           </a:xfrm>
           <a:prstGeom prst="rect">
             <a:avLst/>
@@ -29580,7 +29589,7 @@
         <p:spPr>
           <a:xfrm>
             <a:off x="6448320" y="2270520"/>
-            <a:ext cx="5161320" cy="227520"/>
+            <a:ext cx="5160960" cy="227160"/>
           </a:xfrm>
           <a:prstGeom prst="rect">
             <a:avLst/>
@@ -30104,7 +30113,7 @@
         <p:spPr>
           <a:xfrm>
             <a:off x="6486480" y="4218480"/>
-            <a:ext cx="5085360" cy="8280"/>
+            <a:ext cx="5085000" cy="7920"/>
           </a:xfrm>
           <a:custGeom>
             <a:avLst/>
@@ -30155,7 +30164,7 @@
         <p:spPr>
           <a:xfrm>
             <a:off x="6486480" y="4375440"/>
-            <a:ext cx="5161320" cy="494280"/>
+            <a:ext cx="5160960" cy="493920"/>
           </a:xfrm>
           <a:prstGeom prst="rect">
             <a:avLst/>

--- a/assets/libreoffice_impr_njc/3be4747b-a8aa-4b79-8f0c-0c7326a3d169/Game Theory.pptx
+++ b/assets/libreoffice_impr_njc/3be4747b-a8aa-4b79-8f0c-0c7326a3d169/Game Theory.pptx
@@ -312,7 +312,7 @@
             <a:pPr algn="r">
               <a:buNone/>
             </a:pPr>
-            <a:fld id="{EDE17819-4E61-4988-B3DC-C28BA27EED78}" type="slidenum">
+            <a:fld id="{C1CB55BE-BE0D-4C21-98FC-C963E8A04F95}" type="slidenum">
               <a:rPr b="0" lang="en-HK" sz="1400" spc="-1" strike="noStrike">
                 <a:latin typeface="Times New Roman"/>
               </a:rPr>
@@ -360,7 +360,7 @@
         <p:spPr>
           <a:xfrm>
             <a:off x="685800" y="1143000"/>
-            <a:ext cx="5484960" cy="3084840"/>
+            <a:ext cx="5482800" cy="3082680"/>
           </a:xfrm>
           <a:prstGeom prst="rect">
             <a:avLst/>
@@ -383,7 +383,7 @@
         <p:spPr>
           <a:xfrm>
             <a:off x="685800" y="4400640"/>
-            <a:ext cx="5484960" cy="3598920"/>
+            <a:ext cx="5482800" cy="3596760"/>
           </a:xfrm>
           <a:prstGeom prst="rect">
             <a:avLst/>
@@ -417,7 +417,7 @@
         <p:spPr>
           <a:xfrm>
             <a:off x="3884760" y="8685360"/>
-            <a:ext cx="2970360" cy="457200"/>
+            <a:ext cx="2968200" cy="455040"/>
           </a:xfrm>
           <a:prstGeom prst="rect">
             <a:avLst/>
@@ -449,7 +449,7 @@
               </a:lnSpc>
               <a:buNone/>
             </a:pPr>
-            <a:fld id="{0F249DD9-04D3-49AF-9156-F9638A3BB4CC}" type="slidenum">
+            <a:fld id="{0A4BACAA-423C-4CEB-8A64-63B6CAD02D8B}" type="slidenum">
               <a:rPr b="0" lang="en-US" sz="1200" spc="-1" strike="noStrike">
                 <a:latin typeface="Times New Roman"/>
               </a:rPr>
@@ -496,7 +496,7 @@
         <p:spPr>
           <a:xfrm>
             <a:off x="685800" y="1143000"/>
-            <a:ext cx="5484960" cy="3084840"/>
+            <a:ext cx="5482800" cy="3082680"/>
           </a:xfrm>
           <a:prstGeom prst="rect">
             <a:avLst/>
@@ -519,7 +519,7 @@
         <p:spPr>
           <a:xfrm>
             <a:off x="685800" y="4400640"/>
-            <a:ext cx="5484960" cy="3598920"/>
+            <a:ext cx="5482800" cy="3596760"/>
           </a:xfrm>
           <a:prstGeom prst="rect">
             <a:avLst/>
@@ -553,7 +553,7 @@
         <p:spPr>
           <a:xfrm>
             <a:off x="3884760" y="8685360"/>
-            <a:ext cx="2970360" cy="457200"/>
+            <a:ext cx="2968200" cy="455040"/>
           </a:xfrm>
           <a:prstGeom prst="rect">
             <a:avLst/>
@@ -585,7 +585,7 @@
               </a:lnSpc>
               <a:buNone/>
             </a:pPr>
-            <a:fld id="{FE8CDD32-BC0A-498E-AE72-EDB50D7CD85E}" type="slidenum">
+            <a:fld id="{CB56E8C8-9845-4768-A5C8-D261DDD5FB66}" type="slidenum">
               <a:rPr b="0" lang="en-US" sz="1200" spc="-1" strike="noStrike">
                 <a:latin typeface="Times New Roman"/>
               </a:rPr>
@@ -632,7 +632,7 @@
         <p:spPr>
           <a:xfrm>
             <a:off x="685800" y="1143000"/>
-            <a:ext cx="5484960" cy="3084840"/>
+            <a:ext cx="5482800" cy="3082680"/>
           </a:xfrm>
           <a:prstGeom prst="rect">
             <a:avLst/>
@@ -655,7 +655,7 @@
         <p:spPr>
           <a:xfrm>
             <a:off x="685800" y="4400640"/>
-            <a:ext cx="5484960" cy="3598920"/>
+            <a:ext cx="5482800" cy="3596760"/>
           </a:xfrm>
           <a:prstGeom prst="rect">
             <a:avLst/>
@@ -689,7 +689,7 @@
         <p:spPr>
           <a:xfrm>
             <a:off x="3884760" y="8685360"/>
-            <a:ext cx="2970360" cy="457200"/>
+            <a:ext cx="2968200" cy="455040"/>
           </a:xfrm>
           <a:prstGeom prst="rect">
             <a:avLst/>
@@ -721,7 +721,7 @@
               </a:lnSpc>
               <a:buNone/>
             </a:pPr>
-            <a:fld id="{F170834E-2CBD-4D1D-BF3F-8160001F531B}" type="slidenum">
+            <a:fld id="{5863495B-C443-4124-AA76-B3BA8010C364}" type="slidenum">
               <a:rPr b="0" lang="en-US" sz="1200" spc="-1" strike="noStrike">
                 <a:latin typeface="Times New Roman"/>
               </a:rPr>
@@ -768,7 +768,7 @@
         <p:spPr>
           <a:xfrm>
             <a:off x="685800" y="1143000"/>
-            <a:ext cx="5484960" cy="3084840"/>
+            <a:ext cx="5482800" cy="3082680"/>
           </a:xfrm>
           <a:prstGeom prst="rect">
             <a:avLst/>
@@ -791,7 +791,7 @@
         <p:spPr>
           <a:xfrm>
             <a:off x="685800" y="4400640"/>
-            <a:ext cx="5484960" cy="3598920"/>
+            <a:ext cx="5482800" cy="3596760"/>
           </a:xfrm>
           <a:prstGeom prst="rect">
             <a:avLst/>
@@ -825,7 +825,7 @@
         <p:spPr>
           <a:xfrm>
             <a:off x="3884760" y="8685360"/>
-            <a:ext cx="2970360" cy="457200"/>
+            <a:ext cx="2968200" cy="455040"/>
           </a:xfrm>
           <a:prstGeom prst="rect">
             <a:avLst/>
@@ -857,7 +857,7 @@
               </a:lnSpc>
               <a:buNone/>
             </a:pPr>
-            <a:fld id="{7BE7C717-1176-4DBF-937B-CE728EC0951A}" type="slidenum">
+            <a:fld id="{73B6577B-CA0C-4D1B-8494-25A707AA3341}" type="slidenum">
               <a:rPr b="0" lang="en-US" sz="1200" spc="-1" strike="noStrike">
                 <a:latin typeface="Times New Roman"/>
               </a:rPr>
@@ -904,7 +904,7 @@
         <p:spPr>
           <a:xfrm>
             <a:off x="685800" y="1143000"/>
-            <a:ext cx="5484960" cy="3084840"/>
+            <a:ext cx="5482800" cy="3082680"/>
           </a:xfrm>
           <a:prstGeom prst="rect">
             <a:avLst/>
@@ -927,7 +927,7 @@
         <p:spPr>
           <a:xfrm>
             <a:off x="685800" y="4400640"/>
-            <a:ext cx="5484960" cy="3598920"/>
+            <a:ext cx="5482800" cy="3596760"/>
           </a:xfrm>
           <a:prstGeom prst="rect">
             <a:avLst/>
@@ -961,7 +961,7 @@
         <p:spPr>
           <a:xfrm>
             <a:off x="3884760" y="8685360"/>
-            <a:ext cx="2970360" cy="457200"/>
+            <a:ext cx="2968200" cy="455040"/>
           </a:xfrm>
           <a:prstGeom prst="rect">
             <a:avLst/>
@@ -993,7 +993,7 @@
               </a:lnSpc>
               <a:buNone/>
             </a:pPr>
-            <a:fld id="{C32E9AA7-D62B-4DDD-8FD9-ABC39B7A086D}" type="slidenum">
+            <a:fld id="{690594F9-E7AB-4482-B6A3-C196EE4F40E9}" type="slidenum">
               <a:rPr b="0" lang="en-US" sz="1200" spc="-1" strike="noStrike">
                 <a:latin typeface="Times New Roman"/>
               </a:rPr>
@@ -1040,7 +1040,7 @@
         <p:spPr>
           <a:xfrm>
             <a:off x="685800" y="1143000"/>
-            <a:ext cx="5484960" cy="3084840"/>
+            <a:ext cx="5482800" cy="3082680"/>
           </a:xfrm>
           <a:prstGeom prst="rect">
             <a:avLst/>
@@ -1063,7 +1063,7 @@
         <p:spPr>
           <a:xfrm>
             <a:off x="685800" y="4400640"/>
-            <a:ext cx="5484960" cy="3598920"/>
+            <a:ext cx="5482800" cy="3596760"/>
           </a:xfrm>
           <a:prstGeom prst="rect">
             <a:avLst/>
@@ -1097,7 +1097,7 @@
         <p:spPr>
           <a:xfrm>
             <a:off x="3884760" y="8685360"/>
-            <a:ext cx="2970360" cy="457200"/>
+            <a:ext cx="2968200" cy="455040"/>
           </a:xfrm>
           <a:prstGeom prst="rect">
             <a:avLst/>
@@ -1129,7 +1129,7 @@
               </a:lnSpc>
               <a:buNone/>
             </a:pPr>
-            <a:fld id="{51C37B64-01E7-4EB7-9532-6587ECCD3613}" type="slidenum">
+            <a:fld id="{6BEDDEF5-82D6-4A45-99A1-66364A1CC6BC}" type="slidenum">
               <a:rPr b="0" lang="en-US" sz="1200" spc="-1" strike="noStrike">
                 <a:latin typeface="Times New Roman"/>
               </a:rPr>
@@ -1176,7 +1176,7 @@
         <p:spPr>
           <a:xfrm>
             <a:off x="685800" y="1143000"/>
-            <a:ext cx="5484960" cy="3084840"/>
+            <a:ext cx="5482800" cy="3082680"/>
           </a:xfrm>
           <a:prstGeom prst="rect">
             <a:avLst/>
@@ -1199,7 +1199,7 @@
         <p:spPr>
           <a:xfrm>
             <a:off x="685800" y="4400640"/>
-            <a:ext cx="5484960" cy="3598920"/>
+            <a:ext cx="5482800" cy="3596760"/>
           </a:xfrm>
           <a:prstGeom prst="rect">
             <a:avLst/>
@@ -1233,7 +1233,7 @@
         <p:spPr>
           <a:xfrm>
             <a:off x="3884760" y="8685360"/>
-            <a:ext cx="2970360" cy="457200"/>
+            <a:ext cx="2968200" cy="455040"/>
           </a:xfrm>
           <a:prstGeom prst="rect">
             <a:avLst/>
@@ -1265,7 +1265,7 @@
               </a:lnSpc>
               <a:buNone/>
             </a:pPr>
-            <a:fld id="{2443EFDA-E1B6-42DA-9E60-65FA0DF9D057}" type="slidenum">
+            <a:fld id="{71DAE641-0A94-4735-987F-9D4E1147E49B}" type="slidenum">
               <a:rPr b="0" lang="en-US" sz="1200" spc="-1" strike="noStrike">
                 <a:latin typeface="Times New Roman"/>
               </a:rPr>
@@ -1312,7 +1312,7 @@
         <p:spPr>
           <a:xfrm>
             <a:off x="685800" y="1143000"/>
-            <a:ext cx="5484960" cy="3084840"/>
+            <a:ext cx="5482800" cy="3082680"/>
           </a:xfrm>
           <a:prstGeom prst="rect">
             <a:avLst/>
@@ -1335,7 +1335,7 @@
         <p:spPr>
           <a:xfrm>
             <a:off x="685800" y="4400640"/>
-            <a:ext cx="5484960" cy="3598920"/>
+            <a:ext cx="5482800" cy="3596760"/>
           </a:xfrm>
           <a:prstGeom prst="rect">
             <a:avLst/>
@@ -1369,7 +1369,7 @@
         <p:spPr>
           <a:xfrm>
             <a:off x="3884760" y="8685360"/>
-            <a:ext cx="2970360" cy="457200"/>
+            <a:ext cx="2968200" cy="455040"/>
           </a:xfrm>
           <a:prstGeom prst="rect">
             <a:avLst/>
@@ -1401,7 +1401,7 @@
               </a:lnSpc>
               <a:buNone/>
             </a:pPr>
-            <a:fld id="{F9A7FF5F-0721-4E25-8CA2-73584397BC87}" type="slidenum">
+            <a:fld id="{33100F57-9492-4161-9513-D2A1447DDDC5}" type="slidenum">
               <a:rPr b="0" lang="en-US" sz="1200" spc="-1" strike="noStrike">
                 <a:latin typeface="Times New Roman"/>
               </a:rPr>
@@ -1448,7 +1448,7 @@
         <p:spPr>
           <a:xfrm>
             <a:off x="685800" y="1143000"/>
-            <a:ext cx="5484960" cy="3084840"/>
+            <a:ext cx="5482800" cy="3082680"/>
           </a:xfrm>
           <a:prstGeom prst="rect">
             <a:avLst/>
@@ -1471,7 +1471,7 @@
         <p:spPr>
           <a:xfrm>
             <a:off x="685800" y="4400640"/>
-            <a:ext cx="5484960" cy="3598920"/>
+            <a:ext cx="5482800" cy="3596760"/>
           </a:xfrm>
           <a:prstGeom prst="rect">
             <a:avLst/>
@@ -1505,7 +1505,7 @@
         <p:spPr>
           <a:xfrm>
             <a:off x="3884760" y="8685360"/>
-            <a:ext cx="2970360" cy="457200"/>
+            <a:ext cx="2968200" cy="455040"/>
           </a:xfrm>
           <a:prstGeom prst="rect">
             <a:avLst/>
@@ -1537,7 +1537,7 @@
               </a:lnSpc>
               <a:buNone/>
             </a:pPr>
-            <a:fld id="{F29D6781-3545-45E6-9D4E-726AA3242CEC}" type="slidenum">
+            <a:fld id="{359187E6-CF95-4F13-92CE-CB70B9F0A069}" type="slidenum">
               <a:rPr b="0" lang="en-US" sz="1200" spc="-1" strike="noStrike">
                 <a:latin typeface="Times New Roman"/>
               </a:rPr>
@@ -1584,7 +1584,7 @@
         <p:spPr>
           <a:xfrm>
             <a:off x="685800" y="1143000"/>
-            <a:ext cx="5484960" cy="3084840"/>
+            <a:ext cx="5482800" cy="3082680"/>
           </a:xfrm>
           <a:prstGeom prst="rect">
             <a:avLst/>
@@ -1607,7 +1607,7 @@
         <p:spPr>
           <a:xfrm>
             <a:off x="685800" y="4400640"/>
-            <a:ext cx="5484960" cy="3598920"/>
+            <a:ext cx="5482800" cy="3596760"/>
           </a:xfrm>
           <a:prstGeom prst="rect">
             <a:avLst/>
@@ -1641,7 +1641,7 @@
         <p:spPr>
           <a:xfrm>
             <a:off x="3884760" y="8685360"/>
-            <a:ext cx="2970360" cy="457200"/>
+            <a:ext cx="2968200" cy="455040"/>
           </a:xfrm>
           <a:prstGeom prst="rect">
             <a:avLst/>
@@ -1673,7 +1673,7 @@
               </a:lnSpc>
               <a:buNone/>
             </a:pPr>
-            <a:fld id="{1EBE8B5E-A0A7-45DE-9AB6-1B8370F4D384}" type="slidenum">
+            <a:fld id="{04BB5417-0AFB-432C-AF58-3BE7F7F386BE}" type="slidenum">
               <a:rPr b="0" lang="en-US" sz="1200" spc="-1" strike="noStrike">
                 <a:latin typeface="Times New Roman"/>
               </a:rPr>
@@ -1720,7 +1720,7 @@
         <p:spPr>
           <a:xfrm>
             <a:off x="685800" y="1143000"/>
-            <a:ext cx="5484960" cy="3084840"/>
+            <a:ext cx="5482800" cy="3082680"/>
           </a:xfrm>
           <a:prstGeom prst="rect">
             <a:avLst/>
@@ -1743,7 +1743,7 @@
         <p:spPr>
           <a:xfrm>
             <a:off x="685800" y="4400640"/>
-            <a:ext cx="5484960" cy="3598920"/>
+            <a:ext cx="5482800" cy="3596760"/>
           </a:xfrm>
           <a:prstGeom prst="rect">
             <a:avLst/>
@@ -1777,7 +1777,7 @@
         <p:spPr>
           <a:xfrm>
             <a:off x="3884760" y="8685360"/>
-            <a:ext cx="2970360" cy="457200"/>
+            <a:ext cx="2968200" cy="455040"/>
           </a:xfrm>
           <a:prstGeom prst="rect">
             <a:avLst/>
@@ -1809,7 +1809,7 @@
               </a:lnSpc>
               <a:buNone/>
             </a:pPr>
-            <a:fld id="{08A43EC0-934C-412E-8C78-3DD3B93B6D54}" type="slidenum">
+            <a:fld id="{797EA720-5EB6-4A0D-9F25-8C75C48E37C4}" type="slidenum">
               <a:rPr b="0" lang="en-US" sz="1200" spc="-1" strike="noStrike">
                 <a:latin typeface="Times New Roman"/>
               </a:rPr>
@@ -1856,7 +1856,7 @@
         <p:spPr>
           <a:xfrm>
             <a:off x="685800" y="1143000"/>
-            <a:ext cx="5484960" cy="3084840"/>
+            <a:ext cx="5482800" cy="3082680"/>
           </a:xfrm>
           <a:prstGeom prst="rect">
             <a:avLst/>
@@ -1879,7 +1879,7 @@
         <p:spPr>
           <a:xfrm>
             <a:off x="685800" y="4400640"/>
-            <a:ext cx="5484960" cy="3598920"/>
+            <a:ext cx="5482800" cy="3596760"/>
           </a:xfrm>
           <a:prstGeom prst="rect">
             <a:avLst/>
@@ -1913,7 +1913,7 @@
         <p:spPr>
           <a:xfrm>
             <a:off x="3884760" y="8685360"/>
-            <a:ext cx="2970360" cy="457200"/>
+            <a:ext cx="2968200" cy="455040"/>
           </a:xfrm>
           <a:prstGeom prst="rect">
             <a:avLst/>
@@ -1945,7 +1945,7 @@
               </a:lnSpc>
               <a:buNone/>
             </a:pPr>
-            <a:fld id="{A2E9DB7E-1869-4F56-969D-25CFD737AF72}" type="slidenum">
+            <a:fld id="{03F437B5-7E50-47A3-83C6-34F93A63B245}" type="slidenum">
               <a:rPr b="0" lang="en-US" sz="1200" spc="-1" strike="noStrike">
                 <a:latin typeface="Times New Roman"/>
               </a:rPr>
@@ -1992,7 +1992,7 @@
         <p:spPr>
           <a:xfrm>
             <a:off x="685800" y="1143000"/>
-            <a:ext cx="5484960" cy="3084840"/>
+            <a:ext cx="5482800" cy="3082680"/>
           </a:xfrm>
           <a:prstGeom prst="rect">
             <a:avLst/>
@@ -2015,7 +2015,7 @@
         <p:spPr>
           <a:xfrm>
             <a:off x="685800" y="4400640"/>
-            <a:ext cx="5484960" cy="3598920"/>
+            <a:ext cx="5482800" cy="3596760"/>
           </a:xfrm>
           <a:prstGeom prst="rect">
             <a:avLst/>
@@ -2049,7 +2049,7 @@
         <p:spPr>
           <a:xfrm>
             <a:off x="3884760" y="8685360"/>
-            <a:ext cx="2970360" cy="457200"/>
+            <a:ext cx="2968200" cy="455040"/>
           </a:xfrm>
           <a:prstGeom prst="rect">
             <a:avLst/>
@@ -2081,7 +2081,7 @@
               </a:lnSpc>
               <a:buNone/>
             </a:pPr>
-            <a:fld id="{9DBFF776-BD76-477C-A5F6-EE95F38307C1}" type="slidenum">
+            <a:fld id="{C07B722F-F731-4152-86F7-A846077C5513}" type="slidenum">
               <a:rPr b="0" lang="en-US" sz="1200" spc="-1" strike="noStrike">
                 <a:latin typeface="Times New Roman"/>
               </a:rPr>
@@ -2128,7 +2128,7 @@
         <p:spPr>
           <a:xfrm>
             <a:off x="685800" y="1143000"/>
-            <a:ext cx="5484960" cy="3084840"/>
+            <a:ext cx="5482800" cy="3082680"/>
           </a:xfrm>
           <a:prstGeom prst="rect">
             <a:avLst/>
@@ -2151,7 +2151,7 @@
         <p:spPr>
           <a:xfrm>
             <a:off x="685800" y="4400640"/>
-            <a:ext cx="5484960" cy="3598920"/>
+            <a:ext cx="5482800" cy="3596760"/>
           </a:xfrm>
           <a:prstGeom prst="rect">
             <a:avLst/>
@@ -2185,7 +2185,7 @@
         <p:spPr>
           <a:xfrm>
             <a:off x="3884760" y="8685360"/>
-            <a:ext cx="2970360" cy="457200"/>
+            <a:ext cx="2968200" cy="455040"/>
           </a:xfrm>
           <a:prstGeom prst="rect">
             <a:avLst/>
@@ -2217,7 +2217,7 @@
               </a:lnSpc>
               <a:buNone/>
             </a:pPr>
-            <a:fld id="{AF49C7A3-C3F8-4BC3-B47E-34AEFC5816E7}" type="slidenum">
+            <a:fld id="{34A20128-9FB7-4D8C-86E1-A7D88B1DBE4E}" type="slidenum">
               <a:rPr b="0" lang="en-US" sz="1200" spc="-1" strike="noStrike">
                 <a:latin typeface="Times New Roman"/>
               </a:rPr>
@@ -2264,7 +2264,7 @@
         <p:spPr>
           <a:xfrm>
             <a:off x="685800" y="1143000"/>
-            <a:ext cx="5484960" cy="3084840"/>
+            <a:ext cx="5482800" cy="3082680"/>
           </a:xfrm>
           <a:prstGeom prst="rect">
             <a:avLst/>
@@ -2287,7 +2287,7 @@
         <p:spPr>
           <a:xfrm>
             <a:off x="685800" y="4400640"/>
-            <a:ext cx="5484960" cy="3598920"/>
+            <a:ext cx="5482800" cy="3596760"/>
           </a:xfrm>
           <a:prstGeom prst="rect">
             <a:avLst/>
@@ -2321,7 +2321,7 @@
         <p:spPr>
           <a:xfrm>
             <a:off x="3884760" y="8685360"/>
-            <a:ext cx="2970360" cy="457200"/>
+            <a:ext cx="2968200" cy="455040"/>
           </a:xfrm>
           <a:prstGeom prst="rect">
             <a:avLst/>
@@ -2353,7 +2353,7 @@
               </a:lnSpc>
               <a:buNone/>
             </a:pPr>
-            <a:fld id="{A146B983-5825-4158-B44E-96F9EEF207F5}" type="slidenum">
+            <a:fld id="{90C42AFF-EC53-4D09-9C10-017B5EF8E6A6}" type="slidenum">
               <a:rPr b="0" lang="en-US" sz="1200" spc="-1" strike="noStrike">
                 <a:latin typeface="Times New Roman"/>
               </a:rPr>
@@ -2400,7 +2400,7 @@
         <p:spPr>
           <a:xfrm>
             <a:off x="685800" y="1143000"/>
-            <a:ext cx="5484960" cy="3084840"/>
+            <a:ext cx="5482800" cy="3082680"/>
           </a:xfrm>
           <a:prstGeom prst="rect">
             <a:avLst/>
@@ -2423,7 +2423,7 @@
         <p:spPr>
           <a:xfrm>
             <a:off x="685800" y="4400640"/>
-            <a:ext cx="5484960" cy="3598920"/>
+            <a:ext cx="5482800" cy="3596760"/>
           </a:xfrm>
           <a:prstGeom prst="rect">
             <a:avLst/>
@@ -2457,7 +2457,7 @@
         <p:spPr>
           <a:xfrm>
             <a:off x="3884760" y="8685360"/>
-            <a:ext cx="2970360" cy="457200"/>
+            <a:ext cx="2968200" cy="455040"/>
           </a:xfrm>
           <a:prstGeom prst="rect">
             <a:avLst/>
@@ -2489,7 +2489,7 @@
               </a:lnSpc>
               <a:buNone/>
             </a:pPr>
-            <a:fld id="{FBA4BE3D-402E-4E2E-82AC-700F40EA960F}" type="slidenum">
+            <a:fld id="{B91C2426-B67C-4A36-A163-1453EAD479E4}" type="slidenum">
               <a:rPr b="0" lang="en-US" sz="1200" spc="-1" strike="noStrike">
                 <a:latin typeface="Times New Roman"/>
               </a:rPr>
@@ -2536,7 +2536,7 @@
         <p:spPr>
           <a:xfrm>
             <a:off x="685800" y="1143000"/>
-            <a:ext cx="5484960" cy="3084840"/>
+            <a:ext cx="5482800" cy="3082680"/>
           </a:xfrm>
           <a:prstGeom prst="rect">
             <a:avLst/>
@@ -2559,7 +2559,7 @@
         <p:spPr>
           <a:xfrm>
             <a:off x="685800" y="4400640"/>
-            <a:ext cx="5484960" cy="3598920"/>
+            <a:ext cx="5482800" cy="3596760"/>
           </a:xfrm>
           <a:prstGeom prst="rect">
             <a:avLst/>
@@ -2593,7 +2593,7 @@
         <p:spPr>
           <a:xfrm>
             <a:off x="3884760" y="8685360"/>
-            <a:ext cx="2970360" cy="457200"/>
+            <a:ext cx="2968200" cy="455040"/>
           </a:xfrm>
           <a:prstGeom prst="rect">
             <a:avLst/>
@@ -2625,7 +2625,7 @@
               </a:lnSpc>
               <a:buNone/>
             </a:pPr>
-            <a:fld id="{689C2BB8-BCBA-4E10-BB01-39CE83F73952}" type="slidenum">
+            <a:fld id="{C99AE002-CF9B-47A9-B5CB-EE5518355308}" type="slidenum">
               <a:rPr b="0" lang="en-US" sz="1200" spc="-1" strike="noStrike">
                 <a:latin typeface="Times New Roman"/>
               </a:rPr>
@@ -2672,7 +2672,7 @@
         <p:spPr>
           <a:xfrm>
             <a:off x="685800" y="1143000"/>
-            <a:ext cx="5484960" cy="3084840"/>
+            <a:ext cx="5482800" cy="3082680"/>
           </a:xfrm>
           <a:prstGeom prst="rect">
             <a:avLst/>
@@ -2695,7 +2695,7 @@
         <p:spPr>
           <a:xfrm>
             <a:off x="685800" y="4400640"/>
-            <a:ext cx="5484960" cy="3598920"/>
+            <a:ext cx="5482800" cy="3596760"/>
           </a:xfrm>
           <a:prstGeom prst="rect">
             <a:avLst/>
@@ -2729,7 +2729,7 @@
         <p:spPr>
           <a:xfrm>
             <a:off x="3884760" y="8685360"/>
-            <a:ext cx="2970360" cy="457200"/>
+            <a:ext cx="2968200" cy="455040"/>
           </a:xfrm>
           <a:prstGeom prst="rect">
             <a:avLst/>
@@ -2761,7 +2761,7 @@
               </a:lnSpc>
               <a:buNone/>
             </a:pPr>
-            <a:fld id="{9DF01770-A7FA-4D4D-BD59-990079766E58}" type="slidenum">
+            <a:fld id="{9B8E7B93-50D0-4ED3-8D65-7167D0A8A96E}" type="slidenum">
               <a:rPr b="0" lang="en-US" sz="1200" spc="-1" strike="noStrike">
                 <a:latin typeface="Times New Roman"/>
               </a:rPr>
@@ -2808,7 +2808,7 @@
         <p:spPr>
           <a:xfrm>
             <a:off x="685800" y="1143000"/>
-            <a:ext cx="5484960" cy="3084840"/>
+            <a:ext cx="5482800" cy="3082680"/>
           </a:xfrm>
           <a:prstGeom prst="rect">
             <a:avLst/>
@@ -2831,7 +2831,7 @@
         <p:spPr>
           <a:xfrm>
             <a:off x="685800" y="4400640"/>
-            <a:ext cx="5484960" cy="3598920"/>
+            <a:ext cx="5482800" cy="3596760"/>
           </a:xfrm>
           <a:prstGeom prst="rect">
             <a:avLst/>
@@ -2865,7 +2865,7 @@
         <p:spPr>
           <a:xfrm>
             <a:off x="3884760" y="8685360"/>
-            <a:ext cx="2970360" cy="457200"/>
+            <a:ext cx="2968200" cy="455040"/>
           </a:xfrm>
           <a:prstGeom prst="rect">
             <a:avLst/>
@@ -2897,7 +2897,7 @@
               </a:lnSpc>
               <a:buNone/>
             </a:pPr>
-            <a:fld id="{E9DEA413-EBBF-4054-9F0C-D094C50E50EC}" type="slidenum">
+            <a:fld id="{FFBE678F-6C76-42B3-BD4F-F1BEAB12C0A2}" type="slidenum">
               <a:rPr b="0" lang="en-US" sz="1200" spc="-1" strike="noStrike">
                 <a:latin typeface="Times New Roman"/>
               </a:rPr>
@@ -2944,7 +2944,7 @@
         <p:spPr>
           <a:xfrm>
             <a:off x="685800" y="1143000"/>
-            <a:ext cx="5484960" cy="3084840"/>
+            <a:ext cx="5482800" cy="3082680"/>
           </a:xfrm>
           <a:prstGeom prst="rect">
             <a:avLst/>
@@ -2967,7 +2967,7 @@
         <p:spPr>
           <a:xfrm>
             <a:off x="685800" y="4400640"/>
-            <a:ext cx="5484960" cy="3598920"/>
+            <a:ext cx="5482800" cy="3596760"/>
           </a:xfrm>
           <a:prstGeom prst="rect">
             <a:avLst/>
@@ -3001,7 +3001,7 @@
         <p:spPr>
           <a:xfrm>
             <a:off x="3884760" y="8685360"/>
-            <a:ext cx="2970360" cy="457200"/>
+            <a:ext cx="2968200" cy="455040"/>
           </a:xfrm>
           <a:prstGeom prst="rect">
             <a:avLst/>
@@ -3033,7 +3033,7 @@
               </a:lnSpc>
               <a:buNone/>
             </a:pPr>
-            <a:fld id="{C83D4984-F26B-43E9-AAC5-9F6BA3B705B0}" type="slidenum">
+            <a:fld id="{A7FA18E7-6108-4AB4-ABF6-1D90717B61BD}" type="slidenum">
               <a:rPr b="0" lang="en-US" sz="1200" spc="-1" strike="noStrike">
                 <a:latin typeface="Times New Roman"/>
               </a:rPr>
@@ -3080,7 +3080,7 @@
         <p:spPr>
           <a:xfrm>
             <a:off x="685800" y="1143000"/>
-            <a:ext cx="5484960" cy="3084840"/>
+            <a:ext cx="5482800" cy="3082680"/>
           </a:xfrm>
           <a:prstGeom prst="rect">
             <a:avLst/>
@@ -3103,7 +3103,7 @@
         <p:spPr>
           <a:xfrm>
             <a:off x="685800" y="4400640"/>
-            <a:ext cx="5484960" cy="3598920"/>
+            <a:ext cx="5482800" cy="3596760"/>
           </a:xfrm>
           <a:prstGeom prst="rect">
             <a:avLst/>
@@ -3137,7 +3137,7 @@
         <p:spPr>
           <a:xfrm>
             <a:off x="3884760" y="8685360"/>
-            <a:ext cx="2970360" cy="457200"/>
+            <a:ext cx="2968200" cy="455040"/>
           </a:xfrm>
           <a:prstGeom prst="rect">
             <a:avLst/>
@@ -3169,7 +3169,7 @@
               </a:lnSpc>
               <a:buNone/>
             </a:pPr>
-            <a:fld id="{D16A26F5-0FC3-4D63-90AC-AE08FA23385A}" type="slidenum">
+            <a:fld id="{53C42758-0E94-4CDF-87FC-FF2805B2FFF4}" type="slidenum">
               <a:rPr b="0" lang="en-US" sz="1200" spc="-1" strike="noStrike">
                 <a:latin typeface="Times New Roman"/>
               </a:rPr>
@@ -5013,7 +5013,7 @@
         <p:spPr>
           <a:xfrm>
             <a:off x="5638680" y="2266920"/>
-            <a:ext cx="912960" cy="17640"/>
+            <a:ext cx="910800" cy="15480"/>
           </a:xfrm>
           <a:custGeom>
             <a:avLst/>
@@ -5064,7 +5064,7 @@
         <p:spPr>
           <a:xfrm>
             <a:off x="3633840" y="2514600"/>
-            <a:ext cx="4923000" cy="912960"/>
+            <a:ext cx="4920840" cy="910800"/>
           </a:xfrm>
           <a:prstGeom prst="rect">
             <a:avLst/>
@@ -5116,7 +5116,7 @@
         <p:spPr>
           <a:xfrm>
             <a:off x="5638680" y="3657600"/>
-            <a:ext cx="912960" cy="17640"/>
+            <a:ext cx="910800" cy="15480"/>
           </a:xfrm>
           <a:custGeom>
             <a:avLst/>
@@ -5167,7 +5167,7 @@
         <p:spPr>
           <a:xfrm>
             <a:off x="3545640" y="4286160"/>
-            <a:ext cx="5094360" cy="303480"/>
+            <a:ext cx="5092200" cy="301320"/>
           </a:xfrm>
           <a:prstGeom prst="rect">
             <a:avLst/>
@@ -5195,7 +5195,7 @@
               <a:buNone/>
             </a:pPr>
             <a:r>
-              <a:rPr b="0" lang="en-US" sz="1800" spc="35" strike="noStrike">
+              <a:rPr b="0" lang="en-US" sz="1800" spc="18" strike="noStrike">
                 <a:solidFill>
                   <a:srgbClr val="636e72"/>
                 </a:solidFill>
@@ -5256,7 +5256,7 @@
         <p:spPr>
           <a:xfrm>
             <a:off x="380880" y="380880"/>
-            <a:ext cx="11504880" cy="227160"/>
+            <a:ext cx="11502720" cy="225000"/>
           </a:xfrm>
           <a:prstGeom prst="rect">
             <a:avLst/>
@@ -5284,7 +5284,7 @@
               <a:buNone/>
             </a:pPr>
             <a:r>
-              <a:rPr b="1" lang="en-US" sz="1200" spc="49" strike="noStrike">
+              <a:rPr b="1" lang="en-US" sz="1200" spc="32" strike="noStrike">
                 <a:solidFill>
                   <a:srgbClr val="0984e3"/>
                 </a:solidFill>
@@ -5308,7 +5308,7 @@
         <p:spPr>
           <a:xfrm>
             <a:off x="380880" y="685800"/>
-            <a:ext cx="11657160" cy="455760"/>
+            <a:ext cx="11655000" cy="453600"/>
           </a:xfrm>
           <a:prstGeom prst="rect">
             <a:avLst/>
@@ -5360,7 +5360,7 @@
         <p:spPr>
           <a:xfrm>
             <a:off x="380880" y="1419120"/>
-            <a:ext cx="5495760" cy="827280"/>
+            <a:ext cx="5493600" cy="825120"/>
           </a:xfrm>
           <a:prstGeom prst="rect">
             <a:avLst/>
@@ -5412,7 +5412,7 @@
         <p:spPr>
           <a:xfrm>
             <a:off x="380880" y="2452680"/>
-            <a:ext cx="5646960" cy="836640"/>
+            <a:ext cx="5644800" cy="834480"/>
           </a:xfrm>
           <a:prstGeom prst="rect">
             <a:avLst/>
@@ -5464,7 +5464,7 @@
         <p:spPr>
           <a:xfrm>
             <a:off x="380880" y="3867120"/>
-            <a:ext cx="5561280" cy="2017800"/>
+            <a:ext cx="5559120" cy="2015640"/>
           </a:xfrm>
           <a:custGeom>
             <a:avLst/>
@@ -5515,7 +5515,7 @@
         <p:spPr>
           <a:xfrm>
             <a:off x="609480" y="4095720"/>
-            <a:ext cx="5199120" cy="265320"/>
+            <a:ext cx="5196960" cy="263160"/>
           </a:xfrm>
           <a:prstGeom prst="rect">
             <a:avLst/>
@@ -5567,7 +5567,7 @@
         <p:spPr>
           <a:xfrm>
             <a:off x="609480" y="4476600"/>
-            <a:ext cx="5180040" cy="246240"/>
+            <a:ext cx="5177880" cy="244080"/>
           </a:xfrm>
           <a:prstGeom prst="rect">
             <a:avLst/>
@@ -5659,7 +5659,7 @@
         <p:spPr>
           <a:xfrm>
             <a:off x="609480" y="4838760"/>
-            <a:ext cx="5104080" cy="455760"/>
+            <a:ext cx="5101920" cy="453600"/>
           </a:xfrm>
           <a:custGeom>
             <a:avLst/>
@@ -5710,24 +5710,24 @@
         <p:spPr>
           <a:xfrm>
             <a:off x="609480" y="4838760"/>
-            <a:ext cx="5180040" cy="455760"/>
-          </a:xfrm>
-          <a:prstGeom prst="rect">
-            <a:avLst/>
-          </a:prstGeom>
-          <a:noFill/>
-          <a:ln w="0">
-            <a:noFill/>
-          </a:ln>
-        </p:spPr>
-        <p:style>
-          <a:lnRef idx="0"/>
-          <a:fillRef idx="0"/>
-          <a:effectRef idx="0"/>
-          <a:fontRef idx="minor"/>
-        </p:style>
-        <p:txBody>
-          <a:bodyPr lIns="114480" rIns="114480" tIns="456480" bIns="456480" anchor="ctr">
+            <a:ext cx="5177880" cy="453600"/>
+          </a:xfrm>
+          <a:prstGeom prst="rect">
+            <a:avLst/>
+          </a:prstGeom>
+          <a:noFill/>
+          <a:ln w="0">
+            <a:noFill/>
+          </a:ln>
+        </p:spPr>
+        <p:style>
+          <a:lnRef idx="0"/>
+          <a:fillRef idx="0"/>
+          <a:effectRef idx="0"/>
+          <a:fontRef idx="minor"/>
+        </p:style>
+        <p:txBody>
+          <a:bodyPr lIns="114480" rIns="114480" tIns="454320" bIns="454320" anchor="ctr">
             <a:noAutofit/>
           </a:bodyPr>
           <a:p>
@@ -5762,7 +5762,7 @@
         <p:spPr>
           <a:xfrm>
             <a:off x="609480" y="5410080"/>
-            <a:ext cx="5180040" cy="246240"/>
+            <a:ext cx="5177880" cy="244080"/>
           </a:xfrm>
           <a:prstGeom prst="rect">
             <a:avLst/>
@@ -5834,7 +5834,7 @@
         <p:spPr>
           <a:xfrm>
             <a:off x="6253200" y="1376280"/>
-            <a:ext cx="5551560" cy="3208320"/>
+            <a:ext cx="5549400" cy="3206160"/>
           </a:xfrm>
           <a:custGeom>
             <a:avLst/>
@@ -5888,7 +5888,7 @@
         <p:spPr>
           <a:xfrm>
             <a:off x="6486480" y="1609560"/>
-            <a:ext cx="5180040" cy="265320"/>
+            <a:ext cx="5177880" cy="263160"/>
           </a:xfrm>
           <a:prstGeom prst="rect">
             <a:avLst/>
@@ -5940,7 +5940,7 @@
         <p:spPr>
           <a:xfrm>
             <a:off x="6486480" y="2028960"/>
-            <a:ext cx="303480" cy="303480"/>
+            <a:ext cx="301320" cy="301320"/>
           </a:xfrm>
           <a:custGeom>
             <a:avLst/>
@@ -5991,7 +5991,7 @@
         <p:spPr>
           <a:xfrm>
             <a:off x="6453360" y="2028960"/>
-            <a:ext cx="370080" cy="303480"/>
+            <a:ext cx="367920" cy="301320"/>
           </a:xfrm>
           <a:prstGeom prst="rect">
             <a:avLst/>
@@ -6043,7 +6043,7 @@
         <p:spPr>
           <a:xfrm>
             <a:off x="6905520" y="2028960"/>
-            <a:ext cx="3065760" cy="227160"/>
+            <a:ext cx="3063600" cy="225000"/>
           </a:xfrm>
           <a:prstGeom prst="rect">
             <a:avLst/>
@@ -6095,7 +6095,7 @@
         <p:spPr>
           <a:xfrm>
             <a:off x="6905520" y="2295360"/>
-            <a:ext cx="3065760" cy="227160"/>
+            <a:ext cx="3063600" cy="225000"/>
           </a:xfrm>
           <a:prstGeom prst="rect">
             <a:avLst/>
@@ -6147,7 +6147,7 @@
         <p:spPr>
           <a:xfrm>
             <a:off x="6486480" y="2638440"/>
-            <a:ext cx="303480" cy="303480"/>
+            <a:ext cx="301320" cy="301320"/>
           </a:xfrm>
           <a:custGeom>
             <a:avLst/>
@@ -6198,7 +6198,7 @@
         <p:spPr>
           <a:xfrm>
             <a:off x="6453360" y="2638440"/>
-            <a:ext cx="370080" cy="303480"/>
+            <a:ext cx="367920" cy="301320"/>
           </a:xfrm>
           <a:prstGeom prst="rect">
             <a:avLst/>
@@ -6250,7 +6250,7 @@
         <p:spPr>
           <a:xfrm>
             <a:off x="6905520" y="2638440"/>
-            <a:ext cx="3665520" cy="227160"/>
+            <a:ext cx="3663360" cy="225000"/>
           </a:xfrm>
           <a:prstGeom prst="rect">
             <a:avLst/>
@@ -6302,7 +6302,7 @@
         <p:spPr>
           <a:xfrm>
             <a:off x="6905520" y="2905200"/>
-            <a:ext cx="3665520" cy="227160"/>
+            <a:ext cx="3663360" cy="225000"/>
           </a:xfrm>
           <a:prstGeom prst="rect">
             <a:avLst/>
@@ -6354,7 +6354,7 @@
         <p:spPr>
           <a:xfrm>
             <a:off x="6486480" y="3247920"/>
-            <a:ext cx="303480" cy="303480"/>
+            <a:ext cx="301320" cy="301320"/>
           </a:xfrm>
           <a:custGeom>
             <a:avLst/>
@@ -6405,7 +6405,7 @@
         <p:spPr>
           <a:xfrm>
             <a:off x="6453360" y="3247920"/>
-            <a:ext cx="370080" cy="303480"/>
+            <a:ext cx="367920" cy="301320"/>
           </a:xfrm>
           <a:prstGeom prst="rect">
             <a:avLst/>
@@ -6457,7 +6457,7 @@
         <p:spPr>
           <a:xfrm>
             <a:off x="6905520" y="3247920"/>
-            <a:ext cx="3284640" cy="227160"/>
+            <a:ext cx="3282480" cy="225000"/>
           </a:xfrm>
           <a:prstGeom prst="rect">
             <a:avLst/>
@@ -6509,7 +6509,7 @@
         <p:spPr>
           <a:xfrm>
             <a:off x="6905520" y="3514680"/>
-            <a:ext cx="3284640" cy="227160"/>
+            <a:ext cx="3282480" cy="225000"/>
           </a:xfrm>
           <a:prstGeom prst="rect">
             <a:avLst/>
@@ -6561,7 +6561,7 @@
         <p:spPr>
           <a:xfrm>
             <a:off x="6486480" y="3857760"/>
-            <a:ext cx="303480" cy="303480"/>
+            <a:ext cx="301320" cy="301320"/>
           </a:xfrm>
           <a:custGeom>
             <a:avLst/>
@@ -6612,7 +6612,7 @@
         <p:spPr>
           <a:xfrm>
             <a:off x="6453360" y="3857760"/>
-            <a:ext cx="370080" cy="303480"/>
+            <a:ext cx="367920" cy="301320"/>
           </a:xfrm>
           <a:prstGeom prst="rect">
             <a:avLst/>
@@ -6664,7 +6664,7 @@
         <p:spPr>
           <a:xfrm>
             <a:off x="6905520" y="3857760"/>
-            <a:ext cx="4132440" cy="227160"/>
+            <a:ext cx="4130280" cy="225000"/>
           </a:xfrm>
           <a:prstGeom prst="rect">
             <a:avLst/>
@@ -6716,7 +6716,7 @@
         <p:spPr>
           <a:xfrm>
             <a:off x="6905520" y="4124160"/>
-            <a:ext cx="4132440" cy="227160"/>
+            <a:ext cx="4130280" cy="225000"/>
           </a:xfrm>
           <a:prstGeom prst="rect">
             <a:avLst/>
@@ -6768,7 +6768,7 @@
         <p:spPr>
           <a:xfrm>
             <a:off x="6267600" y="4743360"/>
-            <a:ext cx="5542200" cy="1141560"/>
+            <a:ext cx="5540040" cy="1139400"/>
           </a:xfrm>
           <a:custGeom>
             <a:avLst/>
@@ -6819,7 +6819,7 @@
         <p:spPr>
           <a:xfrm>
             <a:off x="6267600" y="4743360"/>
-            <a:ext cx="36720" cy="1141560"/>
+            <a:ext cx="34560" cy="1139400"/>
           </a:xfrm>
           <a:custGeom>
             <a:avLst/>
@@ -6870,7 +6870,7 @@
         <p:spPr>
           <a:xfrm>
             <a:off x="6477120" y="4933800"/>
-            <a:ext cx="5218200" cy="493920"/>
+            <a:ext cx="5216040" cy="491760"/>
           </a:xfrm>
           <a:prstGeom prst="rect">
             <a:avLst/>
@@ -6922,7 +6922,7 @@
         <p:spPr>
           <a:xfrm>
             <a:off x="6477120" y="5505480"/>
-            <a:ext cx="5208840" cy="189000"/>
+            <a:ext cx="5206680" cy="186840"/>
           </a:xfrm>
           <a:prstGeom prst="rect">
             <a:avLst/>
@@ -7021,7 +7021,7 @@
         <p:spPr>
           <a:xfrm>
             <a:off x="379440" y="379440"/>
-            <a:ext cx="11507400" cy="226440"/>
+            <a:ext cx="11505240" cy="224280"/>
           </a:xfrm>
           <a:prstGeom prst="rect">
             <a:avLst/>
@@ -7049,7 +7049,7 @@
               <a:buNone/>
             </a:pPr>
             <a:r>
-              <a:rPr b="1" lang="en-US" sz="1200" spc="49" strike="noStrike">
+              <a:rPr b="1" lang="en-US" sz="1200" spc="32" strike="noStrike">
                 <a:solidFill>
                   <a:srgbClr val="0984e3"/>
                 </a:solidFill>
@@ -7073,7 +7073,7 @@
         <p:spPr>
           <a:xfrm>
             <a:off x="379440" y="683280"/>
-            <a:ext cx="11659320" cy="453960"/>
+            <a:ext cx="11657160" cy="451800"/>
           </a:xfrm>
           <a:prstGeom prst="rect">
             <a:avLst/>
@@ -7125,7 +7125,7 @@
         <p:spPr>
           <a:xfrm>
             <a:off x="379440" y="1366200"/>
-            <a:ext cx="5681880" cy="302040"/>
+            <a:ext cx="5679720" cy="299880"/>
           </a:xfrm>
           <a:prstGeom prst="rect">
             <a:avLst/>
@@ -7177,7 +7177,7 @@
         <p:spPr>
           <a:xfrm>
             <a:off x="379440" y="1826280"/>
-            <a:ext cx="5095800" cy="465840"/>
+            <a:ext cx="5093640" cy="463680"/>
           </a:xfrm>
           <a:prstGeom prst="rect">
             <a:avLst/>
@@ -7229,7 +7229,7 @@
         <p:spPr>
           <a:xfrm>
             <a:off x="379440" y="2452680"/>
-            <a:ext cx="5643720" cy="738720"/>
+            <a:ext cx="5641560" cy="736560"/>
           </a:xfrm>
           <a:prstGeom prst="rect">
             <a:avLst/>
@@ -7281,7 +7281,7 @@
         <p:spPr>
           <a:xfrm>
             <a:off x="398520" y="3306600"/>
-            <a:ext cx="5549040" cy="757440"/>
+            <a:ext cx="5546880" cy="755280"/>
           </a:xfrm>
           <a:custGeom>
             <a:avLst/>
@@ -7332,7 +7332,7 @@
         <p:spPr>
           <a:xfrm>
             <a:off x="398520" y="3306600"/>
-            <a:ext cx="36360" cy="757440"/>
+            <a:ext cx="34200" cy="755280"/>
           </a:xfrm>
           <a:custGeom>
             <a:avLst/>
@@ -7383,7 +7383,7 @@
         <p:spPr>
           <a:xfrm>
             <a:off x="569160" y="3458520"/>
-            <a:ext cx="5302440" cy="453960"/>
+            <a:ext cx="5300280" cy="451800"/>
           </a:xfrm>
           <a:prstGeom prst="rect">
             <a:avLst/>
@@ -7476,7 +7476,7 @@
         <p:spPr>
           <a:xfrm>
             <a:off x="379440" y="4217400"/>
-            <a:ext cx="5681880" cy="302040"/>
+            <a:ext cx="5679720" cy="299880"/>
           </a:xfrm>
           <a:prstGeom prst="rect">
             <a:avLst/>
@@ -7528,7 +7528,7 @@
         <p:spPr>
           <a:xfrm>
             <a:off x="379440" y="4635000"/>
-            <a:ext cx="5643720" cy="738720"/>
+            <a:ext cx="5641560" cy="736560"/>
           </a:xfrm>
           <a:prstGeom prst="rect">
             <a:avLst/>
@@ -7580,7 +7580,7 @@
         <p:spPr>
           <a:xfrm>
             <a:off x="6249240" y="1366200"/>
-            <a:ext cx="5681880" cy="302040"/>
+            <a:ext cx="5679720" cy="299880"/>
           </a:xfrm>
           <a:prstGeom prst="rect">
             <a:avLst/>
@@ -7632,7 +7632,7 @@
         <p:spPr>
           <a:xfrm>
             <a:off x="6249240" y="1826280"/>
-            <a:ext cx="5249160" cy="465840"/>
+            <a:ext cx="5247000" cy="463680"/>
           </a:xfrm>
           <a:prstGeom prst="rect">
             <a:avLst/>
@@ -7684,7 +7684,7 @@
         <p:spPr>
           <a:xfrm>
             <a:off x="6249240" y="2452680"/>
-            <a:ext cx="5643720" cy="738720"/>
+            <a:ext cx="5641560" cy="736560"/>
           </a:xfrm>
           <a:prstGeom prst="rect">
             <a:avLst/>
@@ -7736,7 +7736,7 @@
         <p:spPr>
           <a:xfrm>
             <a:off x="6249240" y="3344400"/>
-            <a:ext cx="5568120" cy="2180880"/>
+            <a:ext cx="5565960" cy="2178720"/>
           </a:xfrm>
           <a:custGeom>
             <a:avLst/>
@@ -7787,7 +7787,7 @@
         <p:spPr>
           <a:xfrm>
             <a:off x="6438960" y="3534120"/>
-            <a:ext cx="5283360" cy="264240"/>
+            <a:ext cx="5281200" cy="262080"/>
           </a:xfrm>
           <a:prstGeom prst="rect">
             <a:avLst/>
@@ -7839,7 +7839,7 @@
         <p:spPr>
           <a:xfrm>
             <a:off x="6438960" y="3913920"/>
-            <a:ext cx="5264280" cy="245160"/>
+            <a:ext cx="5262120" cy="243000"/>
           </a:xfrm>
           <a:prstGeom prst="rect">
             <a:avLst/>
@@ -7891,7 +7891,7 @@
         <p:spPr>
           <a:xfrm>
             <a:off x="6438960" y="4274280"/>
-            <a:ext cx="5188320" cy="453960"/>
+            <a:ext cx="5186160" cy="451800"/>
           </a:xfrm>
           <a:custGeom>
             <a:avLst/>
@@ -7942,24 +7942,24 @@
         <p:spPr>
           <a:xfrm>
             <a:off x="6438960" y="4274280"/>
-            <a:ext cx="5264280" cy="453960"/>
-          </a:xfrm>
-          <a:prstGeom prst="rect">
-            <a:avLst/>
-          </a:prstGeom>
-          <a:noFill/>
-          <a:ln w="0">
-            <a:noFill/>
-          </a:ln>
-        </p:spPr>
-        <p:style>
-          <a:lnRef idx="0"/>
-          <a:fillRef idx="0"/>
-          <a:effectRef idx="0"/>
-          <a:fontRef idx="minor"/>
-        </p:style>
-        <p:txBody>
-          <a:bodyPr lIns="113760" rIns="113760" tIns="454320" bIns="454320" anchor="ctr">
+            <a:ext cx="5262120" cy="451800"/>
+          </a:xfrm>
+          <a:prstGeom prst="rect">
+            <a:avLst/>
+          </a:prstGeom>
+          <a:noFill/>
+          <a:ln w="0">
+            <a:noFill/>
+          </a:ln>
+        </p:spPr>
+        <p:style>
+          <a:lnRef idx="0"/>
+          <a:fillRef idx="0"/>
+          <a:effectRef idx="0"/>
+          <a:fontRef idx="minor"/>
+        </p:style>
+        <p:txBody>
+          <a:bodyPr lIns="113760" rIns="113760" tIns="452160" bIns="452160" anchor="ctr">
             <a:noAutofit/>
           </a:bodyPr>
           <a:p>
@@ -7994,7 +7994,7 @@
         <p:spPr>
           <a:xfrm>
             <a:off x="6438960" y="4843440"/>
-            <a:ext cx="5264280" cy="491760"/>
+            <a:ext cx="5262120" cy="489600"/>
           </a:xfrm>
           <a:prstGeom prst="rect">
             <a:avLst/>
@@ -8046,7 +8046,7 @@
         <p:spPr>
           <a:xfrm>
             <a:off x="6268320" y="5678640"/>
-            <a:ext cx="5549040" cy="795600"/>
+            <a:ext cx="5546880" cy="793440"/>
           </a:xfrm>
           <a:custGeom>
             <a:avLst/>
@@ -8097,7 +8097,7 @@
         <p:spPr>
           <a:xfrm>
             <a:off x="6268320" y="5678640"/>
-            <a:ext cx="36360" cy="795600"/>
+            <a:ext cx="34200" cy="793440"/>
           </a:xfrm>
           <a:custGeom>
             <a:avLst/>
@@ -8148,7 +8148,7 @@
         <p:spPr>
           <a:xfrm>
             <a:off x="6438960" y="5830200"/>
-            <a:ext cx="5302440" cy="491760"/>
+            <a:ext cx="5300280" cy="489600"/>
           </a:xfrm>
           <a:prstGeom prst="rect">
             <a:avLst/>
@@ -8247,7 +8247,7 @@
         <p:spPr>
           <a:xfrm>
             <a:off x="609480" y="2066760"/>
-            <a:ext cx="12190680" cy="1217880"/>
+            <a:ext cx="12188520" cy="1215720"/>
           </a:xfrm>
           <a:prstGeom prst="rect">
             <a:avLst/>
@@ -8301,7 +8301,7 @@
         <p:spPr>
           <a:xfrm>
             <a:off x="609480" y="3438360"/>
-            <a:ext cx="11866680" cy="570240"/>
+            <a:ext cx="11864520" cy="568080"/>
           </a:xfrm>
           <a:prstGeom prst="rect">
             <a:avLst/>
@@ -8353,7 +8353,7 @@
         <p:spPr>
           <a:xfrm>
             <a:off x="609480" y="4238640"/>
-            <a:ext cx="1217880" cy="17640"/>
+            <a:ext cx="1215720" cy="15480"/>
           </a:xfrm>
           <a:custGeom>
             <a:avLst/>
@@ -8404,7 +8404,7 @@
         <p:spPr>
           <a:xfrm>
             <a:off x="609480" y="4486320"/>
-            <a:ext cx="11695320" cy="303480"/>
+            <a:ext cx="11693160" cy="301320"/>
           </a:xfrm>
           <a:prstGeom prst="rect">
             <a:avLst/>
@@ -8493,7 +8493,7 @@
         <p:spPr>
           <a:xfrm>
             <a:off x="356400" y="356400"/>
-            <a:ext cx="11549520" cy="212400"/>
+            <a:ext cx="11547360" cy="210240"/>
           </a:xfrm>
           <a:prstGeom prst="rect">
             <a:avLst/>
@@ -8521,7 +8521,7 @@
               <a:buNone/>
             </a:pPr>
             <a:r>
-              <a:rPr b="1" lang="en-US" sz="1120" spc="46" strike="noStrike">
+              <a:rPr b="1" lang="en-US" sz="1120" spc="29" strike="noStrike">
                 <a:solidFill>
                   <a:srgbClr val="0984e3"/>
                 </a:solidFill>
@@ -8545,7 +8545,7 @@
         <p:spPr>
           <a:xfrm>
             <a:off x="356400" y="641160"/>
-            <a:ext cx="11691720" cy="425880"/>
+            <a:ext cx="11689560" cy="423720"/>
           </a:xfrm>
           <a:prstGeom prst="rect">
             <a:avLst/>
@@ -8597,7 +8597,7 @@
         <p:spPr>
           <a:xfrm>
             <a:off x="360720" y="1287000"/>
-            <a:ext cx="3694320" cy="2625840"/>
+            <a:ext cx="3692160" cy="2623680"/>
           </a:xfrm>
           <a:custGeom>
             <a:avLst/>
@@ -8651,7 +8651,7 @@
         <p:spPr>
           <a:xfrm>
             <a:off x="543240" y="1469520"/>
-            <a:ext cx="425880" cy="425880"/>
+            <a:ext cx="423720" cy="423720"/>
           </a:xfrm>
           <a:custGeom>
             <a:avLst/>
@@ -8702,7 +8702,7 @@
         <p:spPr>
           <a:xfrm>
             <a:off x="656640" y="1594080"/>
-            <a:ext cx="199080" cy="176760"/>
+            <a:ext cx="196920" cy="174600"/>
           </a:xfrm>
           <a:custGeom>
             <a:avLst/>
@@ -8899,7 +8899,7 @@
         <p:spPr>
           <a:xfrm>
             <a:off x="1077480" y="1558440"/>
-            <a:ext cx="2340720" cy="248040"/>
+            <a:ext cx="2338560" cy="245880"/>
           </a:xfrm>
           <a:prstGeom prst="rect">
             <a:avLst/>
@@ -8951,7 +8951,7 @@
         <p:spPr>
           <a:xfrm>
             <a:off x="543240" y="2003760"/>
-            <a:ext cx="3400560" cy="693360"/>
+            <a:ext cx="3398400" cy="691200"/>
           </a:xfrm>
           <a:prstGeom prst="rect">
             <a:avLst/>
@@ -9013,7 +9013,7 @@
         <p:spPr>
           <a:xfrm>
             <a:off x="543240" y="2805480"/>
-            <a:ext cx="3400560" cy="924840"/>
+            <a:ext cx="3398400" cy="922680"/>
           </a:xfrm>
           <a:prstGeom prst="rect">
             <a:avLst/>
@@ -9075,7 +9075,7 @@
         <p:spPr>
           <a:xfrm>
             <a:off x="4246200" y="1287000"/>
-            <a:ext cx="3694320" cy="2625840"/>
+            <a:ext cx="3692160" cy="2623680"/>
           </a:xfrm>
           <a:custGeom>
             <a:avLst/>
@@ -9129,7 +9129,7 @@
         <p:spPr>
           <a:xfrm>
             <a:off x="4428720" y="1469520"/>
-            <a:ext cx="425880" cy="425880"/>
+            <a:ext cx="423720" cy="423720"/>
           </a:xfrm>
           <a:custGeom>
             <a:avLst/>
@@ -9180,7 +9180,7 @@
         <p:spPr>
           <a:xfrm>
             <a:off x="4542120" y="1594080"/>
-            <a:ext cx="199080" cy="176760"/>
+            <a:ext cx="196920" cy="174600"/>
           </a:xfrm>
           <a:custGeom>
             <a:avLst/>
@@ -9332,7 +9332,7 @@
         <p:spPr>
           <a:xfrm>
             <a:off x="4962960" y="1558440"/>
-            <a:ext cx="2430000" cy="248040"/>
+            <a:ext cx="2427840" cy="245880"/>
           </a:xfrm>
           <a:prstGeom prst="rect">
             <a:avLst/>
@@ -9384,7 +9384,7 @@
         <p:spPr>
           <a:xfrm>
             <a:off x="4428720" y="2003760"/>
-            <a:ext cx="3400560" cy="693360"/>
+            <a:ext cx="3398400" cy="691200"/>
           </a:xfrm>
           <a:prstGeom prst="rect">
             <a:avLst/>
@@ -9446,7 +9446,7 @@
         <p:spPr>
           <a:xfrm>
             <a:off x="4428720" y="2805480"/>
-            <a:ext cx="3400560" cy="693360"/>
+            <a:ext cx="3398400" cy="691200"/>
           </a:xfrm>
           <a:prstGeom prst="rect">
             <a:avLst/>
@@ -9508,7 +9508,7 @@
         <p:spPr>
           <a:xfrm>
             <a:off x="8131680" y="1287000"/>
-            <a:ext cx="3694320" cy="2625840"/>
+            <a:ext cx="3692160" cy="2623680"/>
           </a:xfrm>
           <a:custGeom>
             <a:avLst/>
@@ -9562,7 +9562,7 @@
         <p:spPr>
           <a:xfrm>
             <a:off x="8314200" y="1469520"/>
-            <a:ext cx="425880" cy="425880"/>
+            <a:ext cx="423720" cy="423720"/>
           </a:xfrm>
           <a:custGeom>
             <a:avLst/>
@@ -9613,7 +9613,7 @@
         <p:spPr>
           <a:xfrm>
             <a:off x="8439120" y="1594080"/>
-            <a:ext cx="176760" cy="176760"/>
+            <a:ext cx="174600" cy="174600"/>
           </a:xfrm>
           <a:custGeom>
             <a:avLst/>
@@ -9713,7 +9713,7 @@
         <p:spPr>
           <a:xfrm>
             <a:off x="8848800" y="1558440"/>
-            <a:ext cx="2037960" cy="248040"/>
+            <a:ext cx="2035800" cy="245880"/>
           </a:xfrm>
           <a:prstGeom prst="rect">
             <a:avLst/>
@@ -9765,7 +9765,7 @@
         <p:spPr>
           <a:xfrm>
             <a:off x="8314200" y="2003760"/>
-            <a:ext cx="3400560" cy="693360"/>
+            <a:ext cx="3398400" cy="691200"/>
           </a:xfrm>
           <a:prstGeom prst="rect">
             <a:avLst/>
@@ -9827,7 +9827,7 @@
         <p:spPr>
           <a:xfrm>
             <a:off x="8314200" y="2805480"/>
-            <a:ext cx="3400560" cy="693360"/>
+            <a:ext cx="3398400" cy="691200"/>
           </a:xfrm>
           <a:prstGeom prst="rect">
             <a:avLst/>
@@ -9889,7 +9889,7 @@
         <p:spPr>
           <a:xfrm>
             <a:off x="360720" y="4101120"/>
-            <a:ext cx="3694320" cy="2394360"/>
+            <a:ext cx="3692160" cy="2392200"/>
           </a:xfrm>
           <a:custGeom>
             <a:avLst/>
@@ -9943,7 +9943,7 @@
         <p:spPr>
           <a:xfrm>
             <a:off x="543240" y="4283640"/>
-            <a:ext cx="425880" cy="425880"/>
+            <a:ext cx="423720" cy="423720"/>
           </a:xfrm>
           <a:custGeom>
             <a:avLst/>
@@ -9994,7 +9994,7 @@
         <p:spPr>
           <a:xfrm>
             <a:off x="645840" y="4408200"/>
-            <a:ext cx="221040" cy="176760"/>
+            <a:ext cx="218880" cy="174600"/>
           </a:xfrm>
           <a:custGeom>
             <a:avLst/>
@@ -10226,7 +10226,7 @@
         <p:spPr>
           <a:xfrm>
             <a:off x="1077480" y="4372560"/>
-            <a:ext cx="1931040" cy="248040"/>
+            <a:ext cx="1928880" cy="245880"/>
           </a:xfrm>
           <a:prstGeom prst="rect">
             <a:avLst/>
@@ -10278,7 +10278,7 @@
         <p:spPr>
           <a:xfrm>
             <a:off x="543240" y="4817880"/>
-            <a:ext cx="3400560" cy="693360"/>
+            <a:ext cx="3398400" cy="691200"/>
           </a:xfrm>
           <a:prstGeom prst="rect">
             <a:avLst/>
@@ -10340,7 +10340,7 @@
         <p:spPr>
           <a:xfrm>
             <a:off x="543240" y="5619600"/>
-            <a:ext cx="3400560" cy="693360"/>
+            <a:ext cx="3398400" cy="691200"/>
           </a:xfrm>
           <a:prstGeom prst="rect">
             <a:avLst/>
@@ -10402,7 +10402,7 @@
         <p:spPr>
           <a:xfrm>
             <a:off x="4246200" y="4101120"/>
-            <a:ext cx="7586280" cy="2394360"/>
+            <a:ext cx="7584120" cy="2392200"/>
           </a:xfrm>
           <a:custGeom>
             <a:avLst/>
@@ -10456,7 +10456,7 @@
         <p:spPr>
           <a:xfrm>
             <a:off x="4428720" y="4283640"/>
-            <a:ext cx="425880" cy="425880"/>
+            <a:ext cx="423720" cy="423720"/>
           </a:xfrm>
           <a:custGeom>
             <a:avLst/>
@@ -10507,7 +10507,7 @@
         <p:spPr>
           <a:xfrm>
             <a:off x="4553280" y="4408200"/>
-            <a:ext cx="176760" cy="176760"/>
+            <a:ext cx="174600" cy="174600"/>
           </a:xfrm>
           <a:custGeom>
             <a:avLst/>
@@ -10640,7 +10640,7 @@
         <p:spPr>
           <a:xfrm>
             <a:off x="4962960" y="4372560"/>
-            <a:ext cx="2046960" cy="248040"/>
+            <a:ext cx="2044800" cy="245880"/>
           </a:xfrm>
           <a:prstGeom prst="rect">
             <a:avLst/>
@@ -10692,7 +10692,7 @@
         <p:spPr>
           <a:xfrm>
             <a:off x="4428720" y="4817880"/>
-            <a:ext cx="3605400" cy="693360"/>
+            <a:ext cx="3603240" cy="691200"/>
           </a:xfrm>
           <a:prstGeom prst="rect">
             <a:avLst/>
@@ -10754,7 +10754,7 @@
         <p:spPr>
           <a:xfrm>
             <a:off x="4428720" y="5583960"/>
-            <a:ext cx="3605400" cy="461520"/>
+            <a:ext cx="3603240" cy="459360"/>
           </a:xfrm>
           <a:prstGeom prst="rect">
             <a:avLst/>
@@ -10806,7 +10806,7 @@
         <p:spPr>
           <a:xfrm>
             <a:off x="8109360" y="4817880"/>
-            <a:ext cx="3605400" cy="693360"/>
+            <a:ext cx="3603240" cy="691200"/>
           </a:xfrm>
           <a:prstGeom prst="rect">
             <a:avLst/>
@@ -10868,7 +10868,7 @@
         <p:spPr>
           <a:xfrm>
             <a:off x="8109360" y="5583960"/>
-            <a:ext cx="3605400" cy="461520"/>
+            <a:ext cx="3603240" cy="459360"/>
           </a:xfrm>
           <a:prstGeom prst="rect">
             <a:avLst/>
@@ -10957,7 +10957,7 @@
         <p:spPr>
           <a:xfrm>
             <a:off x="609480" y="2066760"/>
-            <a:ext cx="12190680" cy="1217880"/>
+            <a:ext cx="12188520" cy="1215720"/>
           </a:xfrm>
           <a:prstGeom prst="rect">
             <a:avLst/>
@@ -11011,7 +11011,7 @@
         <p:spPr>
           <a:xfrm>
             <a:off x="609480" y="3438360"/>
-            <a:ext cx="11866680" cy="570240"/>
+            <a:ext cx="11864520" cy="568080"/>
           </a:xfrm>
           <a:prstGeom prst="rect">
             <a:avLst/>
@@ -11063,7 +11063,7 @@
         <p:spPr>
           <a:xfrm>
             <a:off x="609480" y="4238640"/>
-            <a:ext cx="1217880" cy="17640"/>
+            <a:ext cx="1215720" cy="15480"/>
           </a:xfrm>
           <a:custGeom>
             <a:avLst/>
@@ -11114,7 +11114,7 @@
         <p:spPr>
           <a:xfrm>
             <a:off x="609480" y="4486320"/>
-            <a:ext cx="11695320" cy="303480"/>
+            <a:ext cx="11693160" cy="301320"/>
           </a:xfrm>
           <a:prstGeom prst="rect">
             <a:avLst/>
@@ -11203,7 +11203,7 @@
         <p:spPr>
           <a:xfrm>
             <a:off x="380880" y="380880"/>
-            <a:ext cx="11504880" cy="227160"/>
+            <a:ext cx="11502720" cy="225000"/>
           </a:xfrm>
           <a:prstGeom prst="rect">
             <a:avLst/>
@@ -11231,7 +11231,7 @@
               <a:buNone/>
             </a:pPr>
             <a:r>
-              <a:rPr b="1" lang="en-US" sz="1200" spc="49" strike="noStrike">
+              <a:rPr b="1" lang="en-US" sz="1200" spc="32" strike="noStrike">
                 <a:solidFill>
                   <a:srgbClr val="0984e3"/>
                 </a:solidFill>
@@ -11255,7 +11255,7 @@
         <p:spPr>
           <a:xfrm>
             <a:off x="380880" y="685800"/>
-            <a:ext cx="11657160" cy="455760"/>
+            <a:ext cx="11655000" cy="453600"/>
           </a:xfrm>
           <a:prstGeom prst="rect">
             <a:avLst/>
@@ -11307,7 +11307,7 @@
         <p:spPr>
           <a:xfrm>
             <a:off x="380880" y="1295280"/>
-            <a:ext cx="5656320" cy="1236960"/>
+            <a:ext cx="5654160" cy="1234800"/>
           </a:xfrm>
           <a:prstGeom prst="rect">
             <a:avLst/>
@@ -11369,7 +11369,7 @@
         <p:spPr>
           <a:xfrm>
             <a:off x="380880" y="2647800"/>
-            <a:ext cx="5637240" cy="741600"/>
+            <a:ext cx="5635080" cy="739440"/>
           </a:xfrm>
           <a:prstGeom prst="rect">
             <a:avLst/>
@@ -11421,7 +11421,7 @@
         <p:spPr>
           <a:xfrm>
             <a:off x="385920" y="3548160"/>
-            <a:ext cx="5551560" cy="2027520"/>
+            <a:ext cx="5549400" cy="2025360"/>
           </a:xfrm>
           <a:custGeom>
             <a:avLst/>
@@ -11475,7 +11475,7 @@
         <p:spPr>
           <a:xfrm>
             <a:off x="495360" y="3705120"/>
-            <a:ext cx="5332680" cy="265320"/>
+            <a:ext cx="5330520" cy="263160"/>
           </a:xfrm>
           <a:prstGeom prst="rect">
             <a:avLst/>
@@ -12001,7 +12001,7 @@
         <p:spPr>
           <a:xfrm>
             <a:off x="509760" y="5229360"/>
-            <a:ext cx="5303880" cy="189000"/>
+            <a:ext cx="5301720" cy="186840"/>
           </a:xfrm>
           <a:prstGeom prst="rect">
             <a:avLst/>
@@ -12053,7 +12053,7 @@
         <p:spPr>
           <a:xfrm>
             <a:off x="6253200" y="1300320"/>
-            <a:ext cx="5551560" cy="1608120"/>
+            <a:ext cx="5549400" cy="1605960"/>
           </a:xfrm>
           <a:custGeom>
             <a:avLst/>
@@ -12107,7 +12107,7 @@
         <p:spPr>
           <a:xfrm>
             <a:off x="6448320" y="1495440"/>
-            <a:ext cx="5256360" cy="265320"/>
+            <a:ext cx="5254200" cy="263160"/>
           </a:xfrm>
           <a:prstGeom prst="rect">
             <a:avLst/>
@@ -12159,7 +12159,7 @@
         <p:spPr>
           <a:xfrm>
             <a:off x="6448320" y="1876320"/>
-            <a:ext cx="5237280" cy="227160"/>
+            <a:ext cx="5235120" cy="225000"/>
           </a:xfrm>
           <a:prstGeom prst="rect">
             <a:avLst/>
@@ -12221,7 +12221,7 @@
         <p:spPr>
           <a:xfrm>
             <a:off x="6448320" y="2181240"/>
-            <a:ext cx="5237280" cy="227160"/>
+            <a:ext cx="5235120" cy="225000"/>
           </a:xfrm>
           <a:prstGeom prst="rect">
             <a:avLst/>
@@ -12283,7 +12283,7 @@
         <p:spPr>
           <a:xfrm>
             <a:off x="6448320" y="2486160"/>
-            <a:ext cx="5237280" cy="227160"/>
+            <a:ext cx="5235120" cy="225000"/>
           </a:xfrm>
           <a:prstGeom prst="rect">
             <a:avLst/>
@@ -12335,7 +12335,7 @@
         <p:spPr>
           <a:xfrm>
             <a:off x="6267600" y="3067200"/>
-            <a:ext cx="5542200" cy="2132280"/>
+            <a:ext cx="5540040" cy="2130120"/>
           </a:xfrm>
           <a:custGeom>
             <a:avLst/>
@@ -12386,7 +12386,7 @@
         <p:spPr>
           <a:xfrm>
             <a:off x="6267600" y="3067200"/>
-            <a:ext cx="36720" cy="2132280"/>
+            <a:ext cx="34560" cy="2130120"/>
           </a:xfrm>
           <a:custGeom>
             <a:avLst/>
@@ -12437,7 +12437,7 @@
         <p:spPr>
           <a:xfrm>
             <a:off x="6477120" y="3257640"/>
-            <a:ext cx="5237280" cy="265320"/>
+            <a:ext cx="5235120" cy="263160"/>
           </a:xfrm>
           <a:prstGeom prst="rect">
             <a:avLst/>
@@ -12489,7 +12489,7 @@
         <p:spPr>
           <a:xfrm>
             <a:off x="6496200" y="3672000"/>
-            <a:ext cx="150840" cy="150840"/>
+            <a:ext cx="148680" cy="148680"/>
           </a:xfrm>
           <a:custGeom>
             <a:avLst/>
@@ -12613,7 +12613,7 @@
         <p:spPr>
           <a:xfrm>
             <a:off x="6724800" y="3638520"/>
-            <a:ext cx="4970520" cy="455760"/>
+            <a:ext cx="4968360" cy="453600"/>
           </a:xfrm>
           <a:prstGeom prst="rect">
             <a:avLst/>
@@ -12675,7 +12675,7 @@
         <p:spPr>
           <a:xfrm>
             <a:off x="6496200" y="4205160"/>
-            <a:ext cx="150840" cy="150840"/>
+            <a:ext cx="148680" cy="148680"/>
           </a:xfrm>
           <a:custGeom>
             <a:avLst/>
@@ -12798,7 +12798,7 @@
         <p:spPr>
           <a:xfrm>
             <a:off x="6724800" y="4172040"/>
-            <a:ext cx="4970520" cy="227160"/>
+            <a:ext cx="4968360" cy="225000"/>
           </a:xfrm>
           <a:prstGeom prst="rect">
             <a:avLst/>
@@ -12860,7 +12860,7 @@
         <p:spPr>
           <a:xfrm>
             <a:off x="6515280" y="4510080"/>
-            <a:ext cx="113040" cy="150840"/>
+            <a:ext cx="110880" cy="148680"/>
           </a:xfrm>
           <a:custGeom>
             <a:avLst/>
@@ -13101,7 +13101,7 @@
         <p:spPr>
           <a:xfrm>
             <a:off x="6724800" y="4476600"/>
-            <a:ext cx="4970520" cy="227160"/>
+            <a:ext cx="4968360" cy="225000"/>
           </a:xfrm>
           <a:prstGeom prst="rect">
             <a:avLst/>
@@ -13163,7 +13163,7 @@
         <p:spPr>
           <a:xfrm>
             <a:off x="6486480" y="4815000"/>
-            <a:ext cx="169920" cy="150840"/>
+            <a:ext cx="167760" cy="148680"/>
           </a:xfrm>
           <a:custGeom>
             <a:avLst/>
@@ -13399,7 +13399,7 @@
         <p:spPr>
           <a:xfrm>
             <a:off x="6724800" y="4781520"/>
-            <a:ext cx="4970520" cy="227160"/>
+            <a:ext cx="4968360" cy="225000"/>
           </a:xfrm>
           <a:prstGeom prst="rect">
             <a:avLst/>
@@ -13498,7 +13498,7 @@
         <p:spPr>
           <a:xfrm>
             <a:off x="358560" y="358560"/>
-            <a:ext cx="11545200" cy="213840"/>
+            <a:ext cx="11543040" cy="211680"/>
           </a:xfrm>
           <a:prstGeom prst="rect">
             <a:avLst/>
@@ -13526,7 +13526,7 @@
               <a:buNone/>
             </a:pPr>
             <a:r>
-              <a:rPr b="1" lang="en-US" sz="1130" spc="46" strike="noStrike">
+              <a:rPr b="1" lang="en-US" sz="1130" spc="29" strike="noStrike">
                 <a:solidFill>
                   <a:srgbClr val="0984e3"/>
                 </a:solidFill>
@@ -13550,7 +13550,7 @@
         <p:spPr>
           <a:xfrm>
             <a:off x="358560" y="645480"/>
-            <a:ext cx="11688480" cy="428760"/>
+            <a:ext cx="11686320" cy="426600"/>
           </a:xfrm>
           <a:prstGeom prst="rect">
             <a:avLst/>
@@ -13602,7 +13602,7 @@
         <p:spPr>
           <a:xfrm>
             <a:off x="358560" y="1290960"/>
-            <a:ext cx="5700240" cy="285480"/>
+            <a:ext cx="5698080" cy="283320"/>
           </a:xfrm>
           <a:prstGeom prst="rect">
             <a:avLst/>
@@ -13654,7 +13654,7 @@
         <p:spPr>
           <a:xfrm>
             <a:off x="358560" y="1725840"/>
-            <a:ext cx="5473080" cy="439920"/>
+            <a:ext cx="5470920" cy="437760"/>
           </a:xfrm>
           <a:prstGeom prst="rect">
             <a:avLst/>
@@ -13706,7 +13706,7 @@
         <p:spPr>
           <a:xfrm>
             <a:off x="358560" y="2317320"/>
-            <a:ext cx="5664240" cy="464760"/>
+            <a:ext cx="5662080" cy="462600"/>
           </a:xfrm>
           <a:prstGeom prst="rect">
             <a:avLst/>
@@ -13758,7 +13758,7 @@
         <p:spPr>
           <a:xfrm>
             <a:off x="363240" y="2931480"/>
-            <a:ext cx="5583600" cy="1872360"/>
+            <a:ext cx="5581440" cy="1870200"/>
           </a:xfrm>
           <a:custGeom>
             <a:avLst/>
@@ -13812,7 +13812,7 @@
         <p:spPr>
           <a:xfrm>
             <a:off x="470520" y="3079440"/>
-            <a:ext cx="5368320" cy="249480"/>
+            <a:ext cx="5366160" cy="247320"/>
           </a:xfrm>
           <a:prstGeom prst="rect">
             <a:avLst/>
@@ -14340,7 +14340,7 @@
         <p:spPr>
           <a:xfrm>
             <a:off x="479520" y="4478040"/>
-            <a:ext cx="5350320" cy="177840"/>
+            <a:ext cx="5348160" cy="175680"/>
           </a:xfrm>
           <a:prstGeom prst="rect">
             <a:avLst/>
@@ -14392,7 +14392,7 @@
         <p:spPr>
           <a:xfrm>
             <a:off x="376560" y="4952880"/>
-            <a:ext cx="5574600" cy="751680"/>
+            <a:ext cx="5572440" cy="749520"/>
           </a:xfrm>
           <a:custGeom>
             <a:avLst/>
@@ -14443,7 +14443,7 @@
         <p:spPr>
           <a:xfrm>
             <a:off x="376560" y="4952880"/>
-            <a:ext cx="34560" cy="751680"/>
+            <a:ext cx="32400" cy="749520"/>
           </a:xfrm>
           <a:custGeom>
             <a:avLst/>
@@ -14494,7 +14494,7 @@
         <p:spPr>
           <a:xfrm>
             <a:off x="537840" y="5096520"/>
-            <a:ext cx="5341680" cy="464760"/>
+            <a:ext cx="5339520" cy="462600"/>
           </a:xfrm>
           <a:prstGeom prst="rect">
             <a:avLst/>
@@ -14556,7 +14556,7 @@
         <p:spPr>
           <a:xfrm>
             <a:off x="6239520" y="1290960"/>
-            <a:ext cx="5700240" cy="285480"/>
+            <a:ext cx="5698080" cy="283320"/>
           </a:xfrm>
           <a:prstGeom prst="rect">
             <a:avLst/>
@@ -14608,7 +14608,7 @@
         <p:spPr>
           <a:xfrm>
             <a:off x="6239520" y="1685520"/>
-            <a:ext cx="5673240" cy="527400"/>
+            <a:ext cx="5671080" cy="525240"/>
           </a:xfrm>
           <a:prstGeom prst="rect">
             <a:avLst/>
@@ -14670,7 +14670,7 @@
         <p:spPr>
           <a:xfrm>
             <a:off x="6239520" y="2317320"/>
-            <a:ext cx="5664240" cy="697680"/>
+            <a:ext cx="5662080" cy="695520"/>
           </a:xfrm>
           <a:prstGeom prst="rect">
             <a:avLst/>
@@ -14722,7 +14722,7 @@
         <p:spPr>
           <a:xfrm>
             <a:off x="6243840" y="3164400"/>
-            <a:ext cx="5583600" cy="1872360"/>
+            <a:ext cx="5581440" cy="1870200"/>
           </a:xfrm>
           <a:custGeom>
             <a:avLst/>
@@ -14776,7 +14776,7 @@
         <p:spPr>
           <a:xfrm>
             <a:off x="6351480" y="3312360"/>
-            <a:ext cx="5368320" cy="249480"/>
+            <a:ext cx="5366160" cy="247320"/>
           </a:xfrm>
           <a:prstGeom prst="rect">
             <a:avLst/>
@@ -15302,7 +15302,7 @@
         <p:spPr>
           <a:xfrm>
             <a:off x="6360480" y="4710960"/>
-            <a:ext cx="5350320" cy="177840"/>
+            <a:ext cx="5348160" cy="175680"/>
           </a:xfrm>
           <a:prstGeom prst="rect">
             <a:avLst/>
@@ -15354,7 +15354,7 @@
         <p:spPr>
           <a:xfrm>
             <a:off x="6239520" y="5186160"/>
-            <a:ext cx="5592600" cy="1307520"/>
+            <a:ext cx="5590440" cy="1305360"/>
           </a:xfrm>
           <a:custGeom>
             <a:avLst/>
@@ -15405,7 +15405,7 @@
         <p:spPr>
           <a:xfrm>
             <a:off x="6382800" y="5329440"/>
-            <a:ext cx="5386320" cy="249480"/>
+            <a:ext cx="5384160" cy="247320"/>
           </a:xfrm>
           <a:prstGeom prst="rect">
             <a:avLst/>
@@ -15457,7 +15457,7 @@
         <p:spPr>
           <a:xfrm>
             <a:off x="6382800" y="5652360"/>
-            <a:ext cx="5377320" cy="697680"/>
+            <a:ext cx="5375160" cy="695520"/>
           </a:xfrm>
           <a:prstGeom prst="rect">
             <a:avLst/>
@@ -15546,7 +15546,7 @@
         <p:spPr>
           <a:xfrm>
             <a:off x="609480" y="1781280"/>
-            <a:ext cx="12190680" cy="1217880"/>
+            <a:ext cx="12188520" cy="1215720"/>
           </a:xfrm>
           <a:prstGeom prst="rect">
             <a:avLst/>
@@ -15600,7 +15600,7 @@
         <p:spPr>
           <a:xfrm>
             <a:off x="609480" y="3152880"/>
-            <a:ext cx="11866680" cy="1141560"/>
+            <a:ext cx="11864520" cy="1139400"/>
           </a:xfrm>
           <a:prstGeom prst="rect">
             <a:avLst/>
@@ -15673,7 +15673,7 @@
         <p:spPr>
           <a:xfrm>
             <a:off x="609480" y="4524480"/>
-            <a:ext cx="1217880" cy="17640"/>
+            <a:ext cx="1215720" cy="15480"/>
           </a:xfrm>
           <a:custGeom>
             <a:avLst/>
@@ -15724,7 +15724,7 @@
         <p:spPr>
           <a:xfrm>
             <a:off x="609480" y="4772160"/>
-            <a:ext cx="11695320" cy="303480"/>
+            <a:ext cx="11693160" cy="301320"/>
           </a:xfrm>
           <a:prstGeom prst="rect">
             <a:avLst/>
@@ -15813,7 +15813,7 @@
         <p:spPr>
           <a:xfrm>
             <a:off x="380880" y="380880"/>
-            <a:ext cx="11504880" cy="227160"/>
+            <a:ext cx="11502720" cy="225000"/>
           </a:xfrm>
           <a:prstGeom prst="rect">
             <a:avLst/>
@@ -15841,7 +15841,7 @@
               <a:buNone/>
             </a:pPr>
             <a:r>
-              <a:rPr b="1" lang="en-US" sz="1200" spc="49" strike="noStrike">
+              <a:rPr b="1" lang="en-US" sz="1200" spc="32" strike="noStrike">
                 <a:solidFill>
                   <a:srgbClr val="0984e3"/>
                 </a:solidFill>
@@ -15865,7 +15865,7 @@
         <p:spPr>
           <a:xfrm>
             <a:off x="380880" y="685800"/>
-            <a:ext cx="11657160" cy="455760"/>
+            <a:ext cx="11655000" cy="453600"/>
           </a:xfrm>
           <a:prstGeom prst="rect">
             <a:avLst/>
@@ -15917,7 +15917,7 @@
         <p:spPr>
           <a:xfrm>
             <a:off x="380880" y="1295280"/>
-            <a:ext cx="7647120" cy="932040"/>
+            <a:ext cx="7644960" cy="929880"/>
           </a:xfrm>
           <a:prstGeom prst="rect">
             <a:avLst/>
@@ -15979,7 +15979,7 @@
         <p:spPr>
           <a:xfrm>
             <a:off x="385920" y="2381400"/>
-            <a:ext cx="3694320" cy="1722600"/>
+            <a:ext cx="3692160" cy="1720440"/>
           </a:xfrm>
           <a:custGeom>
             <a:avLst/>
@@ -16033,7 +16033,7 @@
         <p:spPr>
           <a:xfrm>
             <a:off x="542880" y="2538360"/>
-            <a:ext cx="3475080" cy="265320"/>
+            <a:ext cx="3472920" cy="263160"/>
           </a:xfrm>
           <a:prstGeom prst="rect">
             <a:avLst/>
@@ -16085,7 +16085,7 @@
         <p:spPr>
           <a:xfrm>
             <a:off x="542880" y="2881440"/>
-            <a:ext cx="3456000" cy="493920"/>
+            <a:ext cx="3453840" cy="491760"/>
           </a:xfrm>
           <a:prstGeom prst="rect">
             <a:avLst/>
@@ -16147,7 +16147,7 @@
         <p:spPr>
           <a:xfrm>
             <a:off x="542880" y="3452760"/>
-            <a:ext cx="3456000" cy="493920"/>
+            <a:ext cx="3453840" cy="491760"/>
           </a:xfrm>
           <a:prstGeom prst="rect">
             <a:avLst/>
@@ -16209,7 +16209,7 @@
         <p:spPr>
           <a:xfrm>
             <a:off x="4240080" y="2381400"/>
-            <a:ext cx="3694320" cy="1722600"/>
+            <a:ext cx="3692160" cy="1720440"/>
           </a:xfrm>
           <a:custGeom>
             <a:avLst/>
@@ -16263,7 +16263,7 @@
         <p:spPr>
           <a:xfrm>
             <a:off x="4397400" y="2538360"/>
-            <a:ext cx="3475080" cy="265320"/>
+            <a:ext cx="3472920" cy="263160"/>
           </a:xfrm>
           <a:prstGeom prst="rect">
             <a:avLst/>
@@ -16315,7 +16315,7 @@
         <p:spPr>
           <a:xfrm>
             <a:off x="4397400" y="2881440"/>
-            <a:ext cx="3456000" cy="493920"/>
+            <a:ext cx="3453840" cy="491760"/>
           </a:xfrm>
           <a:prstGeom prst="rect">
             <a:avLst/>
@@ -16377,7 +16377,7 @@
         <p:spPr>
           <a:xfrm>
             <a:off x="4397400" y="3452760"/>
-            <a:ext cx="3456000" cy="493920"/>
+            <a:ext cx="3453840" cy="491760"/>
           </a:xfrm>
           <a:prstGeom prst="rect">
             <a:avLst/>
@@ -16439,7 +16439,7 @@
         <p:spPr>
           <a:xfrm>
             <a:off x="399960" y="4262400"/>
-            <a:ext cx="7533000" cy="1636920"/>
+            <a:ext cx="7530840" cy="1634760"/>
           </a:xfrm>
           <a:custGeom>
             <a:avLst/>
@@ -16490,7 +16490,7 @@
         <p:spPr>
           <a:xfrm>
             <a:off x="399960" y="4262400"/>
-            <a:ext cx="36720" cy="1636920"/>
+            <a:ext cx="34560" cy="1634760"/>
           </a:xfrm>
           <a:custGeom>
             <a:avLst/>
@@ -16541,7 +16541,7 @@
         <p:spPr>
           <a:xfrm>
             <a:off x="571680" y="4414680"/>
-            <a:ext cx="7304400" cy="265320"/>
+            <a:ext cx="7302240" cy="263160"/>
           </a:xfrm>
           <a:prstGeom prst="rect">
             <a:avLst/>
@@ -16593,7 +16593,7 @@
         <p:spPr>
           <a:xfrm>
             <a:off x="619200" y="4791240"/>
-            <a:ext cx="93960" cy="150840"/>
+            <a:ext cx="91800" cy="148680"/>
           </a:xfrm>
           <a:custGeom>
             <a:avLst/>
@@ -16748,7 +16748,7 @@
         <p:spPr>
           <a:xfrm>
             <a:off x="819000" y="4757760"/>
-            <a:ext cx="3360960" cy="455760"/>
+            <a:ext cx="3358800" cy="453600"/>
           </a:xfrm>
           <a:prstGeom prst="rect">
             <a:avLst/>
@@ -16810,7 +16810,7 @@
         <p:spPr>
           <a:xfrm>
             <a:off x="4282920" y="4791240"/>
-            <a:ext cx="131760" cy="150840"/>
+            <a:ext cx="129600" cy="148680"/>
           </a:xfrm>
           <a:custGeom>
             <a:avLst/>
@@ -16942,7 +16942,7 @@
         <p:spPr>
           <a:xfrm>
             <a:off x="4502160" y="4757760"/>
-            <a:ext cx="3360960" cy="455760"/>
+            <a:ext cx="3358800" cy="453600"/>
           </a:xfrm>
           <a:prstGeom prst="rect">
             <a:avLst/>
@@ -17004,7 +17004,7 @@
         <p:spPr>
           <a:xfrm>
             <a:off x="590400" y="5324400"/>
-            <a:ext cx="150840" cy="150840"/>
+            <a:ext cx="148680" cy="148680"/>
           </a:xfrm>
           <a:custGeom>
             <a:avLst/>
@@ -17227,7 +17227,7 @@
         <p:spPr>
           <a:xfrm>
             <a:off x="819000" y="5291280"/>
-            <a:ext cx="3360960" cy="455760"/>
+            <a:ext cx="3358800" cy="453600"/>
           </a:xfrm>
           <a:prstGeom prst="rect">
             <a:avLst/>
@@ -17289,7 +17289,7 @@
         <p:spPr>
           <a:xfrm>
             <a:off x="4263840" y="5324400"/>
-            <a:ext cx="169920" cy="150840"/>
+            <a:ext cx="167760" cy="148680"/>
           </a:xfrm>
           <a:custGeom>
             <a:avLst/>
@@ -17486,7 +17486,7 @@
         <p:spPr>
           <a:xfrm>
             <a:off x="4502160" y="5291280"/>
-            <a:ext cx="3360960" cy="455760"/>
+            <a:ext cx="3358800" cy="453600"/>
           </a:xfrm>
           <a:prstGeom prst="rect">
             <a:avLst/>
@@ -17548,7 +17548,7 @@
         <p:spPr>
           <a:xfrm>
             <a:off x="8132760" y="1300320"/>
-            <a:ext cx="3675240" cy="2637000"/>
+            <a:ext cx="3673080" cy="2634840"/>
           </a:xfrm>
           <a:custGeom>
             <a:avLst/>
@@ -17602,7 +17602,7 @@
         <p:spPr>
           <a:xfrm>
             <a:off x="8242200" y="1457280"/>
-            <a:ext cx="3456000" cy="265320"/>
+            <a:ext cx="3453840" cy="263160"/>
           </a:xfrm>
           <a:prstGeom prst="rect">
             <a:avLst/>
@@ -17654,7 +17654,7 @@
         <p:spPr>
           <a:xfrm>
             <a:off x="8289720" y="1838160"/>
-            <a:ext cx="3360960" cy="1332000"/>
+            <a:ext cx="3358800" cy="1329840"/>
           </a:xfrm>
           <a:prstGeom prst="roundRect">
             <a:avLst>
@@ -17686,7 +17686,7 @@
         <p:spPr>
           <a:xfrm>
             <a:off x="8251920" y="3286080"/>
-            <a:ext cx="3436920" cy="493920"/>
+            <a:ext cx="3434760" cy="491760"/>
           </a:xfrm>
           <a:prstGeom prst="rect">
             <a:avLst/>
@@ -17738,7 +17738,7 @@
         <p:spPr>
           <a:xfrm>
             <a:off x="8128080" y="4095720"/>
-            <a:ext cx="3684600" cy="1636920"/>
+            <a:ext cx="3682440" cy="1634760"/>
           </a:xfrm>
           <a:custGeom>
             <a:avLst/>
@@ -17789,7 +17789,7 @@
         <p:spPr>
           <a:xfrm>
             <a:off x="8280360" y="4248000"/>
-            <a:ext cx="3465720" cy="265320"/>
+            <a:ext cx="3463560" cy="263160"/>
           </a:xfrm>
           <a:prstGeom prst="rect">
             <a:avLst/>
@@ -17841,7 +17841,7 @@
         <p:spPr>
           <a:xfrm>
             <a:off x="8280360" y="4591080"/>
-            <a:ext cx="3456000" cy="989280"/>
+            <a:ext cx="3453840" cy="987120"/>
           </a:xfrm>
           <a:prstGeom prst="rect">
             <a:avLst/>
@@ -17930,7 +17930,7 @@
         <p:spPr>
           <a:xfrm>
             <a:off x="370440" y="370440"/>
-            <a:ext cx="11523600" cy="221040"/>
+            <a:ext cx="11521440" cy="218880"/>
           </a:xfrm>
           <a:prstGeom prst="rect">
             <a:avLst/>
@@ -17958,7 +17958,7 @@
               <a:buNone/>
             </a:pPr>
             <a:r>
-              <a:rPr b="1" lang="en-US" sz="1170" spc="46" strike="noStrike">
+              <a:rPr b="1" lang="en-US" sz="1170" spc="29" strike="noStrike">
                 <a:solidFill>
                   <a:srgbClr val="0984e3"/>
                 </a:solidFill>
@@ -17982,7 +17982,7 @@
         <p:spPr>
           <a:xfrm>
             <a:off x="370440" y="667080"/>
-            <a:ext cx="11671920" cy="443160"/>
+            <a:ext cx="11669760" cy="441000"/>
           </a:xfrm>
           <a:prstGeom prst="rect">
             <a:avLst/>
@@ -18034,7 +18034,7 @@
         <p:spPr>
           <a:xfrm>
             <a:off x="370440" y="1334160"/>
-            <a:ext cx="5668560" cy="1202760"/>
+            <a:ext cx="5666400" cy="1200600"/>
           </a:xfrm>
           <a:prstGeom prst="rect">
             <a:avLst/>
@@ -18096,7 +18096,7 @@
         <p:spPr>
           <a:xfrm>
             <a:off x="375120" y="2691360"/>
-            <a:ext cx="5566320" cy="2157120"/>
+            <a:ext cx="5564160" cy="2154960"/>
           </a:xfrm>
           <a:custGeom>
             <a:avLst/>
@@ -18150,7 +18150,7 @@
         <p:spPr>
           <a:xfrm>
             <a:off x="565200" y="2881080"/>
-            <a:ext cx="5279400" cy="258120"/>
+            <a:ext cx="5277240" cy="255960"/>
           </a:xfrm>
           <a:prstGeom prst="rect">
             <a:avLst/>
@@ -18202,7 +18202,7 @@
         <p:spPr>
           <a:xfrm>
             <a:off x="565200" y="3251880"/>
-            <a:ext cx="5260680" cy="480240"/>
+            <a:ext cx="5258520" cy="478080"/>
           </a:xfrm>
           <a:prstGeom prst="rect">
             <a:avLst/>
@@ -18254,7 +18254,7 @@
         <p:spPr>
           <a:xfrm>
             <a:off x="592920" y="3877200"/>
-            <a:ext cx="128160" cy="146880"/>
+            <a:ext cx="126000" cy="144720"/>
           </a:xfrm>
           <a:custGeom>
             <a:avLst/>
@@ -18335,7 +18335,7 @@
         <p:spPr>
           <a:xfrm>
             <a:off x="804600" y="3844800"/>
-            <a:ext cx="5021280" cy="221040"/>
+            <a:ext cx="5019120" cy="218880"/>
           </a:xfrm>
           <a:prstGeom prst="rect">
             <a:avLst/>
@@ -18387,7 +18387,7 @@
         <p:spPr>
           <a:xfrm>
             <a:off x="592920" y="4173480"/>
-            <a:ext cx="128160" cy="146880"/>
+            <a:ext cx="126000" cy="144720"/>
           </a:xfrm>
           <a:custGeom>
             <a:avLst/>
@@ -18468,7 +18468,7 @@
         <p:spPr>
           <a:xfrm>
             <a:off x="804600" y="4141080"/>
-            <a:ext cx="5021280" cy="221040"/>
+            <a:ext cx="5019120" cy="218880"/>
           </a:xfrm>
           <a:prstGeom prst="rect">
             <a:avLst/>
@@ -18520,7 +18520,7 @@
         <p:spPr>
           <a:xfrm>
             <a:off x="592920" y="4470120"/>
-            <a:ext cx="128160" cy="146880"/>
+            <a:ext cx="126000" cy="144720"/>
           </a:xfrm>
           <a:custGeom>
             <a:avLst/>
@@ -18601,7 +18601,7 @@
         <p:spPr>
           <a:xfrm>
             <a:off x="804600" y="4437720"/>
-            <a:ext cx="5021280" cy="221040"/>
+            <a:ext cx="5019120" cy="218880"/>
           </a:xfrm>
           <a:prstGeom prst="rect">
             <a:avLst/>
@@ -18653,7 +18653,7 @@
         <p:spPr>
           <a:xfrm>
             <a:off x="375120" y="5007600"/>
-            <a:ext cx="5566320" cy="1471680"/>
+            <a:ext cx="5564160" cy="1469520"/>
           </a:xfrm>
           <a:custGeom>
             <a:avLst/>
@@ -18707,7 +18707,7 @@
         <p:spPr>
           <a:xfrm>
             <a:off x="565200" y="5197320"/>
-            <a:ext cx="5279400" cy="258120"/>
+            <a:ext cx="5277240" cy="255960"/>
           </a:xfrm>
           <a:prstGeom prst="rect">
             <a:avLst/>
@@ -18759,7 +18759,7 @@
         <p:spPr>
           <a:xfrm>
             <a:off x="565200" y="5567760"/>
-            <a:ext cx="5260680" cy="721080"/>
+            <a:ext cx="5258520" cy="718920"/>
           </a:xfrm>
           <a:prstGeom prst="rect">
             <a:avLst/>
@@ -18811,7 +18811,7 @@
         <p:spPr>
           <a:xfrm>
             <a:off x="6242040" y="1334160"/>
-            <a:ext cx="5575680" cy="2842920"/>
+            <a:ext cx="5573520" cy="2840760"/>
           </a:xfrm>
           <a:custGeom>
             <a:avLst/>
@@ -18862,7 +18862,7 @@
         <p:spPr>
           <a:xfrm>
             <a:off x="6427440" y="1519200"/>
-            <a:ext cx="5316480" cy="295200"/>
+            <a:ext cx="5314320" cy="293040"/>
           </a:xfrm>
           <a:prstGeom prst="rect">
             <a:avLst/>
@@ -18914,7 +18914,7 @@
         <p:spPr>
           <a:xfrm>
             <a:off x="6427440" y="1968840"/>
-            <a:ext cx="5145120" cy="454680"/>
+            <a:ext cx="5142960" cy="452520"/>
           </a:xfrm>
           <a:prstGeom prst="rect">
             <a:avLst/>
@@ -18966,7 +18966,7 @@
         <p:spPr>
           <a:xfrm>
             <a:off x="6427440" y="2580120"/>
-            <a:ext cx="5279400" cy="480240"/>
+            <a:ext cx="5277240" cy="478080"/>
           </a:xfrm>
           <a:prstGeom prst="rect">
             <a:avLst/>
@@ -19018,7 +19018,7 @@
         <p:spPr>
           <a:xfrm>
             <a:off x="6436800" y="3205440"/>
-            <a:ext cx="165240" cy="146880"/>
+            <a:ext cx="163080" cy="144720"/>
           </a:xfrm>
           <a:custGeom>
             <a:avLst/>
@@ -19203,7 +19203,7 @@
         <p:spPr>
           <a:xfrm>
             <a:off x="6666840" y="3173040"/>
-            <a:ext cx="5040000" cy="221040"/>
+            <a:ext cx="5037840" cy="218880"/>
           </a:xfrm>
           <a:prstGeom prst="rect">
             <a:avLst/>
@@ -19265,7 +19265,7 @@
         <p:spPr>
           <a:xfrm>
             <a:off x="6445800" y="3502080"/>
-            <a:ext cx="146880" cy="146880"/>
+            <a:ext cx="144720" cy="144720"/>
           </a:xfrm>
           <a:custGeom>
             <a:avLst/>
@@ -19432,7 +19432,7 @@
         <p:spPr>
           <a:xfrm>
             <a:off x="6666840" y="3469680"/>
-            <a:ext cx="5040000" cy="221040"/>
+            <a:ext cx="5037840" cy="218880"/>
           </a:xfrm>
           <a:prstGeom prst="rect">
             <a:avLst/>
@@ -19494,7 +19494,7 @@
         <p:spPr>
           <a:xfrm>
             <a:off x="6427440" y="3798360"/>
-            <a:ext cx="183960" cy="146880"/>
+            <a:ext cx="181800" cy="144720"/>
           </a:xfrm>
           <a:custGeom>
             <a:avLst/>
@@ -19726,7 +19726,7 @@
         <p:spPr>
           <a:xfrm>
             <a:off x="6666840" y="3765960"/>
-            <a:ext cx="5040000" cy="221040"/>
+            <a:ext cx="5037840" cy="218880"/>
           </a:xfrm>
           <a:prstGeom prst="rect">
             <a:avLst/>
@@ -19788,7 +19788,7 @@
         <p:spPr>
           <a:xfrm>
             <a:off x="6260760" y="4321800"/>
-            <a:ext cx="5557320" cy="869400"/>
+            <a:ext cx="5555160" cy="867240"/>
           </a:xfrm>
           <a:custGeom>
             <a:avLst/>
@@ -19839,7 +19839,7 @@
         <p:spPr>
           <a:xfrm>
             <a:off x="6260760" y="4321800"/>
-            <a:ext cx="35640" cy="869400"/>
+            <a:ext cx="33480" cy="867240"/>
           </a:xfrm>
           <a:custGeom>
             <a:avLst/>
@@ -19890,7 +19890,7 @@
         <p:spPr>
           <a:xfrm>
             <a:off x="6464520" y="4507200"/>
-            <a:ext cx="5242320" cy="239400"/>
+            <a:ext cx="5240160" cy="237240"/>
           </a:xfrm>
           <a:prstGeom prst="rect">
             <a:avLst/>
@@ -19942,7 +19942,7 @@
         <p:spPr>
           <a:xfrm>
             <a:off x="6464520" y="4822200"/>
-            <a:ext cx="5232960" cy="183960"/>
+            <a:ext cx="5230800" cy="181800"/>
           </a:xfrm>
           <a:prstGeom prst="rect">
             <a:avLst/>
@@ -20041,7 +20041,7 @@
         <p:spPr>
           <a:xfrm>
             <a:off x="380880" y="380880"/>
-            <a:ext cx="11657160" cy="455760"/>
+            <a:ext cx="11655000" cy="453600"/>
           </a:xfrm>
           <a:prstGeom prst="rect">
             <a:avLst/>
@@ -20093,7 +20093,7 @@
         <p:spPr>
           <a:xfrm>
             <a:off x="380880" y="952560"/>
-            <a:ext cx="760680" cy="17640"/>
+            <a:ext cx="758520" cy="15480"/>
           </a:xfrm>
           <a:custGeom>
             <a:avLst/>
@@ -20144,7 +20144,7 @@
         <p:spPr>
           <a:xfrm>
             <a:off x="380880" y="1428840"/>
-            <a:ext cx="750960" cy="570240"/>
+            <a:ext cx="748800" cy="568080"/>
           </a:xfrm>
           <a:prstGeom prst="rect">
             <a:avLst/>
@@ -20198,7 +20198,7 @@
         <p:spPr>
           <a:xfrm>
             <a:off x="1034280" y="1504800"/>
-            <a:ext cx="4189680" cy="303480"/>
+            <a:ext cx="4187520" cy="301320"/>
           </a:xfrm>
           <a:prstGeom prst="rect">
             <a:avLst/>
@@ -20250,7 +20250,7 @@
         <p:spPr>
           <a:xfrm>
             <a:off x="1034280" y="1886040"/>
-            <a:ext cx="4160880" cy="274680"/>
+            <a:ext cx="4158720" cy="272520"/>
           </a:xfrm>
           <a:prstGeom prst="rect">
             <a:avLst/>
@@ -20302,7 +20302,7 @@
         <p:spPr>
           <a:xfrm>
             <a:off x="6400800" y="1428840"/>
-            <a:ext cx="855720" cy="570240"/>
+            <a:ext cx="853560" cy="568080"/>
           </a:xfrm>
           <a:prstGeom prst="rect">
             <a:avLst/>
@@ -20356,7 +20356,7 @@
         <p:spPr>
           <a:xfrm>
             <a:off x="7160040" y="1504800"/>
-            <a:ext cx="4761000" cy="303480"/>
+            <a:ext cx="4758840" cy="301320"/>
           </a:xfrm>
           <a:prstGeom prst="rect">
             <a:avLst/>
@@ -20408,7 +20408,7 @@
         <p:spPr>
           <a:xfrm>
             <a:off x="7160040" y="1886040"/>
-            <a:ext cx="4732560" cy="560520"/>
+            <a:ext cx="4730400" cy="558360"/>
           </a:xfrm>
           <a:prstGeom prst="rect">
             <a:avLst/>
@@ -20460,7 +20460,7 @@
         <p:spPr>
           <a:xfrm>
             <a:off x="380880" y="2824200"/>
-            <a:ext cx="855720" cy="570240"/>
+            <a:ext cx="853560" cy="568080"/>
           </a:xfrm>
           <a:prstGeom prst="rect">
             <a:avLst/>
@@ -20514,7 +20514,7 @@
         <p:spPr>
           <a:xfrm>
             <a:off x="1143000" y="2900520"/>
-            <a:ext cx="3970440" cy="303480"/>
+            <a:ext cx="3968280" cy="301320"/>
           </a:xfrm>
           <a:prstGeom prst="rect">
             <a:avLst/>
@@ -20566,7 +20566,7 @@
         <p:spPr>
           <a:xfrm>
             <a:off x="1143000" y="3281400"/>
-            <a:ext cx="3942000" cy="274680"/>
+            <a:ext cx="3939840" cy="272520"/>
           </a:xfrm>
           <a:prstGeom prst="rect">
             <a:avLst/>
@@ -20618,7 +20618,7 @@
         <p:spPr>
           <a:xfrm>
             <a:off x="6400800" y="2824200"/>
-            <a:ext cx="884520" cy="570240"/>
+            <a:ext cx="882360" cy="568080"/>
           </a:xfrm>
           <a:prstGeom prst="rect">
             <a:avLst/>
@@ -20672,7 +20672,7 @@
         <p:spPr>
           <a:xfrm>
             <a:off x="7188480" y="2900520"/>
-            <a:ext cx="2475000" cy="303480"/>
+            <a:ext cx="2472840" cy="301320"/>
           </a:xfrm>
           <a:prstGeom prst="rect">
             <a:avLst/>
@@ -20724,7 +20724,7 @@
         <p:spPr>
           <a:xfrm>
             <a:off x="7188480" y="3281400"/>
-            <a:ext cx="2446560" cy="274680"/>
+            <a:ext cx="2444400" cy="272520"/>
           </a:xfrm>
           <a:prstGeom prst="rect">
             <a:avLst/>
@@ -20776,7 +20776,7 @@
         <p:spPr>
           <a:xfrm>
             <a:off x="380880" y="3940920"/>
-            <a:ext cx="846360" cy="570240"/>
+            <a:ext cx="844200" cy="568080"/>
           </a:xfrm>
           <a:prstGeom prst="rect">
             <a:avLst/>
@@ -20830,7 +20830,7 @@
         <p:spPr>
           <a:xfrm>
             <a:off x="1137240" y="4017240"/>
-            <a:ext cx="2865600" cy="303480"/>
+            <a:ext cx="2863440" cy="301320"/>
           </a:xfrm>
           <a:prstGeom prst="rect">
             <a:avLst/>
@@ -20882,7 +20882,7 @@
         <p:spPr>
           <a:xfrm>
             <a:off x="1137240" y="4398120"/>
-            <a:ext cx="2837160" cy="274680"/>
+            <a:ext cx="2835000" cy="272520"/>
           </a:xfrm>
           <a:prstGeom prst="rect">
             <a:avLst/>
@@ -20934,7 +20934,7 @@
         <p:spPr>
           <a:xfrm>
             <a:off x="6400800" y="3940920"/>
-            <a:ext cx="865440" cy="570240"/>
+            <a:ext cx="863280" cy="568080"/>
           </a:xfrm>
           <a:prstGeom prst="rect">
             <a:avLst/>
@@ -20988,7 +20988,7 @@
         <p:spPr>
           <a:xfrm>
             <a:off x="7171560" y="4017240"/>
-            <a:ext cx="3075120" cy="303480"/>
+            <a:ext cx="3072960" cy="301320"/>
           </a:xfrm>
           <a:prstGeom prst="rect">
             <a:avLst/>
@@ -21040,7 +21040,7 @@
         <p:spPr>
           <a:xfrm>
             <a:off x="7171560" y="4398120"/>
-            <a:ext cx="3046680" cy="274680"/>
+            <a:ext cx="3044520" cy="272520"/>
           </a:xfrm>
           <a:prstGeom prst="rect">
             <a:avLst/>
@@ -21129,7 +21129,7 @@
         <p:spPr>
           <a:xfrm>
             <a:off x="335880" y="335880"/>
-            <a:ext cx="11585880" cy="200160"/>
+            <a:ext cx="11583720" cy="198000"/>
           </a:xfrm>
           <a:prstGeom prst="rect">
             <a:avLst/>
@@ -21157,7 +21157,7 @@
               <a:buNone/>
             </a:pPr>
             <a:r>
-              <a:rPr b="1" lang="en-US" sz="1060" spc="43" strike="noStrike">
+              <a:rPr b="1" lang="en-US" sz="1060" spc="26" strike="noStrike">
                 <a:solidFill>
                   <a:srgbClr val="0984e3"/>
                 </a:solidFill>
@@ -21181,7 +21181,7 @@
         <p:spPr>
           <a:xfrm>
             <a:off x="335880" y="604440"/>
-            <a:ext cx="11720520" cy="401760"/>
+            <a:ext cx="11718360" cy="399600"/>
           </a:xfrm>
           <a:prstGeom prst="rect">
             <a:avLst/>
@@ -21233,7 +21233,7 @@
         <p:spPr>
           <a:xfrm>
             <a:off x="335880" y="1251000"/>
-            <a:ext cx="5994720" cy="456120"/>
+            <a:ext cx="5992560" cy="453960"/>
           </a:xfrm>
           <a:prstGeom prst="rect">
             <a:avLst/>
@@ -21285,7 +21285,7 @@
         <p:spPr>
           <a:xfrm>
             <a:off x="335880" y="1889280"/>
-            <a:ext cx="6875280" cy="653400"/>
+            <a:ext cx="6873120" cy="651240"/>
           </a:xfrm>
           <a:prstGeom prst="rect">
             <a:avLst/>
@@ -21337,7 +21337,7 @@
         <p:spPr>
           <a:xfrm>
             <a:off x="340200" y="2682720"/>
-            <a:ext cx="6800040" cy="1955160"/>
+            <a:ext cx="6797880" cy="1953000"/>
           </a:xfrm>
           <a:custGeom>
             <a:avLst/>
@@ -21391,7 +21391,7 @@
         <p:spPr>
           <a:xfrm>
             <a:off x="512280" y="2854800"/>
-            <a:ext cx="6539760" cy="233640"/>
+            <a:ext cx="6537600" cy="231480"/>
           </a:xfrm>
           <a:prstGeom prst="rect">
             <a:avLst/>
@@ -21443,7 +21443,7 @@
         <p:spPr>
           <a:xfrm>
             <a:off x="512280" y="3190680"/>
-            <a:ext cx="6522840" cy="216720"/>
+            <a:ext cx="6520680" cy="214560"/>
           </a:xfrm>
           <a:prstGeom prst="rect">
             <a:avLst/>
@@ -21495,7 +21495,7 @@
         <p:spPr>
           <a:xfrm>
             <a:off x="512280" y="3509640"/>
-            <a:ext cx="6455520" cy="636840"/>
+            <a:ext cx="6453360" cy="634680"/>
           </a:xfrm>
           <a:custGeom>
             <a:avLst/>
@@ -21546,7 +21546,7 @@
         <p:spPr>
           <a:xfrm>
             <a:off x="613080" y="3610440"/>
-            <a:ext cx="6321240" cy="200160"/>
+            <a:ext cx="6319080" cy="198000"/>
           </a:xfrm>
           <a:prstGeom prst="rect">
             <a:avLst/>
@@ -21598,7 +21598,7 @@
         <p:spPr>
           <a:xfrm>
             <a:off x="613080" y="3845520"/>
-            <a:ext cx="6321240" cy="200160"/>
+            <a:ext cx="6319080" cy="198000"/>
           </a:xfrm>
           <a:prstGeom prst="rect">
             <a:avLst/>
@@ -21650,7 +21650,7 @@
         <p:spPr>
           <a:xfrm>
             <a:off x="512280" y="4248720"/>
-            <a:ext cx="6522840" cy="216720"/>
+            <a:ext cx="6520680" cy="214560"/>
           </a:xfrm>
           <a:prstGeom prst="rect">
             <a:avLst/>
@@ -21702,7 +21702,7 @@
         <p:spPr>
           <a:xfrm>
             <a:off x="352800" y="4777560"/>
-            <a:ext cx="6791400" cy="1526760"/>
+            <a:ext cx="6789240" cy="1524600"/>
           </a:xfrm>
           <a:custGeom>
             <a:avLst/>
@@ -21753,7 +21753,7 @@
         <p:spPr>
           <a:xfrm>
             <a:off x="352800" y="4777560"/>
-            <a:ext cx="32040" cy="1526760"/>
+            <a:ext cx="29880" cy="1524600"/>
           </a:xfrm>
           <a:custGeom>
             <a:avLst/>
@@ -21804,7 +21804,7 @@
         <p:spPr>
           <a:xfrm>
             <a:off x="537480" y="4945680"/>
-            <a:ext cx="6522840" cy="233640"/>
+            <a:ext cx="6520680" cy="231480"/>
           </a:xfrm>
           <a:prstGeom prst="rect">
             <a:avLst/>
@@ -21856,7 +21856,7 @@
         <p:spPr>
           <a:xfrm>
             <a:off x="537480" y="5281560"/>
-            <a:ext cx="6505920" cy="216720"/>
+            <a:ext cx="6503760" cy="214560"/>
           </a:xfrm>
           <a:prstGeom prst="rect">
             <a:avLst/>
@@ -21908,7 +21908,7 @@
         <p:spPr>
           <a:xfrm>
             <a:off x="537480" y="5600520"/>
-            <a:ext cx="3214440" cy="200160"/>
+            <a:ext cx="3212280" cy="198000"/>
           </a:xfrm>
           <a:prstGeom prst="rect">
             <a:avLst/>
@@ -21970,7 +21970,7 @@
         <p:spPr>
           <a:xfrm>
             <a:off x="3823200" y="5600520"/>
-            <a:ext cx="3214440" cy="200160"/>
+            <a:ext cx="3212280" cy="198000"/>
           </a:xfrm>
           <a:prstGeom prst="rect">
             <a:avLst/>
@@ -22032,7 +22032,7 @@
         <p:spPr>
           <a:xfrm>
             <a:off x="537480" y="5936400"/>
-            <a:ext cx="3214440" cy="200160"/>
+            <a:ext cx="3212280" cy="198000"/>
           </a:xfrm>
           <a:prstGeom prst="rect">
             <a:avLst/>
@@ -22094,7 +22094,7 @@
         <p:spPr>
           <a:xfrm>
             <a:off x="3823200" y="5936400"/>
-            <a:ext cx="3214440" cy="200160"/>
+            <a:ext cx="3212280" cy="198000"/>
           </a:xfrm>
           <a:prstGeom prst="rect">
             <a:avLst/>
@@ -22156,7 +22156,7 @@
         <p:spPr>
           <a:xfrm>
             <a:off x="7415640" y="1213200"/>
-            <a:ext cx="4440240" cy="3499920"/>
+            <a:ext cx="4438080" cy="3497760"/>
           </a:xfrm>
           <a:custGeom>
             <a:avLst/>
@@ -22210,7 +22210,7 @@
         <p:spPr>
           <a:xfrm>
             <a:off x="7587720" y="1385280"/>
-            <a:ext cx="4096080" cy="1677960"/>
+            <a:ext cx="4093920" cy="1675800"/>
           </a:xfrm>
           <a:prstGeom prst="roundRect">
             <a:avLst>
@@ -22242,7 +22242,7 @@
         <p:spPr>
           <a:xfrm>
             <a:off x="7545600" y="3199320"/>
-            <a:ext cx="4179960" cy="233640"/>
+            <a:ext cx="4177800" cy="231480"/>
           </a:xfrm>
           <a:prstGeom prst="rect">
             <a:avLst/>
@@ -22294,7 +22294,7 @@
         <p:spPr>
           <a:xfrm>
             <a:off x="7621200" y="3564360"/>
-            <a:ext cx="99360" cy="132840"/>
+            <a:ext cx="97200" cy="130680"/>
           </a:xfrm>
           <a:custGeom>
             <a:avLst/>
@@ -22493,7 +22493,7 @@
         <p:spPr>
           <a:xfrm>
             <a:off x="7800120" y="3534840"/>
-            <a:ext cx="3951000" cy="200160"/>
+            <a:ext cx="3948840" cy="198000"/>
           </a:xfrm>
           <a:prstGeom prst="rect">
             <a:avLst/>
@@ -22555,7 +22555,7 @@
         <p:spPr>
           <a:xfrm>
             <a:off x="7604640" y="3832920"/>
-            <a:ext cx="132840" cy="132840"/>
+            <a:ext cx="130680" cy="130680"/>
           </a:xfrm>
           <a:custGeom>
             <a:avLst/>
@@ -22762,7 +22762,7 @@
         <p:spPr>
           <a:xfrm>
             <a:off x="7800120" y="3803760"/>
-            <a:ext cx="3951000" cy="200160"/>
+            <a:ext cx="3948840" cy="198000"/>
           </a:xfrm>
           <a:prstGeom prst="rect">
             <a:avLst/>
@@ -22824,7 +22824,7 @@
         <p:spPr>
           <a:xfrm>
             <a:off x="7604640" y="4101840"/>
-            <a:ext cx="132840" cy="132840"/>
+            <a:ext cx="130680" cy="130680"/>
           </a:xfrm>
           <a:custGeom>
             <a:avLst/>
@@ -23015,7 +23015,7 @@
         <p:spPr>
           <a:xfrm>
             <a:off x="7800120" y="4072320"/>
-            <a:ext cx="3951000" cy="200160"/>
+            <a:ext cx="3948840" cy="198000"/>
           </a:xfrm>
           <a:prstGeom prst="rect">
             <a:avLst/>
@@ -23077,7 +23077,7 @@
         <p:spPr>
           <a:xfrm>
             <a:off x="7587720" y="4370400"/>
-            <a:ext cx="166320" cy="132840"/>
+            <a:ext cx="164160" cy="130680"/>
           </a:xfrm>
           <a:custGeom>
             <a:avLst/>
@@ -23293,7 +23293,7 @@
         <p:spPr>
           <a:xfrm>
             <a:off x="7800120" y="4341240"/>
-            <a:ext cx="3951000" cy="200160"/>
+            <a:ext cx="3948840" cy="198000"/>
           </a:xfrm>
           <a:prstGeom prst="rect">
             <a:avLst/>
@@ -23355,7 +23355,7 @@
         <p:spPr>
           <a:xfrm>
             <a:off x="7411320" y="4853160"/>
-            <a:ext cx="4448880" cy="1291680"/>
+            <a:ext cx="4446720" cy="1289520"/>
           </a:xfrm>
           <a:custGeom>
             <a:avLst/>
@@ -23406,7 +23406,7 @@
         <p:spPr>
           <a:xfrm>
             <a:off x="7579440" y="5021280"/>
-            <a:ext cx="4188600" cy="233640"/>
+            <a:ext cx="4186440" cy="231480"/>
           </a:xfrm>
           <a:prstGeom prst="rect">
             <a:avLst/>
@@ -23458,7 +23458,7 @@
         <p:spPr>
           <a:xfrm>
             <a:off x="7579440" y="5323680"/>
-            <a:ext cx="4179960" cy="653400"/>
+            <a:ext cx="4177800" cy="651240"/>
           </a:xfrm>
           <a:prstGeom prst="rect">
             <a:avLst/>
@@ -23547,7 +23547,7 @@
         <p:spPr>
           <a:xfrm>
             <a:off x="5486400" y="585720"/>
-            <a:ext cx="1217880" cy="17640"/>
+            <a:ext cx="1215720" cy="15480"/>
           </a:xfrm>
           <a:custGeom>
             <a:avLst/>
@@ -23598,7 +23598,7 @@
         <p:spPr>
           <a:xfrm>
             <a:off x="3664080" y="909720"/>
-            <a:ext cx="4865760" cy="1427400"/>
+            <a:ext cx="4863600" cy="1425240"/>
           </a:xfrm>
           <a:prstGeom prst="rect">
             <a:avLst/>
@@ -23671,7 +23671,7 @@
         <p:spPr>
           <a:xfrm>
             <a:off x="5486400" y="2643120"/>
-            <a:ext cx="1217880" cy="17640"/>
+            <a:ext cx="1215720" cy="15480"/>
           </a:xfrm>
           <a:custGeom>
             <a:avLst/>
@@ -23722,7 +23722,7 @@
         <p:spPr>
           <a:xfrm>
             <a:off x="1771560" y="2967120"/>
-            <a:ext cx="8647200" cy="1113120"/>
+            <a:ext cx="8645040" cy="1110960"/>
           </a:xfrm>
           <a:prstGeom prst="rect">
             <a:avLst/>
@@ -23774,7 +23774,7 @@
         <p:spPr>
           <a:xfrm>
             <a:off x="1781280" y="4309920"/>
-            <a:ext cx="8628120" cy="1236960"/>
+            <a:ext cx="8625960" cy="1234800"/>
           </a:xfrm>
           <a:prstGeom prst="rect">
             <a:avLst/>
@@ -23826,7 +23826,7 @@
         <p:spPr>
           <a:xfrm>
             <a:off x="2615400" y="6005520"/>
-            <a:ext cx="6961320" cy="265320"/>
+            <a:ext cx="6959160" cy="263160"/>
           </a:xfrm>
           <a:prstGeom prst="rect">
             <a:avLst/>
@@ -23915,7 +23915,7 @@
         <p:spPr>
           <a:xfrm>
             <a:off x="609480" y="1781280"/>
-            <a:ext cx="12190680" cy="1217880"/>
+            <a:ext cx="12188520" cy="1215720"/>
           </a:xfrm>
           <a:prstGeom prst="rect">
             <a:avLst/>
@@ -23969,7 +23969,7 @@
         <p:spPr>
           <a:xfrm>
             <a:off x="609480" y="3152880"/>
-            <a:ext cx="11866680" cy="1141560"/>
+            <a:ext cx="11864520" cy="1139400"/>
           </a:xfrm>
           <a:prstGeom prst="rect">
             <a:avLst/>
@@ -24042,7 +24042,7 @@
         <p:spPr>
           <a:xfrm>
             <a:off x="609480" y="4524480"/>
-            <a:ext cx="1217880" cy="17640"/>
+            <a:ext cx="1215720" cy="15480"/>
           </a:xfrm>
           <a:custGeom>
             <a:avLst/>
@@ -24093,7 +24093,7 @@
         <p:spPr>
           <a:xfrm>
             <a:off x="609480" y="4772160"/>
-            <a:ext cx="11695320" cy="303480"/>
+            <a:ext cx="11693160" cy="301320"/>
           </a:xfrm>
           <a:prstGeom prst="rect">
             <a:avLst/>
@@ -24182,7 +24182,7 @@
         <p:spPr>
           <a:xfrm>
             <a:off x="380880" y="380880"/>
-            <a:ext cx="11504880" cy="227160"/>
+            <a:ext cx="11502720" cy="225000"/>
           </a:xfrm>
           <a:prstGeom prst="rect">
             <a:avLst/>
@@ -24210,7 +24210,7 @@
               <a:buNone/>
             </a:pPr>
             <a:r>
-              <a:rPr b="1" lang="en-US" sz="1200" spc="49" strike="noStrike">
+              <a:rPr b="1" lang="en-US" sz="1200" spc="32" strike="noStrike">
                 <a:solidFill>
                   <a:srgbClr val="0984e3"/>
                 </a:solidFill>
@@ -24234,7 +24234,7 @@
         <p:spPr>
           <a:xfrm>
             <a:off x="380880" y="685800"/>
-            <a:ext cx="11657160" cy="455760"/>
+            <a:ext cx="11655000" cy="453600"/>
           </a:xfrm>
           <a:prstGeom prst="rect">
             <a:avLst/>
@@ -24285,8 +24285,8 @@
         </p:nvSpPr>
         <p:spPr>
           <a:xfrm>
-            <a:off x="380880" y="1371600"/>
-            <a:ext cx="6828120" cy="1236960"/>
+            <a:off x="11340000" y="6144840"/>
+            <a:ext cx="6825960" cy="1234800"/>
           </a:xfrm>
           <a:prstGeom prst="rect">
             <a:avLst/>
@@ -24316,11 +24316,8 @@
             <a:r>
               <a:rPr b="1" i="1" lang="en-US" sz="1500" spc="-1" strike="noStrike">
                 <a:solidFill>
-                  <a:srgbClr val="00008b"/>
-                </a:solidFill>
-                <a:highlight>
-                  <a:srgbClr val="ffff00"/>
-                </a:highlight>
+                  <a:srgbClr val="2a6099"/>
+                </a:solidFill>
                 <a:latin typeface="Quattrocento Sans"/>
                 <a:ea typeface="Quattrocento Sans"/>
               </a:rPr>
@@ -24329,23 +24326,24 @@
             <a:r>
               <a:rPr b="0" i="1" lang="en-US" sz="1500" spc="-1" strike="noStrike">
                 <a:solidFill>
-                  <a:srgbClr val="00008b"/>
-                </a:solidFill>
-                <a:highlight>
-                  <a:srgbClr val="ffff00"/>
-                </a:highlight>
+                  <a:srgbClr val="2a6099"/>
+                </a:solidFill>
                 <a:latin typeface="Quattrocento Sans"/>
                 <a:ea typeface="Quattrocento Sans"/>
               </a:rPr>
-              <a:t> It provides a structured approach to understanding how individuals or groups make decisions in situations where the outcome depends on the choices of multiple participants.</a:t>
-            </a:r>
-            <a:endParaRPr b="0" i="1" lang="en-HK" sz="1500" spc="-1" strike="noStrike">
-              <a:solidFill>
-                <a:srgbClr val="00008b"/>
-              </a:solidFill>
-              <a:highlight>
-                <a:srgbClr val="ffff00"/>
-              </a:highlight>
+              <a:t> It provides a structured approach to understanding how individuals or groups make decisions in situations where the outcome depends on the choices of multiple participan</a:t>
+            </a:r>
+            <a:r>
+              <a:rPr b="0" lang="en-US" sz="1500" spc="-1" strike="noStrike">
+                <a:solidFill>
+                  <a:srgbClr val="00008b"/>
+                </a:solidFill>
+                <a:latin typeface="Quattrocento Sans"/>
+                <a:ea typeface="Quattrocento Sans"/>
+              </a:rPr>
+              <a:t>ts.</a:t>
+            </a:r>
+            <a:endParaRPr b="0" lang="en-HK" sz="1500" spc="-1" strike="noStrike">
               <a:latin typeface="Arial"/>
             </a:endParaRPr>
           </a:p>
@@ -24359,8 +24357,8 @@
         </p:nvSpPr>
         <p:spPr>
           <a:xfrm>
-            <a:off x="380880" y="2838600"/>
-            <a:ext cx="6818400" cy="1113120"/>
+            <a:off x="3240000" y="3949560"/>
+            <a:ext cx="3957120" cy="360"/>
           </a:xfrm>
           <a:prstGeom prst="rect">
             <a:avLst/>
@@ -24390,14 +24388,33 @@
             <a:r>
               <a:rPr b="0" i="1" lang="en-US" sz="1350" spc="-1" strike="noStrike">
                 <a:solidFill>
-                  <a:srgbClr val="00008b"/>
-                </a:solidFill>
+                  <a:srgbClr val="2a6099"/>
+                </a:solidFill>
+                <a:highlight>
+                  <a:srgbClr val="08ffff"/>
+                </a:highlight>
                 <a:latin typeface="Quattrocento Sans"/>
                 <a:ea typeface="Quattrocento Sans"/>
               </a:rPr>
-              <a:t>Originally developed to investigate rational and economic behavior, game theory has evolved into a powerful tool with applications spanning economics, political science, biology, psychology, and computer science. It helps us predict behavior, design optimal strategies, and understand the dynamics of cooperation and competition.</a:t>
-            </a:r>
-            <a:endParaRPr b="0" lang="en-HK" sz="1350" spc="-1" strike="noStrike">
+              <a:t>Originally developed to investigate rational and economic behavior, game theory has evolved into a powerful tool with applications spanning economics, political science, biology, psychology, and computer science. It helps us predict behavior, design optima</a:t>
+            </a:r>
+            <a:r>
+              <a:rPr b="0" i="1" lang="en-US" sz="1350" spc="-1" strike="noStrike">
+                <a:solidFill>
+                  <a:srgbClr val="2a6099"/>
+                </a:solidFill>
+                <a:highlight>
+                  <a:srgbClr val="08ffff"/>
+                </a:highlight>
+                <a:latin typeface="Quattrocento Sans"/>
+                <a:ea typeface="Quattrocento Sans"/>
+              </a:rPr>
+              <a:t>l strategies, and understand the dynamics of cooperation and competition.</a:t>
+            </a:r>
+            <a:endParaRPr b="0" i="1" lang="en-HK" sz="1350" spc="-1" strike="noStrike">
+              <a:solidFill>
+                <a:srgbClr val="2a6099"/>
+              </a:solidFill>
               <a:latin typeface="Arial"/>
             </a:endParaRPr>
           </a:p>
@@ -24412,7 +24429,7 @@
         <p:spPr>
           <a:xfrm>
             <a:off x="399960" y="4986360"/>
-            <a:ext cx="6713640" cy="1360800"/>
+            <a:ext cx="6711480" cy="1358640"/>
           </a:xfrm>
           <a:custGeom>
             <a:avLst/>
@@ -24463,7 +24480,7 @@
         <p:spPr>
           <a:xfrm>
             <a:off x="399960" y="4986360"/>
-            <a:ext cx="36720" cy="1360800"/>
+            <a:ext cx="34560" cy="1358640"/>
           </a:xfrm>
           <a:custGeom>
             <a:avLst/>
@@ -24514,7 +24531,7 @@
         <p:spPr>
           <a:xfrm>
             <a:off x="647640" y="5214960"/>
-            <a:ext cx="6323040" cy="560520"/>
+            <a:ext cx="6320880" cy="558360"/>
           </a:xfrm>
           <a:prstGeom prst="rect">
             <a:avLst/>
@@ -24566,7 +24583,7 @@
         <p:spPr>
           <a:xfrm>
             <a:off x="647640" y="5886360"/>
-            <a:ext cx="6313680" cy="227160"/>
+            <a:ext cx="6311520" cy="225000"/>
           </a:xfrm>
           <a:prstGeom prst="rect">
             <a:avLst/>
@@ -24628,7 +24645,7 @@
         <p:spPr>
           <a:xfrm>
             <a:off x="7426440" y="1376280"/>
-            <a:ext cx="4380120" cy="1494000"/>
+            <a:ext cx="4377960" cy="1491840"/>
           </a:xfrm>
           <a:custGeom>
             <a:avLst/>
@@ -24682,7 +24699,7 @@
         <p:spPr>
           <a:xfrm>
             <a:off x="7660080" y="1609560"/>
-            <a:ext cx="379440" cy="379440"/>
+            <a:ext cx="377280" cy="377280"/>
           </a:xfrm>
           <a:custGeom>
             <a:avLst/>
@@ -24733,7 +24750,7 @@
         <p:spPr>
           <a:xfrm>
             <a:off x="7745760" y="1714680"/>
-            <a:ext cx="212760" cy="169920"/>
+            <a:ext cx="210600" cy="167760"/>
           </a:xfrm>
           <a:custGeom>
             <a:avLst/>
@@ -24949,7 +24966,7 @@
         <p:spPr>
           <a:xfrm>
             <a:off x="8155440" y="1666800"/>
-            <a:ext cx="636840" cy="265320"/>
+            <a:ext cx="634680" cy="263160"/>
           </a:xfrm>
           <a:prstGeom prst="rect">
             <a:avLst/>
@@ -25001,7 +25018,7 @@
         <p:spPr>
           <a:xfrm>
             <a:off x="7660080" y="2143080"/>
-            <a:ext cx="3989520" cy="493920"/>
+            <a:ext cx="3987360" cy="491760"/>
           </a:xfrm>
           <a:prstGeom prst="rect">
             <a:avLst/>
@@ -25053,7 +25070,7 @@
         <p:spPr>
           <a:xfrm>
             <a:off x="7426440" y="3110040"/>
-            <a:ext cx="4380120" cy="1494000"/>
+            <a:ext cx="4377960" cy="1491840"/>
           </a:xfrm>
           <a:custGeom>
             <a:avLst/>
@@ -25107,7 +25124,7 @@
         <p:spPr>
           <a:xfrm>
             <a:off x="7660080" y="3343320"/>
-            <a:ext cx="379440" cy="379440"/>
+            <a:ext cx="377280" cy="377280"/>
           </a:xfrm>
           <a:custGeom>
             <a:avLst/>
@@ -25158,7 +25175,7 @@
         <p:spPr>
           <a:xfrm>
             <a:off x="7767000" y="3448080"/>
-            <a:ext cx="169920" cy="169920"/>
+            <a:ext cx="167760" cy="167760"/>
           </a:xfrm>
           <a:custGeom>
             <a:avLst/>
@@ -25434,7 +25451,7 @@
         <p:spPr>
           <a:xfrm>
             <a:off x="8155440" y="3400560"/>
-            <a:ext cx="865440" cy="265320"/>
+            <a:ext cx="863280" cy="263160"/>
           </a:xfrm>
           <a:prstGeom prst="rect">
             <a:avLst/>
@@ -25486,7 +25503,7 @@
         <p:spPr>
           <a:xfrm>
             <a:off x="7660080" y="3876840"/>
-            <a:ext cx="3989520" cy="493920"/>
+            <a:ext cx="3987360" cy="491760"/>
           </a:xfrm>
           <a:prstGeom prst="rect">
             <a:avLst/>
@@ -25538,7 +25555,7 @@
         <p:spPr>
           <a:xfrm>
             <a:off x="7426440" y="4843440"/>
-            <a:ext cx="4380120" cy="1494000"/>
+            <a:ext cx="4377960" cy="1491840"/>
           </a:xfrm>
           <a:custGeom>
             <a:avLst/>
@@ -25592,7 +25609,7 @@
         <p:spPr>
           <a:xfrm>
             <a:off x="7660080" y="5076720"/>
-            <a:ext cx="379440" cy="379440"/>
+            <a:ext cx="377280" cy="377280"/>
           </a:xfrm>
           <a:custGeom>
             <a:avLst/>
@@ -25643,7 +25660,7 @@
         <p:spPr>
           <a:xfrm>
             <a:off x="7767000" y="5181480"/>
-            <a:ext cx="169920" cy="169920"/>
+            <a:ext cx="167760" cy="167760"/>
           </a:xfrm>
           <a:custGeom>
             <a:avLst/>
@@ -25820,7 +25837,7 @@
         <p:spPr>
           <a:xfrm>
             <a:off x="8155440" y="5133960"/>
-            <a:ext cx="655920" cy="265320"/>
+            <a:ext cx="653760" cy="263160"/>
           </a:xfrm>
           <a:prstGeom prst="rect">
             <a:avLst/>
@@ -25872,7 +25889,7 @@
         <p:spPr>
           <a:xfrm>
             <a:off x="7660080" y="5610240"/>
-            <a:ext cx="3989520" cy="493920"/>
+            <a:ext cx="3987360" cy="491760"/>
           </a:xfrm>
           <a:prstGeom prst="rect">
             <a:avLst/>
@@ -25961,7 +25978,7 @@
         <p:spPr>
           <a:xfrm>
             <a:off x="609480" y="1781280"/>
-            <a:ext cx="12190680" cy="1217880"/>
+            <a:ext cx="12188520" cy="1215720"/>
           </a:xfrm>
           <a:prstGeom prst="rect">
             <a:avLst/>
@@ -26015,7 +26032,7 @@
         <p:spPr>
           <a:xfrm>
             <a:off x="609480" y="3152880"/>
-            <a:ext cx="11866680" cy="1141560"/>
+            <a:ext cx="11864520" cy="1139400"/>
           </a:xfrm>
           <a:prstGeom prst="rect">
             <a:avLst/>
@@ -26088,7 +26105,7 @@
         <p:spPr>
           <a:xfrm>
             <a:off x="609480" y="4524480"/>
-            <a:ext cx="1217880" cy="17640"/>
+            <a:ext cx="1215720" cy="15480"/>
           </a:xfrm>
           <a:custGeom>
             <a:avLst/>
@@ -26139,7 +26156,7 @@
         <p:spPr>
           <a:xfrm>
             <a:off x="609480" y="4772160"/>
-            <a:ext cx="11695320" cy="303480"/>
+            <a:ext cx="11693160" cy="301320"/>
           </a:xfrm>
           <a:prstGeom prst="rect">
             <a:avLst/>
@@ -26228,7 +26245,7 @@
         <p:spPr>
           <a:xfrm>
             <a:off x="324360" y="324360"/>
-            <a:ext cx="11606760" cy="192960"/>
+            <a:ext cx="11604600" cy="190800"/>
           </a:xfrm>
           <a:prstGeom prst="rect">
             <a:avLst/>
@@ -26256,7 +26273,7 @@
               <a:buNone/>
             </a:pPr>
             <a:r>
-              <a:rPr b="1" lang="en-US" sz="1020" spc="41" strike="noStrike">
+              <a:rPr b="1" lang="en-US" sz="1020" spc="24" strike="noStrike">
                 <a:solidFill>
                   <a:srgbClr val="0984e3"/>
                 </a:solidFill>
@@ -26280,7 +26297,7 @@
         <p:spPr>
           <a:xfrm>
             <a:off x="324360" y="583560"/>
-            <a:ext cx="11736720" cy="387720"/>
+            <a:ext cx="11734560" cy="385560"/>
           </a:xfrm>
           <a:prstGeom prst="rect">
             <a:avLst/>
@@ -26332,7 +26349,7 @@
         <p:spPr>
           <a:xfrm>
             <a:off x="6095880" y="1167480"/>
-            <a:ext cx="14760" cy="4975920"/>
+            <a:ext cx="12600" cy="4973760"/>
           </a:xfrm>
           <a:custGeom>
             <a:avLst/>
@@ -26383,7 +26400,7 @@
         <p:spPr>
           <a:xfrm>
             <a:off x="1638000" y="1171440"/>
-            <a:ext cx="3865320" cy="720000"/>
+            <a:ext cx="3863160" cy="717840"/>
           </a:xfrm>
           <a:custGeom>
             <a:avLst/>
@@ -26437,7 +26454,7 @@
         <p:spPr>
           <a:xfrm>
             <a:off x="1698840" y="1305000"/>
-            <a:ext cx="3670920" cy="225360"/>
+            <a:ext cx="3668760" cy="223200"/>
           </a:xfrm>
           <a:prstGeom prst="rect">
             <a:avLst/>
@@ -26489,7 +26506,7 @@
         <p:spPr>
           <a:xfrm>
             <a:off x="1706760" y="1564560"/>
-            <a:ext cx="3662640" cy="192960"/>
+            <a:ext cx="3660480" cy="190800"/>
           </a:xfrm>
           <a:prstGeom prst="rect">
             <a:avLst/>
@@ -26541,7 +26558,7 @@
         <p:spPr>
           <a:xfrm>
             <a:off x="6683760" y="2030760"/>
-            <a:ext cx="3289680" cy="720000"/>
+            <a:ext cx="3287520" cy="717840"/>
           </a:xfrm>
           <a:custGeom>
             <a:avLst/>
@@ -26595,7 +26612,7 @@
         <p:spPr>
           <a:xfrm>
             <a:off x="6817320" y="2164320"/>
-            <a:ext cx="3095280" cy="225360"/>
+            <a:ext cx="3093120" cy="223200"/>
           </a:xfrm>
           <a:prstGeom prst="rect">
             <a:avLst/>
@@ -26647,7 +26664,7 @@
         <p:spPr>
           <a:xfrm>
             <a:off x="6817320" y="2423880"/>
-            <a:ext cx="3087000" cy="192960"/>
+            <a:ext cx="3084840" cy="190800"/>
           </a:xfrm>
           <a:prstGeom prst="rect">
             <a:avLst/>
@@ -26699,7 +26716,7 @@
         <p:spPr>
           <a:xfrm>
             <a:off x="633600" y="2885760"/>
-            <a:ext cx="4878720" cy="712080"/>
+            <a:ext cx="4876560" cy="709920"/>
           </a:xfrm>
           <a:custGeom>
             <a:avLst/>
@@ -26750,7 +26767,7 @@
         <p:spPr>
           <a:xfrm>
             <a:off x="633600" y="2885760"/>
-            <a:ext cx="30960" cy="712080"/>
+            <a:ext cx="28800" cy="709920"/>
           </a:xfrm>
           <a:custGeom>
             <a:avLst/>
@@ -26801,7 +26818,7 @@
         <p:spPr>
           <a:xfrm>
             <a:off x="706680" y="3015720"/>
-            <a:ext cx="4676040" cy="225360"/>
+            <a:ext cx="4673880" cy="223200"/>
           </a:xfrm>
           <a:prstGeom prst="rect">
             <a:avLst/>
@@ -26853,7 +26870,7 @@
         <p:spPr>
           <a:xfrm>
             <a:off x="714960" y="3274920"/>
-            <a:ext cx="4667760" cy="192960"/>
+            <a:ext cx="4665600" cy="190800"/>
           </a:xfrm>
           <a:prstGeom prst="rect">
             <a:avLst/>
@@ -26915,7 +26932,7 @@
         <p:spPr>
           <a:xfrm>
             <a:off x="6696000" y="3728880"/>
-            <a:ext cx="5016240" cy="712080"/>
+            <a:ext cx="5014080" cy="709920"/>
           </a:xfrm>
           <a:custGeom>
             <a:avLst/>
@@ -26966,7 +26983,7 @@
         <p:spPr>
           <a:xfrm>
             <a:off x="6696000" y="3728880"/>
-            <a:ext cx="30960" cy="712080"/>
+            <a:ext cx="28800" cy="709920"/>
           </a:xfrm>
           <a:custGeom>
             <a:avLst/>
@@ -27017,7 +27034,7 @@
         <p:spPr>
           <a:xfrm>
             <a:off x="6841800" y="3858480"/>
-            <a:ext cx="4813920" cy="225360"/>
+            <a:ext cx="4811760" cy="223200"/>
           </a:xfrm>
           <a:prstGeom prst="rect">
             <a:avLst/>
@@ -27069,7 +27086,7 @@
         <p:spPr>
           <a:xfrm>
             <a:off x="6841800" y="4118040"/>
-            <a:ext cx="4805640" cy="192960"/>
+            <a:ext cx="4803480" cy="190800"/>
           </a:xfrm>
           <a:prstGeom prst="rect">
             <a:avLst/>
@@ -27131,7 +27148,7 @@
         <p:spPr>
           <a:xfrm>
             <a:off x="1476360" y="4572000"/>
-            <a:ext cx="4035600" cy="712080"/>
+            <a:ext cx="4033440" cy="709920"/>
           </a:xfrm>
           <a:custGeom>
             <a:avLst/>
@@ -27182,7 +27199,7 @@
         <p:spPr>
           <a:xfrm>
             <a:off x="1532880" y="4701600"/>
-            <a:ext cx="3849120" cy="225360"/>
+            <a:ext cx="3846960" cy="223200"/>
           </a:xfrm>
           <a:prstGeom prst="rect">
             <a:avLst/>
@@ -27234,7 +27251,7 @@
         <p:spPr>
           <a:xfrm>
             <a:off x="1541160" y="4961160"/>
-            <a:ext cx="3840840" cy="192960"/>
+            <a:ext cx="3838680" cy="190800"/>
           </a:xfrm>
           <a:prstGeom prst="rect">
             <a:avLst/>
@@ -27296,7 +27313,7 @@
         <p:spPr>
           <a:xfrm>
             <a:off x="6683760" y="5419080"/>
-            <a:ext cx="3987000" cy="720000"/>
+            <a:ext cx="3984840" cy="717840"/>
           </a:xfrm>
           <a:custGeom>
             <a:avLst/>
@@ -27350,7 +27367,7 @@
         <p:spPr>
           <a:xfrm>
             <a:off x="6817320" y="5553000"/>
-            <a:ext cx="3792240" cy="225360"/>
+            <a:ext cx="3790080" cy="223200"/>
           </a:xfrm>
           <a:prstGeom prst="rect">
             <a:avLst/>
@@ -27402,7 +27419,7 @@
         <p:spPr>
           <a:xfrm>
             <a:off x="6817320" y="5812200"/>
-            <a:ext cx="3784320" cy="192960"/>
+            <a:ext cx="3782160" cy="190800"/>
           </a:xfrm>
           <a:prstGeom prst="rect">
             <a:avLst/>
@@ -27454,7 +27471,7 @@
         <p:spPr>
           <a:xfrm>
             <a:off x="6031080" y="1467360"/>
-            <a:ext cx="128160" cy="128160"/>
+            <a:ext cx="126000" cy="126000"/>
           </a:xfrm>
           <a:custGeom>
             <a:avLst/>
@@ -27525,7 +27542,7 @@
         <p:spPr>
           <a:xfrm>
             <a:off x="6031080" y="2326680"/>
-            <a:ext cx="128160" cy="128160"/>
+            <a:ext cx="126000" cy="126000"/>
           </a:xfrm>
           <a:custGeom>
             <a:avLst/>
@@ -27596,7 +27613,7 @@
         <p:spPr>
           <a:xfrm>
             <a:off x="6031080" y="3177720"/>
-            <a:ext cx="128160" cy="128160"/>
+            <a:ext cx="126000" cy="126000"/>
           </a:xfrm>
           <a:custGeom>
             <a:avLst/>
@@ -27667,7 +27684,7 @@
         <p:spPr>
           <a:xfrm>
             <a:off x="6031080" y="4020840"/>
-            <a:ext cx="128160" cy="128160"/>
+            <a:ext cx="126000" cy="126000"/>
           </a:xfrm>
           <a:custGeom>
             <a:avLst/>
@@ -27738,7 +27755,7 @@
         <p:spPr>
           <a:xfrm>
             <a:off x="6031080" y="4863960"/>
-            <a:ext cx="128160" cy="128160"/>
+            <a:ext cx="126000" cy="126000"/>
           </a:xfrm>
           <a:custGeom>
             <a:avLst/>
@@ -27809,7 +27826,7 @@
         <p:spPr>
           <a:xfrm>
             <a:off x="6031080" y="5715000"/>
-            <a:ext cx="128160" cy="128160"/>
+            <a:ext cx="126000" cy="126000"/>
           </a:xfrm>
           <a:custGeom>
             <a:avLst/>
@@ -27917,7 +27934,7 @@
         <p:spPr>
           <a:xfrm>
             <a:off x="380880" y="380880"/>
-            <a:ext cx="11504880" cy="227160"/>
+            <a:ext cx="11502720" cy="225000"/>
           </a:xfrm>
           <a:prstGeom prst="rect">
             <a:avLst/>
@@ -27945,7 +27962,7 @@
               <a:buNone/>
             </a:pPr>
             <a:r>
-              <a:rPr b="1" lang="en-US" sz="1200" spc="49" strike="noStrike">
+              <a:rPr b="1" lang="en-US" sz="1200" spc="32" strike="noStrike">
                 <a:solidFill>
                   <a:srgbClr val="0984e3"/>
                 </a:solidFill>
@@ -27969,7 +27986,7 @@
         <p:spPr>
           <a:xfrm>
             <a:off x="380880" y="685800"/>
-            <a:ext cx="11657160" cy="455760"/>
+            <a:ext cx="11655000" cy="453600"/>
           </a:xfrm>
           <a:prstGeom prst="rect">
             <a:avLst/>
@@ -28021,7 +28038,7 @@
         <p:spPr>
           <a:xfrm>
             <a:off x="380880" y="1371600"/>
-            <a:ext cx="4389480" cy="3046680"/>
+            <a:ext cx="4387320" cy="3044520"/>
           </a:xfrm>
           <a:prstGeom prst="roundRect">
             <a:avLst>
@@ -28053,7 +28070,7 @@
         <p:spPr>
           <a:xfrm>
             <a:off x="399960" y="4648320"/>
-            <a:ext cx="4370400" cy="1141560"/>
+            <a:ext cx="4368240" cy="1139400"/>
           </a:xfrm>
           <a:custGeom>
             <a:avLst/>
@@ -28104,7 +28121,7 @@
         <p:spPr>
           <a:xfrm>
             <a:off x="399960" y="4648320"/>
-            <a:ext cx="36720" cy="1141560"/>
+            <a:ext cx="34560" cy="1139400"/>
           </a:xfrm>
           <a:custGeom>
             <a:avLst/>
@@ -28155,7 +28172,7 @@
         <p:spPr>
           <a:xfrm>
             <a:off x="609480" y="4838760"/>
-            <a:ext cx="4046760" cy="493920"/>
+            <a:ext cx="4044600" cy="491760"/>
           </a:xfrm>
           <a:prstGeom prst="rect">
             <a:avLst/>
@@ -28207,7 +28224,7 @@
         <p:spPr>
           <a:xfrm>
             <a:off x="609480" y="5410080"/>
-            <a:ext cx="4037040" cy="189000"/>
+            <a:ext cx="4034880" cy="186840"/>
           </a:xfrm>
           <a:prstGeom prst="rect">
             <a:avLst/>
@@ -28269,7 +28286,7 @@
         <p:spPr>
           <a:xfrm>
             <a:off x="5074920" y="1371600"/>
-            <a:ext cx="6847200" cy="303480"/>
+            <a:ext cx="6845040" cy="301320"/>
           </a:xfrm>
           <a:prstGeom prst="rect">
             <a:avLst/>
@@ -28321,7 +28338,7 @@
         <p:spPr>
           <a:xfrm>
             <a:off x="5074920" y="1752480"/>
-            <a:ext cx="6809040" cy="989280"/>
+            <a:ext cx="6806880" cy="987120"/>
           </a:xfrm>
           <a:prstGeom prst="rect">
             <a:avLst/>
@@ -28373,7 +28390,7 @@
         <p:spPr>
           <a:xfrm>
             <a:off x="5074920" y="2895480"/>
-            <a:ext cx="6847200" cy="303480"/>
+            <a:ext cx="6845040" cy="301320"/>
           </a:xfrm>
           <a:prstGeom prst="rect">
             <a:avLst/>
@@ -28425,7 +28442,7 @@
         <p:spPr>
           <a:xfrm>
             <a:off x="5074920" y="3276720"/>
-            <a:ext cx="6809040" cy="989280"/>
+            <a:ext cx="6806880" cy="987120"/>
           </a:xfrm>
           <a:prstGeom prst="rect">
             <a:avLst/>
@@ -28497,7 +28514,7 @@
         <p:spPr>
           <a:xfrm>
             <a:off x="5074920" y="4419720"/>
-            <a:ext cx="6847200" cy="303480"/>
+            <a:ext cx="6845040" cy="301320"/>
           </a:xfrm>
           <a:prstGeom prst="rect">
             <a:avLst/>
@@ -28549,7 +28566,7 @@
         <p:spPr>
           <a:xfrm>
             <a:off x="5074920" y="4800600"/>
-            <a:ext cx="6809040" cy="989280"/>
+            <a:ext cx="6806880" cy="987120"/>
           </a:xfrm>
           <a:prstGeom prst="rect">
             <a:avLst/>
@@ -28658,7 +28675,7 @@
         <p:spPr>
           <a:xfrm>
             <a:off x="609480" y="1781280"/>
-            <a:ext cx="12190680" cy="1217880"/>
+            <a:ext cx="12188520" cy="1215720"/>
           </a:xfrm>
           <a:prstGeom prst="rect">
             <a:avLst/>
@@ -28712,7 +28729,7 @@
         <p:spPr>
           <a:xfrm>
             <a:off x="609480" y="3152880"/>
-            <a:ext cx="11866680" cy="1141560"/>
+            <a:ext cx="11864520" cy="1139400"/>
           </a:xfrm>
           <a:prstGeom prst="rect">
             <a:avLst/>
@@ -28785,7 +28802,7 @@
         <p:spPr>
           <a:xfrm>
             <a:off x="609480" y="4524480"/>
-            <a:ext cx="1217880" cy="17640"/>
+            <a:ext cx="1215720" cy="15480"/>
           </a:xfrm>
           <a:custGeom>
             <a:avLst/>
@@ -28836,7 +28853,7 @@
         <p:spPr>
           <a:xfrm>
             <a:off x="609480" y="4772160"/>
-            <a:ext cx="11695320" cy="303480"/>
+            <a:ext cx="11693160" cy="301320"/>
           </a:xfrm>
           <a:prstGeom prst="rect">
             <a:avLst/>
@@ -28925,7 +28942,7 @@
         <p:spPr>
           <a:xfrm>
             <a:off x="380880" y="380880"/>
-            <a:ext cx="11504880" cy="227160"/>
+            <a:ext cx="11502720" cy="225000"/>
           </a:xfrm>
           <a:prstGeom prst="rect">
             <a:avLst/>
@@ -28953,7 +28970,7 @@
               <a:buNone/>
             </a:pPr>
             <a:r>
-              <a:rPr b="1" lang="en-US" sz="1200" spc="49" strike="noStrike">
+              <a:rPr b="1" lang="en-US" sz="1200" spc="32" strike="noStrike">
                 <a:solidFill>
                   <a:srgbClr val="0984e3"/>
                 </a:solidFill>
@@ -28977,7 +28994,7 @@
         <p:spPr>
           <a:xfrm>
             <a:off x="380880" y="685800"/>
-            <a:ext cx="11657160" cy="455760"/>
+            <a:ext cx="11655000" cy="453600"/>
           </a:xfrm>
           <a:prstGeom prst="rect">
             <a:avLst/>
@@ -29029,7 +29046,7 @@
         <p:spPr>
           <a:xfrm>
             <a:off x="380880" y="1371600"/>
-            <a:ext cx="5656320" cy="1236960"/>
+            <a:ext cx="5654160" cy="1234800"/>
           </a:xfrm>
           <a:prstGeom prst="rect">
             <a:avLst/>
@@ -29091,7 +29108,7 @@
         <p:spPr>
           <a:xfrm>
             <a:off x="380880" y="2762280"/>
-            <a:ext cx="5646960" cy="836640"/>
+            <a:ext cx="5644800" cy="834480"/>
           </a:xfrm>
           <a:prstGeom prst="rect">
             <a:avLst/>
@@ -29143,7 +29160,7 @@
         <p:spPr>
           <a:xfrm>
             <a:off x="399960" y="3750480"/>
-            <a:ext cx="5542200" cy="1598760"/>
+            <a:ext cx="5540040" cy="1596600"/>
           </a:xfrm>
           <a:custGeom>
             <a:avLst/>
@@ -29194,7 +29211,7 @@
         <p:spPr>
           <a:xfrm>
             <a:off x="399960" y="3750480"/>
-            <a:ext cx="36720" cy="1598760"/>
+            <a:ext cx="34560" cy="1596600"/>
           </a:xfrm>
           <a:custGeom>
             <a:avLst/>
@@ -29245,7 +29262,7 @@
         <p:spPr>
           <a:xfrm>
             <a:off x="609480" y="3940920"/>
-            <a:ext cx="5237280" cy="265320"/>
+            <a:ext cx="5235120" cy="263160"/>
           </a:xfrm>
           <a:prstGeom prst="rect">
             <a:avLst/>
@@ -29297,7 +29314,7 @@
         <p:spPr>
           <a:xfrm>
             <a:off x="609480" y="4321800"/>
-            <a:ext cx="5218200" cy="227160"/>
+            <a:ext cx="5216040" cy="225000"/>
           </a:xfrm>
           <a:prstGeom prst="rect">
             <a:avLst/>
@@ -29359,7 +29376,7 @@
         <p:spPr>
           <a:xfrm>
             <a:off x="609480" y="4626720"/>
-            <a:ext cx="5218200" cy="227160"/>
+            <a:ext cx="5216040" cy="225000"/>
           </a:xfrm>
           <a:prstGeom prst="rect">
             <a:avLst/>
@@ -29421,7 +29438,7 @@
         <p:spPr>
           <a:xfrm>
             <a:off x="609480" y="4931640"/>
-            <a:ext cx="5218200" cy="227160"/>
+            <a:ext cx="5216040" cy="225000"/>
           </a:xfrm>
           <a:prstGeom prst="rect">
             <a:avLst/>
@@ -29483,7 +29500,7 @@
         <p:spPr>
           <a:xfrm>
             <a:off x="6253200" y="1618200"/>
-            <a:ext cx="5551560" cy="3484800"/>
+            <a:ext cx="5549400" cy="3482640"/>
           </a:xfrm>
           <a:custGeom>
             <a:avLst/>
@@ -29537,7 +29554,7 @@
         <p:spPr>
           <a:xfrm>
             <a:off x="6438960" y="1851480"/>
-            <a:ext cx="5180040" cy="265320"/>
+            <a:ext cx="5177880" cy="263160"/>
           </a:xfrm>
           <a:prstGeom prst="rect">
             <a:avLst/>
@@ -29589,7 +29606,7 @@
         <p:spPr>
           <a:xfrm>
             <a:off x="6448320" y="2270520"/>
-            <a:ext cx="5160960" cy="227160"/>
+            <a:ext cx="5158800" cy="225000"/>
           </a:xfrm>
           <a:prstGeom prst="rect">
             <a:avLst/>
@@ -29860,7 +29877,7 @@
                           <a:latin typeface="微软雅黑"/>
                           <a:ea typeface="微软雅黑"/>
                         </a:rPr>
-                        <a:t>(4, 4)</a:t>
+                        <a:t>((4, 4)</a:t>
                       </a:r>
                       <a:endParaRPr b="0" lang="en-HK" sz="1200" spc="-1" strike="noStrike">
                         <a:latin typeface="Arial"/>
@@ -29964,7 +29981,7 @@
                           <a:latin typeface="微软雅黑"/>
                           <a:ea typeface="微软雅黑"/>
                         </a:rPr>
-                        <a:t>Firm A: Lower Prices</a:t>
+                        <a:t>Ffirm A: Lower Prices Lower Prices A: Lower Prices A:Firm A: Lower Prices Lower PricesFirm A: Lower PricessLower Prices</a:t>
                       </a:r>
                       <a:endParaRPr b="0" lang="en-HK" sz="1200" spc="-1" strike="noStrike">
                         <a:latin typeface="Arial"/>
@@ -30017,7 +30034,7 @@
                           <a:latin typeface="微软雅黑"/>
                           <a:ea typeface="微软雅黑"/>
                         </a:rPr>
-                        <a:t>(4, 4)</a:t>
+                        <a:t>((4(4, 4)(4, 4)(4, 4)</a:t>
                       </a:r>
                       <a:endParaRPr b="0" lang="en-HK" sz="1200" spc="-1" strike="noStrike">
                         <a:latin typeface="Arial"/>
@@ -30068,7 +30085,7 @@
                           <a:latin typeface="微软雅黑"/>
                           <a:ea typeface="微软雅黑"/>
                         </a:rPr>
-                        <a:t>(9, 2)</a:t>
+                        <a:t>((9, 2)(9, 2)(9, 2)(9, 2)</a:t>
                       </a:r>
                       <a:endParaRPr b="0" lang="en-HK" sz="1200" spc="-1" strike="noStrike">
                         <a:latin typeface="Arial"/>
@@ -30113,7 +30130,7 @@
         <p:spPr>
           <a:xfrm>
             <a:off x="6486480" y="4218480"/>
-            <a:ext cx="5085000" cy="7920"/>
+            <a:ext cx="5082840" cy="5760"/>
           </a:xfrm>
           <a:custGeom>
             <a:avLst/>
@@ -30164,7 +30181,7 @@
         <p:spPr>
           <a:xfrm>
             <a:off x="6486480" y="4375440"/>
-            <a:ext cx="5160960" cy="493920"/>
+            <a:ext cx="5158800" cy="491760"/>
           </a:xfrm>
           <a:prstGeom prst="rect">
             <a:avLst/>
